--- a/SysGuard_Presentation.pptx
+++ b/SysGuard_Presentation.pptx
@@ -18,7 +18,6 @@
     <p:sldId id="266" r:id="rId17"/>
     <p:sldId id="267" r:id="rId18"/>
     <p:sldId id="268" r:id="rId19"/>
-    <p:sldId id="269" r:id="rId20"/>
   </p:sldIdLst>
   <p:sldSz cx="12191695" cy="6858000" type="screen4x3"/>
   <p:notesSz cx="6858000" cy="9144000"/>
@@ -3103,19 +3102,162 @@
       <p:grpSpPr/>
       <p:sp>
         <p:nvSpPr>
-          <p:cNvPr id="2" name="Title 1"/>
-          <p:cNvSpPr>
-            <a:spLocks noGrp="1"/>
-          </p:cNvSpPr>
-          <p:nvPr>
-            <p:ph type="ctrTitle"/>
-          </p:nvPr>
-        </p:nvSpPr>
-        <p:spPr/>
-        <p:txBody>
-          <a:bodyPr/>
-          <a:lstStyle/>
-          <a:p>
+          <p:cNvPr id="2" name="Rectangle 1"/>
+          <p:cNvSpPr/>
+          <p:nvPr/>
+        </p:nvSpPr>
+        <p:spPr>
+          <a:xfrm>
+            <a:off x="0" y="0"/>
+            <a:ext cx="12191695" cy="6858000"/>
+          </a:xfrm>
+          <a:prstGeom prst="rect">
+            <a:avLst/>
+          </a:prstGeom>
+          <a:solidFill>
+            <a:srgbClr val="FFFFFF"/>
+          </a:solidFill>
+          <a:ln>
+            <a:noFill/>
+          </a:ln>
+        </p:spPr>
+        <p:style>
+          <a:lnRef idx="1">
+            <a:schemeClr val="accent1"/>
+          </a:lnRef>
+          <a:fillRef idx="3">
+            <a:schemeClr val="accent1"/>
+          </a:fillRef>
+          <a:effectRef idx="2">
+            <a:schemeClr val="accent1"/>
+          </a:effectRef>
+          <a:fontRef idx="minor">
+            <a:schemeClr val="lt1"/>
+          </a:fontRef>
+        </p:style>
+        <p:txBody>
+          <a:bodyPr rtlCol="0" anchor="ctr"/>
+          <a:lstStyle/>
+          <a:p>
+            <a:pPr algn="ctr"/>
+          </a:p>
+        </p:txBody>
+      </p:sp>
+      <p:sp>
+        <p:nvSpPr>
+          <p:cNvPr id="3" name="Rectangle 2"/>
+          <p:cNvSpPr/>
+          <p:nvPr/>
+        </p:nvSpPr>
+        <p:spPr>
+          <a:xfrm>
+            <a:off x="0" y="0"/>
+            <a:ext cx="12191695" cy="201168"/>
+          </a:xfrm>
+          <a:prstGeom prst="rect">
+            <a:avLst/>
+          </a:prstGeom>
+          <a:solidFill>
+            <a:srgbClr val="2A69BA"/>
+          </a:solidFill>
+          <a:ln>
+            <a:noFill/>
+          </a:ln>
+        </p:spPr>
+        <p:style>
+          <a:lnRef idx="1">
+            <a:schemeClr val="accent1"/>
+          </a:lnRef>
+          <a:fillRef idx="3">
+            <a:schemeClr val="accent1"/>
+          </a:fillRef>
+          <a:effectRef idx="2">
+            <a:schemeClr val="accent1"/>
+          </a:effectRef>
+          <a:fontRef idx="minor">
+            <a:schemeClr val="lt1"/>
+          </a:fontRef>
+        </p:style>
+        <p:txBody>
+          <a:bodyPr rtlCol="0" anchor="ctr"/>
+          <a:lstStyle/>
+          <a:p>
+            <a:pPr algn="ctr"/>
+          </a:p>
+        </p:txBody>
+      </p:sp>
+      <p:sp>
+        <p:nvSpPr>
+          <p:cNvPr id="4" name="Rounded Rectangle 3"/>
+          <p:cNvSpPr/>
+          <p:nvPr/>
+        </p:nvSpPr>
+        <p:spPr>
+          <a:xfrm>
+            <a:off x="731520" y="1417320"/>
+            <a:ext cx="10698480" cy="4114800"/>
+          </a:xfrm>
+          <a:prstGeom prst="roundRect">
+            <a:avLst/>
+          </a:prstGeom>
+          <a:solidFill>
+            <a:srgbClr val="0E1827"/>
+          </a:solidFill>
+          <a:ln>
+            <a:noFill/>
+          </a:ln>
+        </p:spPr>
+        <p:style>
+          <a:lnRef idx="1">
+            <a:schemeClr val="accent1"/>
+          </a:lnRef>
+          <a:fillRef idx="3">
+            <a:schemeClr val="accent1"/>
+          </a:fillRef>
+          <a:effectRef idx="2">
+            <a:schemeClr val="accent1"/>
+          </a:effectRef>
+          <a:fontRef idx="minor">
+            <a:schemeClr val="lt1"/>
+          </a:fontRef>
+        </p:style>
+        <p:txBody>
+          <a:bodyPr rtlCol="0" anchor="ctr"/>
+          <a:lstStyle/>
+          <a:p>
+            <a:pPr algn="ctr"/>
+          </a:p>
+        </p:txBody>
+      </p:sp>
+      <p:sp>
+        <p:nvSpPr>
+          <p:cNvPr id="5" name="TextBox 4"/>
+          <p:cNvSpPr txBox="1"/>
+          <p:nvPr/>
+        </p:nvSpPr>
+        <p:spPr>
+          <a:xfrm>
+            <a:off x="1143000" y="2011680"/>
+            <a:ext cx="9875520" cy="914400"/>
+          </a:xfrm>
+          <a:prstGeom prst="rect">
+            <a:avLst/>
+          </a:prstGeom>
+          <a:noFill/>
+        </p:spPr>
+        <p:txBody>
+          <a:bodyPr wrap="none">
+            <a:spAutoFit/>
+          </a:bodyPr>
+          <a:lstStyle/>
+          <a:p>
+            <a:pPr>
+              <a:defRPr sz="4400" b="1">
+                <a:solidFill>
+                  <a:srgbClr val="FFFFFF"/>
+                </a:solidFill>
+              </a:defRPr>
+            </a:pPr>
             <a:r>
               <a:t>SysGuard</a:t>
             </a:r>
@@ -3124,26 +3266,105 @@
       </p:sp>
       <p:sp>
         <p:nvSpPr>
-          <p:cNvPr id="3" name="Subtitle 2"/>
-          <p:cNvSpPr>
-            <a:spLocks noGrp="1"/>
-          </p:cNvSpPr>
-          <p:nvPr>
-            <p:ph type="subTitle" idx="1"/>
-          </p:nvPr>
-        </p:nvSpPr>
-        <p:spPr/>
-        <p:txBody>
-          <a:bodyPr/>
-          <a:lstStyle/>
-          <a:p>
+          <p:cNvPr id="6" name="TextBox 5"/>
+          <p:cNvSpPr txBox="1"/>
+          <p:nvPr/>
+        </p:nvSpPr>
+        <p:spPr>
+          <a:xfrm>
+            <a:off x="1161288" y="2834640"/>
+            <a:ext cx="9418320" cy="731520"/>
+          </a:xfrm>
+          <a:prstGeom prst="rect">
+            <a:avLst/>
+          </a:prstGeom>
+          <a:noFill/>
+        </p:spPr>
+        <p:txBody>
+          <a:bodyPr wrap="none">
+            <a:spAutoFit/>
+          </a:bodyPr>
+          <a:lstStyle/>
+          <a:p>
+            <a:pPr>
+              <a:defRPr sz="2600">
+                <a:solidFill>
+                  <a:srgbClr val="BEDCFA"/>
+                </a:solidFill>
+              </a:defRPr>
+            </a:pPr>
             <a:r>
               <a:t>Linux System Health Monitor</a:t>
             </a:r>
           </a:p>
-          <a:p>
-            <a:r>
-              <a:t>C++17 • Linux • System Programming • Device Driver Concepts</a:t>
+        </p:txBody>
+      </p:sp>
+      <p:sp>
+        <p:nvSpPr>
+          <p:cNvPr id="7" name="TextBox 6"/>
+          <p:cNvSpPr txBox="1"/>
+          <p:nvPr/>
+        </p:nvSpPr>
+        <p:spPr>
+          <a:xfrm>
+            <a:off x="1161288" y="3794760"/>
+            <a:ext cx="9326880" cy="914400"/>
+          </a:xfrm>
+          <a:prstGeom prst="rect">
+            <a:avLst/>
+          </a:prstGeom>
+          <a:noFill/>
+        </p:spPr>
+        <p:txBody>
+          <a:bodyPr wrap="none">
+            <a:spAutoFit/>
+          </a:bodyPr>
+          <a:lstStyle/>
+          <a:p>
+            <a:pPr>
+              <a:defRPr sz="1800">
+                <a:solidFill>
+                  <a:srgbClr val="FFFFFF"/>
+                </a:solidFill>
+              </a:defRPr>
+            </a:pPr>
+            <a:r>
+              <a:t>C++17  •  Linux  •  System Programming  •  Process Monitoring  •  Character Driver Concepts</a:t>
+            </a:r>
+          </a:p>
+        </p:txBody>
+      </p:sp>
+      <p:sp>
+        <p:nvSpPr>
+          <p:cNvPr id="8" name="TextBox 7"/>
+          <p:cNvSpPr txBox="1"/>
+          <p:nvPr/>
+        </p:nvSpPr>
+        <p:spPr>
+          <a:xfrm>
+            <a:off x="640080" y="6492240"/>
+            <a:ext cx="10972800" cy="228600"/>
+          </a:xfrm>
+          <a:prstGeom prst="rect">
+            <a:avLst/>
+          </a:prstGeom>
+          <a:noFill/>
+        </p:spPr>
+        <p:txBody>
+          <a:bodyPr wrap="none">
+            <a:spAutoFit/>
+          </a:bodyPr>
+          <a:lstStyle/>
+          <a:p>
+            <a:pPr>
+              <a:defRPr sz="900">
+                <a:solidFill>
+                  <a:srgbClr val="566373"/>
+                </a:solidFill>
+              </a:defRPr>
+            </a:pPr>
+            <a:r>
+              <a:t>SysGuard • Linux System Health Monitor                               1</a:t>
             </a:r>
           </a:p>
         </p:txBody>
@@ -3168,124 +3389,1095 @@
       <p:grpSpPr/>
       <p:sp>
         <p:nvSpPr>
-          <p:cNvPr id="2" name="Title 1"/>
-          <p:cNvSpPr>
-            <a:spLocks noGrp="1"/>
-          </p:cNvSpPr>
-          <p:nvPr>
-            <p:ph type="title"/>
-          </p:nvPr>
-        </p:nvSpPr>
-        <p:spPr/>
-        <p:txBody>
-          <a:bodyPr/>
-          <a:lstStyle/>
-          <a:p>
-            <a:r>
-              <a:t>9. Device Driver Component</a:t>
-            </a:r>
-          </a:p>
-        </p:txBody>
-      </p:sp>
-      <p:sp>
-        <p:nvSpPr>
-          <p:cNvPr id="3" name="Content Placeholder 2"/>
-          <p:cNvSpPr>
-            <a:spLocks noGrp="1"/>
-          </p:cNvSpPr>
-          <p:nvPr>
-            <p:ph idx="1"/>
-          </p:nvPr>
-        </p:nvSpPr>
-        <p:spPr/>
-        <p:txBody>
-          <a:bodyPr/>
-          <a:lstStyle/>
-          <a:p>
-            <a:pPr>
-              <a:defRPr sz="2000"/>
-            </a:pPr>
-            <a:r>
-              <a:t>A minimal Linux character device is exposed as:</a:t>
-            </a:r>
-          </a:p>
-          <a:p>
-            <a:pPr>
-              <a:defRPr sz="2000"/>
-            </a:pPr>
-          </a:p>
-          <a:p>
-            <a:pPr>
-              <a:defRPr sz="2000"/>
-            </a:pPr>
-            <a:r>
-              <a:t>/dev/sysguard</a:t>
-            </a:r>
-          </a:p>
-          <a:p>
-            <a:pPr>
-              <a:defRPr sz="2000"/>
-            </a:pPr>
-          </a:p>
-          <a:p>
-            <a:pPr>
-              <a:defRPr sz="2000"/>
-            </a:pPr>
-            <a:r>
-              <a:t>The module demonstrates:</a:t>
-            </a:r>
-          </a:p>
-          <a:p>
-            <a:pPr>
-              <a:defRPr sz="2000"/>
-            </a:pPr>
-            <a:r>
-              <a:t>• Kernel module lifecycle</a:t>
-            </a:r>
-          </a:p>
-          <a:p>
-            <a:pPr>
-              <a:defRPr sz="2000"/>
-            </a:pPr>
-            <a:r>
-              <a:t>• Character device registration</a:t>
-            </a:r>
-          </a:p>
-          <a:p>
-            <a:pPr>
-              <a:defRPr sz="2000"/>
-            </a:pPr>
-            <a:r>
-              <a:t>• File operations</a:t>
-            </a:r>
-          </a:p>
-          <a:p>
-            <a:pPr>
-              <a:defRPr sz="2000"/>
-            </a:pPr>
-            <a:r>
-              <a:t>• copy_to_user()</a:t>
-            </a:r>
-          </a:p>
-          <a:p>
-            <a:pPr>
-              <a:defRPr sz="2000"/>
-            </a:pPr>
-            <a:r>
-              <a:t>• User-space → kernel-space interaction</a:t>
-            </a:r>
-          </a:p>
-          <a:p>
-            <a:pPr>
-              <a:defRPr sz="2000"/>
-            </a:pPr>
-          </a:p>
-          <a:p>
-            <a:pPr>
-              <a:defRPr sz="2000"/>
-            </a:pPr>
-            <a:r>
-              <a:t>The driver is intentionally small and read-only.</a:t>
+          <p:cNvPr id="2" name="Rectangle 1"/>
+          <p:cNvSpPr/>
+          <p:nvPr/>
+        </p:nvSpPr>
+        <p:spPr>
+          <a:xfrm>
+            <a:off x="0" y="0"/>
+            <a:ext cx="12191695" cy="6858000"/>
+          </a:xfrm>
+          <a:prstGeom prst="rect">
+            <a:avLst/>
+          </a:prstGeom>
+          <a:solidFill>
+            <a:srgbClr val="FFFFFF"/>
+          </a:solidFill>
+          <a:ln>
+            <a:noFill/>
+          </a:ln>
+        </p:spPr>
+        <p:style>
+          <a:lnRef idx="1">
+            <a:schemeClr val="accent1"/>
+          </a:lnRef>
+          <a:fillRef idx="3">
+            <a:schemeClr val="accent1"/>
+          </a:fillRef>
+          <a:effectRef idx="2">
+            <a:schemeClr val="accent1"/>
+          </a:effectRef>
+          <a:fontRef idx="minor">
+            <a:schemeClr val="lt1"/>
+          </a:fontRef>
+        </p:style>
+        <p:txBody>
+          <a:bodyPr rtlCol="0" anchor="ctr"/>
+          <a:lstStyle/>
+          <a:p>
+            <a:pPr algn="ctr"/>
+          </a:p>
+        </p:txBody>
+      </p:sp>
+      <p:sp>
+        <p:nvSpPr>
+          <p:cNvPr id="3" name="Rectangle 2"/>
+          <p:cNvSpPr/>
+          <p:nvPr/>
+        </p:nvSpPr>
+        <p:spPr>
+          <a:xfrm>
+            <a:off x="0" y="0"/>
+            <a:ext cx="12191695" cy="201168"/>
+          </a:xfrm>
+          <a:prstGeom prst="rect">
+            <a:avLst/>
+          </a:prstGeom>
+          <a:solidFill>
+            <a:srgbClr val="2A69BA"/>
+          </a:solidFill>
+          <a:ln>
+            <a:noFill/>
+          </a:ln>
+        </p:spPr>
+        <p:style>
+          <a:lnRef idx="1">
+            <a:schemeClr val="accent1"/>
+          </a:lnRef>
+          <a:fillRef idx="3">
+            <a:schemeClr val="accent1"/>
+          </a:fillRef>
+          <a:effectRef idx="2">
+            <a:schemeClr val="accent1"/>
+          </a:effectRef>
+          <a:fontRef idx="minor">
+            <a:schemeClr val="lt1"/>
+          </a:fontRef>
+        </p:style>
+        <p:txBody>
+          <a:bodyPr rtlCol="0" anchor="ctr"/>
+          <a:lstStyle/>
+          <a:p>
+            <a:pPr algn="ctr"/>
+          </a:p>
+        </p:txBody>
+      </p:sp>
+      <p:sp>
+        <p:nvSpPr>
+          <p:cNvPr id="4" name="TextBox 3"/>
+          <p:cNvSpPr txBox="1"/>
+          <p:nvPr/>
+        </p:nvSpPr>
+        <p:spPr>
+          <a:xfrm>
+            <a:off x="640080" y="502920"/>
+            <a:ext cx="10881360" cy="640080"/>
+          </a:xfrm>
+          <a:prstGeom prst="rect">
+            <a:avLst/>
+          </a:prstGeom>
+          <a:noFill/>
+        </p:spPr>
+        <p:txBody>
+          <a:bodyPr wrap="none">
+            <a:spAutoFit/>
+          </a:bodyPr>
+          <a:lstStyle/>
+          <a:p>
+            <a:pPr>
+              <a:defRPr sz="2800" b="1">
+                <a:solidFill>
+                  <a:srgbClr val="0E1827"/>
+                </a:solidFill>
+              </a:defRPr>
+            </a:pPr>
+            <a:r>
+              <a:t>9. Testing</a:t>
+            </a:r>
+          </a:p>
+        </p:txBody>
+      </p:sp>
+      <p:sp>
+        <p:nvSpPr>
+          <p:cNvPr id="5" name="TextBox 4"/>
+          <p:cNvSpPr txBox="1"/>
+          <p:nvPr/>
+        </p:nvSpPr>
+        <p:spPr>
+          <a:xfrm>
+            <a:off x="658368" y="1143000"/>
+            <a:ext cx="10789920" cy="411480"/>
+          </a:xfrm>
+          <a:prstGeom prst="rect">
+            <a:avLst/>
+          </a:prstGeom>
+          <a:noFill/>
+        </p:spPr>
+        <p:txBody>
+          <a:bodyPr wrap="none">
+            <a:spAutoFit/>
+          </a:bodyPr>
+          <a:lstStyle/>
+          <a:p>
+            <a:pPr>
+              <a:defRPr sz="1400">
+                <a:solidFill>
+                  <a:srgbClr val="566373"/>
+                </a:solidFill>
+              </a:defRPr>
+            </a:pPr>
+            <a:r>
+              <a:t>Implemented checks</a:t>
+            </a:r>
+          </a:p>
+        </p:txBody>
+      </p:sp>
+      <p:sp>
+        <p:nvSpPr>
+          <p:cNvPr id="6" name="TextBox 5"/>
+          <p:cNvSpPr txBox="1"/>
+          <p:nvPr/>
+        </p:nvSpPr>
+        <p:spPr>
+          <a:xfrm>
+            <a:off x="1097280" y="1417320"/>
+            <a:ext cx="6675120" cy="347472"/>
+          </a:xfrm>
+          <a:prstGeom prst="rect">
+            <a:avLst/>
+          </a:prstGeom>
+          <a:noFill/>
+        </p:spPr>
+        <p:txBody>
+          <a:bodyPr wrap="none">
+            <a:spAutoFit/>
+          </a:bodyPr>
+          <a:lstStyle/>
+          <a:p>
+            <a:pPr>
+              <a:defRPr sz="1600">
+                <a:solidFill>
+                  <a:srgbClr val="1C2536"/>
+                </a:solidFill>
+              </a:defRPr>
+            </a:pPr>
+            <a:r>
+              <a:t>Build with make</a:t>
+            </a:r>
+          </a:p>
+        </p:txBody>
+      </p:sp>
+      <p:sp>
+        <p:nvSpPr>
+          <p:cNvPr id="7" name="Rounded Rectangle 6"/>
+          <p:cNvSpPr/>
+          <p:nvPr/>
+        </p:nvSpPr>
+        <p:spPr>
+          <a:xfrm>
+            <a:off x="8229600" y="1399032"/>
+            <a:ext cx="2194560" cy="384048"/>
+          </a:xfrm>
+          <a:prstGeom prst="roundRect">
+            <a:avLst/>
+          </a:prstGeom>
+          <a:solidFill>
+            <a:srgbClr val="26915E"/>
+          </a:solidFill>
+          <a:ln>
+            <a:noFill/>
+          </a:ln>
+        </p:spPr>
+        <p:style>
+          <a:lnRef idx="1">
+            <a:schemeClr val="accent1"/>
+          </a:lnRef>
+          <a:fillRef idx="3">
+            <a:schemeClr val="accent1"/>
+          </a:fillRef>
+          <a:effectRef idx="2">
+            <a:schemeClr val="accent1"/>
+          </a:effectRef>
+          <a:fontRef idx="minor">
+            <a:schemeClr val="lt1"/>
+          </a:fontRef>
+        </p:style>
+        <p:txBody>
+          <a:bodyPr rtlCol="0" anchor="ctr"/>
+          <a:lstStyle/>
+          <a:p>
+            <a:pPr algn="ctr"/>
+          </a:p>
+        </p:txBody>
+      </p:sp>
+      <p:sp>
+        <p:nvSpPr>
+          <p:cNvPr id="8" name="TextBox 7"/>
+          <p:cNvSpPr txBox="1"/>
+          <p:nvPr/>
+        </p:nvSpPr>
+        <p:spPr>
+          <a:xfrm>
+            <a:off x="8321040" y="1435608"/>
+            <a:ext cx="2011680" cy="274320"/>
+          </a:xfrm>
+          <a:prstGeom prst="rect">
+            <a:avLst/>
+          </a:prstGeom>
+          <a:noFill/>
+        </p:spPr>
+        <p:txBody>
+          <a:bodyPr wrap="none">
+            <a:spAutoFit/>
+          </a:bodyPr>
+          <a:lstStyle/>
+          <a:p>
+            <a:pPr algn="ctr">
+              <a:defRPr sz="1300" b="1">
+                <a:solidFill>
+                  <a:srgbClr val="FFFFFF"/>
+                </a:solidFill>
+              </a:defRPr>
+            </a:pPr>
+            <a:r>
+              <a:t>PASS</a:t>
+            </a:r>
+          </a:p>
+        </p:txBody>
+      </p:sp>
+      <p:sp>
+        <p:nvSpPr>
+          <p:cNvPr id="9" name="TextBox 8"/>
+          <p:cNvSpPr txBox="1"/>
+          <p:nvPr/>
+        </p:nvSpPr>
+        <p:spPr>
+          <a:xfrm>
+            <a:off x="1097280" y="1984248"/>
+            <a:ext cx="6675120" cy="347472"/>
+          </a:xfrm>
+          <a:prstGeom prst="rect">
+            <a:avLst/>
+          </a:prstGeom>
+          <a:noFill/>
+        </p:spPr>
+        <p:txBody>
+          <a:bodyPr wrap="none">
+            <a:spAutoFit/>
+          </a:bodyPr>
+          <a:lstStyle/>
+          <a:p>
+            <a:pPr>
+              <a:defRPr sz="1600">
+                <a:solidFill>
+                  <a:srgbClr val="1C2536"/>
+                </a:solidFill>
+              </a:defRPr>
+            </a:pPr>
+            <a:r>
+              <a:t>Application launch</a:t>
+            </a:r>
+          </a:p>
+        </p:txBody>
+      </p:sp>
+      <p:sp>
+        <p:nvSpPr>
+          <p:cNvPr id="10" name="Rounded Rectangle 9"/>
+          <p:cNvSpPr/>
+          <p:nvPr/>
+        </p:nvSpPr>
+        <p:spPr>
+          <a:xfrm>
+            <a:off x="8229600" y="1965960"/>
+            <a:ext cx="2194560" cy="384048"/>
+          </a:xfrm>
+          <a:prstGeom prst="roundRect">
+            <a:avLst/>
+          </a:prstGeom>
+          <a:solidFill>
+            <a:srgbClr val="26915E"/>
+          </a:solidFill>
+          <a:ln>
+            <a:noFill/>
+          </a:ln>
+        </p:spPr>
+        <p:style>
+          <a:lnRef idx="1">
+            <a:schemeClr val="accent1"/>
+          </a:lnRef>
+          <a:fillRef idx="3">
+            <a:schemeClr val="accent1"/>
+          </a:fillRef>
+          <a:effectRef idx="2">
+            <a:schemeClr val="accent1"/>
+          </a:effectRef>
+          <a:fontRef idx="minor">
+            <a:schemeClr val="lt1"/>
+          </a:fontRef>
+        </p:style>
+        <p:txBody>
+          <a:bodyPr rtlCol="0" anchor="ctr"/>
+          <a:lstStyle/>
+          <a:p>
+            <a:pPr algn="ctr"/>
+          </a:p>
+        </p:txBody>
+      </p:sp>
+      <p:sp>
+        <p:nvSpPr>
+          <p:cNvPr id="11" name="TextBox 10"/>
+          <p:cNvSpPr txBox="1"/>
+          <p:nvPr/>
+        </p:nvSpPr>
+        <p:spPr>
+          <a:xfrm>
+            <a:off x="8321040" y="2002536"/>
+            <a:ext cx="2011680" cy="274320"/>
+          </a:xfrm>
+          <a:prstGeom prst="rect">
+            <a:avLst/>
+          </a:prstGeom>
+          <a:noFill/>
+        </p:spPr>
+        <p:txBody>
+          <a:bodyPr wrap="none">
+            <a:spAutoFit/>
+          </a:bodyPr>
+          <a:lstStyle/>
+          <a:p>
+            <a:pPr algn="ctr">
+              <a:defRPr sz="1300" b="1">
+                <a:solidFill>
+                  <a:srgbClr val="FFFFFF"/>
+                </a:solidFill>
+              </a:defRPr>
+            </a:pPr>
+            <a:r>
+              <a:t>PASS</a:t>
+            </a:r>
+          </a:p>
+        </p:txBody>
+      </p:sp>
+      <p:sp>
+        <p:nvSpPr>
+          <p:cNvPr id="12" name="TextBox 11"/>
+          <p:cNvSpPr txBox="1"/>
+          <p:nvPr/>
+        </p:nvSpPr>
+        <p:spPr>
+          <a:xfrm>
+            <a:off x="1097280" y="2551176"/>
+            <a:ext cx="6675120" cy="347472"/>
+          </a:xfrm>
+          <a:prstGeom prst="rect">
+            <a:avLst/>
+          </a:prstGeom>
+          <a:noFill/>
+        </p:spPr>
+        <p:txBody>
+          <a:bodyPr wrap="none">
+            <a:spAutoFit/>
+          </a:bodyPr>
+          <a:lstStyle/>
+          <a:p>
+            <a:pPr>
+              <a:defRPr sz="1600">
+                <a:solidFill>
+                  <a:srgbClr val="1C2536"/>
+                </a:solidFill>
+              </a:defRPr>
+            </a:pPr>
+            <a:r>
+              <a:t>Dashboard</a:t>
+            </a:r>
+          </a:p>
+        </p:txBody>
+      </p:sp>
+      <p:sp>
+        <p:nvSpPr>
+          <p:cNvPr id="13" name="Rounded Rectangle 12"/>
+          <p:cNvSpPr/>
+          <p:nvPr/>
+        </p:nvSpPr>
+        <p:spPr>
+          <a:xfrm>
+            <a:off x="8229600" y="2532888"/>
+            <a:ext cx="2194560" cy="384048"/>
+          </a:xfrm>
+          <a:prstGeom prst="roundRect">
+            <a:avLst/>
+          </a:prstGeom>
+          <a:solidFill>
+            <a:srgbClr val="26915E"/>
+          </a:solidFill>
+          <a:ln>
+            <a:noFill/>
+          </a:ln>
+        </p:spPr>
+        <p:style>
+          <a:lnRef idx="1">
+            <a:schemeClr val="accent1"/>
+          </a:lnRef>
+          <a:fillRef idx="3">
+            <a:schemeClr val="accent1"/>
+          </a:fillRef>
+          <a:effectRef idx="2">
+            <a:schemeClr val="accent1"/>
+          </a:effectRef>
+          <a:fontRef idx="minor">
+            <a:schemeClr val="lt1"/>
+          </a:fontRef>
+        </p:style>
+        <p:txBody>
+          <a:bodyPr rtlCol="0" anchor="ctr"/>
+          <a:lstStyle/>
+          <a:p>
+            <a:pPr algn="ctr"/>
+          </a:p>
+        </p:txBody>
+      </p:sp>
+      <p:sp>
+        <p:nvSpPr>
+          <p:cNvPr id="14" name="TextBox 13"/>
+          <p:cNvSpPr txBox="1"/>
+          <p:nvPr/>
+        </p:nvSpPr>
+        <p:spPr>
+          <a:xfrm>
+            <a:off x="8321040" y="2569464"/>
+            <a:ext cx="2011680" cy="274320"/>
+          </a:xfrm>
+          <a:prstGeom prst="rect">
+            <a:avLst/>
+          </a:prstGeom>
+          <a:noFill/>
+        </p:spPr>
+        <p:txBody>
+          <a:bodyPr wrap="none">
+            <a:spAutoFit/>
+          </a:bodyPr>
+          <a:lstStyle/>
+          <a:p>
+            <a:pPr algn="ctr">
+              <a:defRPr sz="1300" b="1">
+                <a:solidFill>
+                  <a:srgbClr val="FFFFFF"/>
+                </a:solidFill>
+              </a:defRPr>
+            </a:pPr>
+            <a:r>
+              <a:t>PASS</a:t>
+            </a:r>
+          </a:p>
+        </p:txBody>
+      </p:sp>
+      <p:sp>
+        <p:nvSpPr>
+          <p:cNvPr id="15" name="TextBox 14"/>
+          <p:cNvSpPr txBox="1"/>
+          <p:nvPr/>
+        </p:nvSpPr>
+        <p:spPr>
+          <a:xfrm>
+            <a:off x="1097280" y="3118104"/>
+            <a:ext cx="6675120" cy="347472"/>
+          </a:xfrm>
+          <a:prstGeom prst="rect">
+            <a:avLst/>
+          </a:prstGeom>
+          <a:noFill/>
+        </p:spPr>
+        <p:txBody>
+          <a:bodyPr wrap="none">
+            <a:spAutoFit/>
+          </a:bodyPr>
+          <a:lstStyle/>
+          <a:p>
+            <a:pPr>
+              <a:defRPr sz="1600">
+                <a:solidFill>
+                  <a:srgbClr val="1C2536"/>
+                </a:solidFill>
+              </a:defRPr>
+            </a:pPr>
+            <a:r>
+              <a:t>System information</a:t>
+            </a:r>
+          </a:p>
+        </p:txBody>
+      </p:sp>
+      <p:sp>
+        <p:nvSpPr>
+          <p:cNvPr id="16" name="Rounded Rectangle 15"/>
+          <p:cNvSpPr/>
+          <p:nvPr/>
+        </p:nvSpPr>
+        <p:spPr>
+          <a:xfrm>
+            <a:off x="8229600" y="3099816"/>
+            <a:ext cx="2194560" cy="384048"/>
+          </a:xfrm>
+          <a:prstGeom prst="roundRect">
+            <a:avLst/>
+          </a:prstGeom>
+          <a:solidFill>
+            <a:srgbClr val="26915E"/>
+          </a:solidFill>
+          <a:ln>
+            <a:noFill/>
+          </a:ln>
+        </p:spPr>
+        <p:style>
+          <a:lnRef idx="1">
+            <a:schemeClr val="accent1"/>
+          </a:lnRef>
+          <a:fillRef idx="3">
+            <a:schemeClr val="accent1"/>
+          </a:fillRef>
+          <a:effectRef idx="2">
+            <a:schemeClr val="accent1"/>
+          </a:effectRef>
+          <a:fontRef idx="minor">
+            <a:schemeClr val="lt1"/>
+          </a:fontRef>
+        </p:style>
+        <p:txBody>
+          <a:bodyPr rtlCol="0" anchor="ctr"/>
+          <a:lstStyle/>
+          <a:p>
+            <a:pPr algn="ctr"/>
+          </a:p>
+        </p:txBody>
+      </p:sp>
+      <p:sp>
+        <p:nvSpPr>
+          <p:cNvPr id="17" name="TextBox 16"/>
+          <p:cNvSpPr txBox="1"/>
+          <p:nvPr/>
+        </p:nvSpPr>
+        <p:spPr>
+          <a:xfrm>
+            <a:off x="8321040" y="3136392"/>
+            <a:ext cx="2011680" cy="274320"/>
+          </a:xfrm>
+          <a:prstGeom prst="rect">
+            <a:avLst/>
+          </a:prstGeom>
+          <a:noFill/>
+        </p:spPr>
+        <p:txBody>
+          <a:bodyPr wrap="none">
+            <a:spAutoFit/>
+          </a:bodyPr>
+          <a:lstStyle/>
+          <a:p>
+            <a:pPr algn="ctr">
+              <a:defRPr sz="1300" b="1">
+                <a:solidFill>
+                  <a:srgbClr val="FFFFFF"/>
+                </a:solidFill>
+              </a:defRPr>
+            </a:pPr>
+            <a:r>
+              <a:t>PASS</a:t>
+            </a:r>
+          </a:p>
+        </p:txBody>
+      </p:sp>
+      <p:sp>
+        <p:nvSpPr>
+          <p:cNvPr id="18" name="TextBox 17"/>
+          <p:cNvSpPr txBox="1"/>
+          <p:nvPr/>
+        </p:nvSpPr>
+        <p:spPr>
+          <a:xfrm>
+            <a:off x="1097280" y="3685032"/>
+            <a:ext cx="6675120" cy="347472"/>
+          </a:xfrm>
+          <a:prstGeom prst="rect">
+            <a:avLst/>
+          </a:prstGeom>
+          <a:noFill/>
+        </p:spPr>
+        <p:txBody>
+          <a:bodyPr wrap="none">
+            <a:spAutoFit/>
+          </a:bodyPr>
+          <a:lstStyle/>
+          <a:p>
+            <a:pPr>
+              <a:defRPr sz="1600">
+                <a:solidFill>
+                  <a:srgbClr val="1C2536"/>
+                </a:solidFill>
+              </a:defRPr>
+            </a:pPr>
+            <a:r>
+              <a:t>Process listing</a:t>
+            </a:r>
+          </a:p>
+        </p:txBody>
+      </p:sp>
+      <p:sp>
+        <p:nvSpPr>
+          <p:cNvPr id="19" name="Rounded Rectangle 18"/>
+          <p:cNvSpPr/>
+          <p:nvPr/>
+        </p:nvSpPr>
+        <p:spPr>
+          <a:xfrm>
+            <a:off x="8229600" y="3666744"/>
+            <a:ext cx="2194560" cy="384048"/>
+          </a:xfrm>
+          <a:prstGeom prst="roundRect">
+            <a:avLst/>
+          </a:prstGeom>
+          <a:solidFill>
+            <a:srgbClr val="26915E"/>
+          </a:solidFill>
+          <a:ln>
+            <a:noFill/>
+          </a:ln>
+        </p:spPr>
+        <p:style>
+          <a:lnRef idx="1">
+            <a:schemeClr val="accent1"/>
+          </a:lnRef>
+          <a:fillRef idx="3">
+            <a:schemeClr val="accent1"/>
+          </a:fillRef>
+          <a:effectRef idx="2">
+            <a:schemeClr val="accent1"/>
+          </a:effectRef>
+          <a:fontRef idx="minor">
+            <a:schemeClr val="lt1"/>
+          </a:fontRef>
+        </p:style>
+        <p:txBody>
+          <a:bodyPr rtlCol="0" anchor="ctr"/>
+          <a:lstStyle/>
+          <a:p>
+            <a:pPr algn="ctr"/>
+          </a:p>
+        </p:txBody>
+      </p:sp>
+      <p:sp>
+        <p:nvSpPr>
+          <p:cNvPr id="20" name="TextBox 19"/>
+          <p:cNvSpPr txBox="1"/>
+          <p:nvPr/>
+        </p:nvSpPr>
+        <p:spPr>
+          <a:xfrm>
+            <a:off x="8321040" y="3703320"/>
+            <a:ext cx="2011680" cy="274320"/>
+          </a:xfrm>
+          <a:prstGeom prst="rect">
+            <a:avLst/>
+          </a:prstGeom>
+          <a:noFill/>
+        </p:spPr>
+        <p:txBody>
+          <a:bodyPr wrap="none">
+            <a:spAutoFit/>
+          </a:bodyPr>
+          <a:lstStyle/>
+          <a:p>
+            <a:pPr algn="ctr">
+              <a:defRPr sz="1300" b="1">
+                <a:solidFill>
+                  <a:srgbClr val="FFFFFF"/>
+                </a:solidFill>
+              </a:defRPr>
+            </a:pPr>
+            <a:r>
+              <a:t>PASS</a:t>
+            </a:r>
+          </a:p>
+        </p:txBody>
+      </p:sp>
+      <p:sp>
+        <p:nvSpPr>
+          <p:cNvPr id="21" name="TextBox 20"/>
+          <p:cNvSpPr txBox="1"/>
+          <p:nvPr/>
+        </p:nvSpPr>
+        <p:spPr>
+          <a:xfrm>
+            <a:off x="1097280" y="4251960"/>
+            <a:ext cx="6675120" cy="347472"/>
+          </a:xfrm>
+          <a:prstGeom prst="rect">
+            <a:avLst/>
+          </a:prstGeom>
+          <a:noFill/>
+        </p:spPr>
+        <p:txBody>
+          <a:bodyPr wrap="none">
+            <a:spAutoFit/>
+          </a:bodyPr>
+          <a:lstStyle/>
+          <a:p>
+            <a:pPr>
+              <a:defRPr sz="1600">
+                <a:solidFill>
+                  <a:srgbClr val="1C2536"/>
+                </a:solidFill>
+              </a:defRPr>
+            </a:pPr>
+            <a:r>
+              <a:t>Process search</a:t>
+            </a:r>
+          </a:p>
+        </p:txBody>
+      </p:sp>
+      <p:sp>
+        <p:nvSpPr>
+          <p:cNvPr id="22" name="Rounded Rectangle 21"/>
+          <p:cNvSpPr/>
+          <p:nvPr/>
+        </p:nvSpPr>
+        <p:spPr>
+          <a:xfrm>
+            <a:off x="8229600" y="4233672"/>
+            <a:ext cx="2194560" cy="384048"/>
+          </a:xfrm>
+          <a:prstGeom prst="roundRect">
+            <a:avLst/>
+          </a:prstGeom>
+          <a:solidFill>
+            <a:srgbClr val="26915E"/>
+          </a:solidFill>
+          <a:ln>
+            <a:noFill/>
+          </a:ln>
+        </p:spPr>
+        <p:style>
+          <a:lnRef idx="1">
+            <a:schemeClr val="accent1"/>
+          </a:lnRef>
+          <a:fillRef idx="3">
+            <a:schemeClr val="accent1"/>
+          </a:fillRef>
+          <a:effectRef idx="2">
+            <a:schemeClr val="accent1"/>
+          </a:effectRef>
+          <a:fontRef idx="minor">
+            <a:schemeClr val="lt1"/>
+          </a:fontRef>
+        </p:style>
+        <p:txBody>
+          <a:bodyPr rtlCol="0" anchor="ctr"/>
+          <a:lstStyle/>
+          <a:p>
+            <a:pPr algn="ctr"/>
+          </a:p>
+        </p:txBody>
+      </p:sp>
+      <p:sp>
+        <p:nvSpPr>
+          <p:cNvPr id="23" name="TextBox 22"/>
+          <p:cNvSpPr txBox="1"/>
+          <p:nvPr/>
+        </p:nvSpPr>
+        <p:spPr>
+          <a:xfrm>
+            <a:off x="8321040" y="4270248"/>
+            <a:ext cx="2011680" cy="274320"/>
+          </a:xfrm>
+          <a:prstGeom prst="rect">
+            <a:avLst/>
+          </a:prstGeom>
+          <a:noFill/>
+        </p:spPr>
+        <p:txBody>
+          <a:bodyPr wrap="none">
+            <a:spAutoFit/>
+          </a:bodyPr>
+          <a:lstStyle/>
+          <a:p>
+            <a:pPr algn="ctr">
+              <a:defRPr sz="1300" b="1">
+                <a:solidFill>
+                  <a:srgbClr val="FFFFFF"/>
+                </a:solidFill>
+              </a:defRPr>
+            </a:pPr>
+            <a:r>
+              <a:t>PASS</a:t>
+            </a:r>
+          </a:p>
+        </p:txBody>
+      </p:sp>
+      <p:sp>
+        <p:nvSpPr>
+          <p:cNvPr id="24" name="TextBox 23"/>
+          <p:cNvSpPr txBox="1"/>
+          <p:nvPr/>
+        </p:nvSpPr>
+        <p:spPr>
+          <a:xfrm>
+            <a:off x="1097280" y="4818888"/>
+            <a:ext cx="6675120" cy="347472"/>
+          </a:xfrm>
+          <a:prstGeom prst="rect">
+            <a:avLst/>
+          </a:prstGeom>
+          <a:noFill/>
+        </p:spPr>
+        <p:txBody>
+          <a:bodyPr wrap="none">
+            <a:spAutoFit/>
+          </a:bodyPr>
+          <a:lstStyle/>
+          <a:p>
+            <a:pPr>
+              <a:defRPr sz="1600">
+                <a:solidFill>
+                  <a:srgbClr val="1C2536"/>
+                </a:solidFill>
+              </a:defRPr>
+            </a:pPr>
+            <a:r>
+              <a:t>Health snapshot log</a:t>
+            </a:r>
+          </a:p>
+        </p:txBody>
+      </p:sp>
+      <p:sp>
+        <p:nvSpPr>
+          <p:cNvPr id="25" name="Rounded Rectangle 24"/>
+          <p:cNvSpPr/>
+          <p:nvPr/>
+        </p:nvSpPr>
+        <p:spPr>
+          <a:xfrm>
+            <a:off x="8229600" y="4800600"/>
+            <a:ext cx="2194560" cy="384048"/>
+          </a:xfrm>
+          <a:prstGeom prst="roundRect">
+            <a:avLst/>
+          </a:prstGeom>
+          <a:solidFill>
+            <a:srgbClr val="26915E"/>
+          </a:solidFill>
+          <a:ln>
+            <a:noFill/>
+          </a:ln>
+        </p:spPr>
+        <p:style>
+          <a:lnRef idx="1">
+            <a:schemeClr val="accent1"/>
+          </a:lnRef>
+          <a:fillRef idx="3">
+            <a:schemeClr val="accent1"/>
+          </a:fillRef>
+          <a:effectRef idx="2">
+            <a:schemeClr val="accent1"/>
+          </a:effectRef>
+          <a:fontRef idx="minor">
+            <a:schemeClr val="lt1"/>
+          </a:fontRef>
+        </p:style>
+        <p:txBody>
+          <a:bodyPr rtlCol="0" anchor="ctr"/>
+          <a:lstStyle/>
+          <a:p>
+            <a:pPr algn="ctr"/>
+          </a:p>
+        </p:txBody>
+      </p:sp>
+      <p:sp>
+        <p:nvSpPr>
+          <p:cNvPr id="26" name="TextBox 25"/>
+          <p:cNvSpPr txBox="1"/>
+          <p:nvPr/>
+        </p:nvSpPr>
+        <p:spPr>
+          <a:xfrm>
+            <a:off x="8321040" y="4837175"/>
+            <a:ext cx="2011680" cy="274320"/>
+          </a:xfrm>
+          <a:prstGeom prst="rect">
+            <a:avLst/>
+          </a:prstGeom>
+          <a:noFill/>
+        </p:spPr>
+        <p:txBody>
+          <a:bodyPr wrap="none">
+            <a:spAutoFit/>
+          </a:bodyPr>
+          <a:lstStyle/>
+          <a:p>
+            <a:pPr algn="ctr">
+              <a:defRPr sz="1300" b="1">
+                <a:solidFill>
+                  <a:srgbClr val="FFFFFF"/>
+                </a:solidFill>
+              </a:defRPr>
+            </a:pPr>
+            <a:r>
+              <a:t>PASS</a:t>
+            </a:r>
+          </a:p>
+        </p:txBody>
+      </p:sp>
+      <p:sp>
+        <p:nvSpPr>
+          <p:cNvPr id="27" name="TextBox 26"/>
+          <p:cNvSpPr txBox="1"/>
+          <p:nvPr/>
+        </p:nvSpPr>
+        <p:spPr>
+          <a:xfrm>
+            <a:off x="1097280" y="5385816"/>
+            <a:ext cx="6675120" cy="347472"/>
+          </a:xfrm>
+          <a:prstGeom prst="rect">
+            <a:avLst/>
+          </a:prstGeom>
+          <a:noFill/>
+        </p:spPr>
+        <p:txBody>
+          <a:bodyPr wrap="none">
+            <a:spAutoFit/>
+          </a:bodyPr>
+          <a:lstStyle/>
+          <a:p>
+            <a:pPr>
+              <a:defRPr sz="1600">
+                <a:solidFill>
+                  <a:srgbClr val="1C2536"/>
+                </a:solidFill>
+              </a:defRPr>
+            </a:pPr>
+            <a:r>
+              <a:t>Driver load in WSL2</a:t>
+            </a:r>
+          </a:p>
+        </p:txBody>
+      </p:sp>
+      <p:sp>
+        <p:nvSpPr>
+          <p:cNvPr id="28" name="Rounded Rectangle 27"/>
+          <p:cNvSpPr/>
+          <p:nvPr/>
+        </p:nvSpPr>
+        <p:spPr>
+          <a:xfrm>
+            <a:off x="8229600" y="5367528"/>
+            <a:ext cx="2194560" cy="384048"/>
+          </a:xfrm>
+          <a:prstGeom prst="roundRect">
+            <a:avLst/>
+          </a:prstGeom>
+          <a:solidFill>
+            <a:srgbClr val="DD892A"/>
+          </a:solidFill>
+          <a:ln>
+            <a:noFill/>
+          </a:ln>
+        </p:spPr>
+        <p:style>
+          <a:lnRef idx="1">
+            <a:schemeClr val="accent1"/>
+          </a:lnRef>
+          <a:fillRef idx="3">
+            <a:schemeClr val="accent1"/>
+          </a:fillRef>
+          <a:effectRef idx="2">
+            <a:schemeClr val="accent1"/>
+          </a:effectRef>
+          <a:fontRef idx="minor">
+            <a:schemeClr val="lt1"/>
+          </a:fontRef>
+        </p:style>
+        <p:txBody>
+          <a:bodyPr rtlCol="0" anchor="ctr"/>
+          <a:lstStyle/>
+          <a:p>
+            <a:pPr algn="ctr"/>
+          </a:p>
+        </p:txBody>
+      </p:sp>
+      <p:sp>
+        <p:nvSpPr>
+          <p:cNvPr id="29" name="TextBox 28"/>
+          <p:cNvSpPr txBox="1"/>
+          <p:nvPr/>
+        </p:nvSpPr>
+        <p:spPr>
+          <a:xfrm>
+            <a:off x="8321040" y="5404103"/>
+            <a:ext cx="2011680" cy="274320"/>
+          </a:xfrm>
+          <a:prstGeom prst="rect">
+            <a:avLst/>
+          </a:prstGeom>
+          <a:noFill/>
+        </p:spPr>
+        <p:txBody>
+          <a:bodyPr wrap="none">
+            <a:spAutoFit/>
+          </a:bodyPr>
+          <a:lstStyle/>
+          <a:p>
+            <a:pPr algn="ctr">
+              <a:defRPr sz="1300" b="1">
+                <a:solidFill>
+                  <a:srgbClr val="FFFFFF"/>
+                </a:solidFill>
+              </a:defRPr>
+            </a:pPr>
+            <a:r>
+              <a:t>NOT VALIDATED</a:t>
+            </a:r>
+          </a:p>
+        </p:txBody>
+      </p:sp>
+      <p:sp>
+        <p:nvSpPr>
+          <p:cNvPr id="30" name="TextBox 29"/>
+          <p:cNvSpPr txBox="1"/>
+          <p:nvPr/>
+        </p:nvSpPr>
+        <p:spPr>
+          <a:xfrm>
+            <a:off x="640080" y="6492240"/>
+            <a:ext cx="10972800" cy="228600"/>
+          </a:xfrm>
+          <a:prstGeom prst="rect">
+            <a:avLst/>
+          </a:prstGeom>
+          <a:noFill/>
+        </p:spPr>
+        <p:txBody>
+          <a:bodyPr wrap="none">
+            <a:spAutoFit/>
+          </a:bodyPr>
+          <a:lstStyle/>
+          <a:p>
+            <a:pPr>
+              <a:defRPr sz="900">
+                <a:solidFill>
+                  <a:srgbClr val="566373"/>
+                </a:solidFill>
+              </a:defRPr>
+            </a:pPr>
+            <a:r>
+              <a:t>SysGuard • Linux System Health Monitor                               10</a:t>
             </a:r>
           </a:p>
         </p:txBody>
@@ -3310,117 +4502,322 @@
       <p:grpSpPr/>
       <p:sp>
         <p:nvSpPr>
-          <p:cNvPr id="2" name="Title 1"/>
-          <p:cNvSpPr>
-            <a:spLocks noGrp="1"/>
-          </p:cNvSpPr>
-          <p:nvPr>
-            <p:ph type="title"/>
-          </p:nvPr>
-        </p:nvSpPr>
-        <p:spPr/>
-        <p:txBody>
-          <a:bodyPr/>
-          <a:lstStyle/>
-          <a:p>
-            <a:r>
-              <a:t>10. Testing</a:t>
-            </a:r>
-          </a:p>
-        </p:txBody>
-      </p:sp>
-      <p:sp>
-        <p:nvSpPr>
-          <p:cNvPr id="3" name="Content Placeholder 2"/>
-          <p:cNvSpPr>
-            <a:spLocks noGrp="1"/>
-          </p:cNvSpPr>
-          <p:nvPr>
-            <p:ph idx="1"/>
-          </p:nvPr>
-        </p:nvSpPr>
-        <p:spPr/>
-        <p:txBody>
-          <a:bodyPr/>
-          <a:lstStyle/>
-          <a:p>
-            <a:pPr>
-              <a:defRPr sz="2000"/>
-            </a:pPr>
-            <a:r>
-              <a:t>Build test</a:t>
-            </a:r>
-          </a:p>
-          <a:p>
-            <a:pPr>
-              <a:defRPr sz="2000"/>
-            </a:pPr>
-            <a:r>
-              <a:t>System information test</a:t>
-            </a:r>
-          </a:p>
-          <a:p>
-            <a:pPr>
-              <a:defRPr sz="2000"/>
-            </a:pPr>
-            <a:r>
-              <a:t>CPU test</a:t>
-            </a:r>
-          </a:p>
-          <a:p>
-            <a:pPr>
-              <a:defRPr sz="2000"/>
-            </a:pPr>
-            <a:r>
-              <a:t>Memory test</a:t>
-            </a:r>
-          </a:p>
-          <a:p>
-            <a:pPr>
-              <a:defRPr sz="2000"/>
-            </a:pPr>
-            <a:r>
-              <a:t>Disk test</a:t>
-            </a:r>
-          </a:p>
-          <a:p>
-            <a:pPr>
-              <a:defRPr sz="2000"/>
-            </a:pPr>
-            <a:r>
-              <a:t>Process enumeration test</a:t>
-            </a:r>
-          </a:p>
-          <a:p>
-            <a:pPr>
-              <a:defRPr sz="2000"/>
-            </a:pPr>
-            <a:r>
-              <a:t>Process search test</a:t>
-            </a:r>
-          </a:p>
-          <a:p>
-            <a:pPr>
-              <a:defRPr sz="2000"/>
-            </a:pPr>
-            <a:r>
-              <a:t>Process termination test</a:t>
-            </a:r>
-          </a:p>
-          <a:p>
-            <a:pPr>
-              <a:defRPr sz="2000"/>
-            </a:pPr>
-            <a:r>
-              <a:t>Logging test</a:t>
-            </a:r>
-          </a:p>
-          <a:p>
-            <a:pPr>
-              <a:defRPr sz="2000"/>
-            </a:pPr>
-            <a:r>
-              <a:t>Driver build/load/read test</a:t>
+          <p:cNvPr id="2" name="Rectangle 1"/>
+          <p:cNvSpPr/>
+          <p:nvPr/>
+        </p:nvSpPr>
+        <p:spPr>
+          <a:xfrm>
+            <a:off x="0" y="0"/>
+            <a:ext cx="12191695" cy="6858000"/>
+          </a:xfrm>
+          <a:prstGeom prst="rect">
+            <a:avLst/>
+          </a:prstGeom>
+          <a:solidFill>
+            <a:srgbClr val="FFFFFF"/>
+          </a:solidFill>
+          <a:ln>
+            <a:noFill/>
+          </a:ln>
+        </p:spPr>
+        <p:style>
+          <a:lnRef idx="1">
+            <a:schemeClr val="accent1"/>
+          </a:lnRef>
+          <a:fillRef idx="3">
+            <a:schemeClr val="accent1"/>
+          </a:fillRef>
+          <a:effectRef idx="2">
+            <a:schemeClr val="accent1"/>
+          </a:effectRef>
+          <a:fontRef idx="minor">
+            <a:schemeClr val="lt1"/>
+          </a:fontRef>
+        </p:style>
+        <p:txBody>
+          <a:bodyPr rtlCol="0" anchor="ctr"/>
+          <a:lstStyle/>
+          <a:p>
+            <a:pPr algn="ctr"/>
+          </a:p>
+        </p:txBody>
+      </p:sp>
+      <p:sp>
+        <p:nvSpPr>
+          <p:cNvPr id="3" name="Rectangle 2"/>
+          <p:cNvSpPr/>
+          <p:nvPr/>
+        </p:nvSpPr>
+        <p:spPr>
+          <a:xfrm>
+            <a:off x="0" y="0"/>
+            <a:ext cx="12191695" cy="201168"/>
+          </a:xfrm>
+          <a:prstGeom prst="rect">
+            <a:avLst/>
+          </a:prstGeom>
+          <a:solidFill>
+            <a:srgbClr val="2A69BA"/>
+          </a:solidFill>
+          <a:ln>
+            <a:noFill/>
+          </a:ln>
+        </p:spPr>
+        <p:style>
+          <a:lnRef idx="1">
+            <a:schemeClr val="accent1"/>
+          </a:lnRef>
+          <a:fillRef idx="3">
+            <a:schemeClr val="accent1"/>
+          </a:fillRef>
+          <a:effectRef idx="2">
+            <a:schemeClr val="accent1"/>
+          </a:effectRef>
+          <a:fontRef idx="minor">
+            <a:schemeClr val="lt1"/>
+          </a:fontRef>
+        </p:style>
+        <p:txBody>
+          <a:bodyPr rtlCol="0" anchor="ctr"/>
+          <a:lstStyle/>
+          <a:p>
+            <a:pPr algn="ctr"/>
+          </a:p>
+        </p:txBody>
+      </p:sp>
+      <p:sp>
+        <p:nvSpPr>
+          <p:cNvPr id="4" name="TextBox 3"/>
+          <p:cNvSpPr txBox="1"/>
+          <p:nvPr/>
+        </p:nvSpPr>
+        <p:spPr>
+          <a:xfrm>
+            <a:off x="640080" y="502920"/>
+            <a:ext cx="10881360" cy="640080"/>
+          </a:xfrm>
+          <a:prstGeom prst="rect">
+            <a:avLst/>
+          </a:prstGeom>
+          <a:noFill/>
+        </p:spPr>
+        <p:txBody>
+          <a:bodyPr wrap="none">
+            <a:spAutoFit/>
+          </a:bodyPr>
+          <a:lstStyle/>
+          <a:p>
+            <a:pPr>
+              <a:defRPr sz="2800" b="1">
+                <a:solidFill>
+                  <a:srgbClr val="0E1827"/>
+                </a:solidFill>
+              </a:defRPr>
+            </a:pPr>
+            <a:r>
+              <a:t>10. Logging Result</a:t>
+            </a:r>
+          </a:p>
+        </p:txBody>
+      </p:sp>
+      <p:sp>
+        <p:nvSpPr>
+          <p:cNvPr id="5" name="TextBox 4"/>
+          <p:cNvSpPr txBox="1"/>
+          <p:nvPr/>
+        </p:nvSpPr>
+        <p:spPr>
+          <a:xfrm>
+            <a:off x="658368" y="1143000"/>
+            <a:ext cx="10789920" cy="411480"/>
+          </a:xfrm>
+          <a:prstGeom prst="rect">
+            <a:avLst/>
+          </a:prstGeom>
+          <a:noFill/>
+        </p:spPr>
+        <p:txBody>
+          <a:bodyPr wrap="none">
+            <a:spAutoFit/>
+          </a:bodyPr>
+          <a:lstStyle/>
+          <a:p>
+            <a:pPr>
+              <a:defRPr sz="1400">
+                <a:solidFill>
+                  <a:srgbClr val="566373"/>
+                </a:solidFill>
+              </a:defRPr>
+            </a:pPr>
+            <a:r>
+              <a:t>Verified output</a:t>
+            </a:r>
+          </a:p>
+        </p:txBody>
+      </p:sp>
+      <p:sp>
+        <p:nvSpPr>
+          <p:cNvPr id="6" name="Rounded Rectangle 5"/>
+          <p:cNvSpPr/>
+          <p:nvPr/>
+        </p:nvSpPr>
+        <p:spPr>
+          <a:xfrm>
+            <a:off x="1097280" y="1828800"/>
+            <a:ext cx="9966960" cy="1920240"/>
+          </a:xfrm>
+          <a:prstGeom prst="roundRect">
+            <a:avLst/>
+          </a:prstGeom>
+          <a:solidFill>
+            <a:srgbClr val="0E1827"/>
+          </a:solidFill>
+          <a:ln>
+            <a:noFill/>
+          </a:ln>
+        </p:spPr>
+        <p:style>
+          <a:lnRef idx="1">
+            <a:schemeClr val="accent1"/>
+          </a:lnRef>
+          <a:fillRef idx="3">
+            <a:schemeClr val="accent1"/>
+          </a:fillRef>
+          <a:effectRef idx="2">
+            <a:schemeClr val="accent1"/>
+          </a:effectRef>
+          <a:fontRef idx="minor">
+            <a:schemeClr val="lt1"/>
+          </a:fontRef>
+        </p:style>
+        <p:txBody>
+          <a:bodyPr rtlCol="0" anchor="ctr"/>
+          <a:lstStyle/>
+          <a:p>
+            <a:pPr algn="ctr"/>
+          </a:p>
+        </p:txBody>
+      </p:sp>
+      <p:sp>
+        <p:nvSpPr>
+          <p:cNvPr id="7" name="TextBox 6"/>
+          <p:cNvSpPr txBox="1"/>
+          <p:nvPr/>
+        </p:nvSpPr>
+        <p:spPr>
+          <a:xfrm>
+            <a:off x="1508760" y="2240280"/>
+            <a:ext cx="9144000" cy="822960"/>
+          </a:xfrm>
+          <a:prstGeom prst="rect">
+            <a:avLst/>
+          </a:prstGeom>
+          <a:noFill/>
+        </p:spPr>
+        <p:txBody>
+          <a:bodyPr wrap="none">
+            <a:spAutoFit/>
+          </a:bodyPr>
+          <a:lstStyle/>
+          <a:p>
+            <a:pPr algn="ctr">
+              <a:defRPr sz="2200" b="1">
+                <a:solidFill>
+                  <a:srgbClr val="FFFFFF"/>
+                </a:solidFill>
+              </a:defRPr>
+            </a:pPr>
+            <a:r>
+              <a:t>CPU=0.00, MEMORY=7.91, DISK=5.26, STATUS=HEALTHY</a:t>
+            </a:r>
+          </a:p>
+        </p:txBody>
+      </p:sp>
+      <p:sp>
+        <p:nvSpPr>
+          <p:cNvPr id="8" name="TextBox 7"/>
+          <p:cNvSpPr txBox="1"/>
+          <p:nvPr/>
+        </p:nvSpPr>
+        <p:spPr>
+          <a:xfrm>
+            <a:off x="1280160" y="4251960"/>
+            <a:ext cx="9509760" cy="1097280"/>
+          </a:xfrm>
+          <a:prstGeom prst="rect">
+            <a:avLst/>
+          </a:prstGeom>
+          <a:noFill/>
+        </p:spPr>
+        <p:txBody>
+          <a:bodyPr wrap="square">
+            <a:spAutoFit/>
+          </a:bodyPr>
+          <a:lstStyle/>
+          <a:p>
+            <a:pPr>
+              <a:spcAft>
+                <a:spcPts val="1000"/>
+              </a:spcAft>
+              <a:defRPr sz="1600">
+                <a:solidFill>
+                  <a:srgbClr val="1C2536"/>
+                </a:solidFill>
+              </a:defRPr>
+            </a:pPr>
+            <a:r>
+              <a:t>Snapshot is appended to sysguard.log.</a:t>
+            </a:r>
+          </a:p>
+          <a:p>
+            <a:pPr>
+              <a:spcAft>
+                <a:spcPts val="1000"/>
+              </a:spcAft>
+              <a:defRPr sz="1600">
+                <a:solidFill>
+                  <a:srgbClr val="1C2536"/>
+                </a:solidFill>
+              </a:defRPr>
+            </a:pPr>
+            <a:r>
+              <a:t>The same health calculation used by the dashboard is recorded for later inspection.</a:t>
+            </a:r>
+          </a:p>
+        </p:txBody>
+      </p:sp>
+      <p:sp>
+        <p:nvSpPr>
+          <p:cNvPr id="9" name="TextBox 8"/>
+          <p:cNvSpPr txBox="1"/>
+          <p:nvPr/>
+        </p:nvSpPr>
+        <p:spPr>
+          <a:xfrm>
+            <a:off x="640080" y="6492240"/>
+            <a:ext cx="10972800" cy="228600"/>
+          </a:xfrm>
+          <a:prstGeom prst="rect">
+            <a:avLst/>
+          </a:prstGeom>
+          <a:noFill/>
+        </p:spPr>
+        <p:txBody>
+          <a:bodyPr wrap="none">
+            <a:spAutoFit/>
+          </a:bodyPr>
+          <a:lstStyle/>
+          <a:p>
+            <a:pPr>
+              <a:defRPr sz="900">
+                <a:solidFill>
+                  <a:srgbClr val="566373"/>
+                </a:solidFill>
+              </a:defRPr>
+            </a:pPr>
+            <a:r>
+              <a:t>SysGuard • Linux System Health Monitor                               11</a:t>
             </a:r>
           </a:p>
         </p:txBody>
@@ -3445,106 +4842,259 @@
       <p:grpSpPr/>
       <p:sp>
         <p:nvSpPr>
-          <p:cNvPr id="2" name="Title 1"/>
-          <p:cNvSpPr>
-            <a:spLocks noGrp="1"/>
-          </p:cNvSpPr>
-          <p:nvPr>
-            <p:ph type="title"/>
-          </p:nvPr>
-        </p:nvSpPr>
-        <p:spPr/>
-        <p:txBody>
-          <a:bodyPr/>
-          <a:lstStyle/>
-          <a:p>
-            <a:r>
-              <a:t>11. Results &amp; Demonstration</a:t>
-            </a:r>
-          </a:p>
-        </p:txBody>
-      </p:sp>
-      <p:sp>
-        <p:nvSpPr>
-          <p:cNvPr id="3" name="Content Placeholder 2"/>
-          <p:cNvSpPr>
-            <a:spLocks noGrp="1"/>
-          </p:cNvSpPr>
-          <p:nvPr>
-            <p:ph idx="1"/>
-          </p:nvPr>
-        </p:nvSpPr>
-        <p:spPr/>
-        <p:txBody>
-          <a:bodyPr/>
-          <a:lstStyle/>
-          <a:p>
-            <a:pPr>
-              <a:defRPr sz="2000"/>
-            </a:pPr>
-            <a:r>
-              <a:t>Live demonstration:</a:t>
-            </a:r>
-          </a:p>
-          <a:p>
-            <a:pPr>
-              <a:defRPr sz="2000"/>
-            </a:pPr>
-            <a:r>
-              <a:t>1. Build with make</a:t>
-            </a:r>
-          </a:p>
-          <a:p>
-            <a:pPr>
-              <a:defRPr sz="2000"/>
-            </a:pPr>
-            <a:r>
-              <a:t>2. Launch ./sysguard</a:t>
-            </a:r>
-          </a:p>
-          <a:p>
-            <a:pPr>
-              <a:defRPr sz="2000"/>
-            </a:pPr>
-            <a:r>
-              <a:t>3. Open dashboard</a:t>
-            </a:r>
-          </a:p>
-          <a:p>
-            <a:pPr>
-              <a:defRPr sz="2000"/>
-            </a:pPr>
-            <a:r>
-              <a:t>4. Show process list/search</a:t>
-            </a:r>
-          </a:p>
-          <a:p>
-            <a:pPr>
-              <a:defRPr sz="2000"/>
-            </a:pPr>
-            <a:r>
-              <a:t>5. Save a log snapshot</a:t>
-            </a:r>
-          </a:p>
-          <a:p>
-            <a:pPr>
-              <a:defRPr sz="2000"/>
-            </a:pPr>
-            <a:r>
-              <a:t>6. If available, load driver and read /dev/sysguard</a:t>
-            </a:r>
-          </a:p>
-          <a:p>
-            <a:pPr>
-              <a:defRPr sz="2000"/>
-            </a:pPr>
-          </a:p>
-          <a:p>
-            <a:pPr>
-              <a:defRPr sz="2000"/>
-            </a:pPr>
-            <a:r>
-              <a:t>Replace this slide with actual screenshots before submission.</a:t>
+          <p:cNvPr id="2" name="Rectangle 1"/>
+          <p:cNvSpPr/>
+          <p:nvPr/>
+        </p:nvSpPr>
+        <p:spPr>
+          <a:xfrm>
+            <a:off x="0" y="0"/>
+            <a:ext cx="12191695" cy="6858000"/>
+          </a:xfrm>
+          <a:prstGeom prst="rect">
+            <a:avLst/>
+          </a:prstGeom>
+          <a:solidFill>
+            <a:srgbClr val="FFFFFF"/>
+          </a:solidFill>
+          <a:ln>
+            <a:noFill/>
+          </a:ln>
+        </p:spPr>
+        <p:style>
+          <a:lnRef idx="1">
+            <a:schemeClr val="accent1"/>
+          </a:lnRef>
+          <a:fillRef idx="3">
+            <a:schemeClr val="accent1"/>
+          </a:fillRef>
+          <a:effectRef idx="2">
+            <a:schemeClr val="accent1"/>
+          </a:effectRef>
+          <a:fontRef idx="minor">
+            <a:schemeClr val="lt1"/>
+          </a:fontRef>
+        </p:style>
+        <p:txBody>
+          <a:bodyPr rtlCol="0" anchor="ctr"/>
+          <a:lstStyle/>
+          <a:p>
+            <a:pPr algn="ctr"/>
+          </a:p>
+        </p:txBody>
+      </p:sp>
+      <p:sp>
+        <p:nvSpPr>
+          <p:cNvPr id="3" name="Rectangle 2"/>
+          <p:cNvSpPr/>
+          <p:nvPr/>
+        </p:nvSpPr>
+        <p:spPr>
+          <a:xfrm>
+            <a:off x="0" y="0"/>
+            <a:ext cx="12191695" cy="201168"/>
+          </a:xfrm>
+          <a:prstGeom prst="rect">
+            <a:avLst/>
+          </a:prstGeom>
+          <a:solidFill>
+            <a:srgbClr val="2A69BA"/>
+          </a:solidFill>
+          <a:ln>
+            <a:noFill/>
+          </a:ln>
+        </p:spPr>
+        <p:style>
+          <a:lnRef idx="1">
+            <a:schemeClr val="accent1"/>
+          </a:lnRef>
+          <a:fillRef idx="3">
+            <a:schemeClr val="accent1"/>
+          </a:fillRef>
+          <a:effectRef idx="2">
+            <a:schemeClr val="accent1"/>
+          </a:effectRef>
+          <a:fontRef idx="minor">
+            <a:schemeClr val="lt1"/>
+          </a:fontRef>
+        </p:style>
+        <p:txBody>
+          <a:bodyPr rtlCol="0" anchor="ctr"/>
+          <a:lstStyle/>
+          <a:p>
+            <a:pPr algn="ctr"/>
+          </a:p>
+        </p:txBody>
+      </p:sp>
+      <p:sp>
+        <p:nvSpPr>
+          <p:cNvPr id="4" name="TextBox 3"/>
+          <p:cNvSpPr txBox="1"/>
+          <p:nvPr/>
+        </p:nvSpPr>
+        <p:spPr>
+          <a:xfrm>
+            <a:off x="640080" y="502920"/>
+            <a:ext cx="10881360" cy="640080"/>
+          </a:xfrm>
+          <a:prstGeom prst="rect">
+            <a:avLst/>
+          </a:prstGeom>
+          <a:noFill/>
+        </p:spPr>
+        <p:txBody>
+          <a:bodyPr wrap="none">
+            <a:spAutoFit/>
+          </a:bodyPr>
+          <a:lstStyle/>
+          <a:p>
+            <a:pPr>
+              <a:defRPr sz="2800" b="1">
+                <a:solidFill>
+                  <a:srgbClr val="0E1827"/>
+                </a:solidFill>
+              </a:defRPr>
+            </a:pPr>
+            <a:r>
+              <a:t>11. Limitations &amp; Future Scope</a:t>
+            </a:r>
+          </a:p>
+        </p:txBody>
+      </p:sp>
+      <p:sp>
+        <p:nvSpPr>
+          <p:cNvPr id="5" name="TextBox 4"/>
+          <p:cNvSpPr txBox="1"/>
+          <p:nvPr/>
+        </p:nvSpPr>
+        <p:spPr>
+          <a:xfrm>
+            <a:off x="658368" y="1143000"/>
+            <a:ext cx="10789920" cy="411480"/>
+          </a:xfrm>
+          <a:prstGeom prst="rect">
+            <a:avLst/>
+          </a:prstGeom>
+          <a:noFill/>
+        </p:spPr>
+        <p:txBody>
+          <a:bodyPr wrap="none">
+            <a:spAutoFit/>
+          </a:bodyPr>
+          <a:lstStyle/>
+          <a:p>
+            <a:pPr>
+              <a:defRPr sz="1400">
+                <a:solidFill>
+                  <a:srgbClr val="566373"/>
+                </a:solidFill>
+              </a:defRPr>
+            </a:pPr>
+            <a:r>
+              <a:t>How the project can evolve</a:t>
+            </a:r>
+          </a:p>
+        </p:txBody>
+      </p:sp>
+      <p:sp>
+        <p:nvSpPr>
+          <p:cNvPr id="6" name="TextBox 5"/>
+          <p:cNvSpPr txBox="1"/>
+          <p:nvPr/>
+        </p:nvSpPr>
+        <p:spPr>
+          <a:xfrm>
+            <a:off x="822960" y="1600200"/>
+            <a:ext cx="10424160" cy="4389120"/>
+          </a:xfrm>
+          <a:prstGeom prst="rect">
+            <a:avLst/>
+          </a:prstGeom>
+          <a:noFill/>
+        </p:spPr>
+        <p:txBody>
+          <a:bodyPr wrap="square">
+            <a:spAutoFit/>
+          </a:bodyPr>
+          <a:lstStyle/>
+          <a:p>
+            <a:pPr>
+              <a:spcAft>
+                <a:spcPts val="1000"/>
+              </a:spcAft>
+              <a:defRPr sz="1900">
+                <a:solidFill>
+                  <a:srgbClr val="1C2536"/>
+                </a:solidFill>
+              </a:defRPr>
+            </a:pPr>
+            <a:r>
+              <a:t>Limitations: Linux-specific, CLI-only, sensor support varies, minimal driver, no per-process CPU/memory percentage.</a:t>
+            </a:r>
+          </a:p>
+          <a:p>
+            <a:pPr>
+              <a:spcAft>
+                <a:spcPts val="1000"/>
+              </a:spcAft>
+              <a:defRPr sz="1900">
+                <a:solidFill>
+                  <a:srgbClr val="1C2536"/>
+                </a:solidFill>
+              </a:defRPr>
+            </a:pPr>
+            <a:r>
+              <a:t>Future: ncurses real-time UI, configurable thresholds, historical CSV reports, temperature/network monitoring.</a:t>
+            </a:r>
+          </a:p>
+          <a:p>
+            <a:pPr>
+              <a:spcAft>
+                <a:spcPts val="1000"/>
+              </a:spcAft>
+              <a:defRPr sz="1900">
+                <a:solidFill>
+                  <a:srgbClr val="1C2536"/>
+                </a:solidFill>
+              </a:defRPr>
+            </a:pPr>
+            <a:r>
+              <a:t>Future driver work: richer ioctl commands and additional diagnostic data.</a:t>
+            </a:r>
+          </a:p>
+        </p:txBody>
+      </p:sp>
+      <p:sp>
+        <p:nvSpPr>
+          <p:cNvPr id="7" name="TextBox 6"/>
+          <p:cNvSpPr txBox="1"/>
+          <p:nvPr/>
+        </p:nvSpPr>
+        <p:spPr>
+          <a:xfrm>
+            <a:off x="640080" y="6492240"/>
+            <a:ext cx="10972800" cy="228600"/>
+          </a:xfrm>
+          <a:prstGeom prst="rect">
+            <a:avLst/>
+          </a:prstGeom>
+          <a:noFill/>
+        </p:spPr>
+        <p:txBody>
+          <a:bodyPr wrap="none">
+            <a:spAutoFit/>
+          </a:bodyPr>
+          <a:lstStyle/>
+          <a:p>
+            <a:pPr>
+              <a:defRPr sz="900">
+                <a:solidFill>
+                  <a:srgbClr val="566373"/>
+                </a:solidFill>
+              </a:defRPr>
+            </a:pPr>
+            <a:r>
+              <a:t>SysGuard • Linux System Health Monitor                               12</a:t>
             </a:r>
           </a:p>
         </p:txBody>
@@ -3569,214 +5119,274 @@
       <p:grpSpPr/>
       <p:sp>
         <p:nvSpPr>
-          <p:cNvPr id="2" name="Title 1"/>
-          <p:cNvSpPr>
-            <a:spLocks noGrp="1"/>
-          </p:cNvSpPr>
-          <p:nvPr>
-            <p:ph type="title"/>
-          </p:nvPr>
-        </p:nvSpPr>
-        <p:spPr/>
-        <p:txBody>
-          <a:bodyPr/>
-          <a:lstStyle/>
-          <a:p>
-            <a:r>
-              <a:t>12. Limitations &amp; Future Scope</a:t>
-            </a:r>
-          </a:p>
-        </p:txBody>
-      </p:sp>
-      <p:sp>
-        <p:nvSpPr>
-          <p:cNvPr id="3" name="Content Placeholder 2"/>
-          <p:cNvSpPr>
-            <a:spLocks noGrp="1"/>
-          </p:cNvSpPr>
-          <p:nvPr>
-            <p:ph idx="1"/>
-          </p:nvPr>
-        </p:nvSpPr>
-        <p:spPr/>
-        <p:txBody>
-          <a:bodyPr/>
-          <a:lstStyle/>
-          <a:p>
-            <a:pPr>
-              <a:defRPr sz="2000"/>
-            </a:pPr>
-            <a:r>
-              <a:t>Limitations:</a:t>
-            </a:r>
-          </a:p>
-          <a:p>
-            <a:pPr>
-              <a:defRPr sz="2000"/>
-            </a:pPr>
-            <a:r>
-              <a:t>• Linux-specific</a:t>
-            </a:r>
-          </a:p>
-          <a:p>
-            <a:pPr>
-              <a:defRPr sz="2000"/>
-            </a:pPr>
-            <a:r>
-              <a:t>• Minimal driver</a:t>
-            </a:r>
-          </a:p>
-          <a:p>
-            <a:pPr>
-              <a:defRPr sz="2000"/>
-            </a:pPr>
-            <a:r>
-              <a:t>• No GUI</a:t>
-            </a:r>
-          </a:p>
-          <a:p>
-            <a:pPr>
-              <a:defRPr sz="2000"/>
-            </a:pPr>
-            <a:r>
-              <a:t>• Sensor availability varies</a:t>
-            </a:r>
-          </a:p>
-          <a:p>
-            <a:pPr>
-              <a:defRPr sz="2000"/>
-            </a:pPr>
-          </a:p>
-          <a:p>
-            <a:pPr>
-              <a:defRPr sz="2000"/>
-            </a:pPr>
-            <a:r>
-              <a:t>Future:</a:t>
-            </a:r>
-          </a:p>
-          <a:p>
-            <a:pPr>
-              <a:defRPr sz="2000"/>
-            </a:pPr>
-            <a:r>
-              <a:t>• ncurses dashboard</a:t>
-            </a:r>
-          </a:p>
-          <a:p>
-            <a:pPr>
-              <a:defRPr sz="2000"/>
-            </a:pPr>
-            <a:r>
-              <a:t>• Configurable alerts</a:t>
-            </a:r>
-          </a:p>
-          <a:p>
-            <a:pPr>
-              <a:defRPr sz="2000"/>
-            </a:pPr>
-            <a:r>
-              <a:t>• Historical graphs</a:t>
-            </a:r>
-          </a:p>
-          <a:p>
-            <a:pPr>
-              <a:defRPr sz="2000"/>
-            </a:pPr>
-            <a:r>
-              <a:t>• Temperature/network monitoring</a:t>
-            </a:r>
-          </a:p>
-          <a:p>
-            <a:pPr>
-              <a:defRPr sz="2000"/>
-            </a:pPr>
-            <a:r>
-              <a:t>• Extended ioctl interface</a:t>
-            </a:r>
-          </a:p>
-        </p:txBody>
-      </p:sp>
-    </p:spTree>
-  </p:cSld>
-  <p:clrMapOvr>
-    <a:masterClrMapping/>
-  </p:clrMapOvr>
-</p:sld>
-</file>
-
-<file path=ppt/slides/slide14.xml><?xml version="1.0" encoding="utf-8"?>
-<p:sld xmlns:a="http://schemas.openxmlformats.org/drawingml/2006/main" xmlns:p="http://schemas.openxmlformats.org/presentationml/2006/main" xmlns:r="http://schemas.openxmlformats.org/officeDocument/2006/relationships">
-  <p:cSld>
-    <p:spTree>
-      <p:nvGrpSpPr>
-        <p:cNvPr id="1" name=""/>
-        <p:cNvGrpSpPr/>
-        <p:nvPr/>
-      </p:nvGrpSpPr>
-      <p:grpSpPr/>
-      <p:sp>
-        <p:nvSpPr>
-          <p:cNvPr id="2" name="Title 1"/>
-          <p:cNvSpPr>
-            <a:spLocks noGrp="1"/>
-          </p:cNvSpPr>
-          <p:nvPr>
-            <p:ph type="title"/>
-          </p:nvPr>
-        </p:nvSpPr>
-        <p:spPr/>
-        <p:txBody>
-          <a:bodyPr/>
-          <a:lstStyle/>
-          <a:p>
-            <a:r>
-              <a:t>13. Conclusion</a:t>
-            </a:r>
-          </a:p>
-        </p:txBody>
-      </p:sp>
-      <p:sp>
-        <p:nvSpPr>
-          <p:cNvPr id="3" name="Content Placeholder 2"/>
-          <p:cNvSpPr>
-            <a:spLocks noGrp="1"/>
-          </p:cNvSpPr>
-          <p:nvPr>
-            <p:ph idx="1"/>
-          </p:nvPr>
-        </p:nvSpPr>
-        <p:spPr/>
-        <p:txBody>
-          <a:bodyPr/>
-          <a:lstStyle/>
-          <a:p>
-            <a:pPr>
-              <a:defRPr sz="2000"/>
-            </a:pPr>
-            <a:r>
-              <a:t>SysGuard demonstrates how a C++ application can collect and analyze Linux system information while connecting operating-system concepts with hardware/software architecture.</a:t>
-            </a:r>
-          </a:p>
-          <a:p>
-            <a:pPr>
-              <a:defRPr sz="2000"/>
-            </a:pPr>
-          </a:p>
-          <a:p>
-            <a:pPr>
-              <a:defRPr sz="2000"/>
-            </a:pPr>
-            <a:r>
-              <a:t>The project follows the flow:</a:t>
-            </a:r>
-          </a:p>
-          <a:p>
-            <a:pPr>
-              <a:defRPr sz="2000"/>
-            </a:pPr>
-            <a:r>
-              <a:t>Requirements → Design → Implementation → Testing → Final Delivery</a:t>
+          <p:cNvPr id="2" name="Rectangle 1"/>
+          <p:cNvSpPr/>
+          <p:nvPr/>
+        </p:nvSpPr>
+        <p:spPr>
+          <a:xfrm>
+            <a:off x="0" y="0"/>
+            <a:ext cx="12191695" cy="6858000"/>
+          </a:xfrm>
+          <a:prstGeom prst="rect">
+            <a:avLst/>
+          </a:prstGeom>
+          <a:solidFill>
+            <a:srgbClr val="FFFFFF"/>
+          </a:solidFill>
+          <a:ln>
+            <a:noFill/>
+          </a:ln>
+        </p:spPr>
+        <p:style>
+          <a:lnRef idx="1">
+            <a:schemeClr val="accent1"/>
+          </a:lnRef>
+          <a:fillRef idx="3">
+            <a:schemeClr val="accent1"/>
+          </a:fillRef>
+          <a:effectRef idx="2">
+            <a:schemeClr val="accent1"/>
+          </a:effectRef>
+          <a:fontRef idx="minor">
+            <a:schemeClr val="lt1"/>
+          </a:fontRef>
+        </p:style>
+        <p:txBody>
+          <a:bodyPr rtlCol="0" anchor="ctr"/>
+          <a:lstStyle/>
+          <a:p>
+            <a:pPr algn="ctr"/>
+          </a:p>
+        </p:txBody>
+      </p:sp>
+      <p:sp>
+        <p:nvSpPr>
+          <p:cNvPr id="3" name="Rectangle 2"/>
+          <p:cNvSpPr/>
+          <p:nvPr/>
+        </p:nvSpPr>
+        <p:spPr>
+          <a:xfrm>
+            <a:off x="0" y="0"/>
+            <a:ext cx="12191695" cy="201168"/>
+          </a:xfrm>
+          <a:prstGeom prst="rect">
+            <a:avLst/>
+          </a:prstGeom>
+          <a:solidFill>
+            <a:srgbClr val="2A69BA"/>
+          </a:solidFill>
+          <a:ln>
+            <a:noFill/>
+          </a:ln>
+        </p:spPr>
+        <p:style>
+          <a:lnRef idx="1">
+            <a:schemeClr val="accent1"/>
+          </a:lnRef>
+          <a:fillRef idx="3">
+            <a:schemeClr val="accent1"/>
+          </a:fillRef>
+          <a:effectRef idx="2">
+            <a:schemeClr val="accent1"/>
+          </a:effectRef>
+          <a:fontRef idx="minor">
+            <a:schemeClr val="lt1"/>
+          </a:fontRef>
+        </p:style>
+        <p:txBody>
+          <a:bodyPr rtlCol="0" anchor="ctr"/>
+          <a:lstStyle/>
+          <a:p>
+            <a:pPr algn="ctr"/>
+          </a:p>
+        </p:txBody>
+      </p:sp>
+      <p:sp>
+        <p:nvSpPr>
+          <p:cNvPr id="4" name="TextBox 3"/>
+          <p:cNvSpPr txBox="1"/>
+          <p:nvPr/>
+        </p:nvSpPr>
+        <p:spPr>
+          <a:xfrm>
+            <a:off x="640080" y="502920"/>
+            <a:ext cx="10881360" cy="640080"/>
+          </a:xfrm>
+          <a:prstGeom prst="rect">
+            <a:avLst/>
+          </a:prstGeom>
+          <a:noFill/>
+        </p:spPr>
+        <p:txBody>
+          <a:bodyPr wrap="none">
+            <a:spAutoFit/>
+          </a:bodyPr>
+          <a:lstStyle/>
+          <a:p>
+            <a:pPr>
+              <a:defRPr sz="2800" b="1">
+                <a:solidFill>
+                  <a:srgbClr val="0E1827"/>
+                </a:solidFill>
+              </a:defRPr>
+            </a:pPr>
+            <a:r>
+              <a:t>12. Conclusion</a:t>
+            </a:r>
+          </a:p>
+        </p:txBody>
+      </p:sp>
+      <p:sp>
+        <p:nvSpPr>
+          <p:cNvPr id="5" name="TextBox 4"/>
+          <p:cNvSpPr txBox="1"/>
+          <p:nvPr/>
+        </p:nvSpPr>
+        <p:spPr>
+          <a:xfrm>
+            <a:off x="658368" y="1143000"/>
+            <a:ext cx="10789920" cy="411480"/>
+          </a:xfrm>
+          <a:prstGeom prst="rect">
+            <a:avLst/>
+          </a:prstGeom>
+          <a:noFill/>
+        </p:spPr>
+        <p:txBody>
+          <a:bodyPr wrap="none">
+            <a:spAutoFit/>
+          </a:bodyPr>
+          <a:lstStyle/>
+          <a:p>
+            <a:pPr>
+              <a:defRPr sz="1400">
+                <a:solidFill>
+                  <a:srgbClr val="566373"/>
+                </a:solidFill>
+              </a:defRPr>
+            </a:pPr>
+            <a:r>
+              <a:t>Capstone summary</a:t>
+            </a:r>
+          </a:p>
+        </p:txBody>
+      </p:sp>
+      <p:sp>
+        <p:nvSpPr>
+          <p:cNvPr id="6" name="TextBox 5"/>
+          <p:cNvSpPr txBox="1"/>
+          <p:nvPr/>
+        </p:nvSpPr>
+        <p:spPr>
+          <a:xfrm>
+            <a:off x="822960" y="1645920"/>
+            <a:ext cx="10424160" cy="4389120"/>
+          </a:xfrm>
+          <a:prstGeom prst="rect">
+            <a:avLst/>
+          </a:prstGeom>
+          <a:noFill/>
+        </p:spPr>
+        <p:txBody>
+          <a:bodyPr wrap="square">
+            <a:spAutoFit/>
+          </a:bodyPr>
+          <a:lstStyle/>
+          <a:p>
+            <a:pPr>
+              <a:spcAft>
+                <a:spcPts val="1000"/>
+              </a:spcAft>
+              <a:defRPr sz="1900">
+                <a:solidFill>
+                  <a:srgbClr val="1C2536"/>
+                </a:solidFill>
+              </a:defRPr>
+            </a:pPr>
+            <a:r>
+              <a:t>SysGuard successfully demonstrates a modular Linux C++ application for system health monitoring.</a:t>
+            </a:r>
+          </a:p>
+          <a:p>
+            <a:pPr>
+              <a:spcAft>
+                <a:spcPts val="1000"/>
+              </a:spcAft>
+              <a:defRPr sz="1900">
+                <a:solidFill>
+                  <a:srgbClr val="1C2536"/>
+                </a:solidFill>
+              </a:defRPr>
+            </a:pPr>
+            <a:r>
+              <a:t>The project integrates Linux interfaces, process concepts, resource monitoring, system programming and Git/GitHub workflow.</a:t>
+            </a:r>
+          </a:p>
+          <a:p>
+            <a:pPr>
+              <a:spcAft>
+                <a:spcPts val="1000"/>
+              </a:spcAft>
+              <a:defRPr sz="1900">
+                <a:solidFill>
+                  <a:srgbClr val="1C2536"/>
+                </a:solidFill>
+              </a:defRPr>
+            </a:pPr>
+            <a:r>
+              <a:t>The character-driver source demonstrates the kernel-space portion, with the WSL kernel-header limitation documented transparently.</a:t>
+            </a:r>
+          </a:p>
+          <a:p>
+            <a:pPr>
+              <a:spcAft>
+                <a:spcPts val="1000"/>
+              </a:spcAft>
+              <a:defRPr sz="1900">
+                <a:solidFill>
+                  <a:srgbClr val="1C2536"/>
+                </a:solidFill>
+              </a:defRPr>
+            </a:pPr>
+            <a:r>
+              <a:t>The application is functional, tested and ready for a short live demonstration.</a:t>
+            </a:r>
+          </a:p>
+        </p:txBody>
+      </p:sp>
+      <p:sp>
+        <p:nvSpPr>
+          <p:cNvPr id="7" name="TextBox 6"/>
+          <p:cNvSpPr txBox="1"/>
+          <p:nvPr/>
+        </p:nvSpPr>
+        <p:spPr>
+          <a:xfrm>
+            <a:off x="640080" y="6492240"/>
+            <a:ext cx="10972800" cy="228600"/>
+          </a:xfrm>
+          <a:prstGeom prst="rect">
+            <a:avLst/>
+          </a:prstGeom>
+          <a:noFill/>
+        </p:spPr>
+        <p:txBody>
+          <a:bodyPr wrap="none">
+            <a:spAutoFit/>
+          </a:bodyPr>
+          <a:lstStyle/>
+          <a:p>
+            <a:pPr>
+              <a:defRPr sz="900">
+                <a:solidFill>
+                  <a:srgbClr val="566373"/>
+                </a:solidFill>
+              </a:defRPr>
+            </a:pPr>
+            <a:r>
+              <a:t>SysGuard • Linux System Health Monitor                               13</a:t>
             </a:r>
           </a:p>
         </p:txBody>
@@ -3801,19 +5411,119 @@
       <p:grpSpPr/>
       <p:sp>
         <p:nvSpPr>
-          <p:cNvPr id="2" name="Title 1"/>
-          <p:cNvSpPr>
-            <a:spLocks noGrp="1"/>
-          </p:cNvSpPr>
-          <p:nvPr>
-            <p:ph type="title"/>
-          </p:nvPr>
-        </p:nvSpPr>
-        <p:spPr/>
-        <p:txBody>
-          <a:bodyPr/>
-          <a:lstStyle/>
-          <a:p>
+          <p:cNvPr id="2" name="Rectangle 1"/>
+          <p:cNvSpPr/>
+          <p:nvPr/>
+        </p:nvSpPr>
+        <p:spPr>
+          <a:xfrm>
+            <a:off x="0" y="0"/>
+            <a:ext cx="12191695" cy="6858000"/>
+          </a:xfrm>
+          <a:prstGeom prst="rect">
+            <a:avLst/>
+          </a:prstGeom>
+          <a:solidFill>
+            <a:srgbClr val="FFFFFF"/>
+          </a:solidFill>
+          <a:ln>
+            <a:noFill/>
+          </a:ln>
+        </p:spPr>
+        <p:style>
+          <a:lnRef idx="1">
+            <a:schemeClr val="accent1"/>
+          </a:lnRef>
+          <a:fillRef idx="3">
+            <a:schemeClr val="accent1"/>
+          </a:fillRef>
+          <a:effectRef idx="2">
+            <a:schemeClr val="accent1"/>
+          </a:effectRef>
+          <a:fontRef idx="minor">
+            <a:schemeClr val="lt1"/>
+          </a:fontRef>
+        </p:style>
+        <p:txBody>
+          <a:bodyPr rtlCol="0" anchor="ctr"/>
+          <a:lstStyle/>
+          <a:p>
+            <a:pPr algn="ctr"/>
+          </a:p>
+        </p:txBody>
+      </p:sp>
+      <p:sp>
+        <p:nvSpPr>
+          <p:cNvPr id="3" name="Rectangle 2"/>
+          <p:cNvSpPr/>
+          <p:nvPr/>
+        </p:nvSpPr>
+        <p:spPr>
+          <a:xfrm>
+            <a:off x="0" y="0"/>
+            <a:ext cx="12191695" cy="201168"/>
+          </a:xfrm>
+          <a:prstGeom prst="rect">
+            <a:avLst/>
+          </a:prstGeom>
+          <a:solidFill>
+            <a:srgbClr val="2A69BA"/>
+          </a:solidFill>
+          <a:ln>
+            <a:noFill/>
+          </a:ln>
+        </p:spPr>
+        <p:style>
+          <a:lnRef idx="1">
+            <a:schemeClr val="accent1"/>
+          </a:lnRef>
+          <a:fillRef idx="3">
+            <a:schemeClr val="accent1"/>
+          </a:fillRef>
+          <a:effectRef idx="2">
+            <a:schemeClr val="accent1"/>
+          </a:effectRef>
+          <a:fontRef idx="minor">
+            <a:schemeClr val="lt1"/>
+          </a:fontRef>
+        </p:style>
+        <p:txBody>
+          <a:bodyPr rtlCol="0" anchor="ctr"/>
+          <a:lstStyle/>
+          <a:p>
+            <a:pPr algn="ctr"/>
+          </a:p>
+        </p:txBody>
+      </p:sp>
+      <p:sp>
+        <p:nvSpPr>
+          <p:cNvPr id="4" name="TextBox 3"/>
+          <p:cNvSpPr txBox="1"/>
+          <p:nvPr/>
+        </p:nvSpPr>
+        <p:spPr>
+          <a:xfrm>
+            <a:off x="640080" y="502920"/>
+            <a:ext cx="10881360" cy="640080"/>
+          </a:xfrm>
+          <a:prstGeom prst="rect">
+            <a:avLst/>
+          </a:prstGeom>
+          <a:noFill/>
+        </p:spPr>
+        <p:txBody>
+          <a:bodyPr wrap="none">
+            <a:spAutoFit/>
+          </a:bodyPr>
+          <a:lstStyle/>
+          <a:p>
+            <a:pPr>
+              <a:defRPr sz="2800" b="1">
+                <a:solidFill>
+                  <a:srgbClr val="0E1827"/>
+                </a:solidFill>
+              </a:defRPr>
+            </a:pPr>
             <a:r>
               <a:t>1. Problem Statement</a:t>
             </a:r>
@@ -3822,40 +5532,153 @@
       </p:sp>
       <p:sp>
         <p:nvSpPr>
-          <p:cNvPr id="3" name="Content Placeholder 2"/>
-          <p:cNvSpPr>
-            <a:spLocks noGrp="1"/>
-          </p:cNvSpPr>
-          <p:nvPr>
-            <p:ph idx="1"/>
-          </p:nvPr>
-        </p:nvSpPr>
-        <p:spPr/>
-        <p:txBody>
-          <a:bodyPr/>
-          <a:lstStyle/>
-          <a:p>
-            <a:pPr>
-              <a:defRPr sz="2000"/>
-            </a:pPr>
-            <a:r>
-              <a:t>Linux provides CPU, memory, disk and process information through different commands and interfaces.</a:t>
-            </a:r>
-          </a:p>
-          <a:p>
-            <a:pPr>
-              <a:defRPr sz="2000"/>
-            </a:pPr>
-            <a:r>
-              <a:t>SysGuard combines these monitoring functions into one lightweight command-line application.</a:t>
-            </a:r>
-          </a:p>
-          <a:p>
-            <a:pPr>
-              <a:defRPr sz="2000"/>
-            </a:pPr>
-            <a:r>
-              <a:t>Goal: provide a simple system-health view while demonstrating Linux system programming.</a:t>
+          <p:cNvPr id="5" name="TextBox 4"/>
+          <p:cNvSpPr txBox="1"/>
+          <p:nvPr/>
+        </p:nvSpPr>
+        <p:spPr>
+          <a:xfrm>
+            <a:off x="658368" y="1143000"/>
+            <a:ext cx="10789920" cy="411480"/>
+          </a:xfrm>
+          <a:prstGeom prst="rect">
+            <a:avLst/>
+          </a:prstGeom>
+          <a:noFill/>
+        </p:spPr>
+        <p:txBody>
+          <a:bodyPr wrap="none">
+            <a:spAutoFit/>
+          </a:bodyPr>
+          <a:lstStyle/>
+          <a:p>
+            <a:pPr>
+              <a:defRPr sz="1400">
+                <a:solidFill>
+                  <a:srgbClr val="566373"/>
+                </a:solidFill>
+              </a:defRPr>
+            </a:pPr>
+            <a:r>
+              <a:t>Why SysGuard?</a:t>
+            </a:r>
+          </a:p>
+        </p:txBody>
+      </p:sp>
+      <p:sp>
+        <p:nvSpPr>
+          <p:cNvPr id="6" name="TextBox 5"/>
+          <p:cNvSpPr txBox="1"/>
+          <p:nvPr/>
+        </p:nvSpPr>
+        <p:spPr>
+          <a:xfrm>
+            <a:off x="822960" y="1645920"/>
+            <a:ext cx="10424160" cy="4389120"/>
+          </a:xfrm>
+          <a:prstGeom prst="rect">
+            <a:avLst/>
+          </a:prstGeom>
+          <a:noFill/>
+        </p:spPr>
+        <p:txBody>
+          <a:bodyPr wrap="square">
+            <a:spAutoFit/>
+          </a:bodyPr>
+          <a:lstStyle/>
+          <a:p>
+            <a:pPr>
+              <a:spcAft>
+                <a:spcPts val="1000"/>
+              </a:spcAft>
+              <a:defRPr sz="2000">
+                <a:solidFill>
+                  <a:srgbClr val="1C2536"/>
+                </a:solidFill>
+              </a:defRPr>
+            </a:pPr>
+            <a:r>
+              <a:t>Linux exposes system information through many separate tools and interfaces.</a:t>
+            </a:r>
+          </a:p>
+          <a:p>
+            <a:pPr>
+              <a:spcAft>
+                <a:spcPts val="1000"/>
+              </a:spcAft>
+              <a:defRPr sz="2000">
+                <a:solidFill>
+                  <a:srgbClr val="1C2536"/>
+                </a:solidFill>
+              </a:defRPr>
+            </a:pPr>
+            <a:r>
+              <a:t>A user often needs multiple commands to understand CPU, memory, storage and process activity.</a:t>
+            </a:r>
+          </a:p>
+          <a:p>
+            <a:pPr>
+              <a:spcAft>
+                <a:spcPts val="1000"/>
+              </a:spcAft>
+              <a:defRPr sz="2000">
+                <a:solidFill>
+                  <a:srgbClr val="1C2536"/>
+                </a:solidFill>
+              </a:defRPr>
+            </a:pPr>
+            <a:r>
+              <a:t>SysGuard combines these capabilities into one lightweight C++ command-line tool.</a:t>
+            </a:r>
+          </a:p>
+          <a:p>
+            <a:pPr>
+              <a:spcAft>
+                <a:spcPts val="1000"/>
+              </a:spcAft>
+              <a:defRPr sz="2000">
+                <a:solidFill>
+                  <a:srgbClr val="1C2536"/>
+                </a:solidFill>
+              </a:defRPr>
+            </a:pPr>
+            <a:r>
+              <a:t>The project also demonstrates how software interacts with Linux system interfaces and the kernel.</a:t>
+            </a:r>
+          </a:p>
+        </p:txBody>
+      </p:sp>
+      <p:sp>
+        <p:nvSpPr>
+          <p:cNvPr id="7" name="TextBox 6"/>
+          <p:cNvSpPr txBox="1"/>
+          <p:nvPr/>
+        </p:nvSpPr>
+        <p:spPr>
+          <a:xfrm>
+            <a:off x="640080" y="6492240"/>
+            <a:ext cx="10972800" cy="228600"/>
+          </a:xfrm>
+          <a:prstGeom prst="rect">
+            <a:avLst/>
+          </a:prstGeom>
+          <a:noFill/>
+        </p:spPr>
+        <p:txBody>
+          <a:bodyPr wrap="none">
+            <a:spAutoFit/>
+          </a:bodyPr>
+          <a:lstStyle/>
+          <a:p>
+            <a:pPr>
+              <a:defRPr sz="900">
+                <a:solidFill>
+                  <a:srgbClr val="566373"/>
+                </a:solidFill>
+              </a:defRPr>
+            </a:pPr>
+            <a:r>
+              <a:t>SysGuard • Linux System Health Monitor                               2</a:t>
             </a:r>
           </a:p>
         </p:txBody>
@@ -3880,19 +5703,119 @@
       <p:grpSpPr/>
       <p:sp>
         <p:nvSpPr>
-          <p:cNvPr id="2" name="Title 1"/>
-          <p:cNvSpPr>
-            <a:spLocks noGrp="1"/>
-          </p:cNvSpPr>
-          <p:nvPr>
-            <p:ph type="title"/>
-          </p:nvPr>
-        </p:nvSpPr>
-        <p:spPr/>
-        <p:txBody>
-          <a:bodyPr/>
-          <a:lstStyle/>
-          <a:p>
+          <p:cNvPr id="2" name="Rectangle 1"/>
+          <p:cNvSpPr/>
+          <p:nvPr/>
+        </p:nvSpPr>
+        <p:spPr>
+          <a:xfrm>
+            <a:off x="0" y="0"/>
+            <a:ext cx="12191695" cy="6858000"/>
+          </a:xfrm>
+          <a:prstGeom prst="rect">
+            <a:avLst/>
+          </a:prstGeom>
+          <a:solidFill>
+            <a:srgbClr val="FFFFFF"/>
+          </a:solidFill>
+          <a:ln>
+            <a:noFill/>
+          </a:ln>
+        </p:spPr>
+        <p:style>
+          <a:lnRef idx="1">
+            <a:schemeClr val="accent1"/>
+          </a:lnRef>
+          <a:fillRef idx="3">
+            <a:schemeClr val="accent1"/>
+          </a:fillRef>
+          <a:effectRef idx="2">
+            <a:schemeClr val="accent1"/>
+          </a:effectRef>
+          <a:fontRef idx="minor">
+            <a:schemeClr val="lt1"/>
+          </a:fontRef>
+        </p:style>
+        <p:txBody>
+          <a:bodyPr rtlCol="0" anchor="ctr"/>
+          <a:lstStyle/>
+          <a:p>
+            <a:pPr algn="ctr"/>
+          </a:p>
+        </p:txBody>
+      </p:sp>
+      <p:sp>
+        <p:nvSpPr>
+          <p:cNvPr id="3" name="Rectangle 2"/>
+          <p:cNvSpPr/>
+          <p:nvPr/>
+        </p:nvSpPr>
+        <p:spPr>
+          <a:xfrm>
+            <a:off x="0" y="0"/>
+            <a:ext cx="12191695" cy="201168"/>
+          </a:xfrm>
+          <a:prstGeom prst="rect">
+            <a:avLst/>
+          </a:prstGeom>
+          <a:solidFill>
+            <a:srgbClr val="2A69BA"/>
+          </a:solidFill>
+          <a:ln>
+            <a:noFill/>
+          </a:ln>
+        </p:spPr>
+        <p:style>
+          <a:lnRef idx="1">
+            <a:schemeClr val="accent1"/>
+          </a:lnRef>
+          <a:fillRef idx="3">
+            <a:schemeClr val="accent1"/>
+          </a:fillRef>
+          <a:effectRef idx="2">
+            <a:schemeClr val="accent1"/>
+          </a:effectRef>
+          <a:fontRef idx="minor">
+            <a:schemeClr val="lt1"/>
+          </a:fontRef>
+        </p:style>
+        <p:txBody>
+          <a:bodyPr rtlCol="0" anchor="ctr"/>
+          <a:lstStyle/>
+          <a:p>
+            <a:pPr algn="ctr"/>
+          </a:p>
+        </p:txBody>
+      </p:sp>
+      <p:sp>
+        <p:nvSpPr>
+          <p:cNvPr id="4" name="TextBox 3"/>
+          <p:cNvSpPr txBox="1"/>
+          <p:nvPr/>
+        </p:nvSpPr>
+        <p:spPr>
+          <a:xfrm>
+            <a:off x="640080" y="502920"/>
+            <a:ext cx="10881360" cy="640080"/>
+          </a:xfrm>
+          <a:prstGeom prst="rect">
+            <a:avLst/>
+          </a:prstGeom>
+          <a:noFill/>
+        </p:spPr>
+        <p:txBody>
+          <a:bodyPr wrap="none">
+            <a:spAutoFit/>
+          </a:bodyPr>
+          <a:lstStyle/>
+          <a:p>
+            <a:pPr>
+              <a:defRPr sz="2800" b="1">
+                <a:solidFill>
+                  <a:srgbClr val="0E1827"/>
+                </a:solidFill>
+              </a:defRPr>
+            </a:pPr>
             <a:r>
               <a:t>2. Objectives</a:t>
             </a:r>
@@ -3901,72 +5824,183 @@
       </p:sp>
       <p:sp>
         <p:nvSpPr>
-          <p:cNvPr id="3" name="Content Placeholder 2"/>
-          <p:cNvSpPr>
-            <a:spLocks noGrp="1"/>
-          </p:cNvSpPr>
-          <p:nvPr>
-            <p:ph idx="1"/>
-          </p:nvPr>
-        </p:nvSpPr>
-        <p:spPr/>
-        <p:txBody>
-          <a:bodyPr/>
-          <a:lstStyle/>
-          <a:p>
-            <a:pPr>
-              <a:defRPr sz="2000"/>
-            </a:pPr>
-            <a:r>
-              <a:t>• Monitor CPU, memory and storage</a:t>
-            </a:r>
-          </a:p>
-          <a:p>
-            <a:pPr>
-              <a:defRPr sz="2000"/>
-            </a:pPr>
-            <a:r>
-              <a:t>• Display Linux/kernel/system information</a:t>
-            </a:r>
-          </a:p>
-          <a:p>
-            <a:pPr>
-              <a:defRPr sz="2000"/>
-            </a:pPr>
-            <a:r>
-              <a:t>• Enumerate and search processes</a:t>
-            </a:r>
-          </a:p>
-          <a:p>
-            <a:pPr>
-              <a:defRPr sz="2000"/>
-            </a:pPr>
-            <a:r>
-              <a:t>• Provide controlled process termination</a:t>
-            </a:r>
-          </a:p>
-          <a:p>
-            <a:pPr>
-              <a:defRPr sz="2000"/>
-            </a:pPr>
-            <a:r>
-              <a:t>• Calculate overall system health</a:t>
-            </a:r>
-          </a:p>
-          <a:p>
-            <a:pPr>
-              <a:defRPr sz="2000"/>
-            </a:pPr>
-            <a:r>
-              <a:t>• Log monitoring snapshots</a:t>
-            </a:r>
-          </a:p>
-          <a:p>
-            <a:pPr>
-              <a:defRPr sz="2000"/>
-            </a:pPr>
-            <a:r>
-              <a:t>• Demonstrate user-space / kernel-space communication</a:t>
+          <p:cNvPr id="5" name="TextBox 4"/>
+          <p:cNvSpPr txBox="1"/>
+          <p:nvPr/>
+        </p:nvSpPr>
+        <p:spPr>
+          <a:xfrm>
+            <a:off x="658368" y="1143000"/>
+            <a:ext cx="10789920" cy="411480"/>
+          </a:xfrm>
+          <a:prstGeom prst="rect">
+            <a:avLst/>
+          </a:prstGeom>
+          <a:noFill/>
+        </p:spPr>
+        <p:txBody>
+          <a:bodyPr wrap="none">
+            <a:spAutoFit/>
+          </a:bodyPr>
+          <a:lstStyle/>
+          <a:p>
+            <a:pPr>
+              <a:defRPr sz="1400">
+                <a:solidFill>
+                  <a:srgbClr val="566373"/>
+                </a:solidFill>
+              </a:defRPr>
+            </a:pPr>
+            <a:r>
+              <a:t>Project goals</a:t>
+            </a:r>
+          </a:p>
+        </p:txBody>
+      </p:sp>
+      <p:sp>
+        <p:nvSpPr>
+          <p:cNvPr id="6" name="TextBox 5"/>
+          <p:cNvSpPr txBox="1"/>
+          <p:nvPr/>
+        </p:nvSpPr>
+        <p:spPr>
+          <a:xfrm>
+            <a:off x="822960" y="1645920"/>
+            <a:ext cx="10424160" cy="4389120"/>
+          </a:xfrm>
+          <a:prstGeom prst="rect">
+            <a:avLst/>
+          </a:prstGeom>
+          <a:noFill/>
+        </p:spPr>
+        <p:txBody>
+          <a:bodyPr wrap="square">
+            <a:spAutoFit/>
+          </a:bodyPr>
+          <a:lstStyle/>
+          <a:p>
+            <a:pPr>
+              <a:spcAft>
+                <a:spcPts val="1000"/>
+              </a:spcAft>
+              <a:defRPr sz="2000">
+                <a:solidFill>
+                  <a:srgbClr val="1C2536"/>
+                </a:solidFill>
+              </a:defRPr>
+            </a:pPr>
+            <a:r>
+              <a:t>Monitor CPU, memory, disk and process activity.</a:t>
+            </a:r>
+          </a:p>
+          <a:p>
+            <a:pPr>
+              <a:spcAft>
+                <a:spcPts val="1000"/>
+              </a:spcAft>
+              <a:defRPr sz="2000">
+                <a:solidFill>
+                  <a:srgbClr val="1C2536"/>
+                </a:solidFill>
+              </a:defRPr>
+            </a:pPr>
+            <a:r>
+              <a:t>Display Linux and computer-architecture related information.</a:t>
+            </a:r>
+          </a:p>
+          <a:p>
+            <a:pPr>
+              <a:spcAft>
+                <a:spcPts val="1000"/>
+              </a:spcAft>
+              <a:defRPr sz="2000">
+                <a:solidFill>
+                  <a:srgbClr val="1C2536"/>
+                </a:solidFill>
+              </a:defRPr>
+            </a:pPr>
+            <a:r>
+              <a:t>Provide process search and controlled termination.</a:t>
+            </a:r>
+          </a:p>
+          <a:p>
+            <a:pPr>
+              <a:spcAft>
+                <a:spcPts val="1000"/>
+              </a:spcAft>
+              <a:defRPr sz="2000">
+                <a:solidFill>
+                  <a:srgbClr val="1C2536"/>
+                </a:solidFill>
+              </a:defRPr>
+            </a:pPr>
+            <a:r>
+              <a:t>Calculate overall system health and log snapshots.</a:t>
+            </a:r>
+          </a:p>
+          <a:p>
+            <a:pPr>
+              <a:spcAft>
+                <a:spcPts val="1000"/>
+              </a:spcAft>
+              <a:defRPr sz="2000">
+                <a:solidFill>
+                  <a:srgbClr val="1C2536"/>
+                </a:solidFill>
+              </a:defRPr>
+            </a:pPr>
+            <a:r>
+              <a:t>Demonstrate user-space/kernel-space and character-device concepts.</a:t>
+            </a:r>
+          </a:p>
+          <a:p>
+            <a:pPr>
+              <a:spcAft>
+                <a:spcPts val="1000"/>
+              </a:spcAft>
+              <a:defRPr sz="2000">
+                <a:solidFill>
+                  <a:srgbClr val="1C2536"/>
+                </a:solidFill>
+              </a:defRPr>
+            </a:pPr>
+            <a:r>
+              <a:t>Maintain a professional GitHub project structure and documentation.</a:t>
+            </a:r>
+          </a:p>
+        </p:txBody>
+      </p:sp>
+      <p:sp>
+        <p:nvSpPr>
+          <p:cNvPr id="7" name="TextBox 6"/>
+          <p:cNvSpPr txBox="1"/>
+          <p:nvPr/>
+        </p:nvSpPr>
+        <p:spPr>
+          <a:xfrm>
+            <a:off x="640080" y="6492240"/>
+            <a:ext cx="10972800" cy="228600"/>
+          </a:xfrm>
+          <a:prstGeom prst="rect">
+            <a:avLst/>
+          </a:prstGeom>
+          <a:noFill/>
+        </p:spPr>
+        <p:txBody>
+          <a:bodyPr wrap="none">
+            <a:spAutoFit/>
+          </a:bodyPr>
+          <a:lstStyle/>
+          <a:p>
+            <a:pPr>
+              <a:defRPr sz="900">
+                <a:solidFill>
+                  <a:srgbClr val="566373"/>
+                </a:solidFill>
+              </a:defRPr>
+            </a:pPr>
+            <a:r>
+              <a:t>SysGuard • Linux System Health Monitor                               3</a:t>
             </a:r>
           </a:p>
         </p:txBody>
@@ -3991,19 +6025,119 @@
       <p:grpSpPr/>
       <p:sp>
         <p:nvSpPr>
-          <p:cNvPr id="2" name="Title 1"/>
-          <p:cNvSpPr>
-            <a:spLocks noGrp="1"/>
-          </p:cNvSpPr>
-          <p:nvPr>
-            <p:ph type="title"/>
-          </p:nvPr>
-        </p:nvSpPr>
-        <p:spPr/>
-        <p:txBody>
-          <a:bodyPr/>
-          <a:lstStyle/>
-          <a:p>
+          <p:cNvPr id="2" name="Rectangle 1"/>
+          <p:cNvSpPr/>
+          <p:nvPr/>
+        </p:nvSpPr>
+        <p:spPr>
+          <a:xfrm>
+            <a:off x="0" y="0"/>
+            <a:ext cx="12191695" cy="6858000"/>
+          </a:xfrm>
+          <a:prstGeom prst="rect">
+            <a:avLst/>
+          </a:prstGeom>
+          <a:solidFill>
+            <a:srgbClr val="FFFFFF"/>
+          </a:solidFill>
+          <a:ln>
+            <a:noFill/>
+          </a:ln>
+        </p:spPr>
+        <p:style>
+          <a:lnRef idx="1">
+            <a:schemeClr val="accent1"/>
+          </a:lnRef>
+          <a:fillRef idx="3">
+            <a:schemeClr val="accent1"/>
+          </a:fillRef>
+          <a:effectRef idx="2">
+            <a:schemeClr val="accent1"/>
+          </a:effectRef>
+          <a:fontRef idx="minor">
+            <a:schemeClr val="lt1"/>
+          </a:fontRef>
+        </p:style>
+        <p:txBody>
+          <a:bodyPr rtlCol="0" anchor="ctr"/>
+          <a:lstStyle/>
+          <a:p>
+            <a:pPr algn="ctr"/>
+          </a:p>
+        </p:txBody>
+      </p:sp>
+      <p:sp>
+        <p:nvSpPr>
+          <p:cNvPr id="3" name="Rectangle 2"/>
+          <p:cNvSpPr/>
+          <p:nvPr/>
+        </p:nvSpPr>
+        <p:spPr>
+          <a:xfrm>
+            <a:off x="0" y="0"/>
+            <a:ext cx="12191695" cy="201168"/>
+          </a:xfrm>
+          <a:prstGeom prst="rect">
+            <a:avLst/>
+          </a:prstGeom>
+          <a:solidFill>
+            <a:srgbClr val="2A69BA"/>
+          </a:solidFill>
+          <a:ln>
+            <a:noFill/>
+          </a:ln>
+        </p:spPr>
+        <p:style>
+          <a:lnRef idx="1">
+            <a:schemeClr val="accent1"/>
+          </a:lnRef>
+          <a:fillRef idx="3">
+            <a:schemeClr val="accent1"/>
+          </a:fillRef>
+          <a:effectRef idx="2">
+            <a:schemeClr val="accent1"/>
+          </a:effectRef>
+          <a:fontRef idx="minor">
+            <a:schemeClr val="lt1"/>
+          </a:fontRef>
+        </p:style>
+        <p:txBody>
+          <a:bodyPr rtlCol="0" anchor="ctr"/>
+          <a:lstStyle/>
+          <a:p>
+            <a:pPr algn="ctr"/>
+          </a:p>
+        </p:txBody>
+      </p:sp>
+      <p:sp>
+        <p:nvSpPr>
+          <p:cNvPr id="4" name="TextBox 3"/>
+          <p:cNvSpPr txBox="1"/>
+          <p:nvPr/>
+        </p:nvSpPr>
+        <p:spPr>
+          <a:xfrm>
+            <a:off x="640080" y="502920"/>
+            <a:ext cx="10881360" cy="640080"/>
+          </a:xfrm>
+          <a:prstGeom prst="rect">
+            <a:avLst/>
+          </a:prstGeom>
+          <a:noFill/>
+        </p:spPr>
+        <p:txBody>
+          <a:bodyPr wrap="none">
+            <a:spAutoFit/>
+          </a:bodyPr>
+          <a:lstStyle/>
+          <a:p>
+            <a:pPr>
+              <a:defRPr sz="2800" b="1">
+                <a:solidFill>
+                  <a:srgbClr val="0E1827"/>
+                </a:solidFill>
+              </a:defRPr>
+            </a:pPr>
             <a:r>
               <a:t>3. Technology Stack</a:t>
             </a:r>
@@ -4012,72 +6146,760 @@
       </p:sp>
       <p:sp>
         <p:nvSpPr>
-          <p:cNvPr id="3" name="Content Placeholder 2"/>
-          <p:cNvSpPr>
-            <a:spLocks noGrp="1"/>
-          </p:cNvSpPr>
-          <p:nvPr>
-            <p:ph idx="1"/>
-          </p:nvPr>
-        </p:nvSpPr>
-        <p:spPr/>
-        <p:txBody>
-          <a:bodyPr/>
-          <a:lstStyle/>
-          <a:p>
-            <a:pPr>
-              <a:defRPr sz="2000"/>
-            </a:pPr>
-            <a:r>
-              <a:t>Operating System: Linux</a:t>
-            </a:r>
-          </a:p>
-          <a:p>
-            <a:pPr>
-              <a:defRPr sz="2000"/>
-            </a:pPr>
-            <a:r>
-              <a:t>Application Language: C++17</a:t>
-            </a:r>
-          </a:p>
-          <a:p>
-            <a:pPr>
-              <a:defRPr sz="2000"/>
-            </a:pPr>
-            <a:r>
-              <a:t>Driver Language: C</a:t>
-            </a:r>
-          </a:p>
-          <a:p>
-            <a:pPr>
-              <a:defRPr sz="2000"/>
-            </a:pPr>
-            <a:r>
-              <a:t>Build System: GNU Make</a:t>
-            </a:r>
-          </a:p>
-          <a:p>
-            <a:pPr>
-              <a:defRPr sz="2000"/>
-            </a:pPr>
-            <a:r>
-              <a:t>System Interfaces: /proc, uname(), statvfs(), Linux signals</a:t>
-            </a:r>
-          </a:p>
-          <a:p>
-            <a:pPr>
-              <a:defRPr sz="2000"/>
-            </a:pPr>
-            <a:r>
-              <a:t>Version Control: Git + GitHub</a:t>
-            </a:r>
-          </a:p>
-          <a:p>
-            <a:pPr>
-              <a:defRPr sz="2000"/>
-            </a:pPr>
-            <a:r>
-              <a:t>Interface: Terminal / CLI</a:t>
+          <p:cNvPr id="5" name="TextBox 4"/>
+          <p:cNvSpPr txBox="1"/>
+          <p:nvPr/>
+        </p:nvSpPr>
+        <p:spPr>
+          <a:xfrm>
+            <a:off x="658368" y="1143000"/>
+            <a:ext cx="10789920" cy="411480"/>
+          </a:xfrm>
+          <a:prstGeom prst="rect">
+            <a:avLst/>
+          </a:prstGeom>
+          <a:noFill/>
+        </p:spPr>
+        <p:txBody>
+          <a:bodyPr wrap="none">
+            <a:spAutoFit/>
+          </a:bodyPr>
+          <a:lstStyle/>
+          <a:p>
+            <a:pPr>
+              <a:defRPr sz="1400">
+                <a:solidFill>
+                  <a:srgbClr val="566373"/>
+                </a:solidFill>
+              </a:defRPr>
+            </a:pPr>
+            <a:r>
+              <a:t>Implementation environment</a:t>
+            </a:r>
+          </a:p>
+        </p:txBody>
+      </p:sp>
+      <p:sp>
+        <p:nvSpPr>
+          <p:cNvPr id="6" name="Rounded Rectangle 5"/>
+          <p:cNvSpPr/>
+          <p:nvPr/>
+        </p:nvSpPr>
+        <p:spPr>
+          <a:xfrm>
+            <a:off x="822960" y="1554480"/>
+            <a:ext cx="3108960" cy="502920"/>
+          </a:xfrm>
+          <a:prstGeom prst="roundRect">
+            <a:avLst/>
+          </a:prstGeom>
+          <a:solidFill>
+            <a:srgbClr val="F1F5F9"/>
+          </a:solidFill>
+          <a:ln>
+            <a:solidFill>
+              <a:srgbClr val="DCE2EA"/>
+            </a:solidFill>
+          </a:ln>
+        </p:spPr>
+        <p:style>
+          <a:lnRef idx="1">
+            <a:schemeClr val="accent1"/>
+          </a:lnRef>
+          <a:fillRef idx="3">
+            <a:schemeClr val="accent1"/>
+          </a:fillRef>
+          <a:effectRef idx="2">
+            <a:schemeClr val="accent1"/>
+          </a:effectRef>
+          <a:fontRef idx="minor">
+            <a:schemeClr val="lt1"/>
+          </a:fontRef>
+        </p:style>
+        <p:txBody>
+          <a:bodyPr rtlCol="0" anchor="ctr"/>
+          <a:lstStyle/>
+          <a:p>
+            <a:pPr algn="ctr"/>
+          </a:p>
+        </p:txBody>
+      </p:sp>
+      <p:sp>
+        <p:nvSpPr>
+          <p:cNvPr id="7" name="TextBox 6"/>
+          <p:cNvSpPr txBox="1"/>
+          <p:nvPr/>
+        </p:nvSpPr>
+        <p:spPr>
+          <a:xfrm>
+            <a:off x="1005840" y="1627632"/>
+            <a:ext cx="2743200" cy="365760"/>
+          </a:xfrm>
+          <a:prstGeom prst="rect">
+            <a:avLst/>
+          </a:prstGeom>
+          <a:noFill/>
+        </p:spPr>
+        <p:txBody>
+          <a:bodyPr wrap="none">
+            <a:spAutoFit/>
+          </a:bodyPr>
+          <a:lstStyle/>
+          <a:p>
+            <a:pPr>
+              <a:defRPr sz="1600" b="1">
+                <a:solidFill>
+                  <a:srgbClr val="0E1827"/>
+                </a:solidFill>
+              </a:defRPr>
+            </a:pPr>
+            <a:r>
+              <a:t>Operating System</a:t>
+            </a:r>
+          </a:p>
+        </p:txBody>
+      </p:sp>
+      <p:sp>
+        <p:nvSpPr>
+          <p:cNvPr id="8" name="TextBox 7"/>
+          <p:cNvSpPr txBox="1"/>
+          <p:nvPr/>
+        </p:nvSpPr>
+        <p:spPr>
+          <a:xfrm>
+            <a:off x="4251960" y="1627632"/>
+            <a:ext cx="6675120" cy="365760"/>
+          </a:xfrm>
+          <a:prstGeom prst="rect">
+            <a:avLst/>
+          </a:prstGeom>
+          <a:noFill/>
+        </p:spPr>
+        <p:txBody>
+          <a:bodyPr wrap="none">
+            <a:spAutoFit/>
+          </a:bodyPr>
+          <a:lstStyle/>
+          <a:p>
+            <a:pPr>
+              <a:defRPr sz="1600">
+                <a:solidFill>
+                  <a:srgbClr val="1C2536"/>
+                </a:solidFill>
+              </a:defRPr>
+            </a:pPr>
+            <a:r>
+              <a:t>Ubuntu Linux / WSL2</a:t>
+            </a:r>
+          </a:p>
+        </p:txBody>
+      </p:sp>
+      <p:sp>
+        <p:nvSpPr>
+          <p:cNvPr id="9" name="Rounded Rectangle 8"/>
+          <p:cNvSpPr/>
+          <p:nvPr/>
+        </p:nvSpPr>
+        <p:spPr>
+          <a:xfrm>
+            <a:off x="822960" y="2267712"/>
+            <a:ext cx="3108960" cy="502920"/>
+          </a:xfrm>
+          <a:prstGeom prst="roundRect">
+            <a:avLst/>
+          </a:prstGeom>
+          <a:solidFill>
+            <a:srgbClr val="F1F5F9"/>
+          </a:solidFill>
+          <a:ln>
+            <a:solidFill>
+              <a:srgbClr val="DCE2EA"/>
+            </a:solidFill>
+          </a:ln>
+        </p:spPr>
+        <p:style>
+          <a:lnRef idx="1">
+            <a:schemeClr val="accent1"/>
+          </a:lnRef>
+          <a:fillRef idx="3">
+            <a:schemeClr val="accent1"/>
+          </a:fillRef>
+          <a:effectRef idx="2">
+            <a:schemeClr val="accent1"/>
+          </a:effectRef>
+          <a:fontRef idx="minor">
+            <a:schemeClr val="lt1"/>
+          </a:fontRef>
+        </p:style>
+        <p:txBody>
+          <a:bodyPr rtlCol="0" anchor="ctr"/>
+          <a:lstStyle/>
+          <a:p>
+            <a:pPr algn="ctr"/>
+          </a:p>
+        </p:txBody>
+      </p:sp>
+      <p:sp>
+        <p:nvSpPr>
+          <p:cNvPr id="10" name="TextBox 9"/>
+          <p:cNvSpPr txBox="1"/>
+          <p:nvPr/>
+        </p:nvSpPr>
+        <p:spPr>
+          <a:xfrm>
+            <a:off x="1005840" y="2340864"/>
+            <a:ext cx="2743200" cy="365760"/>
+          </a:xfrm>
+          <a:prstGeom prst="rect">
+            <a:avLst/>
+          </a:prstGeom>
+          <a:noFill/>
+        </p:spPr>
+        <p:txBody>
+          <a:bodyPr wrap="none">
+            <a:spAutoFit/>
+          </a:bodyPr>
+          <a:lstStyle/>
+          <a:p>
+            <a:pPr>
+              <a:defRPr sz="1600" b="1">
+                <a:solidFill>
+                  <a:srgbClr val="0E1827"/>
+                </a:solidFill>
+              </a:defRPr>
+            </a:pPr>
+            <a:r>
+              <a:t>Application</a:t>
+            </a:r>
+          </a:p>
+        </p:txBody>
+      </p:sp>
+      <p:sp>
+        <p:nvSpPr>
+          <p:cNvPr id="11" name="TextBox 10"/>
+          <p:cNvSpPr txBox="1"/>
+          <p:nvPr/>
+        </p:nvSpPr>
+        <p:spPr>
+          <a:xfrm>
+            <a:off x="4251960" y="2340864"/>
+            <a:ext cx="6675120" cy="365760"/>
+          </a:xfrm>
+          <a:prstGeom prst="rect">
+            <a:avLst/>
+          </a:prstGeom>
+          <a:noFill/>
+        </p:spPr>
+        <p:txBody>
+          <a:bodyPr wrap="none">
+            <a:spAutoFit/>
+          </a:bodyPr>
+          <a:lstStyle/>
+          <a:p>
+            <a:pPr>
+              <a:defRPr sz="1600">
+                <a:solidFill>
+                  <a:srgbClr val="1C2536"/>
+                </a:solidFill>
+              </a:defRPr>
+            </a:pPr>
+            <a:r>
+              <a:t>C++17</a:t>
+            </a:r>
+          </a:p>
+        </p:txBody>
+      </p:sp>
+      <p:sp>
+        <p:nvSpPr>
+          <p:cNvPr id="12" name="Rounded Rectangle 11"/>
+          <p:cNvSpPr/>
+          <p:nvPr/>
+        </p:nvSpPr>
+        <p:spPr>
+          <a:xfrm>
+            <a:off x="822960" y="2980944"/>
+            <a:ext cx="3108960" cy="502920"/>
+          </a:xfrm>
+          <a:prstGeom prst="roundRect">
+            <a:avLst/>
+          </a:prstGeom>
+          <a:solidFill>
+            <a:srgbClr val="F1F5F9"/>
+          </a:solidFill>
+          <a:ln>
+            <a:solidFill>
+              <a:srgbClr val="DCE2EA"/>
+            </a:solidFill>
+          </a:ln>
+        </p:spPr>
+        <p:style>
+          <a:lnRef idx="1">
+            <a:schemeClr val="accent1"/>
+          </a:lnRef>
+          <a:fillRef idx="3">
+            <a:schemeClr val="accent1"/>
+          </a:fillRef>
+          <a:effectRef idx="2">
+            <a:schemeClr val="accent1"/>
+          </a:effectRef>
+          <a:fontRef idx="minor">
+            <a:schemeClr val="lt1"/>
+          </a:fontRef>
+        </p:style>
+        <p:txBody>
+          <a:bodyPr rtlCol="0" anchor="ctr"/>
+          <a:lstStyle/>
+          <a:p>
+            <a:pPr algn="ctr"/>
+          </a:p>
+        </p:txBody>
+      </p:sp>
+      <p:sp>
+        <p:nvSpPr>
+          <p:cNvPr id="13" name="TextBox 12"/>
+          <p:cNvSpPr txBox="1"/>
+          <p:nvPr/>
+        </p:nvSpPr>
+        <p:spPr>
+          <a:xfrm>
+            <a:off x="1005840" y="3054096"/>
+            <a:ext cx="2743200" cy="365760"/>
+          </a:xfrm>
+          <a:prstGeom prst="rect">
+            <a:avLst/>
+          </a:prstGeom>
+          <a:noFill/>
+        </p:spPr>
+        <p:txBody>
+          <a:bodyPr wrap="none">
+            <a:spAutoFit/>
+          </a:bodyPr>
+          <a:lstStyle/>
+          <a:p>
+            <a:pPr>
+              <a:defRPr sz="1600" b="1">
+                <a:solidFill>
+                  <a:srgbClr val="0E1827"/>
+                </a:solidFill>
+              </a:defRPr>
+            </a:pPr>
+            <a:r>
+              <a:t>Driver Source</a:t>
+            </a:r>
+          </a:p>
+        </p:txBody>
+      </p:sp>
+      <p:sp>
+        <p:nvSpPr>
+          <p:cNvPr id="14" name="TextBox 13"/>
+          <p:cNvSpPr txBox="1"/>
+          <p:nvPr/>
+        </p:nvSpPr>
+        <p:spPr>
+          <a:xfrm>
+            <a:off x="4251960" y="3054096"/>
+            <a:ext cx="6675120" cy="365760"/>
+          </a:xfrm>
+          <a:prstGeom prst="rect">
+            <a:avLst/>
+          </a:prstGeom>
+          <a:noFill/>
+        </p:spPr>
+        <p:txBody>
+          <a:bodyPr wrap="none">
+            <a:spAutoFit/>
+          </a:bodyPr>
+          <a:lstStyle/>
+          <a:p>
+            <a:pPr>
+              <a:defRPr sz="1600">
+                <a:solidFill>
+                  <a:srgbClr val="1C2536"/>
+                </a:solidFill>
+              </a:defRPr>
+            </a:pPr>
+            <a:r>
+              <a:t>C / Linux kernel APIs</a:t>
+            </a:r>
+          </a:p>
+        </p:txBody>
+      </p:sp>
+      <p:sp>
+        <p:nvSpPr>
+          <p:cNvPr id="15" name="Rounded Rectangle 14"/>
+          <p:cNvSpPr/>
+          <p:nvPr/>
+        </p:nvSpPr>
+        <p:spPr>
+          <a:xfrm>
+            <a:off x="822960" y="3694176"/>
+            <a:ext cx="3108960" cy="502920"/>
+          </a:xfrm>
+          <a:prstGeom prst="roundRect">
+            <a:avLst/>
+          </a:prstGeom>
+          <a:solidFill>
+            <a:srgbClr val="F1F5F9"/>
+          </a:solidFill>
+          <a:ln>
+            <a:solidFill>
+              <a:srgbClr val="DCE2EA"/>
+            </a:solidFill>
+          </a:ln>
+        </p:spPr>
+        <p:style>
+          <a:lnRef idx="1">
+            <a:schemeClr val="accent1"/>
+          </a:lnRef>
+          <a:fillRef idx="3">
+            <a:schemeClr val="accent1"/>
+          </a:fillRef>
+          <a:effectRef idx="2">
+            <a:schemeClr val="accent1"/>
+          </a:effectRef>
+          <a:fontRef idx="minor">
+            <a:schemeClr val="lt1"/>
+          </a:fontRef>
+        </p:style>
+        <p:txBody>
+          <a:bodyPr rtlCol="0" anchor="ctr"/>
+          <a:lstStyle/>
+          <a:p>
+            <a:pPr algn="ctr"/>
+          </a:p>
+        </p:txBody>
+      </p:sp>
+      <p:sp>
+        <p:nvSpPr>
+          <p:cNvPr id="16" name="TextBox 15"/>
+          <p:cNvSpPr txBox="1"/>
+          <p:nvPr/>
+        </p:nvSpPr>
+        <p:spPr>
+          <a:xfrm>
+            <a:off x="1005840" y="3767328"/>
+            <a:ext cx="2743200" cy="365760"/>
+          </a:xfrm>
+          <a:prstGeom prst="rect">
+            <a:avLst/>
+          </a:prstGeom>
+          <a:noFill/>
+        </p:spPr>
+        <p:txBody>
+          <a:bodyPr wrap="none">
+            <a:spAutoFit/>
+          </a:bodyPr>
+          <a:lstStyle/>
+          <a:p>
+            <a:pPr>
+              <a:defRPr sz="1600" b="1">
+                <a:solidFill>
+                  <a:srgbClr val="0E1827"/>
+                </a:solidFill>
+              </a:defRPr>
+            </a:pPr>
+            <a:r>
+              <a:t>Build</a:t>
+            </a:r>
+          </a:p>
+        </p:txBody>
+      </p:sp>
+      <p:sp>
+        <p:nvSpPr>
+          <p:cNvPr id="17" name="TextBox 16"/>
+          <p:cNvSpPr txBox="1"/>
+          <p:nvPr/>
+        </p:nvSpPr>
+        <p:spPr>
+          <a:xfrm>
+            <a:off x="4251960" y="3767328"/>
+            <a:ext cx="6675120" cy="365760"/>
+          </a:xfrm>
+          <a:prstGeom prst="rect">
+            <a:avLst/>
+          </a:prstGeom>
+          <a:noFill/>
+        </p:spPr>
+        <p:txBody>
+          <a:bodyPr wrap="none">
+            <a:spAutoFit/>
+          </a:bodyPr>
+          <a:lstStyle/>
+          <a:p>
+            <a:pPr>
+              <a:defRPr sz="1600">
+                <a:solidFill>
+                  <a:srgbClr val="1C2536"/>
+                </a:solidFill>
+              </a:defRPr>
+            </a:pPr>
+            <a:r>
+              <a:t>GNU Make + g++</a:t>
+            </a:r>
+          </a:p>
+        </p:txBody>
+      </p:sp>
+      <p:sp>
+        <p:nvSpPr>
+          <p:cNvPr id="18" name="Rounded Rectangle 17"/>
+          <p:cNvSpPr/>
+          <p:nvPr/>
+        </p:nvSpPr>
+        <p:spPr>
+          <a:xfrm>
+            <a:off x="822960" y="4407408"/>
+            <a:ext cx="3108960" cy="502920"/>
+          </a:xfrm>
+          <a:prstGeom prst="roundRect">
+            <a:avLst/>
+          </a:prstGeom>
+          <a:solidFill>
+            <a:srgbClr val="F1F5F9"/>
+          </a:solidFill>
+          <a:ln>
+            <a:solidFill>
+              <a:srgbClr val="DCE2EA"/>
+            </a:solidFill>
+          </a:ln>
+        </p:spPr>
+        <p:style>
+          <a:lnRef idx="1">
+            <a:schemeClr val="accent1"/>
+          </a:lnRef>
+          <a:fillRef idx="3">
+            <a:schemeClr val="accent1"/>
+          </a:fillRef>
+          <a:effectRef idx="2">
+            <a:schemeClr val="accent1"/>
+          </a:effectRef>
+          <a:fontRef idx="minor">
+            <a:schemeClr val="lt1"/>
+          </a:fontRef>
+        </p:style>
+        <p:txBody>
+          <a:bodyPr rtlCol="0" anchor="ctr"/>
+          <a:lstStyle/>
+          <a:p>
+            <a:pPr algn="ctr"/>
+          </a:p>
+        </p:txBody>
+      </p:sp>
+      <p:sp>
+        <p:nvSpPr>
+          <p:cNvPr id="19" name="TextBox 18"/>
+          <p:cNvSpPr txBox="1"/>
+          <p:nvPr/>
+        </p:nvSpPr>
+        <p:spPr>
+          <a:xfrm>
+            <a:off x="1005840" y="4480560"/>
+            <a:ext cx="2743200" cy="365760"/>
+          </a:xfrm>
+          <a:prstGeom prst="rect">
+            <a:avLst/>
+          </a:prstGeom>
+          <a:noFill/>
+        </p:spPr>
+        <p:txBody>
+          <a:bodyPr wrap="none">
+            <a:spAutoFit/>
+          </a:bodyPr>
+          <a:lstStyle/>
+          <a:p>
+            <a:pPr>
+              <a:defRPr sz="1600" b="1">
+                <a:solidFill>
+                  <a:srgbClr val="0E1827"/>
+                </a:solidFill>
+              </a:defRPr>
+            </a:pPr>
+            <a:r>
+              <a:t>System Interfaces</a:t>
+            </a:r>
+          </a:p>
+        </p:txBody>
+      </p:sp>
+      <p:sp>
+        <p:nvSpPr>
+          <p:cNvPr id="20" name="TextBox 19"/>
+          <p:cNvSpPr txBox="1"/>
+          <p:nvPr/>
+        </p:nvSpPr>
+        <p:spPr>
+          <a:xfrm>
+            <a:off x="4251960" y="4480560"/>
+            <a:ext cx="6675120" cy="365760"/>
+          </a:xfrm>
+          <a:prstGeom prst="rect">
+            <a:avLst/>
+          </a:prstGeom>
+          <a:noFill/>
+        </p:spPr>
+        <p:txBody>
+          <a:bodyPr wrap="none">
+            <a:spAutoFit/>
+          </a:bodyPr>
+          <a:lstStyle/>
+          <a:p>
+            <a:pPr>
+              <a:defRPr sz="1600">
+                <a:solidFill>
+                  <a:srgbClr val="1C2536"/>
+                </a:solidFill>
+              </a:defRPr>
+            </a:pPr>
+            <a:r>
+              <a:t>/proc, uname(), statvfs(), Linux signals</a:t>
+            </a:r>
+          </a:p>
+        </p:txBody>
+      </p:sp>
+      <p:sp>
+        <p:nvSpPr>
+          <p:cNvPr id="21" name="Rounded Rectangle 20"/>
+          <p:cNvSpPr/>
+          <p:nvPr/>
+        </p:nvSpPr>
+        <p:spPr>
+          <a:xfrm>
+            <a:off x="822960" y="5120640"/>
+            <a:ext cx="3108960" cy="502920"/>
+          </a:xfrm>
+          <a:prstGeom prst="roundRect">
+            <a:avLst/>
+          </a:prstGeom>
+          <a:solidFill>
+            <a:srgbClr val="F1F5F9"/>
+          </a:solidFill>
+          <a:ln>
+            <a:solidFill>
+              <a:srgbClr val="DCE2EA"/>
+            </a:solidFill>
+          </a:ln>
+        </p:spPr>
+        <p:style>
+          <a:lnRef idx="1">
+            <a:schemeClr val="accent1"/>
+          </a:lnRef>
+          <a:fillRef idx="3">
+            <a:schemeClr val="accent1"/>
+          </a:fillRef>
+          <a:effectRef idx="2">
+            <a:schemeClr val="accent1"/>
+          </a:effectRef>
+          <a:fontRef idx="minor">
+            <a:schemeClr val="lt1"/>
+          </a:fontRef>
+        </p:style>
+        <p:txBody>
+          <a:bodyPr rtlCol="0" anchor="ctr"/>
+          <a:lstStyle/>
+          <a:p>
+            <a:pPr algn="ctr"/>
+          </a:p>
+        </p:txBody>
+      </p:sp>
+      <p:sp>
+        <p:nvSpPr>
+          <p:cNvPr id="22" name="TextBox 21"/>
+          <p:cNvSpPr txBox="1"/>
+          <p:nvPr/>
+        </p:nvSpPr>
+        <p:spPr>
+          <a:xfrm>
+            <a:off x="1005840" y="5193792"/>
+            <a:ext cx="2743200" cy="365760"/>
+          </a:xfrm>
+          <a:prstGeom prst="rect">
+            <a:avLst/>
+          </a:prstGeom>
+          <a:noFill/>
+        </p:spPr>
+        <p:txBody>
+          <a:bodyPr wrap="none">
+            <a:spAutoFit/>
+          </a:bodyPr>
+          <a:lstStyle/>
+          <a:p>
+            <a:pPr>
+              <a:defRPr sz="1600" b="1">
+                <a:solidFill>
+                  <a:srgbClr val="0E1827"/>
+                </a:solidFill>
+              </a:defRPr>
+            </a:pPr>
+            <a:r>
+              <a:t>Version Control</a:t>
+            </a:r>
+          </a:p>
+        </p:txBody>
+      </p:sp>
+      <p:sp>
+        <p:nvSpPr>
+          <p:cNvPr id="23" name="TextBox 22"/>
+          <p:cNvSpPr txBox="1"/>
+          <p:nvPr/>
+        </p:nvSpPr>
+        <p:spPr>
+          <a:xfrm>
+            <a:off x="4251960" y="5193792"/>
+            <a:ext cx="6675120" cy="365760"/>
+          </a:xfrm>
+          <a:prstGeom prst="rect">
+            <a:avLst/>
+          </a:prstGeom>
+          <a:noFill/>
+        </p:spPr>
+        <p:txBody>
+          <a:bodyPr wrap="none">
+            <a:spAutoFit/>
+          </a:bodyPr>
+          <a:lstStyle/>
+          <a:p>
+            <a:pPr>
+              <a:defRPr sz="1600">
+                <a:solidFill>
+                  <a:srgbClr val="1C2536"/>
+                </a:solidFill>
+              </a:defRPr>
+            </a:pPr>
+            <a:r>
+              <a:t>Git + GitHub</a:t>
+            </a:r>
+          </a:p>
+        </p:txBody>
+      </p:sp>
+      <p:sp>
+        <p:nvSpPr>
+          <p:cNvPr id="24" name="TextBox 23"/>
+          <p:cNvSpPr txBox="1"/>
+          <p:nvPr/>
+        </p:nvSpPr>
+        <p:spPr>
+          <a:xfrm>
+            <a:off x="640080" y="6492240"/>
+            <a:ext cx="10972800" cy="228600"/>
+          </a:xfrm>
+          <a:prstGeom prst="rect">
+            <a:avLst/>
+          </a:prstGeom>
+          <a:noFill/>
+        </p:spPr>
+        <p:txBody>
+          <a:bodyPr wrap="none">
+            <a:spAutoFit/>
+          </a:bodyPr>
+          <a:lstStyle/>
+          <a:p>
+            <a:pPr>
+              <a:defRPr sz="900">
+                <a:solidFill>
+                  <a:srgbClr val="566373"/>
+                </a:solidFill>
+              </a:defRPr>
+            </a:pPr>
+            <a:r>
+              <a:t>SysGuard • Linux System Health Monitor                               4</a:t>
             </a:r>
           </a:p>
         </p:txBody>
@@ -4102,19 +6924,119 @@
       <p:grpSpPr/>
       <p:sp>
         <p:nvSpPr>
-          <p:cNvPr id="2" name="Title 1"/>
-          <p:cNvSpPr>
-            <a:spLocks noGrp="1"/>
-          </p:cNvSpPr>
-          <p:nvPr>
-            <p:ph type="title"/>
-          </p:nvPr>
-        </p:nvSpPr>
-        <p:spPr/>
-        <p:txBody>
-          <a:bodyPr/>
-          <a:lstStyle/>
-          <a:p>
+          <p:cNvPr id="2" name="Rectangle 1"/>
+          <p:cNvSpPr/>
+          <p:nvPr/>
+        </p:nvSpPr>
+        <p:spPr>
+          <a:xfrm>
+            <a:off x="0" y="0"/>
+            <a:ext cx="12191695" cy="6858000"/>
+          </a:xfrm>
+          <a:prstGeom prst="rect">
+            <a:avLst/>
+          </a:prstGeom>
+          <a:solidFill>
+            <a:srgbClr val="FFFFFF"/>
+          </a:solidFill>
+          <a:ln>
+            <a:noFill/>
+          </a:ln>
+        </p:spPr>
+        <p:style>
+          <a:lnRef idx="1">
+            <a:schemeClr val="accent1"/>
+          </a:lnRef>
+          <a:fillRef idx="3">
+            <a:schemeClr val="accent1"/>
+          </a:fillRef>
+          <a:effectRef idx="2">
+            <a:schemeClr val="accent1"/>
+          </a:effectRef>
+          <a:fontRef idx="minor">
+            <a:schemeClr val="lt1"/>
+          </a:fontRef>
+        </p:style>
+        <p:txBody>
+          <a:bodyPr rtlCol="0" anchor="ctr"/>
+          <a:lstStyle/>
+          <a:p>
+            <a:pPr algn="ctr"/>
+          </a:p>
+        </p:txBody>
+      </p:sp>
+      <p:sp>
+        <p:nvSpPr>
+          <p:cNvPr id="3" name="Rectangle 2"/>
+          <p:cNvSpPr/>
+          <p:nvPr/>
+        </p:nvSpPr>
+        <p:spPr>
+          <a:xfrm>
+            <a:off x="0" y="0"/>
+            <a:ext cx="12191695" cy="201168"/>
+          </a:xfrm>
+          <a:prstGeom prst="rect">
+            <a:avLst/>
+          </a:prstGeom>
+          <a:solidFill>
+            <a:srgbClr val="2A69BA"/>
+          </a:solidFill>
+          <a:ln>
+            <a:noFill/>
+          </a:ln>
+        </p:spPr>
+        <p:style>
+          <a:lnRef idx="1">
+            <a:schemeClr val="accent1"/>
+          </a:lnRef>
+          <a:fillRef idx="3">
+            <a:schemeClr val="accent1"/>
+          </a:fillRef>
+          <a:effectRef idx="2">
+            <a:schemeClr val="accent1"/>
+          </a:effectRef>
+          <a:fontRef idx="minor">
+            <a:schemeClr val="lt1"/>
+          </a:fontRef>
+        </p:style>
+        <p:txBody>
+          <a:bodyPr rtlCol="0" anchor="ctr"/>
+          <a:lstStyle/>
+          <a:p>
+            <a:pPr algn="ctr"/>
+          </a:p>
+        </p:txBody>
+      </p:sp>
+      <p:sp>
+        <p:nvSpPr>
+          <p:cNvPr id="4" name="TextBox 3"/>
+          <p:cNvSpPr txBox="1"/>
+          <p:nvPr/>
+        </p:nvSpPr>
+        <p:spPr>
+          <a:xfrm>
+            <a:off x="640080" y="502920"/>
+            <a:ext cx="10881360" cy="640080"/>
+          </a:xfrm>
+          <a:prstGeom prst="rect">
+            <a:avLst/>
+          </a:prstGeom>
+          <a:noFill/>
+        </p:spPr>
+        <p:txBody>
+          <a:bodyPr wrap="none">
+            <a:spAutoFit/>
+          </a:bodyPr>
+          <a:lstStyle/>
+          <a:p>
+            <a:pPr>
+              <a:defRPr sz="2800" b="1">
+                <a:solidFill>
+                  <a:srgbClr val="0E1827"/>
+                </a:solidFill>
+              </a:defRPr>
+            </a:pPr>
             <a:r>
               <a:t>4. System Architecture</a:t>
             </a:r>
@@ -4123,125 +7045,425 @@
       </p:sp>
       <p:sp>
         <p:nvSpPr>
-          <p:cNvPr id="3" name="Content Placeholder 2"/>
-          <p:cNvSpPr>
-            <a:spLocks noGrp="1"/>
-          </p:cNvSpPr>
-          <p:nvPr>
-            <p:ph idx="1"/>
-          </p:nvPr>
-        </p:nvSpPr>
-        <p:spPr/>
-        <p:txBody>
-          <a:bodyPr/>
-          <a:lstStyle/>
-          <a:p>
-            <a:pPr>
-              <a:defRPr sz="2000"/>
-            </a:pPr>
-            <a:r>
-              <a:t>User</a:t>
-            </a:r>
-          </a:p>
-          <a:p>
-            <a:pPr>
-              <a:defRPr sz="2000"/>
-            </a:pPr>
-            <a:r>
-              <a:t>  ↓</a:t>
-            </a:r>
-          </a:p>
-          <a:p>
-            <a:pPr>
-              <a:defRPr sz="2000"/>
-            </a:pPr>
-            <a:r>
-              <a:t>SysGuard C++ Application</a:t>
-            </a:r>
-          </a:p>
-          <a:p>
-            <a:pPr>
-              <a:defRPr sz="2000"/>
-            </a:pPr>
-            <a:r>
-              <a:t>  ↓</a:t>
-            </a:r>
-          </a:p>
-          <a:p>
-            <a:pPr>
-              <a:defRPr sz="2000"/>
-            </a:pPr>
-            <a:r>
-              <a:t>Linux system interfaces</a:t>
-            </a:r>
-          </a:p>
-          <a:p>
-            <a:pPr>
-              <a:defRPr sz="2000"/>
-            </a:pPr>
-            <a:r>
-              <a:t>  ↓</a:t>
-            </a:r>
-          </a:p>
-          <a:p>
-            <a:pPr>
-              <a:defRPr sz="2000"/>
-            </a:pPr>
-            <a:r>
-              <a:t>/proc  •  /sys  •  statvfs()</a:t>
-            </a:r>
-          </a:p>
-          <a:p>
-            <a:pPr>
-              <a:defRPr sz="2000"/>
-            </a:pPr>
-            <a:r>
-              <a:t>  ↓</a:t>
-            </a:r>
-          </a:p>
-          <a:p>
-            <a:pPr>
-              <a:defRPr sz="2000"/>
-            </a:pPr>
-            <a:r>
-              <a:t>Linux Kernel</a:t>
-            </a:r>
-          </a:p>
-          <a:p>
-            <a:pPr>
-              <a:defRPr sz="2000"/>
-            </a:pPr>
-            <a:r>
-              <a:t>  ↓</a:t>
-            </a:r>
-          </a:p>
-          <a:p>
-            <a:pPr>
-              <a:defRPr sz="2000"/>
-            </a:pPr>
-            <a:r>
-              <a:t>CPU • Memory • Processes • Filesystem</a:t>
-            </a:r>
-          </a:p>
-          <a:p>
-            <a:pPr>
-              <a:defRPr sz="2000"/>
-            </a:pPr>
-          </a:p>
-          <a:p>
-            <a:pPr>
-              <a:defRPr sz="2000"/>
-            </a:pPr>
-            <a:r>
-              <a:t>Optional driver path:</a:t>
-            </a:r>
-          </a:p>
-          <a:p>
-            <a:pPr>
-              <a:defRPr sz="2000"/>
-            </a:pPr>
-            <a:r>
-              <a:t>C++ → /dev/sysguard → Character Driver → Kernel</a:t>
+          <p:cNvPr id="5" name="TextBox 4"/>
+          <p:cNvSpPr txBox="1"/>
+          <p:nvPr/>
+        </p:nvSpPr>
+        <p:spPr>
+          <a:xfrm>
+            <a:off x="658368" y="1143000"/>
+            <a:ext cx="10789920" cy="411480"/>
+          </a:xfrm>
+          <a:prstGeom prst="rect">
+            <a:avLst/>
+          </a:prstGeom>
+          <a:noFill/>
+        </p:spPr>
+        <p:txBody>
+          <a:bodyPr wrap="none">
+            <a:spAutoFit/>
+          </a:bodyPr>
+          <a:lstStyle/>
+          <a:p>
+            <a:pPr>
+              <a:defRPr sz="1400">
+                <a:solidFill>
+                  <a:srgbClr val="566373"/>
+                </a:solidFill>
+              </a:defRPr>
+            </a:pPr>
+            <a:r>
+              <a:t>Application → Linux interfaces → kernel</a:t>
+            </a:r>
+          </a:p>
+        </p:txBody>
+      </p:sp>
+      <p:sp>
+        <p:nvSpPr>
+          <p:cNvPr id="6" name="Rounded Rectangle 5"/>
+          <p:cNvSpPr/>
+          <p:nvPr/>
+        </p:nvSpPr>
+        <p:spPr>
+          <a:xfrm>
+            <a:off x="1920240" y="1417320"/>
+            <a:ext cx="8229600" cy="777240"/>
+          </a:xfrm>
+          <a:prstGeom prst="roundRect">
+            <a:avLst/>
+          </a:prstGeom>
+          <a:solidFill>
+            <a:srgbClr val="2A69BA"/>
+          </a:solidFill>
+          <a:ln>
+            <a:noFill/>
+          </a:ln>
+        </p:spPr>
+        <p:style>
+          <a:lnRef idx="1">
+            <a:schemeClr val="accent1"/>
+          </a:lnRef>
+          <a:fillRef idx="3">
+            <a:schemeClr val="accent1"/>
+          </a:fillRef>
+          <a:effectRef idx="2">
+            <a:schemeClr val="accent1"/>
+          </a:effectRef>
+          <a:fontRef idx="minor">
+            <a:schemeClr val="lt1"/>
+          </a:fontRef>
+        </p:style>
+        <p:txBody>
+          <a:bodyPr rtlCol="0" anchor="ctr"/>
+          <a:lstStyle/>
+          <a:p>
+            <a:pPr algn="ctr"/>
+          </a:p>
+        </p:txBody>
+      </p:sp>
+      <p:sp>
+        <p:nvSpPr>
+          <p:cNvPr id="7" name="TextBox 6"/>
+          <p:cNvSpPr txBox="1"/>
+          <p:nvPr/>
+        </p:nvSpPr>
+        <p:spPr>
+          <a:xfrm>
+            <a:off x="2148840" y="1527048"/>
+            <a:ext cx="7772400" cy="548640"/>
+          </a:xfrm>
+          <a:prstGeom prst="rect">
+            <a:avLst/>
+          </a:prstGeom>
+          <a:noFill/>
+        </p:spPr>
+        <p:txBody>
+          <a:bodyPr wrap="none">
+            <a:spAutoFit/>
+          </a:bodyPr>
+          <a:lstStyle/>
+          <a:p>
+            <a:pPr>
+              <a:defRPr sz="2000" b="1">
+                <a:solidFill>
+                  <a:srgbClr val="FFFFFF"/>
+                </a:solidFill>
+              </a:defRPr>
+            </a:pPr>
+            <a:r>
+              <a:t>SysGuard C++ CLI  |  User space</a:t>
+            </a:r>
+          </a:p>
+        </p:txBody>
+      </p:sp>
+      <p:sp>
+        <p:nvSpPr>
+          <p:cNvPr id="8" name="Down Arrow 7"/>
+          <p:cNvSpPr/>
+          <p:nvPr/>
+        </p:nvSpPr>
+        <p:spPr>
+          <a:xfrm>
+            <a:off x="5577840" y="2221992"/>
+            <a:ext cx="914400" cy="365760"/>
+          </a:xfrm>
+          <a:prstGeom prst="downArrow">
+            <a:avLst/>
+          </a:prstGeom>
+          <a:solidFill>
+            <a:srgbClr val="566373"/>
+          </a:solidFill>
+          <a:ln>
+            <a:noFill/>
+          </a:ln>
+        </p:spPr>
+        <p:style>
+          <a:lnRef idx="1">
+            <a:schemeClr val="accent1"/>
+          </a:lnRef>
+          <a:fillRef idx="3">
+            <a:schemeClr val="accent1"/>
+          </a:fillRef>
+          <a:effectRef idx="2">
+            <a:schemeClr val="accent1"/>
+          </a:effectRef>
+          <a:fontRef idx="minor">
+            <a:schemeClr val="lt1"/>
+          </a:fontRef>
+        </p:style>
+        <p:txBody>
+          <a:bodyPr rtlCol="0" anchor="ctr"/>
+          <a:lstStyle/>
+          <a:p>
+            <a:pPr algn="ctr"/>
+          </a:p>
+        </p:txBody>
+      </p:sp>
+      <p:sp>
+        <p:nvSpPr>
+          <p:cNvPr id="9" name="Rounded Rectangle 8"/>
+          <p:cNvSpPr/>
+          <p:nvPr/>
+        </p:nvSpPr>
+        <p:spPr>
+          <a:xfrm>
+            <a:off x="1920240" y="2560320"/>
+            <a:ext cx="8229600" cy="777240"/>
+          </a:xfrm>
+          <a:prstGeom prst="roundRect">
+            <a:avLst/>
+          </a:prstGeom>
+          <a:solidFill>
+            <a:srgbClr val="36B4BE"/>
+          </a:solidFill>
+          <a:ln>
+            <a:noFill/>
+          </a:ln>
+        </p:spPr>
+        <p:style>
+          <a:lnRef idx="1">
+            <a:schemeClr val="accent1"/>
+          </a:lnRef>
+          <a:fillRef idx="3">
+            <a:schemeClr val="accent1"/>
+          </a:fillRef>
+          <a:effectRef idx="2">
+            <a:schemeClr val="accent1"/>
+          </a:effectRef>
+          <a:fontRef idx="minor">
+            <a:schemeClr val="lt1"/>
+          </a:fontRef>
+        </p:style>
+        <p:txBody>
+          <a:bodyPr rtlCol="0" anchor="ctr"/>
+          <a:lstStyle/>
+          <a:p>
+            <a:pPr algn="ctr"/>
+          </a:p>
+        </p:txBody>
+      </p:sp>
+      <p:sp>
+        <p:nvSpPr>
+          <p:cNvPr id="10" name="TextBox 9"/>
+          <p:cNvSpPr txBox="1"/>
+          <p:nvPr/>
+        </p:nvSpPr>
+        <p:spPr>
+          <a:xfrm>
+            <a:off x="2148840" y="2670048"/>
+            <a:ext cx="7772400" cy="548640"/>
+          </a:xfrm>
+          <a:prstGeom prst="rect">
+            <a:avLst/>
+          </a:prstGeom>
+          <a:noFill/>
+        </p:spPr>
+        <p:txBody>
+          <a:bodyPr wrap="none">
+            <a:spAutoFit/>
+          </a:bodyPr>
+          <a:lstStyle/>
+          <a:p>
+            <a:pPr>
+              <a:defRPr sz="2000" b="1">
+                <a:solidFill>
+                  <a:srgbClr val="FFFFFF"/>
+                </a:solidFill>
+              </a:defRPr>
+            </a:pPr>
+            <a:r>
+              <a:t>Linux system interfaces  |  /proc • /sys • statvfs() • signals</a:t>
+            </a:r>
+          </a:p>
+        </p:txBody>
+      </p:sp>
+      <p:sp>
+        <p:nvSpPr>
+          <p:cNvPr id="11" name="Down Arrow 10"/>
+          <p:cNvSpPr/>
+          <p:nvPr/>
+        </p:nvSpPr>
+        <p:spPr>
+          <a:xfrm>
+            <a:off x="5577840" y="3364991"/>
+            <a:ext cx="914400" cy="365760"/>
+          </a:xfrm>
+          <a:prstGeom prst="downArrow">
+            <a:avLst/>
+          </a:prstGeom>
+          <a:solidFill>
+            <a:srgbClr val="566373"/>
+          </a:solidFill>
+          <a:ln>
+            <a:noFill/>
+          </a:ln>
+        </p:spPr>
+        <p:style>
+          <a:lnRef idx="1">
+            <a:schemeClr val="accent1"/>
+          </a:lnRef>
+          <a:fillRef idx="3">
+            <a:schemeClr val="accent1"/>
+          </a:fillRef>
+          <a:effectRef idx="2">
+            <a:schemeClr val="accent1"/>
+          </a:effectRef>
+          <a:fontRef idx="minor">
+            <a:schemeClr val="lt1"/>
+          </a:fontRef>
+        </p:style>
+        <p:txBody>
+          <a:bodyPr rtlCol="0" anchor="ctr"/>
+          <a:lstStyle/>
+          <a:p>
+            <a:pPr algn="ctr"/>
+          </a:p>
+        </p:txBody>
+      </p:sp>
+      <p:sp>
+        <p:nvSpPr>
+          <p:cNvPr id="12" name="Rounded Rectangle 11"/>
+          <p:cNvSpPr/>
+          <p:nvPr/>
+        </p:nvSpPr>
+        <p:spPr>
+          <a:xfrm>
+            <a:off x="1920240" y="3703320"/>
+            <a:ext cx="8229600" cy="777240"/>
+          </a:xfrm>
+          <a:prstGeom prst="roundRect">
+            <a:avLst/>
+          </a:prstGeom>
+          <a:solidFill>
+            <a:srgbClr val="0E1827"/>
+          </a:solidFill>
+          <a:ln>
+            <a:noFill/>
+          </a:ln>
+        </p:spPr>
+        <p:style>
+          <a:lnRef idx="1">
+            <a:schemeClr val="accent1"/>
+          </a:lnRef>
+          <a:fillRef idx="3">
+            <a:schemeClr val="accent1"/>
+          </a:fillRef>
+          <a:effectRef idx="2">
+            <a:schemeClr val="accent1"/>
+          </a:effectRef>
+          <a:fontRef idx="minor">
+            <a:schemeClr val="lt1"/>
+          </a:fontRef>
+        </p:style>
+        <p:txBody>
+          <a:bodyPr rtlCol="0" anchor="ctr"/>
+          <a:lstStyle/>
+          <a:p>
+            <a:pPr algn="ctr"/>
+          </a:p>
+        </p:txBody>
+      </p:sp>
+      <p:sp>
+        <p:nvSpPr>
+          <p:cNvPr id="13" name="TextBox 12"/>
+          <p:cNvSpPr txBox="1"/>
+          <p:nvPr/>
+        </p:nvSpPr>
+        <p:spPr>
+          <a:xfrm>
+            <a:off x="2148840" y="3813048"/>
+            <a:ext cx="7772400" cy="548640"/>
+          </a:xfrm>
+          <a:prstGeom prst="rect">
+            <a:avLst/>
+          </a:prstGeom>
+          <a:noFill/>
+        </p:spPr>
+        <p:txBody>
+          <a:bodyPr wrap="none">
+            <a:spAutoFit/>
+          </a:bodyPr>
+          <a:lstStyle/>
+          <a:p>
+            <a:pPr>
+              <a:defRPr sz="2000" b="1">
+                <a:solidFill>
+                  <a:srgbClr val="FFFFFF"/>
+                </a:solidFill>
+              </a:defRPr>
+            </a:pPr>
+            <a:r>
+              <a:t>Linux Kernel  |  Process manager • memory • filesystem • device layer</a:t>
+            </a:r>
+          </a:p>
+        </p:txBody>
+      </p:sp>
+      <p:sp>
+        <p:nvSpPr>
+          <p:cNvPr id="14" name="TextBox 13"/>
+          <p:cNvSpPr txBox="1"/>
+          <p:nvPr/>
+        </p:nvSpPr>
+        <p:spPr>
+          <a:xfrm>
+            <a:off x="1828800" y="5074920"/>
+            <a:ext cx="8412480" cy="731520"/>
+          </a:xfrm>
+          <a:prstGeom prst="rect">
+            <a:avLst/>
+          </a:prstGeom>
+          <a:noFill/>
+        </p:spPr>
+        <p:txBody>
+          <a:bodyPr wrap="none">
+            <a:spAutoFit/>
+          </a:bodyPr>
+          <a:lstStyle/>
+          <a:p>
+            <a:pPr algn="ctr">
+              <a:defRPr sz="1800">
+                <a:solidFill>
+                  <a:srgbClr val="1C2536"/>
+                </a:solidFill>
+              </a:defRPr>
+            </a:pPr>
+            <a:r>
+              <a:t>Optional driver path: SysGuard → /dev/sysguard → character driver → kernel</a:t>
+            </a:r>
+          </a:p>
+        </p:txBody>
+      </p:sp>
+      <p:sp>
+        <p:nvSpPr>
+          <p:cNvPr id="15" name="TextBox 14"/>
+          <p:cNvSpPr txBox="1"/>
+          <p:nvPr/>
+        </p:nvSpPr>
+        <p:spPr>
+          <a:xfrm>
+            <a:off x="640080" y="6492240"/>
+            <a:ext cx="10972800" cy="228600"/>
+          </a:xfrm>
+          <a:prstGeom prst="rect">
+            <a:avLst/>
+          </a:prstGeom>
+          <a:noFill/>
+        </p:spPr>
+        <p:txBody>
+          <a:bodyPr wrap="none">
+            <a:spAutoFit/>
+          </a:bodyPr>
+          <a:lstStyle/>
+          <a:p>
+            <a:pPr>
+              <a:defRPr sz="900">
+                <a:solidFill>
+                  <a:srgbClr val="566373"/>
+                </a:solidFill>
+              </a:defRPr>
+            </a:pPr>
+            <a:r>
+              <a:t>SysGuard • Linux System Health Monitor                               5</a:t>
             </a:r>
           </a:p>
         </p:txBody>
@@ -4266,19 +7488,119 @@
       <p:grpSpPr/>
       <p:sp>
         <p:nvSpPr>
-          <p:cNvPr id="2" name="Title 1"/>
-          <p:cNvSpPr>
-            <a:spLocks noGrp="1"/>
-          </p:cNvSpPr>
-          <p:nvPr>
-            <p:ph type="title"/>
-          </p:nvPr>
-        </p:nvSpPr>
-        <p:spPr/>
-        <p:txBody>
-          <a:bodyPr/>
-          <a:lstStyle/>
-          <a:p>
+          <p:cNvPr id="2" name="Rectangle 1"/>
+          <p:cNvSpPr/>
+          <p:nvPr/>
+        </p:nvSpPr>
+        <p:spPr>
+          <a:xfrm>
+            <a:off x="0" y="0"/>
+            <a:ext cx="12191695" cy="6858000"/>
+          </a:xfrm>
+          <a:prstGeom prst="rect">
+            <a:avLst/>
+          </a:prstGeom>
+          <a:solidFill>
+            <a:srgbClr val="FFFFFF"/>
+          </a:solidFill>
+          <a:ln>
+            <a:noFill/>
+          </a:ln>
+        </p:spPr>
+        <p:style>
+          <a:lnRef idx="1">
+            <a:schemeClr val="accent1"/>
+          </a:lnRef>
+          <a:fillRef idx="3">
+            <a:schemeClr val="accent1"/>
+          </a:fillRef>
+          <a:effectRef idx="2">
+            <a:schemeClr val="accent1"/>
+          </a:effectRef>
+          <a:fontRef idx="minor">
+            <a:schemeClr val="lt1"/>
+          </a:fontRef>
+        </p:style>
+        <p:txBody>
+          <a:bodyPr rtlCol="0" anchor="ctr"/>
+          <a:lstStyle/>
+          <a:p>
+            <a:pPr algn="ctr"/>
+          </a:p>
+        </p:txBody>
+      </p:sp>
+      <p:sp>
+        <p:nvSpPr>
+          <p:cNvPr id="3" name="Rectangle 2"/>
+          <p:cNvSpPr/>
+          <p:nvPr/>
+        </p:nvSpPr>
+        <p:spPr>
+          <a:xfrm>
+            <a:off x="0" y="0"/>
+            <a:ext cx="12191695" cy="201168"/>
+          </a:xfrm>
+          <a:prstGeom prst="rect">
+            <a:avLst/>
+          </a:prstGeom>
+          <a:solidFill>
+            <a:srgbClr val="2A69BA"/>
+          </a:solidFill>
+          <a:ln>
+            <a:noFill/>
+          </a:ln>
+        </p:spPr>
+        <p:style>
+          <a:lnRef idx="1">
+            <a:schemeClr val="accent1"/>
+          </a:lnRef>
+          <a:fillRef idx="3">
+            <a:schemeClr val="accent1"/>
+          </a:fillRef>
+          <a:effectRef idx="2">
+            <a:schemeClr val="accent1"/>
+          </a:effectRef>
+          <a:fontRef idx="minor">
+            <a:schemeClr val="lt1"/>
+          </a:fontRef>
+        </p:style>
+        <p:txBody>
+          <a:bodyPr rtlCol="0" anchor="ctr"/>
+          <a:lstStyle/>
+          <a:p>
+            <a:pPr algn="ctr"/>
+          </a:p>
+        </p:txBody>
+      </p:sp>
+      <p:sp>
+        <p:nvSpPr>
+          <p:cNvPr id="4" name="TextBox 3"/>
+          <p:cNvSpPr txBox="1"/>
+          <p:nvPr/>
+        </p:nvSpPr>
+        <p:spPr>
+          <a:xfrm>
+            <a:off x="640080" y="502920"/>
+            <a:ext cx="10881360" cy="640080"/>
+          </a:xfrm>
+          <a:prstGeom prst="rect">
+            <a:avLst/>
+          </a:prstGeom>
+          <a:noFill/>
+        </p:spPr>
+        <p:txBody>
+          <a:bodyPr wrap="none">
+            <a:spAutoFit/>
+          </a:bodyPr>
+          <a:lstStyle/>
+          <a:p>
+            <a:pPr>
+              <a:defRPr sz="2800" b="1">
+                <a:solidFill>
+                  <a:srgbClr val="0E1827"/>
+                </a:solidFill>
+              </a:defRPr>
+            </a:pPr>
             <a:r>
               <a:t>5. Major Modules</a:t>
             </a:r>
@@ -4287,80 +7609,630 @@
       </p:sp>
       <p:sp>
         <p:nvSpPr>
-          <p:cNvPr id="3" name="Content Placeholder 2"/>
-          <p:cNvSpPr>
-            <a:spLocks noGrp="1"/>
-          </p:cNvSpPr>
-          <p:nvPr>
-            <p:ph idx="1"/>
-          </p:nvPr>
-        </p:nvSpPr>
-        <p:spPr/>
-        <p:txBody>
-          <a:bodyPr/>
-          <a:lstStyle/>
-          <a:p>
-            <a:pPr>
-              <a:defRPr sz="2000"/>
-            </a:pPr>
-            <a:r>
-              <a:t>• System Information</a:t>
-            </a:r>
-          </a:p>
-          <a:p>
-            <a:pPr>
-              <a:defRPr sz="2000"/>
-            </a:pPr>
-            <a:r>
-              <a:t>• CPU Monitor</a:t>
-            </a:r>
-          </a:p>
-          <a:p>
-            <a:pPr>
-              <a:defRPr sz="2000"/>
-            </a:pPr>
-            <a:r>
-              <a:t>• Memory Monitor</a:t>
-            </a:r>
-          </a:p>
-          <a:p>
-            <a:pPr>
-              <a:defRPr sz="2000"/>
-            </a:pPr>
-            <a:r>
-              <a:t>• Disk Monitor</a:t>
-            </a:r>
-          </a:p>
-          <a:p>
-            <a:pPr>
-              <a:defRPr sz="2000"/>
-            </a:pPr>
-            <a:r>
-              <a:t>• Process Monitor</a:t>
-            </a:r>
-          </a:p>
-          <a:p>
-            <a:pPr>
-              <a:defRPr sz="2000"/>
-            </a:pPr>
-            <a:r>
-              <a:t>• Health Monitor</a:t>
-            </a:r>
-          </a:p>
-          <a:p>
-            <a:pPr>
-              <a:defRPr sz="2000"/>
-            </a:pPr>
-            <a:r>
-              <a:t>• Logger</a:t>
-            </a:r>
-          </a:p>
-          <a:p>
-            <a:pPr>
-              <a:defRPr sz="2000"/>
-            </a:pPr>
-            <a:r>
-              <a:t>• Linux Character Device Driver</a:t>
+          <p:cNvPr id="5" name="TextBox 4"/>
+          <p:cNvSpPr txBox="1"/>
+          <p:nvPr/>
+        </p:nvSpPr>
+        <p:spPr>
+          <a:xfrm>
+            <a:off x="658368" y="1143000"/>
+            <a:ext cx="10789920" cy="411480"/>
+          </a:xfrm>
+          <a:prstGeom prst="rect">
+            <a:avLst/>
+          </a:prstGeom>
+          <a:noFill/>
+        </p:spPr>
+        <p:txBody>
+          <a:bodyPr wrap="none">
+            <a:spAutoFit/>
+          </a:bodyPr>
+          <a:lstStyle/>
+          <a:p>
+            <a:pPr>
+              <a:defRPr sz="1400">
+                <a:solidFill>
+                  <a:srgbClr val="566373"/>
+                </a:solidFill>
+              </a:defRPr>
+            </a:pPr>
+            <a:r>
+              <a:t>Modular C++ design</a:t>
+            </a:r>
+          </a:p>
+        </p:txBody>
+      </p:sp>
+      <p:sp>
+        <p:nvSpPr>
+          <p:cNvPr id="6" name="Rounded Rectangle 5"/>
+          <p:cNvSpPr/>
+          <p:nvPr/>
+        </p:nvSpPr>
+        <p:spPr>
+          <a:xfrm>
+            <a:off x="914400" y="1508760"/>
+            <a:ext cx="4572000" cy="658368"/>
+          </a:xfrm>
+          <a:prstGeom prst="roundRect">
+            <a:avLst/>
+          </a:prstGeom>
+          <a:solidFill>
+            <a:srgbClr val="F1F5F9"/>
+          </a:solidFill>
+          <a:ln>
+            <a:solidFill>
+              <a:srgbClr val="D2DCE8"/>
+            </a:solidFill>
+          </a:ln>
+        </p:spPr>
+        <p:style>
+          <a:lnRef idx="1">
+            <a:schemeClr val="accent1"/>
+          </a:lnRef>
+          <a:fillRef idx="3">
+            <a:schemeClr val="accent1"/>
+          </a:fillRef>
+          <a:effectRef idx="2">
+            <a:schemeClr val="accent1"/>
+          </a:effectRef>
+          <a:fontRef idx="minor">
+            <a:schemeClr val="lt1"/>
+          </a:fontRef>
+        </p:style>
+        <p:txBody>
+          <a:bodyPr rtlCol="0" anchor="ctr"/>
+          <a:lstStyle/>
+          <a:p>
+            <a:pPr algn="ctr"/>
+          </a:p>
+        </p:txBody>
+      </p:sp>
+      <p:sp>
+        <p:nvSpPr>
+          <p:cNvPr id="7" name="TextBox 6"/>
+          <p:cNvSpPr txBox="1"/>
+          <p:nvPr/>
+        </p:nvSpPr>
+        <p:spPr>
+          <a:xfrm>
+            <a:off x="1097280" y="1618488"/>
+            <a:ext cx="4206240" cy="411480"/>
+          </a:xfrm>
+          <a:prstGeom prst="rect">
+            <a:avLst/>
+          </a:prstGeom>
+          <a:noFill/>
+        </p:spPr>
+        <p:txBody>
+          <a:bodyPr wrap="none">
+            <a:spAutoFit/>
+          </a:bodyPr>
+          <a:lstStyle/>
+          <a:p>
+            <a:pPr>
+              <a:defRPr sz="1800" b="1">
+                <a:solidFill>
+                  <a:srgbClr val="0E1827"/>
+                </a:solidFill>
+              </a:defRPr>
+            </a:pPr>
+            <a:r>
+              <a:t>SystemInfo</a:t>
+            </a:r>
+          </a:p>
+        </p:txBody>
+      </p:sp>
+      <p:sp>
+        <p:nvSpPr>
+          <p:cNvPr id="8" name="Rounded Rectangle 7"/>
+          <p:cNvSpPr/>
+          <p:nvPr/>
+        </p:nvSpPr>
+        <p:spPr>
+          <a:xfrm>
+            <a:off x="6217920" y="1508760"/>
+            <a:ext cx="4572000" cy="658368"/>
+          </a:xfrm>
+          <a:prstGeom prst="roundRect">
+            <a:avLst/>
+          </a:prstGeom>
+          <a:solidFill>
+            <a:srgbClr val="F1F5F9"/>
+          </a:solidFill>
+          <a:ln>
+            <a:solidFill>
+              <a:srgbClr val="D2DCE8"/>
+            </a:solidFill>
+          </a:ln>
+        </p:spPr>
+        <p:style>
+          <a:lnRef idx="1">
+            <a:schemeClr val="accent1"/>
+          </a:lnRef>
+          <a:fillRef idx="3">
+            <a:schemeClr val="accent1"/>
+          </a:fillRef>
+          <a:effectRef idx="2">
+            <a:schemeClr val="accent1"/>
+          </a:effectRef>
+          <a:fontRef idx="minor">
+            <a:schemeClr val="lt1"/>
+          </a:fontRef>
+        </p:style>
+        <p:txBody>
+          <a:bodyPr rtlCol="0" anchor="ctr"/>
+          <a:lstStyle/>
+          <a:p>
+            <a:pPr algn="ctr"/>
+          </a:p>
+        </p:txBody>
+      </p:sp>
+      <p:sp>
+        <p:nvSpPr>
+          <p:cNvPr id="9" name="TextBox 8"/>
+          <p:cNvSpPr txBox="1"/>
+          <p:nvPr/>
+        </p:nvSpPr>
+        <p:spPr>
+          <a:xfrm>
+            <a:off x="6400800" y="1618488"/>
+            <a:ext cx="4206240" cy="411480"/>
+          </a:xfrm>
+          <a:prstGeom prst="rect">
+            <a:avLst/>
+          </a:prstGeom>
+          <a:noFill/>
+        </p:spPr>
+        <p:txBody>
+          <a:bodyPr wrap="none">
+            <a:spAutoFit/>
+          </a:bodyPr>
+          <a:lstStyle/>
+          <a:p>
+            <a:pPr>
+              <a:defRPr sz="1800" b="1">
+                <a:solidFill>
+                  <a:srgbClr val="0E1827"/>
+                </a:solidFill>
+              </a:defRPr>
+            </a:pPr>
+            <a:r>
+              <a:t>CPUMonitor</a:t>
+            </a:r>
+          </a:p>
+        </p:txBody>
+      </p:sp>
+      <p:sp>
+        <p:nvSpPr>
+          <p:cNvPr id="10" name="Rounded Rectangle 9"/>
+          <p:cNvSpPr/>
+          <p:nvPr/>
+        </p:nvSpPr>
+        <p:spPr>
+          <a:xfrm>
+            <a:off x="914400" y="2514600"/>
+            <a:ext cx="4572000" cy="658368"/>
+          </a:xfrm>
+          <a:prstGeom prst="roundRect">
+            <a:avLst/>
+          </a:prstGeom>
+          <a:solidFill>
+            <a:srgbClr val="F1F5F9"/>
+          </a:solidFill>
+          <a:ln>
+            <a:solidFill>
+              <a:srgbClr val="D2DCE8"/>
+            </a:solidFill>
+          </a:ln>
+        </p:spPr>
+        <p:style>
+          <a:lnRef idx="1">
+            <a:schemeClr val="accent1"/>
+          </a:lnRef>
+          <a:fillRef idx="3">
+            <a:schemeClr val="accent1"/>
+          </a:fillRef>
+          <a:effectRef idx="2">
+            <a:schemeClr val="accent1"/>
+          </a:effectRef>
+          <a:fontRef idx="minor">
+            <a:schemeClr val="lt1"/>
+          </a:fontRef>
+        </p:style>
+        <p:txBody>
+          <a:bodyPr rtlCol="0" anchor="ctr"/>
+          <a:lstStyle/>
+          <a:p>
+            <a:pPr algn="ctr"/>
+          </a:p>
+        </p:txBody>
+      </p:sp>
+      <p:sp>
+        <p:nvSpPr>
+          <p:cNvPr id="11" name="TextBox 10"/>
+          <p:cNvSpPr txBox="1"/>
+          <p:nvPr/>
+        </p:nvSpPr>
+        <p:spPr>
+          <a:xfrm>
+            <a:off x="1097280" y="2624328"/>
+            <a:ext cx="4206240" cy="411480"/>
+          </a:xfrm>
+          <a:prstGeom prst="rect">
+            <a:avLst/>
+          </a:prstGeom>
+          <a:noFill/>
+        </p:spPr>
+        <p:txBody>
+          <a:bodyPr wrap="none">
+            <a:spAutoFit/>
+          </a:bodyPr>
+          <a:lstStyle/>
+          <a:p>
+            <a:pPr>
+              <a:defRPr sz="1800" b="1">
+                <a:solidFill>
+                  <a:srgbClr val="0E1827"/>
+                </a:solidFill>
+              </a:defRPr>
+            </a:pPr>
+            <a:r>
+              <a:t>MemoryMonitor</a:t>
+            </a:r>
+          </a:p>
+        </p:txBody>
+      </p:sp>
+      <p:sp>
+        <p:nvSpPr>
+          <p:cNvPr id="12" name="Rounded Rectangle 11"/>
+          <p:cNvSpPr/>
+          <p:nvPr/>
+        </p:nvSpPr>
+        <p:spPr>
+          <a:xfrm>
+            <a:off x="6217920" y="2514600"/>
+            <a:ext cx="4572000" cy="658368"/>
+          </a:xfrm>
+          <a:prstGeom prst="roundRect">
+            <a:avLst/>
+          </a:prstGeom>
+          <a:solidFill>
+            <a:srgbClr val="F1F5F9"/>
+          </a:solidFill>
+          <a:ln>
+            <a:solidFill>
+              <a:srgbClr val="D2DCE8"/>
+            </a:solidFill>
+          </a:ln>
+        </p:spPr>
+        <p:style>
+          <a:lnRef idx="1">
+            <a:schemeClr val="accent1"/>
+          </a:lnRef>
+          <a:fillRef idx="3">
+            <a:schemeClr val="accent1"/>
+          </a:fillRef>
+          <a:effectRef idx="2">
+            <a:schemeClr val="accent1"/>
+          </a:effectRef>
+          <a:fontRef idx="minor">
+            <a:schemeClr val="lt1"/>
+          </a:fontRef>
+        </p:style>
+        <p:txBody>
+          <a:bodyPr rtlCol="0" anchor="ctr"/>
+          <a:lstStyle/>
+          <a:p>
+            <a:pPr algn="ctr"/>
+          </a:p>
+        </p:txBody>
+      </p:sp>
+      <p:sp>
+        <p:nvSpPr>
+          <p:cNvPr id="13" name="TextBox 12"/>
+          <p:cNvSpPr txBox="1"/>
+          <p:nvPr/>
+        </p:nvSpPr>
+        <p:spPr>
+          <a:xfrm>
+            <a:off x="6400800" y="2624328"/>
+            <a:ext cx="4206240" cy="411480"/>
+          </a:xfrm>
+          <a:prstGeom prst="rect">
+            <a:avLst/>
+          </a:prstGeom>
+          <a:noFill/>
+        </p:spPr>
+        <p:txBody>
+          <a:bodyPr wrap="none">
+            <a:spAutoFit/>
+          </a:bodyPr>
+          <a:lstStyle/>
+          <a:p>
+            <a:pPr>
+              <a:defRPr sz="1800" b="1">
+                <a:solidFill>
+                  <a:srgbClr val="0E1827"/>
+                </a:solidFill>
+              </a:defRPr>
+            </a:pPr>
+            <a:r>
+              <a:t>DiskMonitor</a:t>
+            </a:r>
+          </a:p>
+        </p:txBody>
+      </p:sp>
+      <p:sp>
+        <p:nvSpPr>
+          <p:cNvPr id="14" name="Rounded Rectangle 13"/>
+          <p:cNvSpPr/>
+          <p:nvPr/>
+        </p:nvSpPr>
+        <p:spPr>
+          <a:xfrm>
+            <a:off x="914400" y="3520440"/>
+            <a:ext cx="4572000" cy="658368"/>
+          </a:xfrm>
+          <a:prstGeom prst="roundRect">
+            <a:avLst/>
+          </a:prstGeom>
+          <a:solidFill>
+            <a:srgbClr val="F1F5F9"/>
+          </a:solidFill>
+          <a:ln>
+            <a:solidFill>
+              <a:srgbClr val="D2DCE8"/>
+            </a:solidFill>
+          </a:ln>
+        </p:spPr>
+        <p:style>
+          <a:lnRef idx="1">
+            <a:schemeClr val="accent1"/>
+          </a:lnRef>
+          <a:fillRef idx="3">
+            <a:schemeClr val="accent1"/>
+          </a:fillRef>
+          <a:effectRef idx="2">
+            <a:schemeClr val="accent1"/>
+          </a:effectRef>
+          <a:fontRef idx="minor">
+            <a:schemeClr val="lt1"/>
+          </a:fontRef>
+        </p:style>
+        <p:txBody>
+          <a:bodyPr rtlCol="0" anchor="ctr"/>
+          <a:lstStyle/>
+          <a:p>
+            <a:pPr algn="ctr"/>
+          </a:p>
+        </p:txBody>
+      </p:sp>
+      <p:sp>
+        <p:nvSpPr>
+          <p:cNvPr id="15" name="TextBox 14"/>
+          <p:cNvSpPr txBox="1"/>
+          <p:nvPr/>
+        </p:nvSpPr>
+        <p:spPr>
+          <a:xfrm>
+            <a:off x="1097280" y="3630168"/>
+            <a:ext cx="4206240" cy="411480"/>
+          </a:xfrm>
+          <a:prstGeom prst="rect">
+            <a:avLst/>
+          </a:prstGeom>
+          <a:noFill/>
+        </p:spPr>
+        <p:txBody>
+          <a:bodyPr wrap="none">
+            <a:spAutoFit/>
+          </a:bodyPr>
+          <a:lstStyle/>
+          <a:p>
+            <a:pPr>
+              <a:defRPr sz="1800" b="1">
+                <a:solidFill>
+                  <a:srgbClr val="0E1827"/>
+                </a:solidFill>
+              </a:defRPr>
+            </a:pPr>
+            <a:r>
+              <a:t>ProcessMonitor</a:t>
+            </a:r>
+          </a:p>
+        </p:txBody>
+      </p:sp>
+      <p:sp>
+        <p:nvSpPr>
+          <p:cNvPr id="16" name="Rounded Rectangle 15"/>
+          <p:cNvSpPr/>
+          <p:nvPr/>
+        </p:nvSpPr>
+        <p:spPr>
+          <a:xfrm>
+            <a:off x="6217920" y="3520440"/>
+            <a:ext cx="4572000" cy="658368"/>
+          </a:xfrm>
+          <a:prstGeom prst="roundRect">
+            <a:avLst/>
+          </a:prstGeom>
+          <a:solidFill>
+            <a:srgbClr val="F1F5F9"/>
+          </a:solidFill>
+          <a:ln>
+            <a:solidFill>
+              <a:srgbClr val="D2DCE8"/>
+            </a:solidFill>
+          </a:ln>
+        </p:spPr>
+        <p:style>
+          <a:lnRef idx="1">
+            <a:schemeClr val="accent1"/>
+          </a:lnRef>
+          <a:fillRef idx="3">
+            <a:schemeClr val="accent1"/>
+          </a:fillRef>
+          <a:effectRef idx="2">
+            <a:schemeClr val="accent1"/>
+          </a:effectRef>
+          <a:fontRef idx="minor">
+            <a:schemeClr val="lt1"/>
+          </a:fontRef>
+        </p:style>
+        <p:txBody>
+          <a:bodyPr rtlCol="0" anchor="ctr"/>
+          <a:lstStyle/>
+          <a:p>
+            <a:pPr algn="ctr"/>
+          </a:p>
+        </p:txBody>
+      </p:sp>
+      <p:sp>
+        <p:nvSpPr>
+          <p:cNvPr id="17" name="TextBox 16"/>
+          <p:cNvSpPr txBox="1"/>
+          <p:nvPr/>
+        </p:nvSpPr>
+        <p:spPr>
+          <a:xfrm>
+            <a:off x="6400800" y="3630168"/>
+            <a:ext cx="4206240" cy="411480"/>
+          </a:xfrm>
+          <a:prstGeom prst="rect">
+            <a:avLst/>
+          </a:prstGeom>
+          <a:noFill/>
+        </p:spPr>
+        <p:txBody>
+          <a:bodyPr wrap="none">
+            <a:spAutoFit/>
+          </a:bodyPr>
+          <a:lstStyle/>
+          <a:p>
+            <a:pPr>
+              <a:defRPr sz="1800" b="1">
+                <a:solidFill>
+                  <a:srgbClr val="0E1827"/>
+                </a:solidFill>
+              </a:defRPr>
+            </a:pPr>
+            <a:r>
+              <a:t>HealthMonitor</a:t>
+            </a:r>
+          </a:p>
+        </p:txBody>
+      </p:sp>
+      <p:sp>
+        <p:nvSpPr>
+          <p:cNvPr id="18" name="Rounded Rectangle 17"/>
+          <p:cNvSpPr/>
+          <p:nvPr/>
+        </p:nvSpPr>
+        <p:spPr>
+          <a:xfrm>
+            <a:off x="914400" y="4526280"/>
+            <a:ext cx="4572000" cy="658368"/>
+          </a:xfrm>
+          <a:prstGeom prst="roundRect">
+            <a:avLst/>
+          </a:prstGeom>
+          <a:solidFill>
+            <a:srgbClr val="F1F5F9"/>
+          </a:solidFill>
+          <a:ln>
+            <a:solidFill>
+              <a:srgbClr val="D2DCE8"/>
+            </a:solidFill>
+          </a:ln>
+        </p:spPr>
+        <p:style>
+          <a:lnRef idx="1">
+            <a:schemeClr val="accent1"/>
+          </a:lnRef>
+          <a:fillRef idx="3">
+            <a:schemeClr val="accent1"/>
+          </a:fillRef>
+          <a:effectRef idx="2">
+            <a:schemeClr val="accent1"/>
+          </a:effectRef>
+          <a:fontRef idx="minor">
+            <a:schemeClr val="lt1"/>
+          </a:fontRef>
+        </p:style>
+        <p:txBody>
+          <a:bodyPr rtlCol="0" anchor="ctr"/>
+          <a:lstStyle/>
+          <a:p>
+            <a:pPr algn="ctr"/>
+          </a:p>
+        </p:txBody>
+      </p:sp>
+      <p:sp>
+        <p:nvSpPr>
+          <p:cNvPr id="19" name="TextBox 18"/>
+          <p:cNvSpPr txBox="1"/>
+          <p:nvPr/>
+        </p:nvSpPr>
+        <p:spPr>
+          <a:xfrm>
+            <a:off x="1097280" y="4636008"/>
+            <a:ext cx="4206240" cy="411480"/>
+          </a:xfrm>
+          <a:prstGeom prst="rect">
+            <a:avLst/>
+          </a:prstGeom>
+          <a:noFill/>
+        </p:spPr>
+        <p:txBody>
+          <a:bodyPr wrap="none">
+            <a:spAutoFit/>
+          </a:bodyPr>
+          <a:lstStyle/>
+          <a:p>
+            <a:pPr>
+              <a:defRPr sz="1800" b="1">
+                <a:solidFill>
+                  <a:srgbClr val="0E1827"/>
+                </a:solidFill>
+              </a:defRPr>
+            </a:pPr>
+            <a:r>
+              <a:t>Logger</a:t>
+            </a:r>
+          </a:p>
+        </p:txBody>
+      </p:sp>
+      <p:sp>
+        <p:nvSpPr>
+          <p:cNvPr id="20" name="TextBox 19"/>
+          <p:cNvSpPr txBox="1"/>
+          <p:nvPr/>
+        </p:nvSpPr>
+        <p:spPr>
+          <a:xfrm>
+            <a:off x="640080" y="6492240"/>
+            <a:ext cx="10972800" cy="228600"/>
+          </a:xfrm>
+          <a:prstGeom prst="rect">
+            <a:avLst/>
+          </a:prstGeom>
+          <a:noFill/>
+        </p:spPr>
+        <p:txBody>
+          <a:bodyPr wrap="none">
+            <a:spAutoFit/>
+          </a:bodyPr>
+          <a:lstStyle/>
+          <a:p>
+            <a:pPr>
+              <a:defRPr sz="900">
+                <a:solidFill>
+                  <a:srgbClr val="566373"/>
+                </a:solidFill>
+              </a:defRPr>
+            </a:pPr>
+            <a:r>
+              <a:t>SysGuard • Linux System Health Monitor                               6</a:t>
             </a:r>
           </a:p>
         </p:txBody>
@@ -4385,101 +8257,289 @@
       <p:grpSpPr/>
       <p:sp>
         <p:nvSpPr>
-          <p:cNvPr id="2" name="Title 1"/>
-          <p:cNvSpPr>
-            <a:spLocks noGrp="1"/>
-          </p:cNvSpPr>
-          <p:nvPr>
-            <p:ph type="title"/>
-          </p:nvPr>
-        </p:nvSpPr>
-        <p:spPr/>
-        <p:txBody>
-          <a:bodyPr/>
-          <a:lstStyle/>
-          <a:p>
-            <a:r>
-              <a:t>6. Linux Concepts Demonstrated</a:t>
-            </a:r>
-          </a:p>
-        </p:txBody>
-      </p:sp>
-      <p:sp>
-        <p:nvSpPr>
-          <p:cNvPr id="3" name="Content Placeholder 2"/>
-          <p:cNvSpPr>
-            <a:spLocks noGrp="1"/>
-          </p:cNvSpPr>
-          <p:nvPr>
-            <p:ph idx="1"/>
-          </p:nvPr>
-        </p:nvSpPr>
-        <p:spPr/>
-        <p:txBody>
-          <a:bodyPr/>
-          <a:lstStyle/>
-          <a:p>
-            <a:pPr>
-              <a:defRPr sz="2000"/>
-            </a:pPr>
-            <a:r>
-              <a:t>• User space vs kernel space</a:t>
-            </a:r>
-          </a:p>
-          <a:p>
-            <a:pPr>
-              <a:defRPr sz="2000"/>
-            </a:pPr>
-            <a:r>
-              <a:t>• /proc virtual filesystem</a:t>
-            </a:r>
-          </a:p>
-          <a:p>
-            <a:pPr>
-              <a:defRPr sz="2000"/>
-            </a:pPr>
-            <a:r>
-              <a:t>• Processes and PIDs</a:t>
-            </a:r>
-          </a:p>
-          <a:p>
-            <a:pPr>
-              <a:defRPr sz="2000"/>
-            </a:pPr>
-            <a:r>
-              <a:t>• Linux signals</a:t>
-            </a:r>
-          </a:p>
-          <a:p>
-            <a:pPr>
-              <a:defRPr sz="2000"/>
-            </a:pPr>
-            <a:r>
-              <a:t>• System calls / OS interfaces</a:t>
-            </a:r>
-          </a:p>
-          <a:p>
-            <a:pPr>
-              <a:defRPr sz="2000"/>
-            </a:pPr>
-            <a:r>
-              <a:t>• Filesystem statistics</a:t>
-            </a:r>
-          </a:p>
-          <a:p>
-            <a:pPr>
-              <a:defRPr sz="2000"/>
-            </a:pPr>
-            <a:r>
-              <a:t>• Kernel modules and character devices</a:t>
-            </a:r>
-          </a:p>
-          <a:p>
-            <a:pPr>
-              <a:defRPr sz="2000"/>
-            </a:pPr>
-            <a:r>
-              <a:t>• Hardware/software interaction</a:t>
+          <p:cNvPr id="2" name="Rectangle 1"/>
+          <p:cNvSpPr/>
+          <p:nvPr/>
+        </p:nvSpPr>
+        <p:spPr>
+          <a:xfrm>
+            <a:off x="0" y="0"/>
+            <a:ext cx="12191695" cy="6858000"/>
+          </a:xfrm>
+          <a:prstGeom prst="rect">
+            <a:avLst/>
+          </a:prstGeom>
+          <a:solidFill>
+            <a:srgbClr val="FFFFFF"/>
+          </a:solidFill>
+          <a:ln>
+            <a:noFill/>
+          </a:ln>
+        </p:spPr>
+        <p:style>
+          <a:lnRef idx="1">
+            <a:schemeClr val="accent1"/>
+          </a:lnRef>
+          <a:fillRef idx="3">
+            <a:schemeClr val="accent1"/>
+          </a:fillRef>
+          <a:effectRef idx="2">
+            <a:schemeClr val="accent1"/>
+          </a:effectRef>
+          <a:fontRef idx="minor">
+            <a:schemeClr val="lt1"/>
+          </a:fontRef>
+        </p:style>
+        <p:txBody>
+          <a:bodyPr rtlCol="0" anchor="ctr"/>
+          <a:lstStyle/>
+          <a:p>
+            <a:pPr algn="ctr"/>
+          </a:p>
+        </p:txBody>
+      </p:sp>
+      <p:sp>
+        <p:nvSpPr>
+          <p:cNvPr id="3" name="Rectangle 2"/>
+          <p:cNvSpPr/>
+          <p:nvPr/>
+        </p:nvSpPr>
+        <p:spPr>
+          <a:xfrm>
+            <a:off x="0" y="0"/>
+            <a:ext cx="12191695" cy="201168"/>
+          </a:xfrm>
+          <a:prstGeom prst="rect">
+            <a:avLst/>
+          </a:prstGeom>
+          <a:solidFill>
+            <a:srgbClr val="2A69BA"/>
+          </a:solidFill>
+          <a:ln>
+            <a:noFill/>
+          </a:ln>
+        </p:spPr>
+        <p:style>
+          <a:lnRef idx="1">
+            <a:schemeClr val="accent1"/>
+          </a:lnRef>
+          <a:fillRef idx="3">
+            <a:schemeClr val="accent1"/>
+          </a:fillRef>
+          <a:effectRef idx="2">
+            <a:schemeClr val="accent1"/>
+          </a:effectRef>
+          <a:fontRef idx="minor">
+            <a:schemeClr val="lt1"/>
+          </a:fontRef>
+        </p:style>
+        <p:txBody>
+          <a:bodyPr rtlCol="0" anchor="ctr"/>
+          <a:lstStyle/>
+          <a:p>
+            <a:pPr algn="ctr"/>
+          </a:p>
+        </p:txBody>
+      </p:sp>
+      <p:sp>
+        <p:nvSpPr>
+          <p:cNvPr id="4" name="TextBox 3"/>
+          <p:cNvSpPr txBox="1"/>
+          <p:nvPr/>
+        </p:nvSpPr>
+        <p:spPr>
+          <a:xfrm>
+            <a:off x="640080" y="502920"/>
+            <a:ext cx="10881360" cy="640080"/>
+          </a:xfrm>
+          <a:prstGeom prst="rect">
+            <a:avLst/>
+          </a:prstGeom>
+          <a:noFill/>
+        </p:spPr>
+        <p:txBody>
+          <a:bodyPr wrap="none">
+            <a:spAutoFit/>
+          </a:bodyPr>
+          <a:lstStyle/>
+          <a:p>
+            <a:pPr>
+              <a:defRPr sz="2800" b="1">
+                <a:solidFill>
+                  <a:srgbClr val="0E1827"/>
+                </a:solidFill>
+              </a:defRPr>
+            </a:pPr>
+            <a:r>
+              <a:t>6. Key Features</a:t>
+            </a:r>
+          </a:p>
+        </p:txBody>
+      </p:sp>
+      <p:sp>
+        <p:nvSpPr>
+          <p:cNvPr id="5" name="TextBox 4"/>
+          <p:cNvSpPr txBox="1"/>
+          <p:nvPr/>
+        </p:nvSpPr>
+        <p:spPr>
+          <a:xfrm>
+            <a:off x="658368" y="1143000"/>
+            <a:ext cx="10789920" cy="411480"/>
+          </a:xfrm>
+          <a:prstGeom prst="rect">
+            <a:avLst/>
+          </a:prstGeom>
+          <a:noFill/>
+        </p:spPr>
+        <p:txBody>
+          <a:bodyPr wrap="none">
+            <a:spAutoFit/>
+          </a:bodyPr>
+          <a:lstStyle/>
+          <a:p>
+            <a:pPr>
+              <a:defRPr sz="1400">
+                <a:solidFill>
+                  <a:srgbClr val="566373"/>
+                </a:solidFill>
+              </a:defRPr>
+            </a:pPr>
+            <a:r>
+              <a:t>What the user can do</a:t>
+            </a:r>
+          </a:p>
+        </p:txBody>
+      </p:sp>
+      <p:sp>
+        <p:nvSpPr>
+          <p:cNvPr id="6" name="TextBox 5"/>
+          <p:cNvSpPr txBox="1"/>
+          <p:nvPr/>
+        </p:nvSpPr>
+        <p:spPr>
+          <a:xfrm>
+            <a:off x="822960" y="1554480"/>
+            <a:ext cx="10424160" cy="4389120"/>
+          </a:xfrm>
+          <a:prstGeom prst="rect">
+            <a:avLst/>
+          </a:prstGeom>
+          <a:noFill/>
+        </p:spPr>
+        <p:txBody>
+          <a:bodyPr wrap="square">
+            <a:spAutoFit/>
+          </a:bodyPr>
+          <a:lstStyle/>
+          <a:p>
+            <a:pPr>
+              <a:spcAft>
+                <a:spcPts val="1000"/>
+              </a:spcAft>
+              <a:defRPr sz="1900">
+                <a:solidFill>
+                  <a:srgbClr val="1C2536"/>
+                </a:solidFill>
+              </a:defRPr>
+            </a:pPr>
+            <a:r>
+              <a:t>System dashboard: CPU, memory, disk, load and process count.</a:t>
+            </a:r>
+          </a:p>
+          <a:p>
+            <a:pPr>
+              <a:spcAft>
+                <a:spcPts val="1000"/>
+              </a:spcAft>
+              <a:defRPr sz="1900">
+                <a:solidFill>
+                  <a:srgbClr val="1C2536"/>
+                </a:solidFill>
+              </a:defRPr>
+            </a:pPr>
+            <a:r>
+              <a:t>System information: OS, kernel, architecture, hostname, CPU model and uptime.</a:t>
+            </a:r>
+          </a:p>
+          <a:p>
+            <a:pPr>
+              <a:spcAft>
+                <a:spcPts val="1000"/>
+              </a:spcAft>
+              <a:defRPr sz="1900">
+                <a:solidFill>
+                  <a:srgbClr val="1C2536"/>
+                </a:solidFill>
+              </a:defRPr>
+            </a:pPr>
+            <a:r>
+              <a:t>Process monitor: list processes, search by name, send SIGTERM.</a:t>
+            </a:r>
+          </a:p>
+          <a:p>
+            <a:pPr>
+              <a:spcAft>
+                <a:spcPts val="1000"/>
+              </a:spcAft>
+              <a:defRPr sz="1900">
+                <a:solidFill>
+                  <a:srgbClr val="1C2536"/>
+                </a:solidFill>
+              </a:defRPr>
+            </a:pPr>
+            <a:r>
+              <a:t>Health monitor: HEALTHY / WARNING / CRITICAL status.</a:t>
+            </a:r>
+          </a:p>
+          <a:p>
+            <a:pPr>
+              <a:spcAft>
+                <a:spcPts val="1000"/>
+              </a:spcAft>
+              <a:defRPr sz="1900">
+                <a:solidFill>
+                  <a:srgbClr val="1C2536"/>
+                </a:solidFill>
+              </a:defRPr>
+            </a:pPr>
+            <a:r>
+              <a:t>Logging: store health snapshots in sysguard.log.</a:t>
+            </a:r>
+          </a:p>
+        </p:txBody>
+      </p:sp>
+      <p:sp>
+        <p:nvSpPr>
+          <p:cNvPr id="7" name="TextBox 6"/>
+          <p:cNvSpPr txBox="1"/>
+          <p:nvPr/>
+        </p:nvSpPr>
+        <p:spPr>
+          <a:xfrm>
+            <a:off x="640080" y="6492240"/>
+            <a:ext cx="10972800" cy="228600"/>
+          </a:xfrm>
+          <a:prstGeom prst="rect">
+            <a:avLst/>
+          </a:prstGeom>
+          <a:noFill/>
+        </p:spPr>
+        <p:txBody>
+          <a:bodyPr wrap="none">
+            <a:spAutoFit/>
+          </a:bodyPr>
+          <a:lstStyle/>
+          <a:p>
+            <a:pPr>
+              <a:defRPr sz="900">
+                <a:solidFill>
+                  <a:srgbClr val="566373"/>
+                </a:solidFill>
+              </a:defRPr>
+            </a:pPr>
+            <a:r>
+              <a:t>SysGuard • Linux System Health Monitor                               7</a:t>
             </a:r>
           </a:p>
         </p:txBody>
@@ -4504,101 +8564,1146 @@
       <p:grpSpPr/>
       <p:sp>
         <p:nvSpPr>
-          <p:cNvPr id="2" name="Title 1"/>
-          <p:cNvSpPr>
-            <a:spLocks noGrp="1"/>
-          </p:cNvSpPr>
-          <p:nvPr>
-            <p:ph type="title"/>
-          </p:nvPr>
-        </p:nvSpPr>
-        <p:spPr/>
-        <p:txBody>
-          <a:bodyPr/>
-          <a:lstStyle/>
-          <a:p>
-            <a:r>
-              <a:t>7. C++ Concepts</a:t>
-            </a:r>
-          </a:p>
-        </p:txBody>
-      </p:sp>
-      <p:sp>
-        <p:nvSpPr>
-          <p:cNvPr id="3" name="Content Placeholder 2"/>
-          <p:cNvSpPr>
-            <a:spLocks noGrp="1"/>
-          </p:cNvSpPr>
-          <p:nvPr>
-            <p:ph idx="1"/>
-          </p:nvPr>
-        </p:nvSpPr>
-        <p:spPr/>
-        <p:txBody>
-          <a:bodyPr/>
-          <a:lstStyle/>
-          <a:p>
-            <a:pPr>
-              <a:defRPr sz="2000"/>
-            </a:pPr>
-            <a:r>
-              <a:t>• Classes and modular design</a:t>
-            </a:r>
-          </a:p>
-          <a:p>
-            <a:pPr>
-              <a:defRPr sz="2000"/>
-            </a:pPr>
-            <a:r>
-              <a:t>• Structures and data modeling</a:t>
-            </a:r>
-          </a:p>
-          <a:p>
-            <a:pPr>
-              <a:defRPr sz="2000"/>
-            </a:pPr>
-            <a:r>
-              <a:t>• Functions</a:t>
-            </a:r>
-          </a:p>
-          <a:p>
-            <a:pPr>
-              <a:defRPr sz="2000"/>
-            </a:pPr>
-            <a:r>
-              <a:t>• STL vector and string</a:t>
-            </a:r>
-          </a:p>
-          <a:p>
-            <a:pPr>
-              <a:defRPr sz="2000"/>
-            </a:pPr>
-            <a:r>
-              <a:t>• File streams</a:t>
-            </a:r>
-          </a:p>
-          <a:p>
-            <a:pPr>
-              <a:defRPr sz="2000"/>
-            </a:pPr>
-            <a:r>
-              <a:t>• Error handling</a:t>
-            </a:r>
-          </a:p>
-          <a:p>
-            <a:pPr>
-              <a:defRPr sz="2000"/>
-            </a:pPr>
-            <a:r>
-              <a:t>• Make-based compilation</a:t>
-            </a:r>
-          </a:p>
-          <a:p>
-            <a:pPr>
-              <a:defRPr sz="2000"/>
-            </a:pPr>
-            <a:r>
-              <a:t>• Separation of interface and implementation</a:t>
+          <p:cNvPr id="2" name="Rectangle 1"/>
+          <p:cNvSpPr/>
+          <p:nvPr/>
+        </p:nvSpPr>
+        <p:spPr>
+          <a:xfrm>
+            <a:off x="0" y="0"/>
+            <a:ext cx="12191695" cy="6858000"/>
+          </a:xfrm>
+          <a:prstGeom prst="rect">
+            <a:avLst/>
+          </a:prstGeom>
+          <a:solidFill>
+            <a:srgbClr val="FFFFFF"/>
+          </a:solidFill>
+          <a:ln>
+            <a:noFill/>
+          </a:ln>
+        </p:spPr>
+        <p:style>
+          <a:lnRef idx="1">
+            <a:schemeClr val="accent1"/>
+          </a:lnRef>
+          <a:fillRef idx="3">
+            <a:schemeClr val="accent1"/>
+          </a:fillRef>
+          <a:effectRef idx="2">
+            <a:schemeClr val="accent1"/>
+          </a:effectRef>
+          <a:fontRef idx="minor">
+            <a:schemeClr val="lt1"/>
+          </a:fontRef>
+        </p:style>
+        <p:txBody>
+          <a:bodyPr rtlCol="0" anchor="ctr"/>
+          <a:lstStyle/>
+          <a:p>
+            <a:pPr algn="ctr"/>
+          </a:p>
+        </p:txBody>
+      </p:sp>
+      <p:sp>
+        <p:nvSpPr>
+          <p:cNvPr id="3" name="Rectangle 2"/>
+          <p:cNvSpPr/>
+          <p:nvPr/>
+        </p:nvSpPr>
+        <p:spPr>
+          <a:xfrm>
+            <a:off x="0" y="0"/>
+            <a:ext cx="12191695" cy="201168"/>
+          </a:xfrm>
+          <a:prstGeom prst="rect">
+            <a:avLst/>
+          </a:prstGeom>
+          <a:solidFill>
+            <a:srgbClr val="2A69BA"/>
+          </a:solidFill>
+          <a:ln>
+            <a:noFill/>
+          </a:ln>
+        </p:spPr>
+        <p:style>
+          <a:lnRef idx="1">
+            <a:schemeClr val="accent1"/>
+          </a:lnRef>
+          <a:fillRef idx="3">
+            <a:schemeClr val="accent1"/>
+          </a:fillRef>
+          <a:effectRef idx="2">
+            <a:schemeClr val="accent1"/>
+          </a:effectRef>
+          <a:fontRef idx="minor">
+            <a:schemeClr val="lt1"/>
+          </a:fontRef>
+        </p:style>
+        <p:txBody>
+          <a:bodyPr rtlCol="0" anchor="ctr"/>
+          <a:lstStyle/>
+          <a:p>
+            <a:pPr algn="ctr"/>
+          </a:p>
+        </p:txBody>
+      </p:sp>
+      <p:sp>
+        <p:nvSpPr>
+          <p:cNvPr id="4" name="TextBox 3"/>
+          <p:cNvSpPr txBox="1"/>
+          <p:nvPr/>
+        </p:nvSpPr>
+        <p:spPr>
+          <a:xfrm>
+            <a:off x="640080" y="502920"/>
+            <a:ext cx="10881360" cy="640080"/>
+          </a:xfrm>
+          <a:prstGeom prst="rect">
+            <a:avLst/>
+          </a:prstGeom>
+          <a:noFill/>
+        </p:spPr>
+        <p:txBody>
+          <a:bodyPr wrap="none">
+            <a:spAutoFit/>
+          </a:bodyPr>
+          <a:lstStyle/>
+          <a:p>
+            <a:pPr>
+              <a:defRPr sz="2800" b="1">
+                <a:solidFill>
+                  <a:srgbClr val="0E1827"/>
+                </a:solidFill>
+              </a:defRPr>
+            </a:pPr>
+            <a:r>
+              <a:t>7. Verified Run</a:t>
+            </a:r>
+          </a:p>
+        </p:txBody>
+      </p:sp>
+      <p:sp>
+        <p:nvSpPr>
+          <p:cNvPr id="5" name="TextBox 4"/>
+          <p:cNvSpPr txBox="1"/>
+          <p:nvPr/>
+        </p:nvSpPr>
+        <p:spPr>
+          <a:xfrm>
+            <a:off x="658368" y="1143000"/>
+            <a:ext cx="10789920" cy="411480"/>
+          </a:xfrm>
+          <a:prstGeom prst="rect">
+            <a:avLst/>
+          </a:prstGeom>
+          <a:noFill/>
+        </p:spPr>
+        <p:txBody>
+          <a:bodyPr wrap="none">
+            <a:spAutoFit/>
+          </a:bodyPr>
+          <a:lstStyle/>
+          <a:p>
+            <a:pPr>
+              <a:defRPr sz="1400">
+                <a:solidFill>
+                  <a:srgbClr val="566373"/>
+                </a:solidFill>
+              </a:defRPr>
+            </a:pPr>
+            <a:r>
+              <a:t>Actual values observed during testing</a:t>
+            </a:r>
+          </a:p>
+        </p:txBody>
+      </p:sp>
+      <p:sp>
+        <p:nvSpPr>
+          <p:cNvPr id="6" name="Rounded Rectangle 5"/>
+          <p:cNvSpPr/>
+          <p:nvPr/>
+        </p:nvSpPr>
+        <p:spPr>
+          <a:xfrm>
+            <a:off x="822960" y="1417320"/>
+            <a:ext cx="5074920" cy="822960"/>
+          </a:xfrm>
+          <a:prstGeom prst="roundRect">
+            <a:avLst/>
+          </a:prstGeom>
+          <a:solidFill>
+            <a:srgbClr val="F1F5F9"/>
+          </a:solidFill>
+          <a:ln>
+            <a:solidFill>
+              <a:srgbClr val="D7E1EB"/>
+            </a:solidFill>
+          </a:ln>
+        </p:spPr>
+        <p:style>
+          <a:lnRef idx="1">
+            <a:schemeClr val="accent1"/>
+          </a:lnRef>
+          <a:fillRef idx="3">
+            <a:schemeClr val="accent1"/>
+          </a:fillRef>
+          <a:effectRef idx="2">
+            <a:schemeClr val="accent1"/>
+          </a:effectRef>
+          <a:fontRef idx="minor">
+            <a:schemeClr val="lt1"/>
+          </a:fontRef>
+        </p:style>
+        <p:txBody>
+          <a:bodyPr rtlCol="0" anchor="ctr"/>
+          <a:lstStyle/>
+          <a:p>
+            <a:pPr algn="ctr"/>
+          </a:p>
+        </p:txBody>
+      </p:sp>
+      <p:sp>
+        <p:nvSpPr>
+          <p:cNvPr id="7" name="TextBox 6"/>
+          <p:cNvSpPr txBox="1"/>
+          <p:nvPr/>
+        </p:nvSpPr>
+        <p:spPr>
+          <a:xfrm>
+            <a:off x="1005840" y="1527048"/>
+            <a:ext cx="1645920" cy="457200"/>
+          </a:xfrm>
+          <a:prstGeom prst="rect">
+            <a:avLst/>
+          </a:prstGeom>
+          <a:noFill/>
+        </p:spPr>
+        <p:txBody>
+          <a:bodyPr wrap="none">
+            <a:spAutoFit/>
+          </a:bodyPr>
+          <a:lstStyle/>
+          <a:p>
+            <a:pPr>
+              <a:defRPr sz="1500" b="1">
+                <a:solidFill>
+                  <a:srgbClr val="566373"/>
+                </a:solidFill>
+              </a:defRPr>
+            </a:pPr>
+            <a:r>
+              <a:t>OS</a:t>
+            </a:r>
+          </a:p>
+        </p:txBody>
+      </p:sp>
+      <p:sp>
+        <p:nvSpPr>
+          <p:cNvPr id="8" name="TextBox 7"/>
+          <p:cNvSpPr txBox="1"/>
+          <p:nvPr/>
+        </p:nvSpPr>
+        <p:spPr>
+          <a:xfrm>
+            <a:off x="2606040" y="1527048"/>
+            <a:ext cx="3017520" cy="502920"/>
+          </a:xfrm>
+          <a:prstGeom prst="rect">
+            <a:avLst/>
+          </a:prstGeom>
+          <a:noFill/>
+        </p:spPr>
+        <p:txBody>
+          <a:bodyPr wrap="none">
+            <a:spAutoFit/>
+          </a:bodyPr>
+          <a:lstStyle/>
+          <a:p>
+            <a:pPr>
+              <a:defRPr sz="1700" b="1">
+                <a:solidFill>
+                  <a:srgbClr val="0E1827"/>
+                </a:solidFill>
+              </a:defRPr>
+            </a:pPr>
+            <a:r>
+              <a:t>Ubuntu 26.04.1 LTS</a:t>
+            </a:r>
+          </a:p>
+        </p:txBody>
+      </p:sp>
+      <p:sp>
+        <p:nvSpPr>
+          <p:cNvPr id="9" name="Rounded Rectangle 8"/>
+          <p:cNvSpPr/>
+          <p:nvPr/>
+        </p:nvSpPr>
+        <p:spPr>
+          <a:xfrm>
+            <a:off x="6309360" y="1417320"/>
+            <a:ext cx="5074920" cy="822960"/>
+          </a:xfrm>
+          <a:prstGeom prst="roundRect">
+            <a:avLst/>
+          </a:prstGeom>
+          <a:solidFill>
+            <a:srgbClr val="F1F5F9"/>
+          </a:solidFill>
+          <a:ln>
+            <a:solidFill>
+              <a:srgbClr val="D7E1EB"/>
+            </a:solidFill>
+          </a:ln>
+        </p:spPr>
+        <p:style>
+          <a:lnRef idx="1">
+            <a:schemeClr val="accent1"/>
+          </a:lnRef>
+          <a:fillRef idx="3">
+            <a:schemeClr val="accent1"/>
+          </a:fillRef>
+          <a:effectRef idx="2">
+            <a:schemeClr val="accent1"/>
+          </a:effectRef>
+          <a:fontRef idx="minor">
+            <a:schemeClr val="lt1"/>
+          </a:fontRef>
+        </p:style>
+        <p:txBody>
+          <a:bodyPr rtlCol="0" anchor="ctr"/>
+          <a:lstStyle/>
+          <a:p>
+            <a:pPr algn="ctr"/>
+          </a:p>
+        </p:txBody>
+      </p:sp>
+      <p:sp>
+        <p:nvSpPr>
+          <p:cNvPr id="10" name="TextBox 9"/>
+          <p:cNvSpPr txBox="1"/>
+          <p:nvPr/>
+        </p:nvSpPr>
+        <p:spPr>
+          <a:xfrm>
+            <a:off x="6492240" y="1527048"/>
+            <a:ext cx="1645920" cy="457200"/>
+          </a:xfrm>
+          <a:prstGeom prst="rect">
+            <a:avLst/>
+          </a:prstGeom>
+          <a:noFill/>
+        </p:spPr>
+        <p:txBody>
+          <a:bodyPr wrap="none">
+            <a:spAutoFit/>
+          </a:bodyPr>
+          <a:lstStyle/>
+          <a:p>
+            <a:pPr>
+              <a:defRPr sz="1500" b="1">
+                <a:solidFill>
+                  <a:srgbClr val="566373"/>
+                </a:solidFill>
+              </a:defRPr>
+            </a:pPr>
+            <a:r>
+              <a:t>Kernel</a:t>
+            </a:r>
+          </a:p>
+        </p:txBody>
+      </p:sp>
+      <p:sp>
+        <p:nvSpPr>
+          <p:cNvPr id="11" name="TextBox 10"/>
+          <p:cNvSpPr txBox="1"/>
+          <p:nvPr/>
+        </p:nvSpPr>
+        <p:spPr>
+          <a:xfrm>
+            <a:off x="8092440" y="1527048"/>
+            <a:ext cx="3017520" cy="502920"/>
+          </a:xfrm>
+          <a:prstGeom prst="rect">
+            <a:avLst/>
+          </a:prstGeom>
+          <a:noFill/>
+        </p:spPr>
+        <p:txBody>
+          <a:bodyPr wrap="none">
+            <a:spAutoFit/>
+          </a:bodyPr>
+          <a:lstStyle/>
+          <a:p>
+            <a:pPr>
+              <a:defRPr sz="1700" b="1">
+                <a:solidFill>
+                  <a:srgbClr val="0E1827"/>
+                </a:solidFill>
+              </a:defRPr>
+            </a:pPr>
+            <a:r>
+              <a:t>6.18.40.1-microsoft-standard-WSL2</a:t>
+            </a:r>
+          </a:p>
+        </p:txBody>
+      </p:sp>
+      <p:sp>
+        <p:nvSpPr>
+          <p:cNvPr id="12" name="Rounded Rectangle 11"/>
+          <p:cNvSpPr/>
+          <p:nvPr/>
+        </p:nvSpPr>
+        <p:spPr>
+          <a:xfrm>
+            <a:off x="822960" y="2560320"/>
+            <a:ext cx="5074920" cy="822960"/>
+          </a:xfrm>
+          <a:prstGeom prst="roundRect">
+            <a:avLst/>
+          </a:prstGeom>
+          <a:solidFill>
+            <a:srgbClr val="F1F5F9"/>
+          </a:solidFill>
+          <a:ln>
+            <a:solidFill>
+              <a:srgbClr val="D7E1EB"/>
+            </a:solidFill>
+          </a:ln>
+        </p:spPr>
+        <p:style>
+          <a:lnRef idx="1">
+            <a:schemeClr val="accent1"/>
+          </a:lnRef>
+          <a:fillRef idx="3">
+            <a:schemeClr val="accent1"/>
+          </a:fillRef>
+          <a:effectRef idx="2">
+            <a:schemeClr val="accent1"/>
+          </a:effectRef>
+          <a:fontRef idx="minor">
+            <a:schemeClr val="lt1"/>
+          </a:fontRef>
+        </p:style>
+        <p:txBody>
+          <a:bodyPr rtlCol="0" anchor="ctr"/>
+          <a:lstStyle/>
+          <a:p>
+            <a:pPr algn="ctr"/>
+          </a:p>
+        </p:txBody>
+      </p:sp>
+      <p:sp>
+        <p:nvSpPr>
+          <p:cNvPr id="13" name="TextBox 12"/>
+          <p:cNvSpPr txBox="1"/>
+          <p:nvPr/>
+        </p:nvSpPr>
+        <p:spPr>
+          <a:xfrm>
+            <a:off x="1005840" y="2670048"/>
+            <a:ext cx="1645920" cy="457200"/>
+          </a:xfrm>
+          <a:prstGeom prst="rect">
+            <a:avLst/>
+          </a:prstGeom>
+          <a:noFill/>
+        </p:spPr>
+        <p:txBody>
+          <a:bodyPr wrap="none">
+            <a:spAutoFit/>
+          </a:bodyPr>
+          <a:lstStyle/>
+          <a:p>
+            <a:pPr>
+              <a:defRPr sz="1500" b="1">
+                <a:solidFill>
+                  <a:srgbClr val="566373"/>
+                </a:solidFill>
+              </a:defRPr>
+            </a:pPr>
+            <a:r>
+              <a:t>CPU</a:t>
+            </a:r>
+          </a:p>
+        </p:txBody>
+      </p:sp>
+      <p:sp>
+        <p:nvSpPr>
+          <p:cNvPr id="14" name="TextBox 13"/>
+          <p:cNvSpPr txBox="1"/>
+          <p:nvPr/>
+        </p:nvSpPr>
+        <p:spPr>
+          <a:xfrm>
+            <a:off x="2606040" y="2670048"/>
+            <a:ext cx="3017520" cy="502920"/>
+          </a:xfrm>
+          <a:prstGeom prst="rect">
+            <a:avLst/>
+          </a:prstGeom>
+          <a:noFill/>
+        </p:spPr>
+        <p:txBody>
+          <a:bodyPr wrap="none">
+            <a:spAutoFit/>
+          </a:bodyPr>
+          <a:lstStyle/>
+          <a:p>
+            <a:pPr>
+              <a:defRPr sz="1700" b="1">
+                <a:solidFill>
+                  <a:srgbClr val="0E1827"/>
+                </a:solidFill>
+              </a:defRPr>
+            </a:pPr>
+            <a:r>
+              <a:t>AMD Ryzen 7 6800H</a:t>
+            </a:r>
+          </a:p>
+        </p:txBody>
+      </p:sp>
+      <p:sp>
+        <p:nvSpPr>
+          <p:cNvPr id="15" name="Rounded Rectangle 14"/>
+          <p:cNvSpPr/>
+          <p:nvPr/>
+        </p:nvSpPr>
+        <p:spPr>
+          <a:xfrm>
+            <a:off x="6309360" y="2560320"/>
+            <a:ext cx="5074920" cy="822960"/>
+          </a:xfrm>
+          <a:prstGeom prst="roundRect">
+            <a:avLst/>
+          </a:prstGeom>
+          <a:solidFill>
+            <a:srgbClr val="F1F5F9"/>
+          </a:solidFill>
+          <a:ln>
+            <a:solidFill>
+              <a:srgbClr val="D7E1EB"/>
+            </a:solidFill>
+          </a:ln>
+        </p:spPr>
+        <p:style>
+          <a:lnRef idx="1">
+            <a:schemeClr val="accent1"/>
+          </a:lnRef>
+          <a:fillRef idx="3">
+            <a:schemeClr val="accent1"/>
+          </a:fillRef>
+          <a:effectRef idx="2">
+            <a:schemeClr val="accent1"/>
+          </a:effectRef>
+          <a:fontRef idx="minor">
+            <a:schemeClr val="lt1"/>
+          </a:fontRef>
+        </p:style>
+        <p:txBody>
+          <a:bodyPr rtlCol="0" anchor="ctr"/>
+          <a:lstStyle/>
+          <a:p>
+            <a:pPr algn="ctr"/>
+          </a:p>
+        </p:txBody>
+      </p:sp>
+      <p:sp>
+        <p:nvSpPr>
+          <p:cNvPr id="16" name="TextBox 15"/>
+          <p:cNvSpPr txBox="1"/>
+          <p:nvPr/>
+        </p:nvSpPr>
+        <p:spPr>
+          <a:xfrm>
+            <a:off x="6492240" y="2670048"/>
+            <a:ext cx="1645920" cy="457200"/>
+          </a:xfrm>
+          <a:prstGeom prst="rect">
+            <a:avLst/>
+          </a:prstGeom>
+          <a:noFill/>
+        </p:spPr>
+        <p:txBody>
+          <a:bodyPr wrap="none">
+            <a:spAutoFit/>
+          </a:bodyPr>
+          <a:lstStyle/>
+          <a:p>
+            <a:pPr>
+              <a:defRPr sz="1500" b="1">
+                <a:solidFill>
+                  <a:srgbClr val="566373"/>
+                </a:solidFill>
+              </a:defRPr>
+            </a:pPr>
+            <a:r>
+              <a:t>Cores</a:t>
+            </a:r>
+          </a:p>
+        </p:txBody>
+      </p:sp>
+      <p:sp>
+        <p:nvSpPr>
+          <p:cNvPr id="17" name="TextBox 16"/>
+          <p:cNvSpPr txBox="1"/>
+          <p:nvPr/>
+        </p:nvSpPr>
+        <p:spPr>
+          <a:xfrm>
+            <a:off x="8092440" y="2670048"/>
+            <a:ext cx="3017520" cy="502920"/>
+          </a:xfrm>
+          <a:prstGeom prst="rect">
+            <a:avLst/>
+          </a:prstGeom>
+          <a:noFill/>
+        </p:spPr>
+        <p:txBody>
+          <a:bodyPr wrap="none">
+            <a:spAutoFit/>
+          </a:bodyPr>
+          <a:lstStyle/>
+          <a:p>
+            <a:pPr>
+              <a:defRPr sz="1700" b="1">
+                <a:solidFill>
+                  <a:srgbClr val="0E1827"/>
+                </a:solidFill>
+              </a:defRPr>
+            </a:pPr>
+            <a:r>
+              <a:t>16</a:t>
+            </a:r>
+          </a:p>
+        </p:txBody>
+      </p:sp>
+      <p:sp>
+        <p:nvSpPr>
+          <p:cNvPr id="18" name="Rounded Rectangle 17"/>
+          <p:cNvSpPr/>
+          <p:nvPr/>
+        </p:nvSpPr>
+        <p:spPr>
+          <a:xfrm>
+            <a:off x="822960" y="3703320"/>
+            <a:ext cx="5074920" cy="822960"/>
+          </a:xfrm>
+          <a:prstGeom prst="roundRect">
+            <a:avLst/>
+          </a:prstGeom>
+          <a:solidFill>
+            <a:srgbClr val="F1F5F9"/>
+          </a:solidFill>
+          <a:ln>
+            <a:solidFill>
+              <a:srgbClr val="D7E1EB"/>
+            </a:solidFill>
+          </a:ln>
+        </p:spPr>
+        <p:style>
+          <a:lnRef idx="1">
+            <a:schemeClr val="accent1"/>
+          </a:lnRef>
+          <a:fillRef idx="3">
+            <a:schemeClr val="accent1"/>
+          </a:fillRef>
+          <a:effectRef idx="2">
+            <a:schemeClr val="accent1"/>
+          </a:effectRef>
+          <a:fontRef idx="minor">
+            <a:schemeClr val="lt1"/>
+          </a:fontRef>
+        </p:style>
+        <p:txBody>
+          <a:bodyPr rtlCol="0" anchor="ctr"/>
+          <a:lstStyle/>
+          <a:p>
+            <a:pPr algn="ctr"/>
+          </a:p>
+        </p:txBody>
+      </p:sp>
+      <p:sp>
+        <p:nvSpPr>
+          <p:cNvPr id="19" name="TextBox 18"/>
+          <p:cNvSpPr txBox="1"/>
+          <p:nvPr/>
+        </p:nvSpPr>
+        <p:spPr>
+          <a:xfrm>
+            <a:off x="1005840" y="3813048"/>
+            <a:ext cx="1645920" cy="457200"/>
+          </a:xfrm>
+          <a:prstGeom prst="rect">
+            <a:avLst/>
+          </a:prstGeom>
+          <a:noFill/>
+        </p:spPr>
+        <p:txBody>
+          <a:bodyPr wrap="none">
+            <a:spAutoFit/>
+          </a:bodyPr>
+          <a:lstStyle/>
+          <a:p>
+            <a:pPr>
+              <a:defRPr sz="1500" b="1">
+                <a:solidFill>
+                  <a:srgbClr val="566373"/>
+                </a:solidFill>
+              </a:defRPr>
+            </a:pPr>
+            <a:r>
+              <a:t>Memory</a:t>
+            </a:r>
+          </a:p>
+        </p:txBody>
+      </p:sp>
+      <p:sp>
+        <p:nvSpPr>
+          <p:cNvPr id="20" name="TextBox 19"/>
+          <p:cNvSpPr txBox="1"/>
+          <p:nvPr/>
+        </p:nvSpPr>
+        <p:spPr>
+          <a:xfrm>
+            <a:off x="2606040" y="3813048"/>
+            <a:ext cx="3017520" cy="502920"/>
+          </a:xfrm>
+          <a:prstGeom prst="rect">
+            <a:avLst/>
+          </a:prstGeom>
+          <a:noFill/>
+        </p:spPr>
+        <p:txBody>
+          <a:bodyPr wrap="none">
+            <a:spAutoFit/>
+          </a:bodyPr>
+          <a:lstStyle/>
+          <a:p>
+            <a:pPr>
+              <a:defRPr sz="1700" b="1">
+                <a:solidFill>
+                  <a:srgbClr val="0E1827"/>
+                </a:solidFill>
+              </a:defRPr>
+            </a:pPr>
+            <a:r>
+              <a:t>7.9% used</a:t>
+            </a:r>
+          </a:p>
+        </p:txBody>
+      </p:sp>
+      <p:sp>
+        <p:nvSpPr>
+          <p:cNvPr id="21" name="Rounded Rectangle 20"/>
+          <p:cNvSpPr/>
+          <p:nvPr/>
+        </p:nvSpPr>
+        <p:spPr>
+          <a:xfrm>
+            <a:off x="6309360" y="3703320"/>
+            <a:ext cx="5074920" cy="822960"/>
+          </a:xfrm>
+          <a:prstGeom prst="roundRect">
+            <a:avLst/>
+          </a:prstGeom>
+          <a:solidFill>
+            <a:srgbClr val="F1F5F9"/>
+          </a:solidFill>
+          <a:ln>
+            <a:solidFill>
+              <a:srgbClr val="D7E1EB"/>
+            </a:solidFill>
+          </a:ln>
+        </p:spPr>
+        <p:style>
+          <a:lnRef idx="1">
+            <a:schemeClr val="accent1"/>
+          </a:lnRef>
+          <a:fillRef idx="3">
+            <a:schemeClr val="accent1"/>
+          </a:fillRef>
+          <a:effectRef idx="2">
+            <a:schemeClr val="accent1"/>
+          </a:effectRef>
+          <a:fontRef idx="minor">
+            <a:schemeClr val="lt1"/>
+          </a:fontRef>
+        </p:style>
+        <p:txBody>
+          <a:bodyPr rtlCol="0" anchor="ctr"/>
+          <a:lstStyle/>
+          <a:p>
+            <a:pPr algn="ctr"/>
+          </a:p>
+        </p:txBody>
+      </p:sp>
+      <p:sp>
+        <p:nvSpPr>
+          <p:cNvPr id="22" name="TextBox 21"/>
+          <p:cNvSpPr txBox="1"/>
+          <p:nvPr/>
+        </p:nvSpPr>
+        <p:spPr>
+          <a:xfrm>
+            <a:off x="6492240" y="3813048"/>
+            <a:ext cx="1645920" cy="457200"/>
+          </a:xfrm>
+          <a:prstGeom prst="rect">
+            <a:avLst/>
+          </a:prstGeom>
+          <a:noFill/>
+        </p:spPr>
+        <p:txBody>
+          <a:bodyPr wrap="none">
+            <a:spAutoFit/>
+          </a:bodyPr>
+          <a:lstStyle/>
+          <a:p>
+            <a:pPr>
+              <a:defRPr sz="1500" b="1">
+                <a:solidFill>
+                  <a:srgbClr val="566373"/>
+                </a:solidFill>
+              </a:defRPr>
+            </a:pPr>
+            <a:r>
+              <a:t>Disk</a:t>
+            </a:r>
+          </a:p>
+        </p:txBody>
+      </p:sp>
+      <p:sp>
+        <p:nvSpPr>
+          <p:cNvPr id="23" name="TextBox 22"/>
+          <p:cNvSpPr txBox="1"/>
+          <p:nvPr/>
+        </p:nvSpPr>
+        <p:spPr>
+          <a:xfrm>
+            <a:off x="8092440" y="3813048"/>
+            <a:ext cx="3017520" cy="502920"/>
+          </a:xfrm>
+          <a:prstGeom prst="rect">
+            <a:avLst/>
+          </a:prstGeom>
+          <a:noFill/>
+        </p:spPr>
+        <p:txBody>
+          <a:bodyPr wrap="none">
+            <a:spAutoFit/>
+          </a:bodyPr>
+          <a:lstStyle/>
+          <a:p>
+            <a:pPr>
+              <a:defRPr sz="1700" b="1">
+                <a:solidFill>
+                  <a:srgbClr val="0E1827"/>
+                </a:solidFill>
+              </a:defRPr>
+            </a:pPr>
+            <a:r>
+              <a:t>5.3% used</a:t>
+            </a:r>
+          </a:p>
+        </p:txBody>
+      </p:sp>
+      <p:sp>
+        <p:nvSpPr>
+          <p:cNvPr id="24" name="Rounded Rectangle 23"/>
+          <p:cNvSpPr/>
+          <p:nvPr/>
+        </p:nvSpPr>
+        <p:spPr>
+          <a:xfrm>
+            <a:off x="822960" y="4846320"/>
+            <a:ext cx="5074920" cy="822960"/>
+          </a:xfrm>
+          <a:prstGeom prst="roundRect">
+            <a:avLst/>
+          </a:prstGeom>
+          <a:solidFill>
+            <a:srgbClr val="F1F5F9"/>
+          </a:solidFill>
+          <a:ln>
+            <a:solidFill>
+              <a:srgbClr val="D7E1EB"/>
+            </a:solidFill>
+          </a:ln>
+        </p:spPr>
+        <p:style>
+          <a:lnRef idx="1">
+            <a:schemeClr val="accent1"/>
+          </a:lnRef>
+          <a:fillRef idx="3">
+            <a:schemeClr val="accent1"/>
+          </a:fillRef>
+          <a:effectRef idx="2">
+            <a:schemeClr val="accent1"/>
+          </a:effectRef>
+          <a:fontRef idx="minor">
+            <a:schemeClr val="lt1"/>
+          </a:fontRef>
+        </p:style>
+        <p:txBody>
+          <a:bodyPr rtlCol="0" anchor="ctr"/>
+          <a:lstStyle/>
+          <a:p>
+            <a:pPr algn="ctr"/>
+          </a:p>
+        </p:txBody>
+      </p:sp>
+      <p:sp>
+        <p:nvSpPr>
+          <p:cNvPr id="25" name="TextBox 24"/>
+          <p:cNvSpPr txBox="1"/>
+          <p:nvPr/>
+        </p:nvSpPr>
+        <p:spPr>
+          <a:xfrm>
+            <a:off x="1005840" y="4956048"/>
+            <a:ext cx="1645920" cy="457200"/>
+          </a:xfrm>
+          <a:prstGeom prst="rect">
+            <a:avLst/>
+          </a:prstGeom>
+          <a:noFill/>
+        </p:spPr>
+        <p:txBody>
+          <a:bodyPr wrap="none">
+            <a:spAutoFit/>
+          </a:bodyPr>
+          <a:lstStyle/>
+          <a:p>
+            <a:pPr>
+              <a:defRPr sz="1500" b="1">
+                <a:solidFill>
+                  <a:srgbClr val="566373"/>
+                </a:solidFill>
+              </a:defRPr>
+            </a:pPr>
+            <a:r>
+              <a:t>Processes</a:t>
+            </a:r>
+          </a:p>
+        </p:txBody>
+      </p:sp>
+      <p:sp>
+        <p:nvSpPr>
+          <p:cNvPr id="26" name="TextBox 25"/>
+          <p:cNvSpPr txBox="1"/>
+          <p:nvPr/>
+        </p:nvSpPr>
+        <p:spPr>
+          <a:xfrm>
+            <a:off x="2606040" y="4956048"/>
+            <a:ext cx="3017520" cy="502920"/>
+          </a:xfrm>
+          <a:prstGeom prst="rect">
+            <a:avLst/>
+          </a:prstGeom>
+          <a:noFill/>
+        </p:spPr>
+        <p:txBody>
+          <a:bodyPr wrap="none">
+            <a:spAutoFit/>
+          </a:bodyPr>
+          <a:lstStyle/>
+          <a:p>
+            <a:pPr>
+              <a:defRPr sz="1700" b="1">
+                <a:solidFill>
+                  <a:srgbClr val="0E1827"/>
+                </a:solidFill>
+              </a:defRPr>
+            </a:pPr>
+            <a:r>
+              <a:t>26</a:t>
+            </a:r>
+          </a:p>
+        </p:txBody>
+      </p:sp>
+      <p:sp>
+        <p:nvSpPr>
+          <p:cNvPr id="27" name="Rounded Rectangle 26"/>
+          <p:cNvSpPr/>
+          <p:nvPr/>
+        </p:nvSpPr>
+        <p:spPr>
+          <a:xfrm>
+            <a:off x="6309360" y="4846320"/>
+            <a:ext cx="5074920" cy="822960"/>
+          </a:xfrm>
+          <a:prstGeom prst="roundRect">
+            <a:avLst/>
+          </a:prstGeom>
+          <a:solidFill>
+            <a:srgbClr val="F1F5F9"/>
+          </a:solidFill>
+          <a:ln>
+            <a:solidFill>
+              <a:srgbClr val="D7E1EB"/>
+            </a:solidFill>
+          </a:ln>
+        </p:spPr>
+        <p:style>
+          <a:lnRef idx="1">
+            <a:schemeClr val="accent1"/>
+          </a:lnRef>
+          <a:fillRef idx="3">
+            <a:schemeClr val="accent1"/>
+          </a:fillRef>
+          <a:effectRef idx="2">
+            <a:schemeClr val="accent1"/>
+          </a:effectRef>
+          <a:fontRef idx="minor">
+            <a:schemeClr val="lt1"/>
+          </a:fontRef>
+        </p:style>
+        <p:txBody>
+          <a:bodyPr rtlCol="0" anchor="ctr"/>
+          <a:lstStyle/>
+          <a:p>
+            <a:pPr algn="ctr"/>
+          </a:p>
+        </p:txBody>
+      </p:sp>
+      <p:sp>
+        <p:nvSpPr>
+          <p:cNvPr id="28" name="TextBox 27"/>
+          <p:cNvSpPr txBox="1"/>
+          <p:nvPr/>
+        </p:nvSpPr>
+        <p:spPr>
+          <a:xfrm>
+            <a:off x="6492240" y="4956048"/>
+            <a:ext cx="1645920" cy="457200"/>
+          </a:xfrm>
+          <a:prstGeom prst="rect">
+            <a:avLst/>
+          </a:prstGeom>
+          <a:noFill/>
+        </p:spPr>
+        <p:txBody>
+          <a:bodyPr wrap="none">
+            <a:spAutoFit/>
+          </a:bodyPr>
+          <a:lstStyle/>
+          <a:p>
+            <a:pPr>
+              <a:defRPr sz="1500" b="1">
+                <a:solidFill>
+                  <a:srgbClr val="566373"/>
+                </a:solidFill>
+              </a:defRPr>
+            </a:pPr>
+            <a:r>
+              <a:t>Health</a:t>
+            </a:r>
+          </a:p>
+        </p:txBody>
+      </p:sp>
+      <p:sp>
+        <p:nvSpPr>
+          <p:cNvPr id="29" name="TextBox 28"/>
+          <p:cNvSpPr txBox="1"/>
+          <p:nvPr/>
+        </p:nvSpPr>
+        <p:spPr>
+          <a:xfrm>
+            <a:off x="8092440" y="4956048"/>
+            <a:ext cx="3017520" cy="502920"/>
+          </a:xfrm>
+          <a:prstGeom prst="rect">
+            <a:avLst/>
+          </a:prstGeom>
+          <a:noFill/>
+        </p:spPr>
+        <p:txBody>
+          <a:bodyPr wrap="none">
+            <a:spAutoFit/>
+          </a:bodyPr>
+          <a:lstStyle/>
+          <a:p>
+            <a:pPr>
+              <a:defRPr sz="1700" b="1">
+                <a:solidFill>
+                  <a:srgbClr val="0E1827"/>
+                </a:solidFill>
+              </a:defRPr>
+            </a:pPr>
+            <a:r>
+              <a:t>HEALTHY</a:t>
+            </a:r>
+          </a:p>
+        </p:txBody>
+      </p:sp>
+      <p:sp>
+        <p:nvSpPr>
+          <p:cNvPr id="30" name="TextBox 29"/>
+          <p:cNvSpPr txBox="1"/>
+          <p:nvPr/>
+        </p:nvSpPr>
+        <p:spPr>
+          <a:xfrm>
+            <a:off x="868680" y="5760720"/>
+            <a:ext cx="10515600" cy="365760"/>
+          </a:xfrm>
+          <a:prstGeom prst="rect">
+            <a:avLst/>
+          </a:prstGeom>
+          <a:noFill/>
+        </p:spPr>
+        <p:txBody>
+          <a:bodyPr wrap="none">
+            <a:spAutoFit/>
+          </a:bodyPr>
+          <a:lstStyle/>
+          <a:p>
+            <a:pPr algn="ctr">
+              <a:defRPr sz="1500">
+                <a:solidFill>
+                  <a:srgbClr val="26915E"/>
+                </a:solidFill>
+              </a:defRPr>
+            </a:pPr>
+            <a:r>
+              <a:t>Process search: query “bash” → PIDs 330 and 633 (2 matches)</a:t>
+            </a:r>
+          </a:p>
+        </p:txBody>
+      </p:sp>
+      <p:sp>
+        <p:nvSpPr>
+          <p:cNvPr id="31" name="TextBox 30"/>
+          <p:cNvSpPr txBox="1"/>
+          <p:nvPr/>
+        </p:nvSpPr>
+        <p:spPr>
+          <a:xfrm>
+            <a:off x="640080" y="6492240"/>
+            <a:ext cx="10972800" cy="228600"/>
+          </a:xfrm>
+          <a:prstGeom prst="rect">
+            <a:avLst/>
+          </a:prstGeom>
+          <a:noFill/>
+        </p:spPr>
+        <p:txBody>
+          <a:bodyPr wrap="none">
+            <a:spAutoFit/>
+          </a:bodyPr>
+          <a:lstStyle/>
+          <a:p>
+            <a:pPr>
+              <a:defRPr sz="900">
+                <a:solidFill>
+                  <a:srgbClr val="566373"/>
+                </a:solidFill>
+              </a:defRPr>
+            </a:pPr>
+            <a:r>
+              <a:t>SysGuard • Linux System Health Monitor                               8</a:t>
             </a:r>
           </a:p>
         </p:txBody>
@@ -4623,103 +9728,367 @@
       <p:grpSpPr/>
       <p:sp>
         <p:nvSpPr>
-          <p:cNvPr id="2" name="Title 1"/>
-          <p:cNvSpPr>
-            <a:spLocks noGrp="1"/>
-          </p:cNvSpPr>
-          <p:nvPr>
-            <p:ph type="title"/>
-          </p:nvPr>
-        </p:nvSpPr>
-        <p:spPr/>
-        <p:txBody>
-          <a:bodyPr/>
-          <a:lstStyle/>
-          <a:p>
-            <a:r>
-              <a:t>8. Health Monitoring</a:t>
-            </a:r>
-          </a:p>
-        </p:txBody>
-      </p:sp>
-      <p:sp>
-        <p:nvSpPr>
-          <p:cNvPr id="3" name="Content Placeholder 2"/>
-          <p:cNvSpPr>
-            <a:spLocks noGrp="1"/>
-          </p:cNvSpPr>
-          <p:nvPr>
-            <p:ph idx="1"/>
-          </p:nvPr>
-        </p:nvSpPr>
-        <p:spPr/>
-        <p:txBody>
-          <a:bodyPr/>
-          <a:lstStyle/>
-          <a:p>
-            <a:pPr>
-              <a:defRPr sz="2000"/>
-            </a:pPr>
-            <a:r>
-              <a:t>CPU &lt; 75%      → Normal</a:t>
-            </a:r>
-          </a:p>
-          <a:p>
-            <a:pPr>
-              <a:defRPr sz="2000"/>
-            </a:pPr>
-            <a:r>
-              <a:t>CPU 75–89%      → Warning</a:t>
-            </a:r>
-          </a:p>
-          <a:p>
-            <a:pPr>
-              <a:defRPr sz="2000"/>
-            </a:pPr>
-            <a:r>
-              <a:t>CPU ≥ 90%       → Critical</a:t>
-            </a:r>
-          </a:p>
-          <a:p>
-            <a:pPr>
-              <a:defRPr sz="2000"/>
-            </a:pPr>
-          </a:p>
-          <a:p>
-            <a:pPr>
-              <a:defRPr sz="2000"/>
-            </a:pPr>
-            <a:r>
-              <a:t>Memory and Disk use similar thresholds.</a:t>
-            </a:r>
-          </a:p>
-          <a:p>
-            <a:pPr>
-              <a:defRPr sz="2000"/>
-            </a:pPr>
-            <a:r>
-              <a:t>Load average is also considered.</a:t>
-            </a:r>
-          </a:p>
-          <a:p>
-            <a:pPr>
-              <a:defRPr sz="2000"/>
-            </a:pPr>
-          </a:p>
-          <a:p>
-            <a:pPr>
-              <a:defRPr sz="2000"/>
-            </a:pPr>
-            <a:r>
-              <a:t>Final status:</a:t>
-            </a:r>
-          </a:p>
-          <a:p>
-            <a:pPr>
-              <a:defRPr sz="2000"/>
-            </a:pPr>
-            <a:r>
-              <a:t>HEALTHY / WARNING / CRITICAL</a:t>
+          <p:cNvPr id="2" name="Rectangle 1"/>
+          <p:cNvSpPr/>
+          <p:nvPr/>
+        </p:nvSpPr>
+        <p:spPr>
+          <a:xfrm>
+            <a:off x="0" y="0"/>
+            <a:ext cx="12191695" cy="6858000"/>
+          </a:xfrm>
+          <a:prstGeom prst="rect">
+            <a:avLst/>
+          </a:prstGeom>
+          <a:solidFill>
+            <a:srgbClr val="FFFFFF"/>
+          </a:solidFill>
+          <a:ln>
+            <a:noFill/>
+          </a:ln>
+        </p:spPr>
+        <p:style>
+          <a:lnRef idx="1">
+            <a:schemeClr val="accent1"/>
+          </a:lnRef>
+          <a:fillRef idx="3">
+            <a:schemeClr val="accent1"/>
+          </a:fillRef>
+          <a:effectRef idx="2">
+            <a:schemeClr val="accent1"/>
+          </a:effectRef>
+          <a:fontRef idx="minor">
+            <a:schemeClr val="lt1"/>
+          </a:fontRef>
+        </p:style>
+        <p:txBody>
+          <a:bodyPr rtlCol="0" anchor="ctr"/>
+          <a:lstStyle/>
+          <a:p>
+            <a:pPr algn="ctr"/>
+          </a:p>
+        </p:txBody>
+      </p:sp>
+      <p:sp>
+        <p:nvSpPr>
+          <p:cNvPr id="3" name="Rectangle 2"/>
+          <p:cNvSpPr/>
+          <p:nvPr/>
+        </p:nvSpPr>
+        <p:spPr>
+          <a:xfrm>
+            <a:off x="0" y="0"/>
+            <a:ext cx="12191695" cy="201168"/>
+          </a:xfrm>
+          <a:prstGeom prst="rect">
+            <a:avLst/>
+          </a:prstGeom>
+          <a:solidFill>
+            <a:srgbClr val="2A69BA"/>
+          </a:solidFill>
+          <a:ln>
+            <a:noFill/>
+          </a:ln>
+        </p:spPr>
+        <p:style>
+          <a:lnRef idx="1">
+            <a:schemeClr val="accent1"/>
+          </a:lnRef>
+          <a:fillRef idx="3">
+            <a:schemeClr val="accent1"/>
+          </a:fillRef>
+          <a:effectRef idx="2">
+            <a:schemeClr val="accent1"/>
+          </a:effectRef>
+          <a:fontRef idx="minor">
+            <a:schemeClr val="lt1"/>
+          </a:fontRef>
+        </p:style>
+        <p:txBody>
+          <a:bodyPr rtlCol="0" anchor="ctr"/>
+          <a:lstStyle/>
+          <a:p>
+            <a:pPr algn="ctr"/>
+          </a:p>
+        </p:txBody>
+      </p:sp>
+      <p:sp>
+        <p:nvSpPr>
+          <p:cNvPr id="4" name="TextBox 3"/>
+          <p:cNvSpPr txBox="1"/>
+          <p:nvPr/>
+        </p:nvSpPr>
+        <p:spPr>
+          <a:xfrm>
+            <a:off x="640080" y="502920"/>
+            <a:ext cx="10881360" cy="640080"/>
+          </a:xfrm>
+          <a:prstGeom prst="rect">
+            <a:avLst/>
+          </a:prstGeom>
+          <a:noFill/>
+        </p:spPr>
+        <p:txBody>
+          <a:bodyPr wrap="none">
+            <a:spAutoFit/>
+          </a:bodyPr>
+          <a:lstStyle/>
+          <a:p>
+            <a:pPr>
+              <a:defRPr sz="2800" b="1">
+                <a:solidFill>
+                  <a:srgbClr val="0E1827"/>
+                </a:solidFill>
+              </a:defRPr>
+            </a:pPr>
+            <a:r>
+              <a:t>8. Device Driver Component</a:t>
+            </a:r>
+          </a:p>
+        </p:txBody>
+      </p:sp>
+      <p:sp>
+        <p:nvSpPr>
+          <p:cNvPr id="5" name="TextBox 4"/>
+          <p:cNvSpPr txBox="1"/>
+          <p:nvPr/>
+        </p:nvSpPr>
+        <p:spPr>
+          <a:xfrm>
+            <a:off x="658368" y="1143000"/>
+            <a:ext cx="10789920" cy="411480"/>
+          </a:xfrm>
+          <a:prstGeom prst="rect">
+            <a:avLst/>
+          </a:prstGeom>
+          <a:noFill/>
+        </p:spPr>
+        <p:txBody>
+          <a:bodyPr wrap="none">
+            <a:spAutoFit/>
+          </a:bodyPr>
+          <a:lstStyle/>
+          <a:p>
+            <a:pPr>
+              <a:defRPr sz="1400">
+                <a:solidFill>
+                  <a:srgbClr val="566373"/>
+                </a:solidFill>
+              </a:defRPr>
+            </a:pPr>
+            <a:r>
+              <a:t>Kernel-space concept</a:t>
+            </a:r>
+          </a:p>
+        </p:txBody>
+      </p:sp>
+      <p:sp>
+        <p:nvSpPr>
+          <p:cNvPr id="6" name="TextBox 5"/>
+          <p:cNvSpPr txBox="1"/>
+          <p:nvPr/>
+        </p:nvSpPr>
+        <p:spPr>
+          <a:xfrm>
+            <a:off x="822960" y="1554480"/>
+            <a:ext cx="10424160" cy="4389120"/>
+          </a:xfrm>
+          <a:prstGeom prst="rect">
+            <a:avLst/>
+          </a:prstGeom>
+          <a:noFill/>
+        </p:spPr>
+        <p:txBody>
+          <a:bodyPr wrap="square">
+            <a:spAutoFit/>
+          </a:bodyPr>
+          <a:lstStyle/>
+          <a:p>
+            <a:pPr>
+              <a:spcAft>
+                <a:spcPts val="1000"/>
+              </a:spcAft>
+              <a:defRPr sz="1800">
+                <a:solidFill>
+                  <a:srgbClr val="1C2536"/>
+                </a:solidFill>
+              </a:defRPr>
+            </a:pPr>
+            <a:r>
+              <a:t>Source: driver/sysguard_driver.c</a:t>
+            </a:r>
+          </a:p>
+          <a:p>
+            <a:pPr>
+              <a:spcAft>
+                <a:spcPts val="1000"/>
+              </a:spcAft>
+              <a:defRPr sz="1800">
+                <a:solidFill>
+                  <a:srgbClr val="1C2536"/>
+                </a:solidFill>
+              </a:defRPr>
+            </a:pPr>
+            <a:r>
+              <a:t>Uses the Linux misc-device framework.</a:t>
+            </a:r>
+          </a:p>
+          <a:p>
+            <a:pPr>
+              <a:spcAft>
+                <a:spcPts val="1000"/>
+              </a:spcAft>
+              <a:defRPr sz="1800">
+                <a:solidFill>
+                  <a:srgbClr val="1C2536"/>
+                </a:solidFill>
+              </a:defRPr>
+            </a:pPr>
+            <a:r>
+              <a:t>Designed to expose a read-only character device: /dev/sysguard</a:t>
+            </a:r>
+          </a:p>
+          <a:p>
+            <a:pPr>
+              <a:spcAft>
+                <a:spcPts val="1000"/>
+              </a:spcAft>
+              <a:defRPr sz="1800">
+                <a:solidFill>
+                  <a:srgbClr val="1C2536"/>
+                </a:solidFill>
+              </a:defRPr>
+            </a:pPr>
+            <a:r>
+              <a:t>Demonstrates module initialization, device registration, file operations and copy_to_user().</a:t>
+            </a:r>
+          </a:p>
+          <a:p>
+            <a:pPr>
+              <a:spcAft>
+                <a:spcPts val="1000"/>
+              </a:spcAft>
+              <a:defRPr sz="1800">
+                <a:solidFill>
+                  <a:srgbClr val="1C2536"/>
+                </a:solidFill>
+              </a:defRPr>
+            </a:pPr>
+            <a:r>
+              <a:t>Current WSL environment does not expose the matching kernel build tree, so runtime driver loading was not validated.</a:t>
+            </a:r>
+          </a:p>
+        </p:txBody>
+      </p:sp>
+      <p:sp>
+        <p:nvSpPr>
+          <p:cNvPr id="7" name="Rounded Rectangle 6"/>
+          <p:cNvSpPr/>
+          <p:nvPr/>
+        </p:nvSpPr>
+        <p:spPr>
+          <a:xfrm>
+            <a:off x="7680960" y="5120640"/>
+            <a:ext cx="3291840" cy="640080"/>
+          </a:xfrm>
+          <a:prstGeom prst="roundRect">
+            <a:avLst/>
+          </a:prstGeom>
+          <a:solidFill>
+            <a:srgbClr val="DD892A"/>
+          </a:solidFill>
+          <a:ln>
+            <a:noFill/>
+          </a:ln>
+        </p:spPr>
+        <p:style>
+          <a:lnRef idx="1">
+            <a:schemeClr val="accent1"/>
+          </a:lnRef>
+          <a:fillRef idx="3">
+            <a:schemeClr val="accent1"/>
+          </a:fillRef>
+          <a:effectRef idx="2">
+            <a:schemeClr val="accent1"/>
+          </a:effectRef>
+          <a:fontRef idx="minor">
+            <a:schemeClr val="lt1"/>
+          </a:fontRef>
+        </p:style>
+        <p:txBody>
+          <a:bodyPr rtlCol="0" anchor="ctr"/>
+          <a:lstStyle/>
+          <a:p>
+            <a:pPr algn="ctr"/>
+          </a:p>
+        </p:txBody>
+      </p:sp>
+      <p:sp>
+        <p:nvSpPr>
+          <p:cNvPr id="8" name="TextBox 7"/>
+          <p:cNvSpPr txBox="1"/>
+          <p:nvPr/>
+        </p:nvSpPr>
+        <p:spPr>
+          <a:xfrm>
+            <a:off x="7818120" y="5239512"/>
+            <a:ext cx="3017520" cy="365760"/>
+          </a:xfrm>
+          <a:prstGeom prst="rect">
+            <a:avLst/>
+          </a:prstGeom>
+          <a:noFill/>
+        </p:spPr>
+        <p:txBody>
+          <a:bodyPr wrap="none">
+            <a:spAutoFit/>
+          </a:bodyPr>
+          <a:lstStyle/>
+          <a:p>
+            <a:pPr algn="ctr">
+              <a:defRPr sz="1500" b="1">
+                <a:solidFill>
+                  <a:srgbClr val="FFFFFF"/>
+                </a:solidFill>
+              </a:defRPr>
+            </a:pPr>
+            <a:r>
+              <a:t>Transparent WSL limitation</a:t>
+            </a:r>
+          </a:p>
+        </p:txBody>
+      </p:sp>
+      <p:sp>
+        <p:nvSpPr>
+          <p:cNvPr id="9" name="TextBox 8"/>
+          <p:cNvSpPr txBox="1"/>
+          <p:nvPr/>
+        </p:nvSpPr>
+        <p:spPr>
+          <a:xfrm>
+            <a:off x="640080" y="6492240"/>
+            <a:ext cx="10972800" cy="228600"/>
+          </a:xfrm>
+          <a:prstGeom prst="rect">
+            <a:avLst/>
+          </a:prstGeom>
+          <a:noFill/>
+        </p:spPr>
+        <p:txBody>
+          <a:bodyPr wrap="none">
+            <a:spAutoFit/>
+          </a:bodyPr>
+          <a:lstStyle/>
+          <a:p>
+            <a:pPr>
+              <a:defRPr sz="900">
+                <a:solidFill>
+                  <a:srgbClr val="566373"/>
+                </a:solidFill>
+              </a:defRPr>
+            </a:pPr>
+            <a:r>
+              <a:t>SysGuard • Linux System Health Monitor                               9</a:t>
             </a:r>
           </a:p>
         </p:txBody>

--- a/SysGuard_Presentation.pptx
+++ b/SysGuard_Presentation.pptx
@@ -16,10 +16,8 @@
     <p:sldId id="264" r:id="rId15"/>
     <p:sldId id="265" r:id="rId16"/>
     <p:sldId id="266" r:id="rId17"/>
-    <p:sldId id="267" r:id="rId18"/>
-    <p:sldId id="268" r:id="rId19"/>
   </p:sldIdLst>
-  <p:sldSz cx="12191695" cy="6858000" type="screen4x3"/>
+  <p:sldSz cx="12191999" cy="6858000" type="screen4x3"/>
   <p:notesSz cx="6858000" cy="9144000"/>
   <p:defaultTextStyle>
     <a:defPPr>
@@ -3109,13 +3107,13 @@
         <p:spPr>
           <a:xfrm>
             <a:off x="0" y="0"/>
-            <a:ext cx="12191695" cy="6858000"/>
+            <a:ext cx="12191999" cy="6858000"/>
           </a:xfrm>
           <a:prstGeom prst="rect">
             <a:avLst/>
           </a:prstGeom>
           <a:solidFill>
-            <a:srgbClr val="FFFFFF"/>
+            <a:srgbClr val="0F172A"/>
           </a:solidFill>
           <a:ln>
             <a:noFill/>
@@ -3152,13 +3150,13 @@
         <p:spPr>
           <a:xfrm>
             <a:off x="0" y="0"/>
-            <a:ext cx="12191695" cy="201168"/>
+            <a:ext cx="12191999" cy="164592"/>
           </a:xfrm>
           <a:prstGeom prst="rect">
             <a:avLst/>
           </a:prstGeom>
           <a:solidFill>
-            <a:srgbClr val="2A69BA"/>
+            <a:srgbClr val="2563EB"/>
           </a:solidFill>
           <a:ln>
             <a:noFill/>
@@ -3194,17 +3192,19 @@
         </p:nvSpPr>
         <p:spPr>
           <a:xfrm>
-            <a:off x="731520" y="1417320"/>
-            <a:ext cx="10698480" cy="4114800"/>
+            <a:off x="822960" y="1234440"/>
+            <a:ext cx="10561320" cy="4343400"/>
           </a:xfrm>
           <a:prstGeom prst="roundRect">
             <a:avLst/>
           </a:prstGeom>
           <a:solidFill>
-            <a:srgbClr val="0E1827"/>
+            <a:srgbClr val="17233B"/>
           </a:solidFill>
           <a:ln>
-            <a:noFill/>
+            <a:solidFill>
+              <a:srgbClr val="293A58"/>
+            </a:solidFill>
           </a:ln>
         </p:spPr>
         <p:style>
@@ -3237,8 +3237,8 @@
         </p:nvSpPr>
         <p:spPr>
           <a:xfrm>
-            <a:off x="1143000" y="2011680"/>
-            <a:ext cx="9875520" cy="914400"/>
+            <a:off x="1234440" y="1828800"/>
+            <a:ext cx="9601200" cy="822960"/>
           </a:xfrm>
           <a:prstGeom prst="rect">
             <a:avLst/>
@@ -3252,7 +3252,7 @@
           <a:lstStyle/>
           <a:p>
             <a:pPr>
-              <a:defRPr sz="4400" b="1">
+              <a:defRPr sz="4800" b="1">
                 <a:solidFill>
                   <a:srgbClr val="FFFFFF"/>
                 </a:solidFill>
@@ -3272,8 +3272,8 @@
         </p:nvSpPr>
         <p:spPr>
           <a:xfrm>
-            <a:off x="1161288" y="2834640"/>
-            <a:ext cx="9418320" cy="731520"/>
+            <a:off x="1252728" y="2606040"/>
+            <a:ext cx="9509760" cy="640080"/>
           </a:xfrm>
           <a:prstGeom prst="rect">
             <a:avLst/>
@@ -3287,9 +3287,9 @@
           <a:lstStyle/>
           <a:p>
             <a:pPr>
-              <a:defRPr sz="2600">
-                <a:solidFill>
-                  <a:srgbClr val="BEDCFA"/>
+              <a:defRPr sz="2800">
+                <a:solidFill>
+                  <a:srgbClr val="BFDBFE"/>
                 </a:solidFill>
               </a:defRPr>
             </a:pPr>
@@ -3307,7 +3307,7 @@
         </p:nvSpPr>
         <p:spPr>
           <a:xfrm>
-            <a:off x="1161288" y="3794760"/>
+            <a:off x="1271016" y="3429000"/>
             <a:ext cx="9326880" cy="914400"/>
           </a:xfrm>
           <a:prstGeom prst="rect">
@@ -3329,7 +3329,7 @@
               </a:defRPr>
             </a:pPr>
             <a:r>
-              <a:t>C++17  •  Linux  •  System Programming  •  Process Monitoring  •  Character Driver Concepts</a:t>
+              <a:t>C++17  •  Linux  •  System Programming  •  Process Monitoring</a:t>
             </a:r>
           </a:p>
         </p:txBody>
@@ -3342,8 +3342,8 @@
         </p:nvSpPr>
         <p:spPr>
           <a:xfrm>
-            <a:off x="640080" y="6492240"/>
-            <a:ext cx="10972800" cy="228600"/>
+            <a:off x="1280160" y="4526280"/>
+            <a:ext cx="7772400" cy="457200"/>
           </a:xfrm>
           <a:prstGeom prst="rect">
             <a:avLst/>
@@ -3357,14 +3357,49 @@
           <a:lstStyle/>
           <a:p>
             <a:pPr>
-              <a:defRPr sz="900">
-                <a:solidFill>
-                  <a:srgbClr val="566373"/>
-                </a:solidFill>
-              </a:defRPr>
-            </a:pPr>
-            <a:r>
-              <a:t>SysGuard • Linux System Health Monitor                               1</a:t>
+              <a:defRPr sz="1500">
+                <a:solidFill>
+                  <a:srgbClr val="CBD5E1"/>
+                </a:solidFill>
+              </a:defRPr>
+            </a:pPr>
+            <a:r>
+              <a:t>Sanish Panda  |  B.Tech CSE  |  Capstone Project</a:t>
+            </a:r>
+          </a:p>
+        </p:txBody>
+      </p:sp>
+      <p:sp>
+        <p:nvSpPr>
+          <p:cNvPr id="9" name="TextBox 8"/>
+          <p:cNvSpPr txBox="1"/>
+          <p:nvPr/>
+        </p:nvSpPr>
+        <p:spPr>
+          <a:xfrm>
+            <a:off x="640080" y="6473952"/>
+            <a:ext cx="10972800" cy="201168"/>
+          </a:xfrm>
+          <a:prstGeom prst="rect">
+            <a:avLst/>
+          </a:prstGeom>
+          <a:noFill/>
+        </p:spPr>
+        <p:txBody>
+          <a:bodyPr wrap="none">
+            <a:spAutoFit/>
+          </a:bodyPr>
+          <a:lstStyle/>
+          <a:p>
+            <a:pPr>
+              <a:defRPr sz="850">
+                <a:solidFill>
+                  <a:srgbClr val="94A3B8"/>
+                </a:solidFill>
+              </a:defRPr>
+            </a:pPr>
+            <a:r>
+              <a:t>SysGuard • Linux System Health Monitor                                              1</a:t>
             </a:r>
           </a:p>
         </p:txBody>
@@ -3396,13 +3431,13 @@
         <p:spPr>
           <a:xfrm>
             <a:off x="0" y="0"/>
-            <a:ext cx="12191695" cy="6858000"/>
+            <a:ext cx="12191999" cy="6858000"/>
           </a:xfrm>
           <a:prstGeom prst="rect">
             <a:avLst/>
           </a:prstGeom>
           <a:solidFill>
-            <a:srgbClr val="FFFFFF"/>
+            <a:srgbClr val="F5F7FA"/>
           </a:solidFill>
           <a:ln>
             <a:noFill/>
@@ -3439,13 +3474,13 @@
         <p:spPr>
           <a:xfrm>
             <a:off x="0" y="0"/>
-            <a:ext cx="12191695" cy="201168"/>
+            <a:ext cx="12191999" cy="164592"/>
           </a:xfrm>
           <a:prstGeom prst="rect">
             <a:avLst/>
           </a:prstGeom>
           <a:solidFill>
-            <a:srgbClr val="2A69BA"/>
+            <a:srgbClr val="2563EB"/>
           </a:solidFill>
           <a:ln>
             <a:noFill/>
@@ -3481,8 +3516,8 @@
         </p:nvSpPr>
         <p:spPr>
           <a:xfrm>
-            <a:off x="640080" y="502920"/>
-            <a:ext cx="10881360" cy="640080"/>
+            <a:off x="640080" y="438912"/>
+            <a:ext cx="10972800" cy="566928"/>
           </a:xfrm>
           <a:prstGeom prst="rect">
             <a:avLst/>
@@ -3498,12 +3533,12 @@
             <a:pPr>
               <a:defRPr sz="2800" b="1">
                 <a:solidFill>
-                  <a:srgbClr val="0E1827"/>
-                </a:solidFill>
-              </a:defRPr>
-            </a:pPr>
-            <a:r>
-              <a:t>9. Testing</a:t>
+                  <a:srgbClr val="0F172A"/>
+                </a:solidFill>
+              </a:defRPr>
+            </a:pPr>
+            <a:r>
+              <a:t>9. Testing &amp; Results</a:t>
             </a:r>
           </a:p>
         </p:txBody>
@@ -3516,8 +3551,8 @@
         </p:nvSpPr>
         <p:spPr>
           <a:xfrm>
-            <a:off x="658368" y="1143000"/>
-            <a:ext cx="10789920" cy="411480"/>
+            <a:off x="658368" y="987552"/>
+            <a:ext cx="10698480" cy="365760"/>
           </a:xfrm>
           <a:prstGeom prst="rect">
             <a:avLst/>
@@ -3531,14 +3566,14 @@
           <a:lstStyle/>
           <a:p>
             <a:pPr>
-              <a:defRPr sz="1400">
-                <a:solidFill>
-                  <a:srgbClr val="566373"/>
-                </a:solidFill>
-              </a:defRPr>
-            </a:pPr>
-            <a:r>
-              <a:t>Implemented checks</a:t>
+              <a:defRPr sz="1300">
+                <a:solidFill>
+                  <a:srgbClr val="64748B"/>
+                </a:solidFill>
+              </a:defRPr>
+            </a:pPr>
+            <a:r>
+              <a:t>What was actually verified</a:t>
             </a:r>
           </a:p>
         </p:txBody>
@@ -3551,8 +3586,8 @@
         </p:nvSpPr>
         <p:spPr>
           <a:xfrm>
-            <a:off x="1097280" y="1417320"/>
-            <a:ext cx="6675120" cy="347472"/>
+            <a:off x="868680" y="1325880"/>
+            <a:ext cx="6035040" cy="310896"/>
           </a:xfrm>
           <a:prstGeom prst="rect">
             <a:avLst/>
@@ -3566,9 +3601,9 @@
           <a:lstStyle/>
           <a:p>
             <a:pPr>
-              <a:defRPr sz="1600">
-                <a:solidFill>
-                  <a:srgbClr val="1C2536"/>
+              <a:defRPr sz="1450">
+                <a:solidFill>
+                  <a:srgbClr val="1F2937"/>
                 </a:solidFill>
               </a:defRPr>
             </a:pPr>
@@ -3586,14 +3621,14 @@
         </p:nvSpPr>
         <p:spPr>
           <a:xfrm>
-            <a:off x="8229600" y="1399032"/>
-            <a:ext cx="2194560" cy="384048"/>
+            <a:off x="6949440" y="1316736"/>
+            <a:ext cx="1920240" cy="320040"/>
           </a:xfrm>
           <a:prstGeom prst="roundRect">
             <a:avLst/>
           </a:prstGeom>
           <a:solidFill>
-            <a:srgbClr val="26915E"/>
+            <a:srgbClr val="16A34A"/>
           </a:solidFill>
           <a:ln>
             <a:noFill/>
@@ -3629,8 +3664,8 @@
         </p:nvSpPr>
         <p:spPr>
           <a:xfrm>
-            <a:off x="8321040" y="1435608"/>
-            <a:ext cx="2011680" cy="274320"/>
+            <a:off x="7013448" y="1353312"/>
+            <a:ext cx="1783080" cy="228600"/>
           </a:xfrm>
           <a:prstGeom prst="rect">
             <a:avLst/>
@@ -3644,7 +3679,7 @@
           <a:lstStyle/>
           <a:p>
             <a:pPr algn="ctr">
-              <a:defRPr sz="1300" b="1">
+              <a:defRPr sz="1150" b="1">
                 <a:solidFill>
                   <a:srgbClr val="FFFFFF"/>
                 </a:solidFill>
@@ -3664,8 +3699,8 @@
         </p:nvSpPr>
         <p:spPr>
           <a:xfrm>
-            <a:off x="1097280" y="1984248"/>
-            <a:ext cx="6675120" cy="347472"/>
+            <a:off x="868680" y="1828800"/>
+            <a:ext cx="6035040" cy="310896"/>
           </a:xfrm>
           <a:prstGeom prst="rect">
             <a:avLst/>
@@ -3679,9 +3714,9 @@
           <a:lstStyle/>
           <a:p>
             <a:pPr>
-              <a:defRPr sz="1600">
-                <a:solidFill>
-                  <a:srgbClr val="1C2536"/>
+              <a:defRPr sz="1450">
+                <a:solidFill>
+                  <a:srgbClr val="1F2937"/>
                 </a:solidFill>
               </a:defRPr>
             </a:pPr>
@@ -3699,14 +3734,14 @@
         </p:nvSpPr>
         <p:spPr>
           <a:xfrm>
-            <a:off x="8229600" y="1965960"/>
-            <a:ext cx="2194560" cy="384048"/>
+            <a:off x="6949440" y="1819656"/>
+            <a:ext cx="1920240" cy="320040"/>
           </a:xfrm>
           <a:prstGeom prst="roundRect">
             <a:avLst/>
           </a:prstGeom>
           <a:solidFill>
-            <a:srgbClr val="26915E"/>
+            <a:srgbClr val="16A34A"/>
           </a:solidFill>
           <a:ln>
             <a:noFill/>
@@ -3742,8 +3777,8 @@
         </p:nvSpPr>
         <p:spPr>
           <a:xfrm>
-            <a:off x="8321040" y="2002536"/>
-            <a:ext cx="2011680" cy="274320"/>
+            <a:off x="7013448" y="1856231"/>
+            <a:ext cx="1783080" cy="228600"/>
           </a:xfrm>
           <a:prstGeom prst="rect">
             <a:avLst/>
@@ -3757,7 +3792,7 @@
           <a:lstStyle/>
           <a:p>
             <a:pPr algn="ctr">
-              <a:defRPr sz="1300" b="1">
+              <a:defRPr sz="1150" b="1">
                 <a:solidFill>
                   <a:srgbClr val="FFFFFF"/>
                 </a:solidFill>
@@ -3777,8 +3812,8 @@
         </p:nvSpPr>
         <p:spPr>
           <a:xfrm>
-            <a:off x="1097280" y="2551176"/>
-            <a:ext cx="6675120" cy="347472"/>
+            <a:off x="868680" y="2331720"/>
+            <a:ext cx="6035040" cy="310896"/>
           </a:xfrm>
           <a:prstGeom prst="rect">
             <a:avLst/>
@@ -3792,9 +3827,9 @@
           <a:lstStyle/>
           <a:p>
             <a:pPr>
-              <a:defRPr sz="1600">
-                <a:solidFill>
-                  <a:srgbClr val="1C2536"/>
+              <a:defRPr sz="1450">
+                <a:solidFill>
+                  <a:srgbClr val="1F2937"/>
                 </a:solidFill>
               </a:defRPr>
             </a:pPr>
@@ -3812,14 +3847,14 @@
         </p:nvSpPr>
         <p:spPr>
           <a:xfrm>
-            <a:off x="8229600" y="2532888"/>
-            <a:ext cx="2194560" cy="384048"/>
+            <a:off x="6949440" y="2322576"/>
+            <a:ext cx="1920240" cy="320040"/>
           </a:xfrm>
           <a:prstGeom prst="roundRect">
             <a:avLst/>
           </a:prstGeom>
           <a:solidFill>
-            <a:srgbClr val="26915E"/>
+            <a:srgbClr val="16A34A"/>
           </a:solidFill>
           <a:ln>
             <a:noFill/>
@@ -3855,8 +3890,8 @@
         </p:nvSpPr>
         <p:spPr>
           <a:xfrm>
-            <a:off x="8321040" y="2569464"/>
-            <a:ext cx="2011680" cy="274320"/>
+            <a:off x="7013448" y="2359151"/>
+            <a:ext cx="1783080" cy="228600"/>
           </a:xfrm>
           <a:prstGeom prst="rect">
             <a:avLst/>
@@ -3870,7 +3905,7 @@
           <a:lstStyle/>
           <a:p>
             <a:pPr algn="ctr">
-              <a:defRPr sz="1300" b="1">
+              <a:defRPr sz="1150" b="1">
                 <a:solidFill>
                   <a:srgbClr val="FFFFFF"/>
                 </a:solidFill>
@@ -3890,8 +3925,8 @@
         </p:nvSpPr>
         <p:spPr>
           <a:xfrm>
-            <a:off x="1097280" y="3118104"/>
-            <a:ext cx="6675120" cy="347472"/>
+            <a:off x="868680" y="2834640"/>
+            <a:ext cx="6035040" cy="310896"/>
           </a:xfrm>
           <a:prstGeom prst="rect">
             <a:avLst/>
@@ -3905,9 +3940,9 @@
           <a:lstStyle/>
           <a:p>
             <a:pPr>
-              <a:defRPr sz="1600">
-                <a:solidFill>
-                  <a:srgbClr val="1C2536"/>
+              <a:defRPr sz="1450">
+                <a:solidFill>
+                  <a:srgbClr val="1F2937"/>
                 </a:solidFill>
               </a:defRPr>
             </a:pPr>
@@ -3925,14 +3960,14 @@
         </p:nvSpPr>
         <p:spPr>
           <a:xfrm>
-            <a:off x="8229600" y="3099816"/>
-            <a:ext cx="2194560" cy="384048"/>
+            <a:off x="6949440" y="2825496"/>
+            <a:ext cx="1920240" cy="320040"/>
           </a:xfrm>
           <a:prstGeom prst="roundRect">
             <a:avLst/>
           </a:prstGeom>
           <a:solidFill>
-            <a:srgbClr val="26915E"/>
+            <a:srgbClr val="16A34A"/>
           </a:solidFill>
           <a:ln>
             <a:noFill/>
@@ -3968,8 +4003,8 @@
         </p:nvSpPr>
         <p:spPr>
           <a:xfrm>
-            <a:off x="8321040" y="3136392"/>
-            <a:ext cx="2011680" cy="274320"/>
+            <a:off x="7013448" y="2862072"/>
+            <a:ext cx="1783080" cy="228600"/>
           </a:xfrm>
           <a:prstGeom prst="rect">
             <a:avLst/>
@@ -3983,7 +4018,7 @@
           <a:lstStyle/>
           <a:p>
             <a:pPr algn="ctr">
-              <a:defRPr sz="1300" b="1">
+              <a:defRPr sz="1150" b="1">
                 <a:solidFill>
                   <a:srgbClr val="FFFFFF"/>
                 </a:solidFill>
@@ -4003,8 +4038,8 @@
         </p:nvSpPr>
         <p:spPr>
           <a:xfrm>
-            <a:off x="1097280" y="3685032"/>
-            <a:ext cx="6675120" cy="347472"/>
+            <a:off x="868680" y="3337560"/>
+            <a:ext cx="6035040" cy="310896"/>
           </a:xfrm>
           <a:prstGeom prst="rect">
             <a:avLst/>
@@ -4018,9 +4053,9 @@
           <a:lstStyle/>
           <a:p>
             <a:pPr>
-              <a:defRPr sz="1600">
-                <a:solidFill>
-                  <a:srgbClr val="1C2536"/>
+              <a:defRPr sz="1450">
+                <a:solidFill>
+                  <a:srgbClr val="1F2937"/>
                 </a:solidFill>
               </a:defRPr>
             </a:pPr>
@@ -4038,14 +4073,14 @@
         </p:nvSpPr>
         <p:spPr>
           <a:xfrm>
-            <a:off x="8229600" y="3666744"/>
-            <a:ext cx="2194560" cy="384048"/>
+            <a:off x="6949440" y="3328416"/>
+            <a:ext cx="1920240" cy="320040"/>
           </a:xfrm>
           <a:prstGeom prst="roundRect">
             <a:avLst/>
           </a:prstGeom>
           <a:solidFill>
-            <a:srgbClr val="26915E"/>
+            <a:srgbClr val="16A34A"/>
           </a:solidFill>
           <a:ln>
             <a:noFill/>
@@ -4081,8 +4116,8 @@
         </p:nvSpPr>
         <p:spPr>
           <a:xfrm>
-            <a:off x="8321040" y="3703320"/>
-            <a:ext cx="2011680" cy="274320"/>
+            <a:off x="7013448" y="3364992"/>
+            <a:ext cx="1783080" cy="228600"/>
           </a:xfrm>
           <a:prstGeom prst="rect">
             <a:avLst/>
@@ -4096,7 +4131,7 @@
           <a:lstStyle/>
           <a:p>
             <a:pPr algn="ctr">
-              <a:defRPr sz="1300" b="1">
+              <a:defRPr sz="1150" b="1">
                 <a:solidFill>
                   <a:srgbClr val="FFFFFF"/>
                 </a:solidFill>
@@ -4116,8 +4151,8 @@
         </p:nvSpPr>
         <p:spPr>
           <a:xfrm>
-            <a:off x="1097280" y="4251960"/>
-            <a:ext cx="6675120" cy="347472"/>
+            <a:off x="868680" y="3840480"/>
+            <a:ext cx="6035040" cy="310896"/>
           </a:xfrm>
           <a:prstGeom prst="rect">
             <a:avLst/>
@@ -4131,9 +4166,9 @@
           <a:lstStyle/>
           <a:p>
             <a:pPr>
-              <a:defRPr sz="1600">
-                <a:solidFill>
-                  <a:srgbClr val="1C2536"/>
+              <a:defRPr sz="1450">
+                <a:solidFill>
+                  <a:srgbClr val="1F2937"/>
                 </a:solidFill>
               </a:defRPr>
             </a:pPr>
@@ -4151,14 +4186,14 @@
         </p:nvSpPr>
         <p:spPr>
           <a:xfrm>
-            <a:off x="8229600" y="4233672"/>
-            <a:ext cx="2194560" cy="384048"/>
+            <a:off x="6949440" y="3831336"/>
+            <a:ext cx="1920240" cy="320040"/>
           </a:xfrm>
           <a:prstGeom prst="roundRect">
             <a:avLst/>
           </a:prstGeom>
           <a:solidFill>
-            <a:srgbClr val="26915E"/>
+            <a:srgbClr val="16A34A"/>
           </a:solidFill>
           <a:ln>
             <a:noFill/>
@@ -4194,8 +4229,8 @@
         </p:nvSpPr>
         <p:spPr>
           <a:xfrm>
-            <a:off x="8321040" y="4270248"/>
-            <a:ext cx="2011680" cy="274320"/>
+            <a:off x="7013448" y="3867912"/>
+            <a:ext cx="1783080" cy="228600"/>
           </a:xfrm>
           <a:prstGeom prst="rect">
             <a:avLst/>
@@ -4209,7 +4244,7 @@
           <a:lstStyle/>
           <a:p>
             <a:pPr algn="ctr">
-              <a:defRPr sz="1300" b="1">
+              <a:defRPr sz="1150" b="1">
                 <a:solidFill>
                   <a:srgbClr val="FFFFFF"/>
                 </a:solidFill>
@@ -4229,8 +4264,8 @@
         </p:nvSpPr>
         <p:spPr>
           <a:xfrm>
-            <a:off x="1097280" y="4818888"/>
-            <a:ext cx="6675120" cy="347472"/>
+            <a:off x="868680" y="4343400"/>
+            <a:ext cx="6035040" cy="310896"/>
           </a:xfrm>
           <a:prstGeom prst="rect">
             <a:avLst/>
@@ -4244,14 +4279,14 @@
           <a:lstStyle/>
           <a:p>
             <a:pPr>
-              <a:defRPr sz="1600">
-                <a:solidFill>
-                  <a:srgbClr val="1C2536"/>
-                </a:solidFill>
-              </a:defRPr>
-            </a:pPr>
-            <a:r>
-              <a:t>Health snapshot log</a:t>
+              <a:defRPr sz="1450">
+                <a:solidFill>
+                  <a:srgbClr val="1F2937"/>
+                </a:solidFill>
+              </a:defRPr>
+            </a:pPr>
+            <a:r>
+              <a:t>Health snapshot logging</a:t>
             </a:r>
           </a:p>
         </p:txBody>
@@ -4264,14 +4299,14 @@
         </p:nvSpPr>
         <p:spPr>
           <a:xfrm>
-            <a:off x="8229600" y="4800600"/>
-            <a:ext cx="2194560" cy="384048"/>
+            <a:off x="6949440" y="4334256"/>
+            <a:ext cx="1920240" cy="320040"/>
           </a:xfrm>
           <a:prstGeom prst="roundRect">
             <a:avLst/>
           </a:prstGeom>
           <a:solidFill>
-            <a:srgbClr val="26915E"/>
+            <a:srgbClr val="16A34A"/>
           </a:solidFill>
           <a:ln>
             <a:noFill/>
@@ -4307,8 +4342,8 @@
         </p:nvSpPr>
         <p:spPr>
           <a:xfrm>
-            <a:off x="8321040" y="4837175"/>
-            <a:ext cx="2011680" cy="274320"/>
+            <a:off x="7013448" y="4370832"/>
+            <a:ext cx="1783080" cy="228600"/>
           </a:xfrm>
           <a:prstGeom prst="rect">
             <a:avLst/>
@@ -4322,7 +4357,7 @@
           <a:lstStyle/>
           <a:p>
             <a:pPr algn="ctr">
-              <a:defRPr sz="1300" b="1">
+              <a:defRPr sz="1150" b="1">
                 <a:solidFill>
                   <a:srgbClr val="FFFFFF"/>
                 </a:solidFill>
@@ -4342,8 +4377,8 @@
         </p:nvSpPr>
         <p:spPr>
           <a:xfrm>
-            <a:off x="1097280" y="5385816"/>
-            <a:ext cx="6675120" cy="347472"/>
+            <a:off x="868680" y="4846320"/>
+            <a:ext cx="6035040" cy="310896"/>
           </a:xfrm>
           <a:prstGeom prst="rect">
             <a:avLst/>
@@ -4357,14 +4392,14 @@
           <a:lstStyle/>
           <a:p>
             <a:pPr>
-              <a:defRPr sz="1600">
-                <a:solidFill>
-                  <a:srgbClr val="1C2536"/>
-                </a:solidFill>
-              </a:defRPr>
-            </a:pPr>
-            <a:r>
-              <a:t>Driver load in WSL2</a:t>
+              <a:defRPr sz="1450">
+                <a:solidFill>
+                  <a:srgbClr val="1F2937"/>
+                </a:solidFill>
+              </a:defRPr>
+            </a:pPr>
+            <a:r>
+              <a:t>Driver runtime test in WSL2</a:t>
             </a:r>
           </a:p>
         </p:txBody>
@@ -4377,14 +4412,14 @@
         </p:nvSpPr>
         <p:spPr>
           <a:xfrm>
-            <a:off x="8229600" y="5367528"/>
-            <a:ext cx="2194560" cy="384048"/>
+            <a:off x="6949440" y="4837176"/>
+            <a:ext cx="1920240" cy="320040"/>
           </a:xfrm>
           <a:prstGeom prst="roundRect">
             <a:avLst/>
           </a:prstGeom>
           <a:solidFill>
-            <a:srgbClr val="DD892A"/>
+            <a:srgbClr val="EA8A2A"/>
           </a:solidFill>
           <a:ln>
             <a:noFill/>
@@ -4420,8 +4455,8 @@
         </p:nvSpPr>
         <p:spPr>
           <a:xfrm>
-            <a:off x="8321040" y="5404103"/>
-            <a:ext cx="2011680" cy="274320"/>
+            <a:off x="7013448" y="4873752"/>
+            <a:ext cx="1783080" cy="228600"/>
           </a:xfrm>
           <a:prstGeom prst="rect">
             <a:avLst/>
@@ -4435,7 +4470,7 @@
           <a:lstStyle/>
           <a:p>
             <a:pPr algn="ctr">
-              <a:defRPr sz="1300" b="1">
+              <a:defRPr sz="1150" b="1">
                 <a:solidFill>
                   <a:srgbClr val="FFFFFF"/>
                 </a:solidFill>
@@ -4449,14 +4484,171 @@
       </p:sp>
       <p:sp>
         <p:nvSpPr>
-          <p:cNvPr id="30" name="TextBox 29"/>
-          <p:cNvSpPr txBox="1"/>
-          <p:nvPr/>
-        </p:nvSpPr>
-        <p:spPr>
-          <a:xfrm>
-            <a:off x="640080" y="6492240"/>
-            <a:ext cx="10972800" cy="228600"/>
+          <p:cNvPr id="30" name="Rounded Rectangle 29"/>
+          <p:cNvSpPr/>
+          <p:nvPr/>
+        </p:nvSpPr>
+        <p:spPr>
+          <a:xfrm>
+            <a:off x="9025128" y="1298448"/>
+            <a:ext cx="2386584" cy="1883664"/>
+          </a:xfrm>
+          <a:prstGeom prst="roundRect">
+            <a:avLst/>
+          </a:prstGeom>
+          <a:solidFill>
+            <a:srgbClr val="FFFFFF"/>
+          </a:solidFill>
+          <a:ln>
+            <a:solidFill>
+              <a:srgbClr val="D7DEE7"/>
+            </a:solidFill>
+          </a:ln>
+        </p:spPr>
+        <p:style>
+          <a:lnRef idx="1">
+            <a:schemeClr val="accent1"/>
+          </a:lnRef>
+          <a:fillRef idx="3">
+            <a:schemeClr val="accent1"/>
+          </a:fillRef>
+          <a:effectRef idx="2">
+            <a:schemeClr val="accent1"/>
+          </a:effectRef>
+          <a:fontRef idx="minor">
+            <a:schemeClr val="lt1"/>
+          </a:fontRef>
+        </p:style>
+        <p:txBody>
+          <a:bodyPr rtlCol="0" anchor="ctr"/>
+          <a:lstStyle/>
+          <a:p>
+            <a:pPr algn="ctr"/>
+          </a:p>
+        </p:txBody>
+      </p:sp>
+      <p:pic>
+        <p:nvPicPr>
+          <p:cNvPr id="31" name="Picture 30" descr="log.png"/>
+          <p:cNvPicPr>
+            <a:picLocks noChangeAspect="1"/>
+          </p:cNvPicPr>
+          <p:nvPr/>
+        </p:nvPicPr>
+        <p:blipFill>
+          <a:blip r:embed="rId2"/>
+          <a:stretch>
+            <a:fillRect/>
+          </a:stretch>
+        </p:blipFill>
+        <p:spPr>
+          <a:xfrm>
+            <a:off x="9052560" y="1820256"/>
+            <a:ext cx="2331720" cy="840047"/>
+          </a:xfrm>
+          <a:prstGeom prst="rect">
+            <a:avLst/>
+          </a:prstGeom>
+        </p:spPr>
+      </p:pic>
+      <p:sp>
+        <p:nvSpPr>
+          <p:cNvPr id="32" name="Rounded Rectangle 31"/>
+          <p:cNvSpPr/>
+          <p:nvPr/>
+        </p:nvSpPr>
+        <p:spPr>
+          <a:xfrm>
+            <a:off x="9052560" y="3429000"/>
+            <a:ext cx="2331720" cy="1600200"/>
+          </a:xfrm>
+          <a:prstGeom prst="roundRect">
+            <a:avLst/>
+          </a:prstGeom>
+          <a:solidFill>
+            <a:srgbClr val="FFFFFF"/>
+          </a:solidFill>
+          <a:ln>
+            <a:solidFill>
+              <a:srgbClr val="D7DEE7"/>
+            </a:solidFill>
+          </a:ln>
+        </p:spPr>
+        <p:style>
+          <a:lnRef idx="1">
+            <a:schemeClr val="accent1"/>
+          </a:lnRef>
+          <a:fillRef idx="3">
+            <a:schemeClr val="accent1"/>
+          </a:fillRef>
+          <a:effectRef idx="2">
+            <a:schemeClr val="accent1"/>
+          </a:effectRef>
+          <a:fontRef idx="minor">
+            <a:schemeClr val="lt1"/>
+          </a:fontRef>
+        </p:style>
+        <p:txBody>
+          <a:bodyPr rtlCol="0" anchor="ctr"/>
+          <a:lstStyle/>
+          <a:p>
+            <a:pPr algn="ctr"/>
+          </a:p>
+        </p:txBody>
+      </p:sp>
+      <p:sp>
+        <p:nvSpPr>
+          <p:cNvPr id="33" name="Rectangle 32"/>
+          <p:cNvSpPr/>
+          <p:nvPr/>
+        </p:nvSpPr>
+        <p:spPr>
+          <a:xfrm>
+            <a:off x="9052560" y="3429000"/>
+            <a:ext cx="73152" cy="1600200"/>
+          </a:xfrm>
+          <a:prstGeom prst="rect">
+            <a:avLst/>
+          </a:prstGeom>
+          <a:solidFill>
+            <a:srgbClr val="0D9488"/>
+          </a:solidFill>
+          <a:ln>
+            <a:noFill/>
+          </a:ln>
+        </p:spPr>
+        <p:style>
+          <a:lnRef idx="1">
+            <a:schemeClr val="accent1"/>
+          </a:lnRef>
+          <a:fillRef idx="3">
+            <a:schemeClr val="accent1"/>
+          </a:fillRef>
+          <a:effectRef idx="2">
+            <a:schemeClr val="accent1"/>
+          </a:effectRef>
+          <a:fontRef idx="minor">
+            <a:schemeClr val="lt1"/>
+          </a:fontRef>
+        </p:style>
+        <p:txBody>
+          <a:bodyPr rtlCol="0" anchor="ctr"/>
+          <a:lstStyle/>
+          <a:p>
+            <a:pPr algn="ctr"/>
+          </a:p>
+        </p:txBody>
+      </p:sp>
+      <p:sp>
+        <p:nvSpPr>
+          <p:cNvPr id="34" name="TextBox 33"/>
+          <p:cNvSpPr txBox="1"/>
+          <p:nvPr/>
+        </p:nvSpPr>
+        <p:spPr>
+          <a:xfrm>
+            <a:off x="9262872" y="3593592"/>
+            <a:ext cx="1984248" cy="365760"/>
           </a:xfrm>
           <a:prstGeom prst="rect">
             <a:avLst/>
@@ -4470,14 +4662,88 @@
           <a:lstStyle/>
           <a:p>
             <a:pPr>
-              <a:defRPr sz="900">
-                <a:solidFill>
-                  <a:srgbClr val="566373"/>
-                </a:solidFill>
-              </a:defRPr>
-            </a:pPr>
-            <a:r>
-              <a:t>SysGuard • Linux System Health Monitor                               10</a:t>
+              <a:defRPr sz="1600" b="1">
+                <a:solidFill>
+                  <a:srgbClr val="0F172A"/>
+                </a:solidFill>
+              </a:defRPr>
+            </a:pPr>
+            <a:r>
+              <a:t>Log result</a:t>
+            </a:r>
+          </a:p>
+        </p:txBody>
+      </p:sp>
+      <p:sp>
+        <p:nvSpPr>
+          <p:cNvPr id="35" name="TextBox 34"/>
+          <p:cNvSpPr txBox="1"/>
+          <p:nvPr/>
+        </p:nvSpPr>
+        <p:spPr>
+          <a:xfrm>
+            <a:off x="9262872" y="4023360"/>
+            <a:ext cx="1984248" cy="886968"/>
+          </a:xfrm>
+          <a:prstGeom prst="rect">
+            <a:avLst/>
+          </a:prstGeom>
+          <a:noFill/>
+        </p:spPr>
+        <p:txBody>
+          <a:bodyPr wrap="square">
+            <a:spAutoFit/>
+          </a:bodyPr>
+          <a:lstStyle/>
+          <a:p>
+            <a:pPr>
+              <a:defRPr sz="1300">
+                <a:solidFill>
+                  <a:srgbClr val="1F2937"/>
+                </a:solidFill>
+              </a:defRPr>
+            </a:pPr>
+            <a:r>
+              <a:t>Snapshot written to</a:t>
+            </a:r>
+            <a:br/>
+            <a:r>
+              <a:t>sysguard.log</a:t>
+            </a:r>
+          </a:p>
+        </p:txBody>
+      </p:sp>
+      <p:sp>
+        <p:nvSpPr>
+          <p:cNvPr id="36" name="TextBox 35"/>
+          <p:cNvSpPr txBox="1"/>
+          <p:nvPr/>
+        </p:nvSpPr>
+        <p:spPr>
+          <a:xfrm>
+            <a:off x="640080" y="6473952"/>
+            <a:ext cx="10972800" cy="201168"/>
+          </a:xfrm>
+          <a:prstGeom prst="rect">
+            <a:avLst/>
+          </a:prstGeom>
+          <a:noFill/>
+        </p:spPr>
+        <p:txBody>
+          <a:bodyPr wrap="none">
+            <a:spAutoFit/>
+          </a:bodyPr>
+          <a:lstStyle/>
+          <a:p>
+            <a:pPr>
+              <a:defRPr sz="850">
+                <a:solidFill>
+                  <a:srgbClr val="64748B"/>
+                </a:solidFill>
+              </a:defRPr>
+            </a:pPr>
+            <a:r>
+              <a:t>SysGuard • Linux System Health Monitor                                              10</a:t>
             </a:r>
           </a:p>
         </p:txBody>
@@ -4509,13 +4775,13 @@
         <p:spPr>
           <a:xfrm>
             <a:off x="0" y="0"/>
-            <a:ext cx="12191695" cy="6858000"/>
+            <a:ext cx="12191999" cy="6858000"/>
           </a:xfrm>
           <a:prstGeom prst="rect">
             <a:avLst/>
           </a:prstGeom>
           <a:solidFill>
-            <a:srgbClr val="FFFFFF"/>
+            <a:srgbClr val="F5F7FA"/>
           </a:solidFill>
           <a:ln>
             <a:noFill/>
@@ -4552,13 +4818,13 @@
         <p:spPr>
           <a:xfrm>
             <a:off x="0" y="0"/>
-            <a:ext cx="12191695" cy="201168"/>
+            <a:ext cx="12191999" cy="164592"/>
           </a:xfrm>
           <a:prstGeom prst="rect">
             <a:avLst/>
           </a:prstGeom>
           <a:solidFill>
-            <a:srgbClr val="2A69BA"/>
+            <a:srgbClr val="2563EB"/>
           </a:solidFill>
           <a:ln>
             <a:noFill/>
@@ -4594,8 +4860,8 @@
         </p:nvSpPr>
         <p:spPr>
           <a:xfrm>
-            <a:off x="640080" y="502920"/>
-            <a:ext cx="10881360" cy="640080"/>
+            <a:off x="640080" y="438912"/>
+            <a:ext cx="10972800" cy="566928"/>
           </a:xfrm>
           <a:prstGeom prst="rect">
             <a:avLst/>
@@ -4611,12 +4877,12 @@
             <a:pPr>
               <a:defRPr sz="2800" b="1">
                 <a:solidFill>
-                  <a:srgbClr val="0E1827"/>
-                </a:solidFill>
-              </a:defRPr>
-            </a:pPr>
-            <a:r>
-              <a:t>10. Logging Result</a:t>
+                  <a:srgbClr val="0F172A"/>
+                </a:solidFill>
+              </a:defRPr>
+            </a:pPr>
+            <a:r>
+              <a:t>10. Device Driver, Limitations &amp; Future Scope</a:t>
             </a:r>
           </a:p>
         </p:txBody>
@@ -4629,8 +4895,8 @@
         </p:nvSpPr>
         <p:spPr>
           <a:xfrm>
-            <a:off x="658368" y="1143000"/>
-            <a:ext cx="10789920" cy="411480"/>
+            <a:off x="658368" y="987552"/>
+            <a:ext cx="10698480" cy="365760"/>
           </a:xfrm>
           <a:prstGeom prst="rect">
             <a:avLst/>
@@ -4644,14 +4910,14 @@
           <a:lstStyle/>
           <a:p>
             <a:pPr>
-              <a:defRPr sz="1400">
-                <a:solidFill>
-                  <a:srgbClr val="566373"/>
-                </a:solidFill>
-              </a:defRPr>
-            </a:pPr>
-            <a:r>
-              <a:t>Verified output</a:t>
+              <a:defRPr sz="1300">
+                <a:solidFill>
+                  <a:srgbClr val="64748B"/>
+                </a:solidFill>
+              </a:defRPr>
+            </a:pPr>
+            <a:r>
+              <a:t>Transparent project status</a:t>
             </a:r>
           </a:p>
         </p:txBody>
@@ -4664,17 +4930,19 @@
         </p:nvSpPr>
         <p:spPr>
           <a:xfrm>
-            <a:off x="1097280" y="1828800"/>
-            <a:ext cx="9966960" cy="1920240"/>
+            <a:off x="640080" y="1325880"/>
+            <a:ext cx="3429000" cy="2194560"/>
           </a:xfrm>
           <a:prstGeom prst="roundRect">
             <a:avLst/>
           </a:prstGeom>
           <a:solidFill>
-            <a:srgbClr val="0E1827"/>
+            <a:srgbClr val="FFFFFF"/>
           </a:solidFill>
           <a:ln>
-            <a:noFill/>
+            <a:solidFill>
+              <a:srgbClr val="D7DEE7"/>
+            </a:solidFill>
           </a:ln>
         </p:spPr>
         <p:style>
@@ -4701,161 +4969,20 @@
       </p:sp>
       <p:sp>
         <p:nvSpPr>
-          <p:cNvPr id="7" name="TextBox 6"/>
-          <p:cNvSpPr txBox="1"/>
-          <p:nvPr/>
-        </p:nvSpPr>
-        <p:spPr>
-          <a:xfrm>
-            <a:off x="1508760" y="2240280"/>
-            <a:ext cx="9144000" cy="822960"/>
-          </a:xfrm>
-          <a:prstGeom prst="rect">
-            <a:avLst/>
-          </a:prstGeom>
-          <a:noFill/>
-        </p:spPr>
-        <p:txBody>
-          <a:bodyPr wrap="none">
-            <a:spAutoFit/>
-          </a:bodyPr>
-          <a:lstStyle/>
-          <a:p>
-            <a:pPr algn="ctr">
-              <a:defRPr sz="2200" b="1">
-                <a:solidFill>
-                  <a:srgbClr val="FFFFFF"/>
-                </a:solidFill>
-              </a:defRPr>
-            </a:pPr>
-            <a:r>
-              <a:t>CPU=0.00, MEMORY=7.91, DISK=5.26, STATUS=HEALTHY</a:t>
-            </a:r>
-          </a:p>
-        </p:txBody>
-      </p:sp>
-      <p:sp>
-        <p:nvSpPr>
-          <p:cNvPr id="8" name="TextBox 7"/>
-          <p:cNvSpPr txBox="1"/>
-          <p:nvPr/>
-        </p:nvSpPr>
-        <p:spPr>
-          <a:xfrm>
-            <a:off x="1280160" y="4251960"/>
-            <a:ext cx="9509760" cy="1097280"/>
-          </a:xfrm>
-          <a:prstGeom prst="rect">
-            <a:avLst/>
-          </a:prstGeom>
-          <a:noFill/>
-        </p:spPr>
-        <p:txBody>
-          <a:bodyPr wrap="square">
-            <a:spAutoFit/>
-          </a:bodyPr>
-          <a:lstStyle/>
-          <a:p>
-            <a:pPr>
-              <a:spcAft>
-                <a:spcPts val="1000"/>
-              </a:spcAft>
-              <a:defRPr sz="1600">
-                <a:solidFill>
-                  <a:srgbClr val="1C2536"/>
-                </a:solidFill>
-              </a:defRPr>
-            </a:pPr>
-            <a:r>
-              <a:t>Snapshot is appended to sysguard.log.</a:t>
-            </a:r>
-          </a:p>
-          <a:p>
-            <a:pPr>
-              <a:spcAft>
-                <a:spcPts val="1000"/>
-              </a:spcAft>
-              <a:defRPr sz="1600">
-                <a:solidFill>
-                  <a:srgbClr val="1C2536"/>
-                </a:solidFill>
-              </a:defRPr>
-            </a:pPr>
-            <a:r>
-              <a:t>The same health calculation used by the dashboard is recorded for later inspection.</a:t>
-            </a:r>
-          </a:p>
-        </p:txBody>
-      </p:sp>
-      <p:sp>
-        <p:nvSpPr>
-          <p:cNvPr id="9" name="TextBox 8"/>
-          <p:cNvSpPr txBox="1"/>
-          <p:nvPr/>
-        </p:nvSpPr>
-        <p:spPr>
-          <a:xfrm>
-            <a:off x="640080" y="6492240"/>
-            <a:ext cx="10972800" cy="228600"/>
-          </a:xfrm>
-          <a:prstGeom prst="rect">
-            <a:avLst/>
-          </a:prstGeom>
-          <a:noFill/>
-        </p:spPr>
-        <p:txBody>
-          <a:bodyPr wrap="none">
-            <a:spAutoFit/>
-          </a:bodyPr>
-          <a:lstStyle/>
-          <a:p>
-            <a:pPr>
-              <a:defRPr sz="900">
-                <a:solidFill>
-                  <a:srgbClr val="566373"/>
-                </a:solidFill>
-              </a:defRPr>
-            </a:pPr>
-            <a:r>
-              <a:t>SysGuard • Linux System Health Monitor                               11</a:t>
-            </a:r>
-          </a:p>
-        </p:txBody>
-      </p:sp>
-    </p:spTree>
-  </p:cSld>
-  <p:clrMapOvr>
-    <a:masterClrMapping/>
-  </p:clrMapOvr>
-</p:sld>
-</file>
-
-<file path=ppt/slides/slide12.xml><?xml version="1.0" encoding="utf-8"?>
-<p:sld xmlns:a="http://schemas.openxmlformats.org/drawingml/2006/main" xmlns:p="http://schemas.openxmlformats.org/presentationml/2006/main" xmlns:r="http://schemas.openxmlformats.org/officeDocument/2006/relationships">
-  <p:cSld>
-    <p:spTree>
-      <p:nvGrpSpPr>
-        <p:cNvPr id="1" name=""/>
-        <p:cNvGrpSpPr/>
-        <p:nvPr/>
-      </p:nvGrpSpPr>
-      <p:grpSpPr/>
-      <p:sp>
-        <p:nvSpPr>
-          <p:cNvPr id="2" name="Rectangle 1"/>
+          <p:cNvPr id="7" name="Rectangle 6"/>
           <p:cNvSpPr/>
           <p:nvPr/>
         </p:nvSpPr>
         <p:spPr>
           <a:xfrm>
-            <a:off x="0" y="0"/>
-            <a:ext cx="12191695" cy="6858000"/>
+            <a:off x="640080" y="1325880"/>
+            <a:ext cx="73152" cy="2194560"/>
           </a:xfrm>
           <a:prstGeom prst="rect">
             <a:avLst/>
           </a:prstGeom>
           <a:solidFill>
-            <a:srgbClr val="FFFFFF"/>
+            <a:srgbClr val="2563EB"/>
           </a:solidFill>
           <a:ln>
             <a:noFill/>
@@ -4885,23 +5012,109 @@
       </p:sp>
       <p:sp>
         <p:nvSpPr>
-          <p:cNvPr id="3" name="Rectangle 2"/>
+          <p:cNvPr id="8" name="TextBox 7"/>
+          <p:cNvSpPr txBox="1"/>
+          <p:nvPr/>
+        </p:nvSpPr>
+        <p:spPr>
+          <a:xfrm>
+            <a:off x="850392" y="1490472"/>
+            <a:ext cx="3081528" cy="365760"/>
+          </a:xfrm>
+          <a:prstGeom prst="rect">
+            <a:avLst/>
+          </a:prstGeom>
+          <a:noFill/>
+        </p:spPr>
+        <p:txBody>
+          <a:bodyPr wrap="none">
+            <a:spAutoFit/>
+          </a:bodyPr>
+          <a:lstStyle/>
+          <a:p>
+            <a:pPr>
+              <a:defRPr sz="1600" b="1">
+                <a:solidFill>
+                  <a:srgbClr val="0F172A"/>
+                </a:solidFill>
+              </a:defRPr>
+            </a:pPr>
+            <a:r>
+              <a:t>Character driver</a:t>
+            </a:r>
+          </a:p>
+        </p:txBody>
+      </p:sp>
+      <p:sp>
+        <p:nvSpPr>
+          <p:cNvPr id="9" name="TextBox 8"/>
+          <p:cNvSpPr txBox="1"/>
+          <p:nvPr/>
+        </p:nvSpPr>
+        <p:spPr>
+          <a:xfrm>
+            <a:off x="850392" y="1920240"/>
+            <a:ext cx="3081528" cy="1481328"/>
+          </a:xfrm>
+          <a:prstGeom prst="rect">
+            <a:avLst/>
+          </a:prstGeom>
+          <a:noFill/>
+        </p:spPr>
+        <p:txBody>
+          <a:bodyPr wrap="square">
+            <a:spAutoFit/>
+          </a:bodyPr>
+          <a:lstStyle/>
+          <a:p>
+            <a:pPr>
+              <a:defRPr sz="1350">
+                <a:solidFill>
+                  <a:srgbClr val="1F2937"/>
+                </a:solidFill>
+              </a:defRPr>
+            </a:pPr>
+            <a:r>
+              <a:t>Source: driver/sysguard_driver.c</a:t>
+            </a:r>
+            <a:br/>
+            <a:br/>
+            <a:r>
+              <a:t>Designed device:</a:t>
+            </a:r>
+            <a:br/>
+            <a:r>
+              <a:t>/dev/sysguard</a:t>
+            </a:r>
+            <a:br/>
+            <a:br/>
+            <a:r>
+              <a:t>Uses the Linux misc-device framework.</a:t>
+            </a:r>
+          </a:p>
+        </p:txBody>
+      </p:sp>
+      <p:sp>
+        <p:nvSpPr>
+          <p:cNvPr id="10" name="Rounded Rectangle 9"/>
           <p:cNvSpPr/>
           <p:nvPr/>
         </p:nvSpPr>
         <p:spPr>
           <a:xfrm>
-            <a:off x="0" y="0"/>
-            <a:ext cx="12191695" cy="201168"/>
-          </a:xfrm>
-          <a:prstGeom prst="rect">
+            <a:off x="4389120" y="1325880"/>
+            <a:ext cx="3429000" cy="2194560"/>
+          </a:xfrm>
+          <a:prstGeom prst="roundRect">
             <a:avLst/>
           </a:prstGeom>
           <a:solidFill>
-            <a:srgbClr val="2A69BA"/>
+            <a:srgbClr val="FFFFFF"/>
           </a:solidFill>
           <a:ln>
-            <a:noFill/>
+            <a:solidFill>
+              <a:srgbClr val="D7DEE7"/>
+            </a:solidFill>
           </a:ln>
         </p:spPr>
         <p:style>
@@ -4928,211 +5141,20 @@
       </p:sp>
       <p:sp>
         <p:nvSpPr>
-          <p:cNvPr id="4" name="TextBox 3"/>
-          <p:cNvSpPr txBox="1"/>
-          <p:nvPr/>
-        </p:nvSpPr>
-        <p:spPr>
-          <a:xfrm>
-            <a:off x="640080" y="502920"/>
-            <a:ext cx="10881360" cy="640080"/>
-          </a:xfrm>
-          <a:prstGeom prst="rect">
-            <a:avLst/>
-          </a:prstGeom>
-          <a:noFill/>
-        </p:spPr>
-        <p:txBody>
-          <a:bodyPr wrap="none">
-            <a:spAutoFit/>
-          </a:bodyPr>
-          <a:lstStyle/>
-          <a:p>
-            <a:pPr>
-              <a:defRPr sz="2800" b="1">
-                <a:solidFill>
-                  <a:srgbClr val="0E1827"/>
-                </a:solidFill>
-              </a:defRPr>
-            </a:pPr>
-            <a:r>
-              <a:t>11. Limitations &amp; Future Scope</a:t>
-            </a:r>
-          </a:p>
-        </p:txBody>
-      </p:sp>
-      <p:sp>
-        <p:nvSpPr>
-          <p:cNvPr id="5" name="TextBox 4"/>
-          <p:cNvSpPr txBox="1"/>
-          <p:nvPr/>
-        </p:nvSpPr>
-        <p:spPr>
-          <a:xfrm>
-            <a:off x="658368" y="1143000"/>
-            <a:ext cx="10789920" cy="411480"/>
-          </a:xfrm>
-          <a:prstGeom prst="rect">
-            <a:avLst/>
-          </a:prstGeom>
-          <a:noFill/>
-        </p:spPr>
-        <p:txBody>
-          <a:bodyPr wrap="none">
-            <a:spAutoFit/>
-          </a:bodyPr>
-          <a:lstStyle/>
-          <a:p>
-            <a:pPr>
-              <a:defRPr sz="1400">
-                <a:solidFill>
-                  <a:srgbClr val="566373"/>
-                </a:solidFill>
-              </a:defRPr>
-            </a:pPr>
-            <a:r>
-              <a:t>How the project can evolve</a:t>
-            </a:r>
-          </a:p>
-        </p:txBody>
-      </p:sp>
-      <p:sp>
-        <p:nvSpPr>
-          <p:cNvPr id="6" name="TextBox 5"/>
-          <p:cNvSpPr txBox="1"/>
-          <p:nvPr/>
-        </p:nvSpPr>
-        <p:spPr>
-          <a:xfrm>
-            <a:off x="822960" y="1600200"/>
-            <a:ext cx="10424160" cy="4389120"/>
-          </a:xfrm>
-          <a:prstGeom prst="rect">
-            <a:avLst/>
-          </a:prstGeom>
-          <a:noFill/>
-        </p:spPr>
-        <p:txBody>
-          <a:bodyPr wrap="square">
-            <a:spAutoFit/>
-          </a:bodyPr>
-          <a:lstStyle/>
-          <a:p>
-            <a:pPr>
-              <a:spcAft>
-                <a:spcPts val="1000"/>
-              </a:spcAft>
-              <a:defRPr sz="1900">
-                <a:solidFill>
-                  <a:srgbClr val="1C2536"/>
-                </a:solidFill>
-              </a:defRPr>
-            </a:pPr>
-            <a:r>
-              <a:t>Limitations: Linux-specific, CLI-only, sensor support varies, minimal driver, no per-process CPU/memory percentage.</a:t>
-            </a:r>
-          </a:p>
-          <a:p>
-            <a:pPr>
-              <a:spcAft>
-                <a:spcPts val="1000"/>
-              </a:spcAft>
-              <a:defRPr sz="1900">
-                <a:solidFill>
-                  <a:srgbClr val="1C2536"/>
-                </a:solidFill>
-              </a:defRPr>
-            </a:pPr>
-            <a:r>
-              <a:t>Future: ncurses real-time UI, configurable thresholds, historical CSV reports, temperature/network monitoring.</a:t>
-            </a:r>
-          </a:p>
-          <a:p>
-            <a:pPr>
-              <a:spcAft>
-                <a:spcPts val="1000"/>
-              </a:spcAft>
-              <a:defRPr sz="1900">
-                <a:solidFill>
-                  <a:srgbClr val="1C2536"/>
-                </a:solidFill>
-              </a:defRPr>
-            </a:pPr>
-            <a:r>
-              <a:t>Future driver work: richer ioctl commands and additional diagnostic data.</a:t>
-            </a:r>
-          </a:p>
-        </p:txBody>
-      </p:sp>
-      <p:sp>
-        <p:nvSpPr>
-          <p:cNvPr id="7" name="TextBox 6"/>
-          <p:cNvSpPr txBox="1"/>
-          <p:nvPr/>
-        </p:nvSpPr>
-        <p:spPr>
-          <a:xfrm>
-            <a:off x="640080" y="6492240"/>
-            <a:ext cx="10972800" cy="228600"/>
-          </a:xfrm>
-          <a:prstGeom prst="rect">
-            <a:avLst/>
-          </a:prstGeom>
-          <a:noFill/>
-        </p:spPr>
-        <p:txBody>
-          <a:bodyPr wrap="none">
-            <a:spAutoFit/>
-          </a:bodyPr>
-          <a:lstStyle/>
-          <a:p>
-            <a:pPr>
-              <a:defRPr sz="900">
-                <a:solidFill>
-                  <a:srgbClr val="566373"/>
-                </a:solidFill>
-              </a:defRPr>
-            </a:pPr>
-            <a:r>
-              <a:t>SysGuard • Linux System Health Monitor                               12</a:t>
-            </a:r>
-          </a:p>
-        </p:txBody>
-      </p:sp>
-    </p:spTree>
-  </p:cSld>
-  <p:clrMapOvr>
-    <a:masterClrMapping/>
-  </p:clrMapOvr>
-</p:sld>
-</file>
-
-<file path=ppt/slides/slide13.xml><?xml version="1.0" encoding="utf-8"?>
-<p:sld xmlns:a="http://schemas.openxmlformats.org/drawingml/2006/main" xmlns:p="http://schemas.openxmlformats.org/presentationml/2006/main" xmlns:r="http://schemas.openxmlformats.org/officeDocument/2006/relationships">
-  <p:cSld>
-    <p:spTree>
-      <p:nvGrpSpPr>
-        <p:cNvPr id="1" name=""/>
-        <p:cNvGrpSpPr/>
-        <p:nvPr/>
-      </p:nvGrpSpPr>
-      <p:grpSpPr/>
-      <p:sp>
-        <p:nvSpPr>
-          <p:cNvPr id="2" name="Rectangle 1"/>
+          <p:cNvPr id="11" name="Rectangle 10"/>
           <p:cNvSpPr/>
           <p:nvPr/>
         </p:nvSpPr>
         <p:spPr>
           <a:xfrm>
-            <a:off x="0" y="0"/>
-            <a:ext cx="12191695" cy="6858000"/>
+            <a:off x="4389120" y="1325880"/>
+            <a:ext cx="73152" cy="2194560"/>
           </a:xfrm>
           <a:prstGeom prst="rect">
             <a:avLst/>
           </a:prstGeom>
           <a:solidFill>
-            <a:srgbClr val="FFFFFF"/>
+            <a:srgbClr val="EA8A2A"/>
           </a:solidFill>
           <a:ln>
             <a:noFill/>
@@ -5162,23 +5184,100 @@
       </p:sp>
       <p:sp>
         <p:nvSpPr>
-          <p:cNvPr id="3" name="Rectangle 2"/>
+          <p:cNvPr id="12" name="TextBox 11"/>
+          <p:cNvSpPr txBox="1"/>
+          <p:nvPr/>
+        </p:nvSpPr>
+        <p:spPr>
+          <a:xfrm>
+            <a:off x="4599432" y="1490472"/>
+            <a:ext cx="3081528" cy="365760"/>
+          </a:xfrm>
+          <a:prstGeom prst="rect">
+            <a:avLst/>
+          </a:prstGeom>
+          <a:noFill/>
+        </p:spPr>
+        <p:txBody>
+          <a:bodyPr wrap="none">
+            <a:spAutoFit/>
+          </a:bodyPr>
+          <a:lstStyle/>
+          <a:p>
+            <a:pPr>
+              <a:defRPr sz="1600" b="1">
+                <a:solidFill>
+                  <a:srgbClr val="0F172A"/>
+                </a:solidFill>
+              </a:defRPr>
+            </a:pPr>
+            <a:r>
+              <a:t>WSL limitation</a:t>
+            </a:r>
+          </a:p>
+        </p:txBody>
+      </p:sp>
+      <p:sp>
+        <p:nvSpPr>
+          <p:cNvPr id="13" name="TextBox 12"/>
+          <p:cNvSpPr txBox="1"/>
+          <p:nvPr/>
+        </p:nvSpPr>
+        <p:spPr>
+          <a:xfrm>
+            <a:off x="4599432" y="1920240"/>
+            <a:ext cx="3081528" cy="1481328"/>
+          </a:xfrm>
+          <a:prstGeom prst="rect">
+            <a:avLst/>
+          </a:prstGeom>
+          <a:noFill/>
+        </p:spPr>
+        <p:txBody>
+          <a:bodyPr wrap="square">
+            <a:spAutoFit/>
+          </a:bodyPr>
+          <a:lstStyle/>
+          <a:p>
+            <a:pPr>
+              <a:defRPr sz="1350">
+                <a:solidFill>
+                  <a:srgbClr val="1F2937"/>
+                </a:solidFill>
+              </a:defRPr>
+            </a:pPr>
+            <a:r>
+              <a:t>The running WSL2 kernel did not provide the matching kernel development tree.</a:t>
+            </a:r>
+            <a:br/>
+            <a:br/>
+            <a:r>
+              <a:t>Therefore driver loading was not validated in this environment.</a:t>
+            </a:r>
+          </a:p>
+        </p:txBody>
+      </p:sp>
+      <p:sp>
+        <p:nvSpPr>
+          <p:cNvPr id="14" name="Rounded Rectangle 13"/>
           <p:cNvSpPr/>
           <p:nvPr/>
         </p:nvSpPr>
         <p:spPr>
           <a:xfrm>
-            <a:off x="0" y="0"/>
-            <a:ext cx="12191695" cy="201168"/>
-          </a:xfrm>
-          <a:prstGeom prst="rect">
+            <a:off x="8138160" y="1325880"/>
+            <a:ext cx="3429000" cy="2194560"/>
+          </a:xfrm>
+          <a:prstGeom prst="roundRect">
             <a:avLst/>
           </a:prstGeom>
           <a:solidFill>
-            <a:srgbClr val="2A69BA"/>
+            <a:srgbClr val="FFFFFF"/>
           </a:solidFill>
           <a:ln>
-            <a:noFill/>
+            <a:solidFill>
+              <a:srgbClr val="D7DEE7"/>
+            </a:solidFill>
           </a:ln>
         </p:spPr>
         <p:style>
@@ -5205,14 +5304,57 @@
       </p:sp>
       <p:sp>
         <p:nvSpPr>
-          <p:cNvPr id="4" name="TextBox 3"/>
-          <p:cNvSpPr txBox="1"/>
-          <p:nvPr/>
-        </p:nvSpPr>
-        <p:spPr>
-          <a:xfrm>
-            <a:off x="640080" y="502920"/>
-            <a:ext cx="10881360" cy="640080"/>
+          <p:cNvPr id="15" name="Rectangle 14"/>
+          <p:cNvSpPr/>
+          <p:nvPr/>
+        </p:nvSpPr>
+        <p:spPr>
+          <a:xfrm>
+            <a:off x="8138160" y="1325880"/>
+            <a:ext cx="73152" cy="2194560"/>
+          </a:xfrm>
+          <a:prstGeom prst="rect">
+            <a:avLst/>
+          </a:prstGeom>
+          <a:solidFill>
+            <a:srgbClr val="0D9488"/>
+          </a:solidFill>
+          <a:ln>
+            <a:noFill/>
+          </a:ln>
+        </p:spPr>
+        <p:style>
+          <a:lnRef idx="1">
+            <a:schemeClr val="accent1"/>
+          </a:lnRef>
+          <a:fillRef idx="3">
+            <a:schemeClr val="accent1"/>
+          </a:fillRef>
+          <a:effectRef idx="2">
+            <a:schemeClr val="accent1"/>
+          </a:effectRef>
+          <a:fontRef idx="minor">
+            <a:schemeClr val="lt1"/>
+          </a:fontRef>
+        </p:style>
+        <p:txBody>
+          <a:bodyPr rtlCol="0" anchor="ctr"/>
+          <a:lstStyle/>
+          <a:p>
+            <a:pPr algn="ctr"/>
+          </a:p>
+        </p:txBody>
+      </p:sp>
+      <p:sp>
+        <p:nvSpPr>
+          <p:cNvPr id="16" name="TextBox 15"/>
+          <p:cNvSpPr txBox="1"/>
+          <p:nvPr/>
+        </p:nvSpPr>
+        <p:spPr>
+          <a:xfrm>
+            <a:off x="8348472" y="1490472"/>
+            <a:ext cx="3081528" cy="365760"/>
           </a:xfrm>
           <a:prstGeom prst="rect">
             <a:avLst/>
@@ -5226,167 +5368,306 @@
           <a:lstStyle/>
           <a:p>
             <a:pPr>
-              <a:defRPr sz="2800" b="1">
-                <a:solidFill>
-                  <a:srgbClr val="0E1827"/>
-                </a:solidFill>
-              </a:defRPr>
-            </a:pPr>
-            <a:r>
-              <a:t>12. Conclusion</a:t>
-            </a:r>
-          </a:p>
-        </p:txBody>
-      </p:sp>
-      <p:sp>
-        <p:nvSpPr>
-          <p:cNvPr id="5" name="TextBox 4"/>
-          <p:cNvSpPr txBox="1"/>
-          <p:nvPr/>
-        </p:nvSpPr>
-        <p:spPr>
-          <a:xfrm>
-            <a:off x="658368" y="1143000"/>
-            <a:ext cx="10789920" cy="411480"/>
-          </a:xfrm>
-          <a:prstGeom prst="rect">
-            <a:avLst/>
-          </a:prstGeom>
-          <a:noFill/>
-        </p:spPr>
-        <p:txBody>
-          <a:bodyPr wrap="none">
-            <a:spAutoFit/>
-          </a:bodyPr>
-          <a:lstStyle/>
+              <a:defRPr sz="1600" b="1">
+                <a:solidFill>
+                  <a:srgbClr val="0F172A"/>
+                </a:solidFill>
+              </a:defRPr>
+            </a:pPr>
+            <a:r>
+              <a:t>Future improvements</a:t>
+            </a:r>
+          </a:p>
+        </p:txBody>
+      </p:sp>
+      <p:sp>
+        <p:nvSpPr>
+          <p:cNvPr id="17" name="TextBox 16"/>
+          <p:cNvSpPr txBox="1"/>
+          <p:nvPr/>
+        </p:nvSpPr>
+        <p:spPr>
+          <a:xfrm>
+            <a:off x="8348472" y="1920240"/>
+            <a:ext cx="3081528" cy="1481328"/>
+          </a:xfrm>
+          <a:prstGeom prst="rect">
+            <a:avLst/>
+          </a:prstGeom>
+          <a:noFill/>
+        </p:spPr>
+        <p:txBody>
+          <a:bodyPr wrap="square">
+            <a:spAutoFit/>
+          </a:bodyPr>
+          <a:lstStyle/>
+          <a:p>
+            <a:pPr>
+              <a:defRPr sz="1350">
+                <a:solidFill>
+                  <a:srgbClr val="1F2937"/>
+                </a:solidFill>
+              </a:defRPr>
+            </a:pPr>
+            <a:r>
+              <a:t>• ncurses real-time UI</a:t>
+            </a:r>
+            <a:br/>
+            <a:r>
+              <a:t>• Per-process CPU/RAM metrics</a:t>
+            </a:r>
+            <a:br/>
+            <a:r>
+              <a:t>• Configurable thresholds</a:t>
+            </a:r>
+            <a:br/>
+            <a:r>
+              <a:t>• Temperature/network monitoring</a:t>
+            </a:r>
+            <a:br/>
+            <a:r>
+              <a:t>• Extended ioctl support</a:t>
+            </a:r>
+          </a:p>
+        </p:txBody>
+      </p:sp>
+      <p:sp>
+        <p:nvSpPr>
+          <p:cNvPr id="18" name="Rounded Rectangle 17"/>
+          <p:cNvSpPr/>
+          <p:nvPr/>
+        </p:nvSpPr>
+        <p:spPr>
+          <a:xfrm>
+            <a:off x="658368" y="3767328"/>
+            <a:ext cx="7004303" cy="2112264"/>
+          </a:xfrm>
+          <a:prstGeom prst="roundRect">
+            <a:avLst/>
+          </a:prstGeom>
+          <a:solidFill>
+            <a:srgbClr val="FFFFFF"/>
+          </a:solidFill>
+          <a:ln>
+            <a:solidFill>
+              <a:srgbClr val="D7DEE7"/>
+            </a:solidFill>
+          </a:ln>
+        </p:spPr>
+        <p:style>
+          <a:lnRef idx="1">
+            <a:schemeClr val="accent1"/>
+          </a:lnRef>
+          <a:fillRef idx="3">
+            <a:schemeClr val="accent1"/>
+          </a:fillRef>
+          <a:effectRef idx="2">
+            <a:schemeClr val="accent1"/>
+          </a:effectRef>
+          <a:fontRef idx="minor">
+            <a:schemeClr val="lt1"/>
+          </a:fontRef>
+        </p:style>
+        <p:txBody>
+          <a:bodyPr rtlCol="0" anchor="ctr"/>
+          <a:lstStyle/>
+          <a:p>
+            <a:pPr algn="ctr"/>
+          </a:p>
+        </p:txBody>
+      </p:sp>
+      <p:pic>
+        <p:nvPicPr>
+          <p:cNvPr id="19" name="Picture 18" descr="github.png"/>
+          <p:cNvPicPr>
+            <a:picLocks noChangeAspect="1"/>
+          </p:cNvPicPr>
+          <p:nvPr/>
+        </p:nvPicPr>
+        <p:blipFill>
+          <a:blip r:embed="rId2"/>
+          <a:stretch>
+            <a:fillRect/>
+          </a:stretch>
+        </p:blipFill>
+        <p:spPr>
+          <a:xfrm>
+            <a:off x="2541943" y="3794760"/>
+            <a:ext cx="3237152" cy="2057400"/>
+          </a:xfrm>
+          <a:prstGeom prst="rect">
+            <a:avLst/>
+          </a:prstGeom>
+        </p:spPr>
+      </p:pic>
+      <p:sp>
+        <p:nvSpPr>
+          <p:cNvPr id="20" name="TextBox 19"/>
+          <p:cNvSpPr txBox="1"/>
+          <p:nvPr/>
+        </p:nvSpPr>
+        <p:spPr>
+          <a:xfrm>
+            <a:off x="7955279" y="3931920"/>
+            <a:ext cx="3291840" cy="1554480"/>
+          </a:xfrm>
+          <a:prstGeom prst="rect">
+            <a:avLst/>
+          </a:prstGeom>
+          <a:noFill/>
+        </p:spPr>
+        <p:txBody>
+          <a:bodyPr wrap="square">
+            <a:spAutoFit/>
+          </a:bodyPr>
+          <a:lstStyle/>
+          <a:p>
+            <a:pPr>
+              <a:defRPr sz="2000" b="1">
+                <a:solidFill>
+                  <a:srgbClr val="0F172A"/>
+                </a:solidFill>
+              </a:defRPr>
+            </a:pPr>
+            <a:r>
+              <a:t>GitHub Repository</a:t>
+            </a:r>
+          </a:p>
           <a:p>
             <a:pPr>
               <a:defRPr sz="1400">
                 <a:solidFill>
-                  <a:srgbClr val="566373"/>
-                </a:solidFill>
-              </a:defRPr>
-            </a:pPr>
-            <a:r>
-              <a:t>Capstone summary</a:t>
-            </a:r>
-          </a:p>
-        </p:txBody>
-      </p:sp>
-      <p:sp>
-        <p:nvSpPr>
-          <p:cNvPr id="6" name="TextBox 5"/>
-          <p:cNvSpPr txBox="1"/>
-          <p:nvPr/>
-        </p:nvSpPr>
-        <p:spPr>
-          <a:xfrm>
-            <a:off x="822960" y="1645920"/>
-            <a:ext cx="10424160" cy="4389120"/>
-          </a:xfrm>
-          <a:prstGeom prst="rect">
-            <a:avLst/>
-          </a:prstGeom>
-          <a:noFill/>
-        </p:spPr>
-        <p:txBody>
-          <a:bodyPr wrap="square">
-            <a:spAutoFit/>
-          </a:bodyPr>
-          <a:lstStyle/>
+                  <a:srgbClr val="2563EB"/>
+                </a:solidFill>
+              </a:defRPr>
+            </a:pPr>
+            <a:r>
+              <a:t>github.com/sanishpanda3113-dev/SysGuard</a:t>
+            </a:r>
+          </a:p>
           <a:p>
             <a:pPr>
-              <a:spcAft>
-                <a:spcPts val="1000"/>
-              </a:spcAft>
-              <a:defRPr sz="1900">
-                <a:solidFill>
-                  <a:srgbClr val="1C2536"/>
-                </a:solidFill>
-              </a:defRPr>
-            </a:pPr>
-            <a:r>
-              <a:t>SysGuard successfully demonstrates a modular Linux C++ application for system health monitoring.</a:t>
-            </a:r>
-          </a:p>
+              <a:defRPr sz="1400">
+                <a:solidFill>
+                  <a:srgbClr val="1F2937"/>
+                </a:solidFill>
+              </a:defRPr>
+            </a:pPr>
+            <a:r>
+              <a:t>Source • Documentation • Driver • Tests • PPT</a:t>
+            </a:r>
+          </a:p>
+        </p:txBody>
+      </p:sp>
+      <p:sp>
+        <p:nvSpPr>
+          <p:cNvPr id="21" name="Rounded Rectangle 20"/>
+          <p:cNvSpPr/>
+          <p:nvPr/>
+        </p:nvSpPr>
+        <p:spPr>
+          <a:xfrm>
+            <a:off x="7955279" y="5577840"/>
+            <a:ext cx="3291840" cy="502920"/>
+          </a:xfrm>
+          <a:prstGeom prst="roundRect">
+            <a:avLst/>
+          </a:prstGeom>
+          <a:solidFill>
+            <a:srgbClr val="0F172A"/>
+          </a:solidFill>
+          <a:ln>
+            <a:noFill/>
+          </a:ln>
+        </p:spPr>
+        <p:style>
+          <a:lnRef idx="1">
+            <a:schemeClr val="accent1"/>
+          </a:lnRef>
+          <a:fillRef idx="3">
+            <a:schemeClr val="accent1"/>
+          </a:fillRef>
+          <a:effectRef idx="2">
+            <a:schemeClr val="accent1"/>
+          </a:effectRef>
+          <a:fontRef idx="minor">
+            <a:schemeClr val="lt1"/>
+          </a:fontRef>
+        </p:style>
+        <p:txBody>
+          <a:bodyPr rtlCol="0" anchor="ctr"/>
+          <a:lstStyle/>
+          <a:p>
+            <a:pPr algn="ctr"/>
+          </a:p>
+        </p:txBody>
+      </p:sp>
+      <p:sp>
+        <p:nvSpPr>
+          <p:cNvPr id="22" name="TextBox 21"/>
+          <p:cNvSpPr txBox="1"/>
+          <p:nvPr/>
+        </p:nvSpPr>
+        <p:spPr>
+          <a:xfrm>
+            <a:off x="8092440" y="5696712"/>
+            <a:ext cx="3017520" cy="228600"/>
+          </a:xfrm>
+          <a:prstGeom prst="rect">
+            <a:avLst/>
+          </a:prstGeom>
+          <a:noFill/>
+        </p:spPr>
+        <p:txBody>
+          <a:bodyPr wrap="none">
+            <a:spAutoFit/>
+          </a:bodyPr>
+          <a:lstStyle/>
+          <a:p>
+            <a:pPr algn="ctr">
+              <a:defRPr sz="1250" b="1">
+                <a:solidFill>
+                  <a:srgbClr val="FFFFFF"/>
+                </a:solidFill>
+              </a:defRPr>
+            </a:pPr>
+            <a:r>
+              <a:t>Project: Working &amp; Demonstrable</a:t>
+            </a:r>
+          </a:p>
+        </p:txBody>
+      </p:sp>
+      <p:sp>
+        <p:nvSpPr>
+          <p:cNvPr id="23" name="TextBox 22"/>
+          <p:cNvSpPr txBox="1"/>
+          <p:nvPr/>
+        </p:nvSpPr>
+        <p:spPr>
+          <a:xfrm>
+            <a:off x="640080" y="6473952"/>
+            <a:ext cx="10972800" cy="201168"/>
+          </a:xfrm>
+          <a:prstGeom prst="rect">
+            <a:avLst/>
+          </a:prstGeom>
+          <a:noFill/>
+        </p:spPr>
+        <p:txBody>
+          <a:bodyPr wrap="none">
+            <a:spAutoFit/>
+          </a:bodyPr>
+          <a:lstStyle/>
           <a:p>
             <a:pPr>
-              <a:spcAft>
-                <a:spcPts val="1000"/>
-              </a:spcAft>
-              <a:defRPr sz="1900">
-                <a:solidFill>
-                  <a:srgbClr val="1C2536"/>
-                </a:solidFill>
-              </a:defRPr>
-            </a:pPr>
-            <a:r>
-              <a:t>The project integrates Linux interfaces, process concepts, resource monitoring, system programming and Git/GitHub workflow.</a:t>
-            </a:r>
-          </a:p>
-          <a:p>
-            <a:pPr>
-              <a:spcAft>
-                <a:spcPts val="1000"/>
-              </a:spcAft>
-              <a:defRPr sz="1900">
-                <a:solidFill>
-                  <a:srgbClr val="1C2536"/>
-                </a:solidFill>
-              </a:defRPr>
-            </a:pPr>
-            <a:r>
-              <a:t>The character-driver source demonstrates the kernel-space portion, with the WSL kernel-header limitation documented transparently.</a:t>
-            </a:r>
-          </a:p>
-          <a:p>
-            <a:pPr>
-              <a:spcAft>
-                <a:spcPts val="1000"/>
-              </a:spcAft>
-              <a:defRPr sz="1900">
-                <a:solidFill>
-                  <a:srgbClr val="1C2536"/>
-                </a:solidFill>
-              </a:defRPr>
-            </a:pPr>
-            <a:r>
-              <a:t>The application is functional, tested and ready for a short live demonstration.</a:t>
-            </a:r>
-          </a:p>
-        </p:txBody>
-      </p:sp>
-      <p:sp>
-        <p:nvSpPr>
-          <p:cNvPr id="7" name="TextBox 6"/>
-          <p:cNvSpPr txBox="1"/>
-          <p:nvPr/>
-        </p:nvSpPr>
-        <p:spPr>
-          <a:xfrm>
-            <a:off x="640080" y="6492240"/>
-            <a:ext cx="10972800" cy="228600"/>
-          </a:xfrm>
-          <a:prstGeom prst="rect">
-            <a:avLst/>
-          </a:prstGeom>
-          <a:noFill/>
-        </p:spPr>
-        <p:txBody>
-          <a:bodyPr wrap="none">
-            <a:spAutoFit/>
-          </a:bodyPr>
-          <a:lstStyle/>
-          <a:p>
-            <a:pPr>
-              <a:defRPr sz="900">
-                <a:solidFill>
-                  <a:srgbClr val="566373"/>
-                </a:solidFill>
-              </a:defRPr>
-            </a:pPr>
-            <a:r>
-              <a:t>SysGuard • Linux System Health Monitor                               13</a:t>
+              <a:defRPr sz="850">
+                <a:solidFill>
+                  <a:srgbClr val="64748B"/>
+                </a:solidFill>
+              </a:defRPr>
+            </a:pPr>
+            <a:r>
+              <a:t>SysGuard • Linux System Health Monitor                                              11</a:t>
             </a:r>
           </a:p>
         </p:txBody>
@@ -5418,13 +5699,13 @@
         <p:spPr>
           <a:xfrm>
             <a:off x="0" y="0"/>
-            <a:ext cx="12191695" cy="6858000"/>
+            <a:ext cx="12191999" cy="6858000"/>
           </a:xfrm>
           <a:prstGeom prst="rect">
             <a:avLst/>
           </a:prstGeom>
           <a:solidFill>
-            <a:srgbClr val="FFFFFF"/>
+            <a:srgbClr val="F5F7FA"/>
           </a:solidFill>
           <a:ln>
             <a:noFill/>
@@ -5461,13 +5742,13 @@
         <p:spPr>
           <a:xfrm>
             <a:off x="0" y="0"/>
-            <a:ext cx="12191695" cy="201168"/>
+            <a:ext cx="12191999" cy="164592"/>
           </a:xfrm>
           <a:prstGeom prst="rect">
             <a:avLst/>
           </a:prstGeom>
           <a:solidFill>
-            <a:srgbClr val="2A69BA"/>
+            <a:srgbClr val="2563EB"/>
           </a:solidFill>
           <a:ln>
             <a:noFill/>
@@ -5503,8 +5784,8 @@
         </p:nvSpPr>
         <p:spPr>
           <a:xfrm>
-            <a:off x="640080" y="502920"/>
-            <a:ext cx="10881360" cy="640080"/>
+            <a:off x="640080" y="438912"/>
+            <a:ext cx="10972800" cy="566928"/>
           </a:xfrm>
           <a:prstGeom prst="rect">
             <a:avLst/>
@@ -5520,7 +5801,7 @@
             <a:pPr>
               <a:defRPr sz="2800" b="1">
                 <a:solidFill>
-                  <a:srgbClr val="0E1827"/>
+                  <a:srgbClr val="0F172A"/>
                 </a:solidFill>
               </a:defRPr>
             </a:pPr>
@@ -5538,8 +5819,8 @@
         </p:nvSpPr>
         <p:spPr>
           <a:xfrm>
-            <a:off x="658368" y="1143000"/>
-            <a:ext cx="10789920" cy="411480"/>
+            <a:off x="658368" y="987552"/>
+            <a:ext cx="10698480" cy="365760"/>
           </a:xfrm>
           <a:prstGeom prst="rect">
             <a:avLst/>
@@ -5553,9 +5834,9 @@
           <a:lstStyle/>
           <a:p>
             <a:pPr>
-              <a:defRPr sz="1400">
-                <a:solidFill>
-                  <a:srgbClr val="566373"/>
+              <a:defRPr sz="1300">
+                <a:solidFill>
+                  <a:srgbClr val="64748B"/>
                 </a:solidFill>
               </a:defRPr>
             </a:pPr>
@@ -5573,16 +5854,16 @@
         </p:nvSpPr>
         <p:spPr>
           <a:xfrm>
-            <a:off x="822960" y="1645920"/>
-            <a:ext cx="10424160" cy="4389120"/>
-          </a:xfrm>
-          <a:prstGeom prst="rect">
-            <a:avLst/>
-          </a:prstGeom>
-          <a:noFill/>
-        </p:spPr>
-        <p:txBody>
-          <a:bodyPr wrap="square">
+            <a:off x="777240" y="1554480"/>
+            <a:ext cx="6492240" cy="4297680"/>
+          </a:xfrm>
+          <a:prstGeom prst="rect">
+            <a:avLst/>
+          </a:prstGeom>
+          <a:noFill/>
+        </p:spPr>
+        <p:txBody>
+          <a:bodyPr wrap="square" lIns="0" rIns="0">
             <a:spAutoFit/>
           </a:bodyPr>
           <a:lstStyle/>
@@ -5591,14 +5872,14 @@
               <a:spcAft>
                 <a:spcPts val="1000"/>
               </a:spcAft>
-              <a:defRPr sz="2000">
-                <a:solidFill>
-                  <a:srgbClr val="1C2536"/>
-                </a:solidFill>
-              </a:defRPr>
-            </a:pPr>
-            <a:r>
-              <a:t>Linux exposes system information through many separate tools and interfaces.</a:t>
+              <a:defRPr sz="1800">
+                <a:solidFill>
+                  <a:srgbClr val="1F2937"/>
+                </a:solidFill>
+              </a:defRPr>
+            </a:pPr>
+            <a:r>
+              <a:t>Linux exposes system-health information through different commands and virtual interfaces.</a:t>
             </a:r>
           </a:p>
           <a:p>
@@ -5606,14 +5887,14 @@
               <a:spcAft>
                 <a:spcPts val="1000"/>
               </a:spcAft>
-              <a:defRPr sz="2000">
-                <a:solidFill>
-                  <a:srgbClr val="1C2536"/>
-                </a:solidFill>
-              </a:defRPr>
-            </a:pPr>
-            <a:r>
-              <a:t>A user often needs multiple commands to understand CPU, memory, storage and process activity.</a:t>
+              <a:defRPr sz="1800">
+                <a:solidFill>
+                  <a:srgbClr val="1F2937"/>
+                </a:solidFill>
+              </a:defRPr>
+            </a:pPr>
+            <a:r>
+              <a:t>Checking CPU, memory, storage and processes separately makes routine diagnosis less convenient.</a:t>
             </a:r>
           </a:p>
           <a:p>
@@ -5621,14 +5902,14 @@
               <a:spcAft>
                 <a:spcPts val="1000"/>
               </a:spcAft>
-              <a:defRPr sz="2000">
-                <a:solidFill>
-                  <a:srgbClr val="1C2536"/>
-                </a:solidFill>
-              </a:defRPr>
-            </a:pPr>
-            <a:r>
-              <a:t>SysGuard combines these capabilities into one lightweight C++ command-line tool.</a:t>
+              <a:defRPr sz="1800">
+                <a:solidFill>
+                  <a:srgbClr val="1F2937"/>
+                </a:solidFill>
+              </a:defRPr>
+            </a:pPr>
+            <a:r>
+              <a:t>SysGuard combines these checks into one lightweight terminal application.</a:t>
             </a:r>
           </a:p>
           <a:p>
@@ -5636,28 +5917,116 @@
               <a:spcAft>
                 <a:spcPts val="1000"/>
               </a:spcAft>
-              <a:defRPr sz="2000">
-                <a:solidFill>
-                  <a:srgbClr val="1C2536"/>
-                </a:solidFill>
-              </a:defRPr>
-            </a:pPr>
-            <a:r>
-              <a:t>The project also demonstrates how software interacts with Linux system interfaces and the kernel.</a:t>
-            </a:r>
-          </a:p>
-        </p:txBody>
-      </p:sp>
-      <p:sp>
-        <p:nvSpPr>
-          <p:cNvPr id="7" name="TextBox 6"/>
-          <p:cNvSpPr txBox="1"/>
-          <p:nvPr/>
-        </p:nvSpPr>
-        <p:spPr>
-          <a:xfrm>
-            <a:off x="640080" y="6492240"/>
-            <a:ext cx="10972800" cy="228600"/>
+              <a:defRPr sz="1800">
+                <a:solidFill>
+                  <a:srgbClr val="1F2937"/>
+                </a:solidFill>
+              </a:defRPr>
+            </a:pPr>
+            <a:r>
+              <a:t>The project connects C++ application logic with Linux operating-system concepts.</a:t>
+            </a:r>
+          </a:p>
+        </p:txBody>
+      </p:sp>
+      <p:sp>
+        <p:nvSpPr>
+          <p:cNvPr id="7" name="Rounded Rectangle 6"/>
+          <p:cNvSpPr/>
+          <p:nvPr/>
+        </p:nvSpPr>
+        <p:spPr>
+          <a:xfrm>
+            <a:off x="7635240" y="1645920"/>
+            <a:ext cx="3474720" cy="914400"/>
+          </a:xfrm>
+          <a:prstGeom prst="roundRect">
+            <a:avLst/>
+          </a:prstGeom>
+          <a:solidFill>
+            <a:srgbClr val="FFFFFF"/>
+          </a:solidFill>
+          <a:ln>
+            <a:solidFill>
+              <a:srgbClr val="D7DEE7"/>
+            </a:solidFill>
+          </a:ln>
+        </p:spPr>
+        <p:style>
+          <a:lnRef idx="1">
+            <a:schemeClr val="accent1"/>
+          </a:lnRef>
+          <a:fillRef idx="3">
+            <a:schemeClr val="accent1"/>
+          </a:fillRef>
+          <a:effectRef idx="2">
+            <a:schemeClr val="accent1"/>
+          </a:effectRef>
+          <a:fontRef idx="minor">
+            <a:schemeClr val="lt1"/>
+          </a:fontRef>
+        </p:style>
+        <p:txBody>
+          <a:bodyPr rtlCol="0" anchor="ctr"/>
+          <a:lstStyle/>
+          <a:p>
+            <a:pPr algn="ctr"/>
+          </a:p>
+        </p:txBody>
+      </p:sp>
+      <p:sp>
+        <p:nvSpPr>
+          <p:cNvPr id="8" name="Rectangle 7"/>
+          <p:cNvSpPr/>
+          <p:nvPr/>
+        </p:nvSpPr>
+        <p:spPr>
+          <a:xfrm>
+            <a:off x="7635240" y="1645920"/>
+            <a:ext cx="73152" cy="914400"/>
+          </a:xfrm>
+          <a:prstGeom prst="rect">
+            <a:avLst/>
+          </a:prstGeom>
+          <a:solidFill>
+            <a:srgbClr val="2563EB"/>
+          </a:solidFill>
+          <a:ln>
+            <a:noFill/>
+          </a:ln>
+        </p:spPr>
+        <p:style>
+          <a:lnRef idx="1">
+            <a:schemeClr val="accent1"/>
+          </a:lnRef>
+          <a:fillRef idx="3">
+            <a:schemeClr val="accent1"/>
+          </a:fillRef>
+          <a:effectRef idx="2">
+            <a:schemeClr val="accent1"/>
+          </a:effectRef>
+          <a:fontRef idx="minor">
+            <a:schemeClr val="lt1"/>
+          </a:fontRef>
+        </p:style>
+        <p:txBody>
+          <a:bodyPr rtlCol="0" anchor="ctr"/>
+          <a:lstStyle/>
+          <a:p>
+            <a:pPr algn="ctr"/>
+          </a:p>
+        </p:txBody>
+      </p:sp>
+      <p:sp>
+        <p:nvSpPr>
+          <p:cNvPr id="9" name="TextBox 8"/>
+          <p:cNvSpPr txBox="1"/>
+          <p:nvPr/>
+        </p:nvSpPr>
+        <p:spPr>
+          <a:xfrm>
+            <a:off x="7845552" y="1810512"/>
+            <a:ext cx="3127248" cy="365760"/>
           </a:xfrm>
           <a:prstGeom prst="rect">
             <a:avLst/>
@@ -5671,14 +6040,558 @@
           <a:lstStyle/>
           <a:p>
             <a:pPr>
-              <a:defRPr sz="900">
-                <a:solidFill>
-                  <a:srgbClr val="566373"/>
-                </a:solidFill>
-              </a:defRPr>
-            </a:pPr>
-            <a:r>
-              <a:t>SysGuard • Linux System Health Monitor                               2</a:t>
+              <a:defRPr sz="1600" b="1">
+                <a:solidFill>
+                  <a:srgbClr val="0F172A"/>
+                </a:solidFill>
+              </a:defRPr>
+            </a:pPr>
+            <a:r>
+              <a:t>CPU</a:t>
+            </a:r>
+          </a:p>
+        </p:txBody>
+      </p:sp>
+      <p:sp>
+        <p:nvSpPr>
+          <p:cNvPr id="10" name="TextBox 9"/>
+          <p:cNvSpPr txBox="1"/>
+          <p:nvPr/>
+        </p:nvSpPr>
+        <p:spPr>
+          <a:xfrm>
+            <a:off x="7845552" y="2240280"/>
+            <a:ext cx="3127248" cy="201167"/>
+          </a:xfrm>
+          <a:prstGeom prst="rect">
+            <a:avLst/>
+          </a:prstGeom>
+          <a:noFill/>
+        </p:spPr>
+        <p:txBody>
+          <a:bodyPr wrap="square">
+            <a:spAutoFit/>
+          </a:bodyPr>
+          <a:lstStyle/>
+          <a:p>
+            <a:pPr>
+              <a:defRPr sz="1300">
+                <a:solidFill>
+                  <a:srgbClr val="1F2937"/>
+                </a:solidFill>
+              </a:defRPr>
+            </a:pPr>
+            <a:r>
+              <a:t>Usage &amp; load</a:t>
+            </a:r>
+          </a:p>
+        </p:txBody>
+      </p:sp>
+      <p:sp>
+        <p:nvSpPr>
+          <p:cNvPr id="11" name="Rounded Rectangle 10"/>
+          <p:cNvSpPr/>
+          <p:nvPr/>
+        </p:nvSpPr>
+        <p:spPr>
+          <a:xfrm>
+            <a:off x="7635240" y="2697480"/>
+            <a:ext cx="3474720" cy="914400"/>
+          </a:xfrm>
+          <a:prstGeom prst="roundRect">
+            <a:avLst/>
+          </a:prstGeom>
+          <a:solidFill>
+            <a:srgbClr val="FFFFFF"/>
+          </a:solidFill>
+          <a:ln>
+            <a:solidFill>
+              <a:srgbClr val="D7DEE7"/>
+            </a:solidFill>
+          </a:ln>
+        </p:spPr>
+        <p:style>
+          <a:lnRef idx="1">
+            <a:schemeClr val="accent1"/>
+          </a:lnRef>
+          <a:fillRef idx="3">
+            <a:schemeClr val="accent1"/>
+          </a:fillRef>
+          <a:effectRef idx="2">
+            <a:schemeClr val="accent1"/>
+          </a:effectRef>
+          <a:fontRef idx="minor">
+            <a:schemeClr val="lt1"/>
+          </a:fontRef>
+        </p:style>
+        <p:txBody>
+          <a:bodyPr rtlCol="0" anchor="ctr"/>
+          <a:lstStyle/>
+          <a:p>
+            <a:pPr algn="ctr"/>
+          </a:p>
+        </p:txBody>
+      </p:sp>
+      <p:sp>
+        <p:nvSpPr>
+          <p:cNvPr id="12" name="Rectangle 11"/>
+          <p:cNvSpPr/>
+          <p:nvPr/>
+        </p:nvSpPr>
+        <p:spPr>
+          <a:xfrm>
+            <a:off x="7635240" y="2697480"/>
+            <a:ext cx="73152" cy="914400"/>
+          </a:xfrm>
+          <a:prstGeom prst="rect">
+            <a:avLst/>
+          </a:prstGeom>
+          <a:solidFill>
+            <a:srgbClr val="0EA5E9"/>
+          </a:solidFill>
+          <a:ln>
+            <a:noFill/>
+          </a:ln>
+        </p:spPr>
+        <p:style>
+          <a:lnRef idx="1">
+            <a:schemeClr val="accent1"/>
+          </a:lnRef>
+          <a:fillRef idx="3">
+            <a:schemeClr val="accent1"/>
+          </a:fillRef>
+          <a:effectRef idx="2">
+            <a:schemeClr val="accent1"/>
+          </a:effectRef>
+          <a:fontRef idx="minor">
+            <a:schemeClr val="lt1"/>
+          </a:fontRef>
+        </p:style>
+        <p:txBody>
+          <a:bodyPr rtlCol="0" anchor="ctr"/>
+          <a:lstStyle/>
+          <a:p>
+            <a:pPr algn="ctr"/>
+          </a:p>
+        </p:txBody>
+      </p:sp>
+      <p:sp>
+        <p:nvSpPr>
+          <p:cNvPr id="13" name="TextBox 12"/>
+          <p:cNvSpPr txBox="1"/>
+          <p:nvPr/>
+        </p:nvSpPr>
+        <p:spPr>
+          <a:xfrm>
+            <a:off x="7845552" y="2862072"/>
+            <a:ext cx="3127248" cy="365760"/>
+          </a:xfrm>
+          <a:prstGeom prst="rect">
+            <a:avLst/>
+          </a:prstGeom>
+          <a:noFill/>
+        </p:spPr>
+        <p:txBody>
+          <a:bodyPr wrap="none">
+            <a:spAutoFit/>
+          </a:bodyPr>
+          <a:lstStyle/>
+          <a:p>
+            <a:pPr>
+              <a:defRPr sz="1600" b="1">
+                <a:solidFill>
+                  <a:srgbClr val="0F172A"/>
+                </a:solidFill>
+              </a:defRPr>
+            </a:pPr>
+            <a:r>
+              <a:t>Memory</a:t>
+            </a:r>
+          </a:p>
+        </p:txBody>
+      </p:sp>
+      <p:sp>
+        <p:nvSpPr>
+          <p:cNvPr id="14" name="TextBox 13"/>
+          <p:cNvSpPr txBox="1"/>
+          <p:nvPr/>
+        </p:nvSpPr>
+        <p:spPr>
+          <a:xfrm>
+            <a:off x="7845552" y="3291840"/>
+            <a:ext cx="3127248" cy="201167"/>
+          </a:xfrm>
+          <a:prstGeom prst="rect">
+            <a:avLst/>
+          </a:prstGeom>
+          <a:noFill/>
+        </p:spPr>
+        <p:txBody>
+          <a:bodyPr wrap="square">
+            <a:spAutoFit/>
+          </a:bodyPr>
+          <a:lstStyle/>
+          <a:p>
+            <a:pPr>
+              <a:defRPr sz="1300">
+                <a:solidFill>
+                  <a:srgbClr val="1F2937"/>
+                </a:solidFill>
+              </a:defRPr>
+            </a:pPr>
+            <a:r>
+              <a:t>RAM &amp; swap</a:t>
+            </a:r>
+          </a:p>
+        </p:txBody>
+      </p:sp>
+      <p:sp>
+        <p:nvSpPr>
+          <p:cNvPr id="15" name="Rounded Rectangle 14"/>
+          <p:cNvSpPr/>
+          <p:nvPr/>
+        </p:nvSpPr>
+        <p:spPr>
+          <a:xfrm>
+            <a:off x="7635240" y="3749039"/>
+            <a:ext cx="3474720" cy="914400"/>
+          </a:xfrm>
+          <a:prstGeom prst="roundRect">
+            <a:avLst/>
+          </a:prstGeom>
+          <a:solidFill>
+            <a:srgbClr val="FFFFFF"/>
+          </a:solidFill>
+          <a:ln>
+            <a:solidFill>
+              <a:srgbClr val="D7DEE7"/>
+            </a:solidFill>
+          </a:ln>
+        </p:spPr>
+        <p:style>
+          <a:lnRef idx="1">
+            <a:schemeClr val="accent1"/>
+          </a:lnRef>
+          <a:fillRef idx="3">
+            <a:schemeClr val="accent1"/>
+          </a:fillRef>
+          <a:effectRef idx="2">
+            <a:schemeClr val="accent1"/>
+          </a:effectRef>
+          <a:fontRef idx="minor">
+            <a:schemeClr val="lt1"/>
+          </a:fontRef>
+        </p:style>
+        <p:txBody>
+          <a:bodyPr rtlCol="0" anchor="ctr"/>
+          <a:lstStyle/>
+          <a:p>
+            <a:pPr algn="ctr"/>
+          </a:p>
+        </p:txBody>
+      </p:sp>
+      <p:sp>
+        <p:nvSpPr>
+          <p:cNvPr id="16" name="Rectangle 15"/>
+          <p:cNvSpPr/>
+          <p:nvPr/>
+        </p:nvSpPr>
+        <p:spPr>
+          <a:xfrm>
+            <a:off x="7635240" y="3749039"/>
+            <a:ext cx="73152" cy="914400"/>
+          </a:xfrm>
+          <a:prstGeom prst="rect">
+            <a:avLst/>
+          </a:prstGeom>
+          <a:solidFill>
+            <a:srgbClr val="0D9488"/>
+          </a:solidFill>
+          <a:ln>
+            <a:noFill/>
+          </a:ln>
+        </p:spPr>
+        <p:style>
+          <a:lnRef idx="1">
+            <a:schemeClr val="accent1"/>
+          </a:lnRef>
+          <a:fillRef idx="3">
+            <a:schemeClr val="accent1"/>
+          </a:fillRef>
+          <a:effectRef idx="2">
+            <a:schemeClr val="accent1"/>
+          </a:effectRef>
+          <a:fontRef idx="minor">
+            <a:schemeClr val="lt1"/>
+          </a:fontRef>
+        </p:style>
+        <p:txBody>
+          <a:bodyPr rtlCol="0" anchor="ctr"/>
+          <a:lstStyle/>
+          <a:p>
+            <a:pPr algn="ctr"/>
+          </a:p>
+        </p:txBody>
+      </p:sp>
+      <p:sp>
+        <p:nvSpPr>
+          <p:cNvPr id="17" name="TextBox 16"/>
+          <p:cNvSpPr txBox="1"/>
+          <p:nvPr/>
+        </p:nvSpPr>
+        <p:spPr>
+          <a:xfrm>
+            <a:off x="7845552" y="3913631"/>
+            <a:ext cx="3127248" cy="365760"/>
+          </a:xfrm>
+          <a:prstGeom prst="rect">
+            <a:avLst/>
+          </a:prstGeom>
+          <a:noFill/>
+        </p:spPr>
+        <p:txBody>
+          <a:bodyPr wrap="none">
+            <a:spAutoFit/>
+          </a:bodyPr>
+          <a:lstStyle/>
+          <a:p>
+            <a:pPr>
+              <a:defRPr sz="1600" b="1">
+                <a:solidFill>
+                  <a:srgbClr val="0F172A"/>
+                </a:solidFill>
+              </a:defRPr>
+            </a:pPr>
+            <a:r>
+              <a:t>Storage</a:t>
+            </a:r>
+          </a:p>
+        </p:txBody>
+      </p:sp>
+      <p:sp>
+        <p:nvSpPr>
+          <p:cNvPr id="18" name="TextBox 17"/>
+          <p:cNvSpPr txBox="1"/>
+          <p:nvPr/>
+        </p:nvSpPr>
+        <p:spPr>
+          <a:xfrm>
+            <a:off x="7845552" y="4343400"/>
+            <a:ext cx="3127248" cy="201167"/>
+          </a:xfrm>
+          <a:prstGeom prst="rect">
+            <a:avLst/>
+          </a:prstGeom>
+          <a:noFill/>
+        </p:spPr>
+        <p:txBody>
+          <a:bodyPr wrap="square">
+            <a:spAutoFit/>
+          </a:bodyPr>
+          <a:lstStyle/>
+          <a:p>
+            <a:pPr>
+              <a:defRPr sz="1300">
+                <a:solidFill>
+                  <a:srgbClr val="1F2937"/>
+                </a:solidFill>
+              </a:defRPr>
+            </a:pPr>
+            <a:r>
+              <a:t>Filesystem usage</a:t>
+            </a:r>
+          </a:p>
+        </p:txBody>
+      </p:sp>
+      <p:sp>
+        <p:nvSpPr>
+          <p:cNvPr id="19" name="Rounded Rectangle 18"/>
+          <p:cNvSpPr/>
+          <p:nvPr/>
+        </p:nvSpPr>
+        <p:spPr>
+          <a:xfrm>
+            <a:off x="7635240" y="4800600"/>
+            <a:ext cx="3474720" cy="914400"/>
+          </a:xfrm>
+          <a:prstGeom prst="roundRect">
+            <a:avLst/>
+          </a:prstGeom>
+          <a:solidFill>
+            <a:srgbClr val="FFFFFF"/>
+          </a:solidFill>
+          <a:ln>
+            <a:solidFill>
+              <a:srgbClr val="D7DEE7"/>
+            </a:solidFill>
+          </a:ln>
+        </p:spPr>
+        <p:style>
+          <a:lnRef idx="1">
+            <a:schemeClr val="accent1"/>
+          </a:lnRef>
+          <a:fillRef idx="3">
+            <a:schemeClr val="accent1"/>
+          </a:fillRef>
+          <a:effectRef idx="2">
+            <a:schemeClr val="accent1"/>
+          </a:effectRef>
+          <a:fontRef idx="minor">
+            <a:schemeClr val="lt1"/>
+          </a:fontRef>
+        </p:style>
+        <p:txBody>
+          <a:bodyPr rtlCol="0" anchor="ctr"/>
+          <a:lstStyle/>
+          <a:p>
+            <a:pPr algn="ctr"/>
+          </a:p>
+        </p:txBody>
+      </p:sp>
+      <p:sp>
+        <p:nvSpPr>
+          <p:cNvPr id="20" name="Rectangle 19"/>
+          <p:cNvSpPr/>
+          <p:nvPr/>
+        </p:nvSpPr>
+        <p:spPr>
+          <a:xfrm>
+            <a:off x="7635240" y="4800600"/>
+            <a:ext cx="73152" cy="914400"/>
+          </a:xfrm>
+          <a:prstGeom prst="rect">
+            <a:avLst/>
+          </a:prstGeom>
+          <a:solidFill>
+            <a:srgbClr val="EA8A2A"/>
+          </a:solidFill>
+          <a:ln>
+            <a:noFill/>
+          </a:ln>
+        </p:spPr>
+        <p:style>
+          <a:lnRef idx="1">
+            <a:schemeClr val="accent1"/>
+          </a:lnRef>
+          <a:fillRef idx="3">
+            <a:schemeClr val="accent1"/>
+          </a:fillRef>
+          <a:effectRef idx="2">
+            <a:schemeClr val="accent1"/>
+          </a:effectRef>
+          <a:fontRef idx="minor">
+            <a:schemeClr val="lt1"/>
+          </a:fontRef>
+        </p:style>
+        <p:txBody>
+          <a:bodyPr rtlCol="0" anchor="ctr"/>
+          <a:lstStyle/>
+          <a:p>
+            <a:pPr algn="ctr"/>
+          </a:p>
+        </p:txBody>
+      </p:sp>
+      <p:sp>
+        <p:nvSpPr>
+          <p:cNvPr id="21" name="TextBox 20"/>
+          <p:cNvSpPr txBox="1"/>
+          <p:nvPr/>
+        </p:nvSpPr>
+        <p:spPr>
+          <a:xfrm>
+            <a:off x="7845552" y="4965192"/>
+            <a:ext cx="3127248" cy="365760"/>
+          </a:xfrm>
+          <a:prstGeom prst="rect">
+            <a:avLst/>
+          </a:prstGeom>
+          <a:noFill/>
+        </p:spPr>
+        <p:txBody>
+          <a:bodyPr wrap="none">
+            <a:spAutoFit/>
+          </a:bodyPr>
+          <a:lstStyle/>
+          <a:p>
+            <a:pPr>
+              <a:defRPr sz="1600" b="1">
+                <a:solidFill>
+                  <a:srgbClr val="0F172A"/>
+                </a:solidFill>
+              </a:defRPr>
+            </a:pPr>
+            <a:r>
+              <a:t>Processes</a:t>
+            </a:r>
+          </a:p>
+        </p:txBody>
+      </p:sp>
+      <p:sp>
+        <p:nvSpPr>
+          <p:cNvPr id="22" name="TextBox 21"/>
+          <p:cNvSpPr txBox="1"/>
+          <p:nvPr/>
+        </p:nvSpPr>
+        <p:spPr>
+          <a:xfrm>
+            <a:off x="7845552" y="5394960"/>
+            <a:ext cx="3127248" cy="201167"/>
+          </a:xfrm>
+          <a:prstGeom prst="rect">
+            <a:avLst/>
+          </a:prstGeom>
+          <a:noFill/>
+        </p:spPr>
+        <p:txBody>
+          <a:bodyPr wrap="square">
+            <a:spAutoFit/>
+          </a:bodyPr>
+          <a:lstStyle/>
+          <a:p>
+            <a:pPr>
+              <a:defRPr sz="1300">
+                <a:solidFill>
+                  <a:srgbClr val="1F2937"/>
+                </a:solidFill>
+              </a:defRPr>
+            </a:pPr>
+            <a:r>
+              <a:t>PIDs &amp; states</a:t>
+            </a:r>
+          </a:p>
+        </p:txBody>
+      </p:sp>
+      <p:sp>
+        <p:nvSpPr>
+          <p:cNvPr id="23" name="TextBox 22"/>
+          <p:cNvSpPr txBox="1"/>
+          <p:nvPr/>
+        </p:nvSpPr>
+        <p:spPr>
+          <a:xfrm>
+            <a:off x="640080" y="6473952"/>
+            <a:ext cx="10972800" cy="201168"/>
+          </a:xfrm>
+          <a:prstGeom prst="rect">
+            <a:avLst/>
+          </a:prstGeom>
+          <a:noFill/>
+        </p:spPr>
+        <p:txBody>
+          <a:bodyPr wrap="none">
+            <a:spAutoFit/>
+          </a:bodyPr>
+          <a:lstStyle/>
+          <a:p>
+            <a:pPr>
+              <a:defRPr sz="850">
+                <a:solidFill>
+                  <a:srgbClr val="64748B"/>
+                </a:solidFill>
+              </a:defRPr>
+            </a:pPr>
+            <a:r>
+              <a:t>SysGuard • Linux System Health Monitor                                              2</a:t>
             </a:r>
           </a:p>
         </p:txBody>
@@ -5710,13 +6623,13 @@
         <p:spPr>
           <a:xfrm>
             <a:off x="0" y="0"/>
-            <a:ext cx="12191695" cy="6858000"/>
+            <a:ext cx="12191999" cy="6858000"/>
           </a:xfrm>
           <a:prstGeom prst="rect">
             <a:avLst/>
           </a:prstGeom>
           <a:solidFill>
-            <a:srgbClr val="FFFFFF"/>
+            <a:srgbClr val="F5F7FA"/>
           </a:solidFill>
           <a:ln>
             <a:noFill/>
@@ -5753,13 +6666,13 @@
         <p:spPr>
           <a:xfrm>
             <a:off x="0" y="0"/>
-            <a:ext cx="12191695" cy="201168"/>
+            <a:ext cx="12191999" cy="164592"/>
           </a:xfrm>
           <a:prstGeom prst="rect">
             <a:avLst/>
           </a:prstGeom>
           <a:solidFill>
-            <a:srgbClr val="2A69BA"/>
+            <a:srgbClr val="2563EB"/>
           </a:solidFill>
           <a:ln>
             <a:noFill/>
@@ -5795,8 +6708,8 @@
         </p:nvSpPr>
         <p:spPr>
           <a:xfrm>
-            <a:off x="640080" y="502920"/>
-            <a:ext cx="10881360" cy="640080"/>
+            <a:off x="640080" y="438912"/>
+            <a:ext cx="10972800" cy="566928"/>
           </a:xfrm>
           <a:prstGeom prst="rect">
             <a:avLst/>
@@ -5812,7 +6725,7 @@
             <a:pPr>
               <a:defRPr sz="2800" b="1">
                 <a:solidFill>
-                  <a:srgbClr val="0E1827"/>
+                  <a:srgbClr val="0F172A"/>
                 </a:solidFill>
               </a:defRPr>
             </a:pPr>
@@ -5830,8 +6743,8 @@
         </p:nvSpPr>
         <p:spPr>
           <a:xfrm>
-            <a:off x="658368" y="1143000"/>
-            <a:ext cx="10789920" cy="411480"/>
+            <a:off x="658368" y="987552"/>
+            <a:ext cx="10698480" cy="365760"/>
           </a:xfrm>
           <a:prstGeom prst="rect">
             <a:avLst/>
@@ -5845,14 +6758,14 @@
           <a:lstStyle/>
           <a:p>
             <a:pPr>
-              <a:defRPr sz="1400">
-                <a:solidFill>
-                  <a:srgbClr val="566373"/>
-                </a:solidFill>
-              </a:defRPr>
-            </a:pPr>
-            <a:r>
-              <a:t>Project goals</a:t>
+              <a:defRPr sz="1300">
+                <a:solidFill>
+                  <a:srgbClr val="64748B"/>
+                </a:solidFill>
+              </a:defRPr>
+            </a:pPr>
+            <a:r>
+              <a:t>What the project was built to demonstrate</a:t>
             </a:r>
           </a:p>
         </p:txBody>
@@ -5865,16 +6778,16 @@
         </p:nvSpPr>
         <p:spPr>
           <a:xfrm>
-            <a:off x="822960" y="1645920"/>
-            <a:ext cx="10424160" cy="4389120"/>
-          </a:xfrm>
-          <a:prstGeom prst="rect">
-            <a:avLst/>
-          </a:prstGeom>
-          <a:noFill/>
-        </p:spPr>
-        <p:txBody>
-          <a:bodyPr wrap="square">
+            <a:off x="822960" y="1463040"/>
+            <a:ext cx="10424160" cy="4754880"/>
+          </a:xfrm>
+          <a:prstGeom prst="rect">
+            <a:avLst/>
+          </a:prstGeom>
+          <a:noFill/>
+        </p:spPr>
+        <p:txBody>
+          <a:bodyPr wrap="square" lIns="0" rIns="0">
             <a:spAutoFit/>
           </a:bodyPr>
           <a:lstStyle/>
@@ -5883,14 +6796,14 @@
               <a:spcAft>
                 <a:spcPts val="1000"/>
               </a:spcAft>
-              <a:defRPr sz="2000">
-                <a:solidFill>
-                  <a:srgbClr val="1C2536"/>
-                </a:solidFill>
-              </a:defRPr>
-            </a:pPr>
-            <a:r>
-              <a:t>Monitor CPU, memory, disk and process activity.</a:t>
+              <a:defRPr sz="1800">
+                <a:solidFill>
+                  <a:srgbClr val="1F2937"/>
+                </a:solidFill>
+              </a:defRPr>
+            </a:pPr>
+            <a:r>
+              <a:t>Monitor CPU utilization and system load.</a:t>
             </a:r>
           </a:p>
           <a:p>
@@ -5898,14 +6811,14 @@
               <a:spcAft>
                 <a:spcPts val="1000"/>
               </a:spcAft>
-              <a:defRPr sz="2000">
-                <a:solidFill>
-                  <a:srgbClr val="1C2536"/>
-                </a:solidFill>
-              </a:defRPr>
-            </a:pPr>
-            <a:r>
-              <a:t>Display Linux and computer-architecture related information.</a:t>
+              <a:defRPr sz="1800">
+                <a:solidFill>
+                  <a:srgbClr val="1F2937"/>
+                </a:solidFill>
+              </a:defRPr>
+            </a:pPr>
+            <a:r>
+              <a:t>Monitor RAM, swap and root filesystem usage.</a:t>
             </a:r>
           </a:p>
           <a:p>
@@ -5913,14 +6826,14 @@
               <a:spcAft>
                 <a:spcPts val="1000"/>
               </a:spcAft>
-              <a:defRPr sz="2000">
-                <a:solidFill>
-                  <a:srgbClr val="1C2536"/>
-                </a:solidFill>
-              </a:defRPr>
-            </a:pPr>
-            <a:r>
-              <a:t>Provide process search and controlled termination.</a:t>
+              <a:defRPr sz="1800">
+                <a:solidFill>
+                  <a:srgbClr val="1F2937"/>
+                </a:solidFill>
+              </a:defRPr>
+            </a:pPr>
+            <a:r>
+              <a:t>Display Linux and basic computer-architecture information.</a:t>
             </a:r>
           </a:p>
           <a:p>
@@ -5928,14 +6841,14 @@
               <a:spcAft>
                 <a:spcPts val="1000"/>
               </a:spcAft>
-              <a:defRPr sz="2000">
-                <a:solidFill>
-                  <a:srgbClr val="1C2536"/>
-                </a:solidFill>
-              </a:defRPr>
-            </a:pPr>
-            <a:r>
-              <a:t>Calculate overall system health and log snapshots.</a:t>
+              <a:defRPr sz="1800">
+                <a:solidFill>
+                  <a:srgbClr val="1F2937"/>
+                </a:solidFill>
+              </a:defRPr>
+            </a:pPr>
+            <a:r>
+              <a:t>List and search Linux processes and provide controlled termination.</a:t>
             </a:r>
           </a:p>
           <a:p>
@@ -5943,14 +6856,14 @@
               <a:spcAft>
                 <a:spcPts val="1000"/>
               </a:spcAft>
-              <a:defRPr sz="2000">
-                <a:solidFill>
-                  <a:srgbClr val="1C2536"/>
-                </a:solidFill>
-              </a:defRPr>
-            </a:pPr>
-            <a:r>
-              <a:t>Demonstrate user-space/kernel-space and character-device concepts.</a:t>
+              <a:defRPr sz="1800">
+                <a:solidFill>
+                  <a:srgbClr val="1F2937"/>
+                </a:solidFill>
+              </a:defRPr>
+            </a:pPr>
+            <a:r>
+              <a:t>Calculate overall health and save monitoring snapshots.</a:t>
             </a:r>
           </a:p>
           <a:p>
@@ -5958,14 +6871,14 @@
               <a:spcAft>
                 <a:spcPts val="1000"/>
               </a:spcAft>
-              <a:defRPr sz="2000">
-                <a:solidFill>
-                  <a:srgbClr val="1C2536"/>
-                </a:solidFill>
-              </a:defRPr>
-            </a:pPr>
-            <a:r>
-              <a:t>Maintain a professional GitHub project structure and documentation.</a:t>
+              <a:defRPr sz="1800">
+                <a:solidFill>
+                  <a:srgbClr val="1F2937"/>
+                </a:solidFill>
+              </a:defRPr>
+            </a:pPr>
+            <a:r>
+              <a:t>Demonstrate modular C++ design and Linux user-space/kernel-space concepts.</a:t>
             </a:r>
           </a:p>
         </p:txBody>
@@ -5978,8 +6891,8 @@
         </p:nvSpPr>
         <p:spPr>
           <a:xfrm>
-            <a:off x="640080" y="6492240"/>
-            <a:ext cx="10972800" cy="228600"/>
+            <a:off x="640080" y="6473952"/>
+            <a:ext cx="10972800" cy="201168"/>
           </a:xfrm>
           <a:prstGeom prst="rect">
             <a:avLst/>
@@ -5993,14 +6906,14 @@
           <a:lstStyle/>
           <a:p>
             <a:pPr>
-              <a:defRPr sz="900">
-                <a:solidFill>
-                  <a:srgbClr val="566373"/>
-                </a:solidFill>
-              </a:defRPr>
-            </a:pPr>
-            <a:r>
-              <a:t>SysGuard • Linux System Health Monitor                               3</a:t>
+              <a:defRPr sz="850">
+                <a:solidFill>
+                  <a:srgbClr val="64748B"/>
+                </a:solidFill>
+              </a:defRPr>
+            </a:pPr>
+            <a:r>
+              <a:t>SysGuard • Linux System Health Monitor                                              3</a:t>
             </a:r>
           </a:p>
         </p:txBody>
@@ -6032,13 +6945,13 @@
         <p:spPr>
           <a:xfrm>
             <a:off x="0" y="0"/>
-            <a:ext cx="12191695" cy="6858000"/>
+            <a:ext cx="12191999" cy="6858000"/>
           </a:xfrm>
           <a:prstGeom prst="rect">
             <a:avLst/>
           </a:prstGeom>
           <a:solidFill>
-            <a:srgbClr val="FFFFFF"/>
+            <a:srgbClr val="F5F7FA"/>
           </a:solidFill>
           <a:ln>
             <a:noFill/>
@@ -6075,13 +6988,13 @@
         <p:spPr>
           <a:xfrm>
             <a:off x="0" y="0"/>
-            <a:ext cx="12191695" cy="201168"/>
+            <a:ext cx="12191999" cy="164592"/>
           </a:xfrm>
           <a:prstGeom prst="rect">
             <a:avLst/>
           </a:prstGeom>
           <a:solidFill>
-            <a:srgbClr val="2A69BA"/>
+            <a:srgbClr val="2563EB"/>
           </a:solidFill>
           <a:ln>
             <a:noFill/>
@@ -6117,8 +7030,8 @@
         </p:nvSpPr>
         <p:spPr>
           <a:xfrm>
-            <a:off x="640080" y="502920"/>
-            <a:ext cx="10881360" cy="640080"/>
+            <a:off x="640080" y="438912"/>
+            <a:ext cx="10972800" cy="566928"/>
           </a:xfrm>
           <a:prstGeom prst="rect">
             <a:avLst/>
@@ -6134,12 +7047,12 @@
             <a:pPr>
               <a:defRPr sz="2800" b="1">
                 <a:solidFill>
-                  <a:srgbClr val="0E1827"/>
-                </a:solidFill>
-              </a:defRPr>
-            </a:pPr>
-            <a:r>
-              <a:t>3. Technology Stack</a:t>
+                  <a:srgbClr val="0F172A"/>
+                </a:solidFill>
+              </a:defRPr>
+            </a:pPr>
+            <a:r>
+              <a:t>3. Development Process</a:t>
             </a:r>
           </a:p>
         </p:txBody>
@@ -6152,8 +7065,8 @@
         </p:nvSpPr>
         <p:spPr>
           <a:xfrm>
-            <a:off x="658368" y="1143000"/>
-            <a:ext cx="10789920" cy="411480"/>
+            <a:off x="658368" y="987552"/>
+            <a:ext cx="10698480" cy="365760"/>
           </a:xfrm>
           <a:prstGeom prst="rect">
             <a:avLst/>
@@ -6167,14 +7080,14 @@
           <a:lstStyle/>
           <a:p>
             <a:pPr>
-              <a:defRPr sz="1400">
-                <a:solidFill>
-                  <a:srgbClr val="566373"/>
-                </a:solidFill>
-              </a:defRPr>
-            </a:pPr>
-            <a:r>
-              <a:t>Implementation environment</a:t>
+              <a:defRPr sz="1300">
+                <a:solidFill>
+                  <a:srgbClr val="64748B"/>
+                </a:solidFill>
+              </a:defRPr>
+            </a:pPr>
+            <a:r>
+              <a:t>Six-stage capstone workflow</a:t>
             </a:r>
           </a:p>
         </p:txBody>
@@ -6187,18 +7100,18 @@
         </p:nvSpPr>
         <p:spPr>
           <a:xfrm>
-            <a:off x="822960" y="1554480"/>
-            <a:ext cx="3108960" cy="502920"/>
+            <a:off x="685800" y="1508760"/>
+            <a:ext cx="3246120" cy="1600200"/>
           </a:xfrm>
           <a:prstGeom prst="roundRect">
             <a:avLst/>
           </a:prstGeom>
           <a:solidFill>
-            <a:srgbClr val="F1F5F9"/>
+            <a:srgbClr val="FFFFFF"/>
           </a:solidFill>
           <a:ln>
             <a:solidFill>
-              <a:srgbClr val="DCE2EA"/>
+              <a:srgbClr val="D7DEE7"/>
             </a:solidFill>
           </a:ln>
         </p:spPr>
@@ -6226,95 +7139,23 @@
       </p:sp>
       <p:sp>
         <p:nvSpPr>
-          <p:cNvPr id="7" name="TextBox 6"/>
-          <p:cNvSpPr txBox="1"/>
-          <p:nvPr/>
-        </p:nvSpPr>
-        <p:spPr>
-          <a:xfrm>
-            <a:off x="1005840" y="1627632"/>
-            <a:ext cx="2743200" cy="365760"/>
-          </a:xfrm>
-          <a:prstGeom prst="rect">
-            <a:avLst/>
-          </a:prstGeom>
-          <a:noFill/>
-        </p:spPr>
-        <p:txBody>
-          <a:bodyPr wrap="none">
-            <a:spAutoFit/>
-          </a:bodyPr>
-          <a:lstStyle/>
-          <a:p>
-            <a:pPr>
-              <a:defRPr sz="1600" b="1">
-                <a:solidFill>
-                  <a:srgbClr val="0E1827"/>
-                </a:solidFill>
-              </a:defRPr>
-            </a:pPr>
-            <a:r>
-              <a:t>Operating System</a:t>
-            </a:r>
-          </a:p>
-        </p:txBody>
-      </p:sp>
-      <p:sp>
-        <p:nvSpPr>
-          <p:cNvPr id="8" name="TextBox 7"/>
-          <p:cNvSpPr txBox="1"/>
-          <p:nvPr/>
-        </p:nvSpPr>
-        <p:spPr>
-          <a:xfrm>
-            <a:off x="4251960" y="1627632"/>
-            <a:ext cx="6675120" cy="365760"/>
-          </a:xfrm>
-          <a:prstGeom prst="rect">
-            <a:avLst/>
-          </a:prstGeom>
-          <a:noFill/>
-        </p:spPr>
-        <p:txBody>
-          <a:bodyPr wrap="none">
-            <a:spAutoFit/>
-          </a:bodyPr>
-          <a:lstStyle/>
-          <a:p>
-            <a:pPr>
-              <a:defRPr sz="1600">
-                <a:solidFill>
-                  <a:srgbClr val="1C2536"/>
-                </a:solidFill>
-              </a:defRPr>
-            </a:pPr>
-            <a:r>
-              <a:t>Ubuntu Linux / WSL2</a:t>
-            </a:r>
-          </a:p>
-        </p:txBody>
-      </p:sp>
-      <p:sp>
-        <p:nvSpPr>
-          <p:cNvPr id="9" name="Rounded Rectangle 8"/>
+          <p:cNvPr id="7" name="Oval 6"/>
           <p:cNvSpPr/>
           <p:nvPr/>
         </p:nvSpPr>
         <p:spPr>
           <a:xfrm>
-            <a:off x="822960" y="2267712"/>
-            <a:ext cx="3108960" cy="502920"/>
-          </a:xfrm>
-          <a:prstGeom prst="roundRect">
+            <a:off x="886968" y="1737360"/>
+            <a:ext cx="566928" cy="566928"/>
+          </a:xfrm>
+          <a:prstGeom prst="ellipse">
             <a:avLst/>
           </a:prstGeom>
           <a:solidFill>
-            <a:srgbClr val="F1F5F9"/>
+            <a:srgbClr val="2563EB"/>
           </a:solidFill>
           <a:ln>
-            <a:solidFill>
-              <a:srgbClr val="DCE2EA"/>
-            </a:solidFill>
+            <a:noFill/>
           </a:ln>
         </p:spPr>
         <p:style>
@@ -6341,14 +7182,84 @@
       </p:sp>
       <p:sp>
         <p:nvSpPr>
+          <p:cNvPr id="8" name="TextBox 7"/>
+          <p:cNvSpPr txBox="1"/>
+          <p:nvPr/>
+        </p:nvSpPr>
+        <p:spPr>
+          <a:xfrm>
+            <a:off x="886968" y="1856231"/>
+            <a:ext cx="566928" cy="182880"/>
+          </a:xfrm>
+          <a:prstGeom prst="rect">
+            <a:avLst/>
+          </a:prstGeom>
+          <a:noFill/>
+        </p:spPr>
+        <p:txBody>
+          <a:bodyPr wrap="none">
+            <a:spAutoFit/>
+          </a:bodyPr>
+          <a:lstStyle/>
+          <a:p>
+            <a:pPr algn="ctr">
+              <a:defRPr sz="1000" b="1">
+                <a:solidFill>
+                  <a:srgbClr val="FFFFFF"/>
+                </a:solidFill>
+              </a:defRPr>
+            </a:pPr>
+            <a:r>
+              <a:t>01</a:t>
+            </a:r>
+          </a:p>
+        </p:txBody>
+      </p:sp>
+      <p:sp>
+        <p:nvSpPr>
+          <p:cNvPr id="9" name="TextBox 8"/>
+          <p:cNvSpPr txBox="1"/>
+          <p:nvPr/>
+        </p:nvSpPr>
+        <p:spPr>
+          <a:xfrm>
+            <a:off x="1600200" y="1691639"/>
+            <a:ext cx="2103120" cy="365760"/>
+          </a:xfrm>
+          <a:prstGeom prst="rect">
+            <a:avLst/>
+          </a:prstGeom>
+          <a:noFill/>
+        </p:spPr>
+        <p:txBody>
+          <a:bodyPr wrap="none">
+            <a:spAutoFit/>
+          </a:bodyPr>
+          <a:lstStyle/>
+          <a:p>
+            <a:pPr>
+              <a:defRPr sz="1800" b="1">
+                <a:solidFill>
+                  <a:srgbClr val="0F172A"/>
+                </a:solidFill>
+              </a:defRPr>
+            </a:pPr>
+            <a:r>
+              <a:t>Introduction</a:t>
+            </a:r>
+          </a:p>
+        </p:txBody>
+      </p:sp>
+      <p:sp>
+        <p:nvSpPr>
           <p:cNvPr id="10" name="TextBox 9"/>
           <p:cNvSpPr txBox="1"/>
           <p:nvPr/>
         </p:nvSpPr>
         <p:spPr>
           <a:xfrm>
-            <a:off x="1005840" y="2340864"/>
-            <a:ext cx="2743200" cy="365760"/>
+            <a:off x="1600200" y="2167128"/>
+            <a:ext cx="2103120" cy="640080"/>
           </a:xfrm>
           <a:prstGeom prst="rect">
             <a:avLst/>
@@ -6362,73 +7273,38 @@
           <a:lstStyle/>
           <a:p>
             <a:pPr>
-              <a:defRPr sz="1600" b="1">
-                <a:solidFill>
-                  <a:srgbClr val="0E1827"/>
-                </a:solidFill>
-              </a:defRPr>
-            </a:pPr>
-            <a:r>
-              <a:t>Application</a:t>
-            </a:r>
-          </a:p>
-        </p:txBody>
-      </p:sp>
-      <p:sp>
-        <p:nvSpPr>
-          <p:cNvPr id="11" name="TextBox 10"/>
-          <p:cNvSpPr txBox="1"/>
-          <p:nvPr/>
-        </p:nvSpPr>
-        <p:spPr>
-          <a:xfrm>
-            <a:off x="4251960" y="2340864"/>
-            <a:ext cx="6675120" cy="365760"/>
-          </a:xfrm>
-          <a:prstGeom prst="rect">
-            <a:avLst/>
-          </a:prstGeom>
-          <a:noFill/>
-        </p:spPr>
-        <p:txBody>
-          <a:bodyPr wrap="none">
-            <a:spAutoFit/>
-          </a:bodyPr>
-          <a:lstStyle/>
-          <a:p>
-            <a:pPr>
-              <a:defRPr sz="1600">
-                <a:solidFill>
-                  <a:srgbClr val="1C2536"/>
-                </a:solidFill>
-              </a:defRPr>
-            </a:pPr>
-            <a:r>
-              <a:t>C++17</a:t>
-            </a:r>
-          </a:p>
-        </p:txBody>
-      </p:sp>
-      <p:sp>
-        <p:nvSpPr>
-          <p:cNvPr id="12" name="Rounded Rectangle 11"/>
+              <a:defRPr sz="1250">
+                <a:solidFill>
+                  <a:srgbClr val="1F2937"/>
+                </a:solidFill>
+              </a:defRPr>
+            </a:pPr>
+            <a:r>
+              <a:t>Problem, objective, scope</a:t>
+            </a:r>
+          </a:p>
+        </p:txBody>
+      </p:sp>
+      <p:sp>
+        <p:nvSpPr>
+          <p:cNvPr id="11" name="Rounded Rectangle 10"/>
           <p:cNvSpPr/>
           <p:nvPr/>
         </p:nvSpPr>
         <p:spPr>
           <a:xfrm>
-            <a:off x="822960" y="2980944"/>
-            <a:ext cx="3108960" cy="502920"/>
+            <a:off x="4480560" y="1508760"/>
+            <a:ext cx="3246120" cy="1600200"/>
           </a:xfrm>
           <a:prstGeom prst="roundRect">
             <a:avLst/>
           </a:prstGeom>
           <a:solidFill>
-            <a:srgbClr val="F1F5F9"/>
+            <a:srgbClr val="FFFFFF"/>
           </a:solidFill>
           <a:ln>
             <a:solidFill>
-              <a:srgbClr val="DCE2EA"/>
+              <a:srgbClr val="D7DEE7"/>
             </a:solidFill>
           </a:ln>
         </p:spPr>
@@ -6456,95 +7332,23 @@
       </p:sp>
       <p:sp>
         <p:nvSpPr>
-          <p:cNvPr id="13" name="TextBox 12"/>
-          <p:cNvSpPr txBox="1"/>
-          <p:nvPr/>
-        </p:nvSpPr>
-        <p:spPr>
-          <a:xfrm>
-            <a:off x="1005840" y="3054096"/>
-            <a:ext cx="2743200" cy="365760"/>
-          </a:xfrm>
-          <a:prstGeom prst="rect">
-            <a:avLst/>
-          </a:prstGeom>
-          <a:noFill/>
-        </p:spPr>
-        <p:txBody>
-          <a:bodyPr wrap="none">
-            <a:spAutoFit/>
-          </a:bodyPr>
-          <a:lstStyle/>
-          <a:p>
-            <a:pPr>
-              <a:defRPr sz="1600" b="1">
-                <a:solidFill>
-                  <a:srgbClr val="0E1827"/>
-                </a:solidFill>
-              </a:defRPr>
-            </a:pPr>
-            <a:r>
-              <a:t>Driver Source</a:t>
-            </a:r>
-          </a:p>
-        </p:txBody>
-      </p:sp>
-      <p:sp>
-        <p:nvSpPr>
-          <p:cNvPr id="14" name="TextBox 13"/>
-          <p:cNvSpPr txBox="1"/>
-          <p:nvPr/>
-        </p:nvSpPr>
-        <p:spPr>
-          <a:xfrm>
-            <a:off x="4251960" y="3054096"/>
-            <a:ext cx="6675120" cy="365760"/>
-          </a:xfrm>
-          <a:prstGeom prst="rect">
-            <a:avLst/>
-          </a:prstGeom>
-          <a:noFill/>
-        </p:spPr>
-        <p:txBody>
-          <a:bodyPr wrap="none">
-            <a:spAutoFit/>
-          </a:bodyPr>
-          <a:lstStyle/>
-          <a:p>
-            <a:pPr>
-              <a:defRPr sz="1600">
-                <a:solidFill>
-                  <a:srgbClr val="1C2536"/>
-                </a:solidFill>
-              </a:defRPr>
-            </a:pPr>
-            <a:r>
-              <a:t>C / Linux kernel APIs</a:t>
-            </a:r>
-          </a:p>
-        </p:txBody>
-      </p:sp>
-      <p:sp>
-        <p:nvSpPr>
-          <p:cNvPr id="15" name="Rounded Rectangle 14"/>
+          <p:cNvPr id="12" name="Oval 11"/>
           <p:cNvSpPr/>
           <p:nvPr/>
         </p:nvSpPr>
         <p:spPr>
           <a:xfrm>
-            <a:off x="822960" y="3694176"/>
-            <a:ext cx="3108960" cy="502920"/>
-          </a:xfrm>
-          <a:prstGeom prst="roundRect">
+            <a:off x="4681728" y="1737360"/>
+            <a:ext cx="566928" cy="566928"/>
+          </a:xfrm>
+          <a:prstGeom prst="ellipse">
             <a:avLst/>
           </a:prstGeom>
           <a:solidFill>
-            <a:srgbClr val="F1F5F9"/>
+            <a:srgbClr val="2563EB"/>
           </a:solidFill>
           <a:ln>
-            <a:solidFill>
-              <a:srgbClr val="DCE2EA"/>
-            </a:solidFill>
+            <a:noFill/>
           </a:ln>
         </p:spPr>
         <p:style>
@@ -6571,14 +7375,14 @@
       </p:sp>
       <p:sp>
         <p:nvSpPr>
-          <p:cNvPr id="16" name="TextBox 15"/>
-          <p:cNvSpPr txBox="1"/>
-          <p:nvPr/>
-        </p:nvSpPr>
-        <p:spPr>
-          <a:xfrm>
-            <a:off x="1005840" y="3767328"/>
-            <a:ext cx="2743200" cy="365760"/>
+          <p:cNvPr id="13" name="TextBox 12"/>
+          <p:cNvSpPr txBox="1"/>
+          <p:nvPr/>
+        </p:nvSpPr>
+        <p:spPr>
+          <a:xfrm>
+            <a:off x="4681728" y="1856231"/>
+            <a:ext cx="566928" cy="182880"/>
           </a:xfrm>
           <a:prstGeom prst="rect">
             <a:avLst/>
@@ -6591,29 +7395,64 @@
           </a:bodyPr>
           <a:lstStyle/>
           <a:p>
+            <a:pPr algn="ctr">
+              <a:defRPr sz="1000" b="1">
+                <a:solidFill>
+                  <a:srgbClr val="FFFFFF"/>
+                </a:solidFill>
+              </a:defRPr>
+            </a:pPr>
+            <a:r>
+              <a:t>02</a:t>
+            </a:r>
+          </a:p>
+        </p:txBody>
+      </p:sp>
+      <p:sp>
+        <p:nvSpPr>
+          <p:cNvPr id="14" name="TextBox 13"/>
+          <p:cNvSpPr txBox="1"/>
+          <p:nvPr/>
+        </p:nvSpPr>
+        <p:spPr>
+          <a:xfrm>
+            <a:off x="5394960" y="1691639"/>
+            <a:ext cx="2103120" cy="365760"/>
+          </a:xfrm>
+          <a:prstGeom prst="rect">
+            <a:avLst/>
+          </a:prstGeom>
+          <a:noFill/>
+        </p:spPr>
+        <p:txBody>
+          <a:bodyPr wrap="none">
+            <a:spAutoFit/>
+          </a:bodyPr>
+          <a:lstStyle/>
+          <a:p>
             <a:pPr>
-              <a:defRPr sz="1600" b="1">
-                <a:solidFill>
-                  <a:srgbClr val="0E1827"/>
-                </a:solidFill>
-              </a:defRPr>
-            </a:pPr>
-            <a:r>
-              <a:t>Build</a:t>
-            </a:r>
-          </a:p>
-        </p:txBody>
-      </p:sp>
-      <p:sp>
-        <p:nvSpPr>
-          <p:cNvPr id="17" name="TextBox 16"/>
-          <p:cNvSpPr txBox="1"/>
-          <p:nvPr/>
-        </p:nvSpPr>
-        <p:spPr>
-          <a:xfrm>
-            <a:off x="4251960" y="3767328"/>
-            <a:ext cx="6675120" cy="365760"/>
+              <a:defRPr sz="1800" b="1">
+                <a:solidFill>
+                  <a:srgbClr val="0F172A"/>
+                </a:solidFill>
+              </a:defRPr>
+            </a:pPr>
+            <a:r>
+              <a:t>Requirements</a:t>
+            </a:r>
+          </a:p>
+        </p:txBody>
+      </p:sp>
+      <p:sp>
+        <p:nvSpPr>
+          <p:cNvPr id="15" name="TextBox 14"/>
+          <p:cNvSpPr txBox="1"/>
+          <p:nvPr/>
+        </p:nvSpPr>
+        <p:spPr>
+          <a:xfrm>
+            <a:off x="5394960" y="2167128"/>
+            <a:ext cx="2103120" cy="640080"/>
           </a:xfrm>
           <a:prstGeom prst="rect">
             <a:avLst/>
@@ -6627,38 +7466,38 @@
           <a:lstStyle/>
           <a:p>
             <a:pPr>
-              <a:defRPr sz="1600">
-                <a:solidFill>
-                  <a:srgbClr val="1C2536"/>
-                </a:solidFill>
-              </a:defRPr>
-            </a:pPr>
-            <a:r>
-              <a:t>GNU Make + g++</a:t>
-            </a:r>
-          </a:p>
-        </p:txBody>
-      </p:sp>
-      <p:sp>
-        <p:nvSpPr>
-          <p:cNvPr id="18" name="Rounded Rectangle 17"/>
+              <a:defRPr sz="1250">
+                <a:solidFill>
+                  <a:srgbClr val="1F2937"/>
+                </a:solidFill>
+              </a:defRPr>
+            </a:pPr>
+            <a:r>
+              <a:t>PRD, modules, plan</a:t>
+            </a:r>
+          </a:p>
+        </p:txBody>
+      </p:sp>
+      <p:sp>
+        <p:nvSpPr>
+          <p:cNvPr id="16" name="Rounded Rectangle 15"/>
           <p:cNvSpPr/>
           <p:nvPr/>
         </p:nvSpPr>
         <p:spPr>
           <a:xfrm>
-            <a:off x="822960" y="4407408"/>
-            <a:ext cx="3108960" cy="502920"/>
+            <a:off x="8275320" y="1508760"/>
+            <a:ext cx="3246120" cy="1600200"/>
           </a:xfrm>
           <a:prstGeom prst="roundRect">
             <a:avLst/>
           </a:prstGeom>
           <a:solidFill>
-            <a:srgbClr val="F1F5F9"/>
+            <a:srgbClr val="FFFFFF"/>
           </a:solidFill>
           <a:ln>
             <a:solidFill>
-              <a:srgbClr val="DCE2EA"/>
+              <a:srgbClr val="D7DEE7"/>
             </a:solidFill>
           </a:ln>
         </p:spPr>
@@ -6686,95 +7525,23 @@
       </p:sp>
       <p:sp>
         <p:nvSpPr>
-          <p:cNvPr id="19" name="TextBox 18"/>
-          <p:cNvSpPr txBox="1"/>
-          <p:nvPr/>
-        </p:nvSpPr>
-        <p:spPr>
-          <a:xfrm>
-            <a:off x="1005840" y="4480560"/>
-            <a:ext cx="2743200" cy="365760"/>
-          </a:xfrm>
-          <a:prstGeom prst="rect">
-            <a:avLst/>
-          </a:prstGeom>
-          <a:noFill/>
-        </p:spPr>
-        <p:txBody>
-          <a:bodyPr wrap="none">
-            <a:spAutoFit/>
-          </a:bodyPr>
-          <a:lstStyle/>
-          <a:p>
-            <a:pPr>
-              <a:defRPr sz="1600" b="1">
-                <a:solidFill>
-                  <a:srgbClr val="0E1827"/>
-                </a:solidFill>
-              </a:defRPr>
-            </a:pPr>
-            <a:r>
-              <a:t>System Interfaces</a:t>
-            </a:r>
-          </a:p>
-        </p:txBody>
-      </p:sp>
-      <p:sp>
-        <p:nvSpPr>
-          <p:cNvPr id="20" name="TextBox 19"/>
-          <p:cNvSpPr txBox="1"/>
-          <p:nvPr/>
-        </p:nvSpPr>
-        <p:spPr>
-          <a:xfrm>
-            <a:off x="4251960" y="4480560"/>
-            <a:ext cx="6675120" cy="365760"/>
-          </a:xfrm>
-          <a:prstGeom prst="rect">
-            <a:avLst/>
-          </a:prstGeom>
-          <a:noFill/>
-        </p:spPr>
-        <p:txBody>
-          <a:bodyPr wrap="none">
-            <a:spAutoFit/>
-          </a:bodyPr>
-          <a:lstStyle/>
-          <a:p>
-            <a:pPr>
-              <a:defRPr sz="1600">
-                <a:solidFill>
-                  <a:srgbClr val="1C2536"/>
-                </a:solidFill>
-              </a:defRPr>
-            </a:pPr>
-            <a:r>
-              <a:t>/proc, uname(), statvfs(), Linux signals</a:t>
-            </a:r>
-          </a:p>
-        </p:txBody>
-      </p:sp>
-      <p:sp>
-        <p:nvSpPr>
-          <p:cNvPr id="21" name="Rounded Rectangle 20"/>
+          <p:cNvPr id="17" name="Oval 16"/>
           <p:cNvSpPr/>
           <p:nvPr/>
         </p:nvSpPr>
         <p:spPr>
           <a:xfrm>
-            <a:off x="822960" y="5120640"/>
-            <a:ext cx="3108960" cy="502920"/>
-          </a:xfrm>
-          <a:prstGeom prst="roundRect">
+            <a:off x="8476488" y="1737360"/>
+            <a:ext cx="566928" cy="566928"/>
+          </a:xfrm>
+          <a:prstGeom prst="ellipse">
             <a:avLst/>
           </a:prstGeom>
           <a:solidFill>
-            <a:srgbClr val="F1F5F9"/>
+            <a:srgbClr val="2563EB"/>
           </a:solidFill>
           <a:ln>
-            <a:solidFill>
-              <a:srgbClr val="DCE2EA"/>
-            </a:solidFill>
+            <a:noFill/>
           </a:ln>
         </p:spPr>
         <p:style>
@@ -6801,14 +7568,14 @@
       </p:sp>
       <p:sp>
         <p:nvSpPr>
-          <p:cNvPr id="22" name="TextBox 21"/>
-          <p:cNvSpPr txBox="1"/>
-          <p:nvPr/>
-        </p:nvSpPr>
-        <p:spPr>
-          <a:xfrm>
-            <a:off x="1005840" y="5193792"/>
-            <a:ext cx="2743200" cy="365760"/>
+          <p:cNvPr id="18" name="TextBox 17"/>
+          <p:cNvSpPr txBox="1"/>
+          <p:nvPr/>
+        </p:nvSpPr>
+        <p:spPr>
+          <a:xfrm>
+            <a:off x="8476488" y="1856231"/>
+            <a:ext cx="566928" cy="182880"/>
           </a:xfrm>
           <a:prstGeom prst="rect">
             <a:avLst/>
@@ -6821,16 +7588,174 @@
           </a:bodyPr>
           <a:lstStyle/>
           <a:p>
+            <a:pPr algn="ctr">
+              <a:defRPr sz="1000" b="1">
+                <a:solidFill>
+                  <a:srgbClr val="FFFFFF"/>
+                </a:solidFill>
+              </a:defRPr>
+            </a:pPr>
+            <a:r>
+              <a:t>03</a:t>
+            </a:r>
+          </a:p>
+        </p:txBody>
+      </p:sp>
+      <p:sp>
+        <p:nvSpPr>
+          <p:cNvPr id="19" name="TextBox 18"/>
+          <p:cNvSpPr txBox="1"/>
+          <p:nvPr/>
+        </p:nvSpPr>
+        <p:spPr>
+          <a:xfrm>
+            <a:off x="9189720" y="1691639"/>
+            <a:ext cx="2103120" cy="365760"/>
+          </a:xfrm>
+          <a:prstGeom prst="rect">
+            <a:avLst/>
+          </a:prstGeom>
+          <a:noFill/>
+        </p:spPr>
+        <p:txBody>
+          <a:bodyPr wrap="none">
+            <a:spAutoFit/>
+          </a:bodyPr>
+          <a:lstStyle/>
+          <a:p>
             <a:pPr>
-              <a:defRPr sz="1600" b="1">
-                <a:solidFill>
-                  <a:srgbClr val="0E1827"/>
-                </a:solidFill>
-              </a:defRPr>
-            </a:pPr>
-            <a:r>
-              <a:t>Version Control</a:t>
-            </a:r>
+              <a:defRPr sz="1800" b="1">
+                <a:solidFill>
+                  <a:srgbClr val="0F172A"/>
+                </a:solidFill>
+              </a:defRPr>
+            </a:pPr>
+            <a:r>
+              <a:t>Design</a:t>
+            </a:r>
+          </a:p>
+        </p:txBody>
+      </p:sp>
+      <p:sp>
+        <p:nvSpPr>
+          <p:cNvPr id="20" name="TextBox 19"/>
+          <p:cNvSpPr txBox="1"/>
+          <p:nvPr/>
+        </p:nvSpPr>
+        <p:spPr>
+          <a:xfrm>
+            <a:off x="9189720" y="2167128"/>
+            <a:ext cx="2103120" cy="640080"/>
+          </a:xfrm>
+          <a:prstGeom prst="rect">
+            <a:avLst/>
+          </a:prstGeom>
+          <a:noFill/>
+        </p:spPr>
+        <p:txBody>
+          <a:bodyPr wrap="none">
+            <a:spAutoFit/>
+          </a:bodyPr>
+          <a:lstStyle/>
+          <a:p>
+            <a:pPr>
+              <a:defRPr sz="1250">
+                <a:solidFill>
+                  <a:srgbClr val="1F2937"/>
+                </a:solidFill>
+              </a:defRPr>
+            </a:pPr>
+            <a:r>
+              <a:t>Architecture, UML, implementation plan</a:t>
+            </a:r>
+          </a:p>
+        </p:txBody>
+      </p:sp>
+      <p:sp>
+        <p:nvSpPr>
+          <p:cNvPr id="21" name="Rounded Rectangle 20"/>
+          <p:cNvSpPr/>
+          <p:nvPr/>
+        </p:nvSpPr>
+        <p:spPr>
+          <a:xfrm>
+            <a:off x="685800" y="3520440"/>
+            <a:ext cx="3246120" cy="1600200"/>
+          </a:xfrm>
+          <a:prstGeom prst="roundRect">
+            <a:avLst/>
+          </a:prstGeom>
+          <a:solidFill>
+            <a:srgbClr val="FFFFFF"/>
+          </a:solidFill>
+          <a:ln>
+            <a:solidFill>
+              <a:srgbClr val="D7DEE7"/>
+            </a:solidFill>
+          </a:ln>
+        </p:spPr>
+        <p:style>
+          <a:lnRef idx="1">
+            <a:schemeClr val="accent1"/>
+          </a:lnRef>
+          <a:fillRef idx="3">
+            <a:schemeClr val="accent1"/>
+          </a:fillRef>
+          <a:effectRef idx="2">
+            <a:schemeClr val="accent1"/>
+          </a:effectRef>
+          <a:fontRef idx="minor">
+            <a:schemeClr val="lt1"/>
+          </a:fontRef>
+        </p:style>
+        <p:txBody>
+          <a:bodyPr rtlCol="0" anchor="ctr"/>
+          <a:lstStyle/>
+          <a:p>
+            <a:pPr algn="ctr"/>
+          </a:p>
+        </p:txBody>
+      </p:sp>
+      <p:sp>
+        <p:nvSpPr>
+          <p:cNvPr id="22" name="Oval 21"/>
+          <p:cNvSpPr/>
+          <p:nvPr/>
+        </p:nvSpPr>
+        <p:spPr>
+          <a:xfrm>
+            <a:off x="886968" y="3749039"/>
+            <a:ext cx="566928" cy="566928"/>
+          </a:xfrm>
+          <a:prstGeom prst="ellipse">
+            <a:avLst/>
+          </a:prstGeom>
+          <a:solidFill>
+            <a:srgbClr val="2563EB"/>
+          </a:solidFill>
+          <a:ln>
+            <a:noFill/>
+          </a:ln>
+        </p:spPr>
+        <p:style>
+          <a:lnRef idx="1">
+            <a:schemeClr val="accent1"/>
+          </a:lnRef>
+          <a:fillRef idx="3">
+            <a:schemeClr val="accent1"/>
+          </a:fillRef>
+          <a:effectRef idx="2">
+            <a:schemeClr val="accent1"/>
+          </a:effectRef>
+          <a:fontRef idx="minor">
+            <a:schemeClr val="lt1"/>
+          </a:fontRef>
+        </p:style>
+        <p:txBody>
+          <a:bodyPr rtlCol="0" anchor="ctr"/>
+          <a:lstStyle/>
+          <a:p>
+            <a:pPr algn="ctr"/>
           </a:p>
         </p:txBody>
       </p:sp>
@@ -6842,8 +7767,8 @@
         </p:nvSpPr>
         <p:spPr>
           <a:xfrm>
-            <a:off x="4251960" y="5193792"/>
-            <a:ext cx="6675120" cy="365760"/>
+            <a:off x="886968" y="3867912"/>
+            <a:ext cx="566928" cy="182880"/>
           </a:xfrm>
           <a:prstGeom prst="rect">
             <a:avLst/>
@@ -6856,29 +7781,64 @@
           </a:bodyPr>
           <a:lstStyle/>
           <a:p>
+            <a:pPr algn="ctr">
+              <a:defRPr sz="1000" b="1">
+                <a:solidFill>
+                  <a:srgbClr val="FFFFFF"/>
+                </a:solidFill>
+              </a:defRPr>
+            </a:pPr>
+            <a:r>
+              <a:t>04</a:t>
+            </a:r>
+          </a:p>
+        </p:txBody>
+      </p:sp>
+      <p:sp>
+        <p:nvSpPr>
+          <p:cNvPr id="24" name="TextBox 23"/>
+          <p:cNvSpPr txBox="1"/>
+          <p:nvPr/>
+        </p:nvSpPr>
+        <p:spPr>
+          <a:xfrm>
+            <a:off x="1600200" y="3703320"/>
+            <a:ext cx="2103120" cy="365760"/>
+          </a:xfrm>
+          <a:prstGeom prst="rect">
+            <a:avLst/>
+          </a:prstGeom>
+          <a:noFill/>
+        </p:spPr>
+        <p:txBody>
+          <a:bodyPr wrap="none">
+            <a:spAutoFit/>
+          </a:bodyPr>
+          <a:lstStyle/>
+          <a:p>
             <a:pPr>
-              <a:defRPr sz="1600">
-                <a:solidFill>
-                  <a:srgbClr val="1C2536"/>
-                </a:solidFill>
-              </a:defRPr>
-            </a:pPr>
-            <a:r>
-              <a:t>Git + GitHub</a:t>
-            </a:r>
-          </a:p>
-        </p:txBody>
-      </p:sp>
-      <p:sp>
-        <p:nvSpPr>
-          <p:cNvPr id="24" name="TextBox 23"/>
-          <p:cNvSpPr txBox="1"/>
-          <p:nvPr/>
-        </p:nvSpPr>
-        <p:spPr>
-          <a:xfrm>
-            <a:off x="640080" y="6492240"/>
-            <a:ext cx="10972800" cy="228600"/>
+              <a:defRPr sz="1800" b="1">
+                <a:solidFill>
+                  <a:srgbClr val="0F172A"/>
+                </a:solidFill>
+              </a:defRPr>
+            </a:pPr>
+            <a:r>
+              <a:t>Prototype</a:t>
+            </a:r>
+          </a:p>
+        </p:txBody>
+      </p:sp>
+      <p:sp>
+        <p:nvSpPr>
+          <p:cNvPr id="25" name="TextBox 24"/>
+          <p:cNvSpPr txBox="1"/>
+          <p:nvPr/>
+        </p:nvSpPr>
+        <p:spPr>
+          <a:xfrm>
+            <a:off x="1600200" y="4178808"/>
+            <a:ext cx="2103120" cy="640080"/>
           </a:xfrm>
           <a:prstGeom prst="rect">
             <a:avLst/>
@@ -6892,14 +7852,435 @@
           <a:lstStyle/>
           <a:p>
             <a:pPr>
-              <a:defRPr sz="900">
-                <a:solidFill>
-                  <a:srgbClr val="566373"/>
-                </a:solidFill>
-              </a:defRPr>
-            </a:pPr>
-            <a:r>
-              <a:t>SysGuard • Linux System Health Monitor                               4</a:t>
+              <a:defRPr sz="1250">
+                <a:solidFill>
+                  <a:srgbClr val="1F2937"/>
+                </a:solidFill>
+              </a:defRPr>
+            </a:pPr>
+            <a:r>
+              <a:t>Core C++ modules and integration</a:t>
+            </a:r>
+          </a:p>
+        </p:txBody>
+      </p:sp>
+      <p:sp>
+        <p:nvSpPr>
+          <p:cNvPr id="26" name="Rounded Rectangle 25"/>
+          <p:cNvSpPr/>
+          <p:nvPr/>
+        </p:nvSpPr>
+        <p:spPr>
+          <a:xfrm>
+            <a:off x="4480560" y="3520440"/>
+            <a:ext cx="3246120" cy="1600200"/>
+          </a:xfrm>
+          <a:prstGeom prst="roundRect">
+            <a:avLst/>
+          </a:prstGeom>
+          <a:solidFill>
+            <a:srgbClr val="FFFFFF"/>
+          </a:solidFill>
+          <a:ln>
+            <a:solidFill>
+              <a:srgbClr val="D7DEE7"/>
+            </a:solidFill>
+          </a:ln>
+        </p:spPr>
+        <p:style>
+          <a:lnRef idx="1">
+            <a:schemeClr val="accent1"/>
+          </a:lnRef>
+          <a:fillRef idx="3">
+            <a:schemeClr val="accent1"/>
+          </a:fillRef>
+          <a:effectRef idx="2">
+            <a:schemeClr val="accent1"/>
+          </a:effectRef>
+          <a:fontRef idx="minor">
+            <a:schemeClr val="lt1"/>
+          </a:fontRef>
+        </p:style>
+        <p:txBody>
+          <a:bodyPr rtlCol="0" anchor="ctr"/>
+          <a:lstStyle/>
+          <a:p>
+            <a:pPr algn="ctr"/>
+          </a:p>
+        </p:txBody>
+      </p:sp>
+      <p:sp>
+        <p:nvSpPr>
+          <p:cNvPr id="27" name="Oval 26"/>
+          <p:cNvSpPr/>
+          <p:nvPr/>
+        </p:nvSpPr>
+        <p:spPr>
+          <a:xfrm>
+            <a:off x="4681728" y="3749039"/>
+            <a:ext cx="566928" cy="566928"/>
+          </a:xfrm>
+          <a:prstGeom prst="ellipse">
+            <a:avLst/>
+          </a:prstGeom>
+          <a:solidFill>
+            <a:srgbClr val="2563EB"/>
+          </a:solidFill>
+          <a:ln>
+            <a:noFill/>
+          </a:ln>
+        </p:spPr>
+        <p:style>
+          <a:lnRef idx="1">
+            <a:schemeClr val="accent1"/>
+          </a:lnRef>
+          <a:fillRef idx="3">
+            <a:schemeClr val="accent1"/>
+          </a:fillRef>
+          <a:effectRef idx="2">
+            <a:schemeClr val="accent1"/>
+          </a:effectRef>
+          <a:fontRef idx="minor">
+            <a:schemeClr val="lt1"/>
+          </a:fontRef>
+        </p:style>
+        <p:txBody>
+          <a:bodyPr rtlCol="0" anchor="ctr"/>
+          <a:lstStyle/>
+          <a:p>
+            <a:pPr algn="ctr"/>
+          </a:p>
+        </p:txBody>
+      </p:sp>
+      <p:sp>
+        <p:nvSpPr>
+          <p:cNvPr id="28" name="TextBox 27"/>
+          <p:cNvSpPr txBox="1"/>
+          <p:nvPr/>
+        </p:nvSpPr>
+        <p:spPr>
+          <a:xfrm>
+            <a:off x="4681728" y="3867912"/>
+            <a:ext cx="566928" cy="182880"/>
+          </a:xfrm>
+          <a:prstGeom prst="rect">
+            <a:avLst/>
+          </a:prstGeom>
+          <a:noFill/>
+        </p:spPr>
+        <p:txBody>
+          <a:bodyPr wrap="none">
+            <a:spAutoFit/>
+          </a:bodyPr>
+          <a:lstStyle/>
+          <a:p>
+            <a:pPr algn="ctr">
+              <a:defRPr sz="1000" b="1">
+                <a:solidFill>
+                  <a:srgbClr val="FFFFFF"/>
+                </a:solidFill>
+              </a:defRPr>
+            </a:pPr>
+            <a:r>
+              <a:t>05</a:t>
+            </a:r>
+          </a:p>
+        </p:txBody>
+      </p:sp>
+      <p:sp>
+        <p:nvSpPr>
+          <p:cNvPr id="29" name="TextBox 28"/>
+          <p:cNvSpPr txBox="1"/>
+          <p:nvPr/>
+        </p:nvSpPr>
+        <p:spPr>
+          <a:xfrm>
+            <a:off x="5394960" y="3703320"/>
+            <a:ext cx="2103120" cy="365760"/>
+          </a:xfrm>
+          <a:prstGeom prst="rect">
+            <a:avLst/>
+          </a:prstGeom>
+          <a:noFill/>
+        </p:spPr>
+        <p:txBody>
+          <a:bodyPr wrap="none">
+            <a:spAutoFit/>
+          </a:bodyPr>
+          <a:lstStyle/>
+          <a:p>
+            <a:pPr>
+              <a:defRPr sz="1800" b="1">
+                <a:solidFill>
+                  <a:srgbClr val="0F172A"/>
+                </a:solidFill>
+              </a:defRPr>
+            </a:pPr>
+            <a:r>
+              <a:t>Testing</a:t>
+            </a:r>
+          </a:p>
+        </p:txBody>
+      </p:sp>
+      <p:sp>
+        <p:nvSpPr>
+          <p:cNvPr id="30" name="TextBox 29"/>
+          <p:cNvSpPr txBox="1"/>
+          <p:nvPr/>
+        </p:nvSpPr>
+        <p:spPr>
+          <a:xfrm>
+            <a:off x="5394960" y="4178808"/>
+            <a:ext cx="2103120" cy="640080"/>
+          </a:xfrm>
+          <a:prstGeom prst="rect">
+            <a:avLst/>
+          </a:prstGeom>
+          <a:noFill/>
+        </p:spPr>
+        <p:txBody>
+          <a:bodyPr wrap="none">
+            <a:spAutoFit/>
+          </a:bodyPr>
+          <a:lstStyle/>
+          <a:p>
+            <a:pPr>
+              <a:defRPr sz="1250">
+                <a:solidFill>
+                  <a:srgbClr val="1F2937"/>
+                </a:solidFill>
+              </a:defRPr>
+            </a:pPr>
+            <a:r>
+              <a:t>Debugging, validation, documentation</a:t>
+            </a:r>
+          </a:p>
+        </p:txBody>
+      </p:sp>
+      <p:sp>
+        <p:nvSpPr>
+          <p:cNvPr id="31" name="Rounded Rectangle 30"/>
+          <p:cNvSpPr/>
+          <p:nvPr/>
+        </p:nvSpPr>
+        <p:spPr>
+          <a:xfrm>
+            <a:off x="8275320" y="3520440"/>
+            <a:ext cx="3246120" cy="1600200"/>
+          </a:xfrm>
+          <a:prstGeom prst="roundRect">
+            <a:avLst/>
+          </a:prstGeom>
+          <a:solidFill>
+            <a:srgbClr val="FFFFFF"/>
+          </a:solidFill>
+          <a:ln>
+            <a:solidFill>
+              <a:srgbClr val="D7DEE7"/>
+            </a:solidFill>
+          </a:ln>
+        </p:spPr>
+        <p:style>
+          <a:lnRef idx="1">
+            <a:schemeClr val="accent1"/>
+          </a:lnRef>
+          <a:fillRef idx="3">
+            <a:schemeClr val="accent1"/>
+          </a:fillRef>
+          <a:effectRef idx="2">
+            <a:schemeClr val="accent1"/>
+          </a:effectRef>
+          <a:fontRef idx="minor">
+            <a:schemeClr val="lt1"/>
+          </a:fontRef>
+        </p:style>
+        <p:txBody>
+          <a:bodyPr rtlCol="0" anchor="ctr"/>
+          <a:lstStyle/>
+          <a:p>
+            <a:pPr algn="ctr"/>
+          </a:p>
+        </p:txBody>
+      </p:sp>
+      <p:sp>
+        <p:nvSpPr>
+          <p:cNvPr id="32" name="Oval 31"/>
+          <p:cNvSpPr/>
+          <p:nvPr/>
+        </p:nvSpPr>
+        <p:spPr>
+          <a:xfrm>
+            <a:off x="8476488" y="3749039"/>
+            <a:ext cx="566928" cy="566928"/>
+          </a:xfrm>
+          <a:prstGeom prst="ellipse">
+            <a:avLst/>
+          </a:prstGeom>
+          <a:solidFill>
+            <a:srgbClr val="2563EB"/>
+          </a:solidFill>
+          <a:ln>
+            <a:noFill/>
+          </a:ln>
+        </p:spPr>
+        <p:style>
+          <a:lnRef idx="1">
+            <a:schemeClr val="accent1"/>
+          </a:lnRef>
+          <a:fillRef idx="3">
+            <a:schemeClr val="accent1"/>
+          </a:fillRef>
+          <a:effectRef idx="2">
+            <a:schemeClr val="accent1"/>
+          </a:effectRef>
+          <a:fontRef idx="minor">
+            <a:schemeClr val="lt1"/>
+          </a:fontRef>
+        </p:style>
+        <p:txBody>
+          <a:bodyPr rtlCol="0" anchor="ctr"/>
+          <a:lstStyle/>
+          <a:p>
+            <a:pPr algn="ctr"/>
+          </a:p>
+        </p:txBody>
+      </p:sp>
+      <p:sp>
+        <p:nvSpPr>
+          <p:cNvPr id="33" name="TextBox 32"/>
+          <p:cNvSpPr txBox="1"/>
+          <p:nvPr/>
+        </p:nvSpPr>
+        <p:spPr>
+          <a:xfrm>
+            <a:off x="8476488" y="3867912"/>
+            <a:ext cx="566928" cy="182880"/>
+          </a:xfrm>
+          <a:prstGeom prst="rect">
+            <a:avLst/>
+          </a:prstGeom>
+          <a:noFill/>
+        </p:spPr>
+        <p:txBody>
+          <a:bodyPr wrap="none">
+            <a:spAutoFit/>
+          </a:bodyPr>
+          <a:lstStyle/>
+          <a:p>
+            <a:pPr algn="ctr">
+              <a:defRPr sz="1000" b="1">
+                <a:solidFill>
+                  <a:srgbClr val="FFFFFF"/>
+                </a:solidFill>
+              </a:defRPr>
+            </a:pPr>
+            <a:r>
+              <a:t>06</a:t>
+            </a:r>
+          </a:p>
+        </p:txBody>
+      </p:sp>
+      <p:sp>
+        <p:nvSpPr>
+          <p:cNvPr id="34" name="TextBox 33"/>
+          <p:cNvSpPr txBox="1"/>
+          <p:nvPr/>
+        </p:nvSpPr>
+        <p:spPr>
+          <a:xfrm>
+            <a:off x="9189720" y="3703320"/>
+            <a:ext cx="2103120" cy="365760"/>
+          </a:xfrm>
+          <a:prstGeom prst="rect">
+            <a:avLst/>
+          </a:prstGeom>
+          <a:noFill/>
+        </p:spPr>
+        <p:txBody>
+          <a:bodyPr wrap="none">
+            <a:spAutoFit/>
+          </a:bodyPr>
+          <a:lstStyle/>
+          <a:p>
+            <a:pPr>
+              <a:defRPr sz="1800" b="1">
+                <a:solidFill>
+                  <a:srgbClr val="0F172A"/>
+                </a:solidFill>
+              </a:defRPr>
+            </a:pPr>
+            <a:r>
+              <a:t>Final</a:t>
+            </a:r>
+          </a:p>
+        </p:txBody>
+      </p:sp>
+      <p:sp>
+        <p:nvSpPr>
+          <p:cNvPr id="35" name="TextBox 34"/>
+          <p:cNvSpPr txBox="1"/>
+          <p:nvPr/>
+        </p:nvSpPr>
+        <p:spPr>
+          <a:xfrm>
+            <a:off x="9189720" y="4178808"/>
+            <a:ext cx="2103120" cy="640080"/>
+          </a:xfrm>
+          <a:prstGeom prst="rect">
+            <a:avLst/>
+          </a:prstGeom>
+          <a:noFill/>
+        </p:spPr>
+        <p:txBody>
+          <a:bodyPr wrap="none">
+            <a:spAutoFit/>
+          </a:bodyPr>
+          <a:lstStyle/>
+          <a:p>
+            <a:pPr>
+              <a:defRPr sz="1250">
+                <a:solidFill>
+                  <a:srgbClr val="1F2937"/>
+                </a:solidFill>
+              </a:defRPr>
+            </a:pPr>
+            <a:r>
+              <a:t>GitHub, report, PPT, presentation</a:t>
+            </a:r>
+          </a:p>
+        </p:txBody>
+      </p:sp>
+      <p:sp>
+        <p:nvSpPr>
+          <p:cNvPr id="36" name="TextBox 35"/>
+          <p:cNvSpPr txBox="1"/>
+          <p:nvPr/>
+        </p:nvSpPr>
+        <p:spPr>
+          <a:xfrm>
+            <a:off x="640080" y="6473952"/>
+            <a:ext cx="10972800" cy="201168"/>
+          </a:xfrm>
+          <a:prstGeom prst="rect">
+            <a:avLst/>
+          </a:prstGeom>
+          <a:noFill/>
+        </p:spPr>
+        <p:txBody>
+          <a:bodyPr wrap="none">
+            <a:spAutoFit/>
+          </a:bodyPr>
+          <a:lstStyle/>
+          <a:p>
+            <a:pPr>
+              <a:defRPr sz="850">
+                <a:solidFill>
+                  <a:srgbClr val="64748B"/>
+                </a:solidFill>
+              </a:defRPr>
+            </a:pPr>
+            <a:r>
+              <a:t>SysGuard • Linux System Health Monitor                                              4</a:t>
             </a:r>
           </a:p>
         </p:txBody>
@@ -6931,13 +8312,13 @@
         <p:spPr>
           <a:xfrm>
             <a:off x="0" y="0"/>
-            <a:ext cx="12191695" cy="6858000"/>
+            <a:ext cx="12191999" cy="6858000"/>
           </a:xfrm>
           <a:prstGeom prst="rect">
             <a:avLst/>
           </a:prstGeom>
           <a:solidFill>
-            <a:srgbClr val="FFFFFF"/>
+            <a:srgbClr val="F5F7FA"/>
           </a:solidFill>
           <a:ln>
             <a:noFill/>
@@ -6974,13 +8355,13 @@
         <p:spPr>
           <a:xfrm>
             <a:off x="0" y="0"/>
-            <a:ext cx="12191695" cy="201168"/>
+            <a:ext cx="12191999" cy="164592"/>
           </a:xfrm>
           <a:prstGeom prst="rect">
             <a:avLst/>
           </a:prstGeom>
           <a:solidFill>
-            <a:srgbClr val="2A69BA"/>
+            <a:srgbClr val="2563EB"/>
           </a:solidFill>
           <a:ln>
             <a:noFill/>
@@ -7016,8 +8397,8 @@
         </p:nvSpPr>
         <p:spPr>
           <a:xfrm>
-            <a:off x="640080" y="502920"/>
-            <a:ext cx="10881360" cy="640080"/>
+            <a:off x="640080" y="438912"/>
+            <a:ext cx="10972800" cy="566928"/>
           </a:xfrm>
           <a:prstGeom prst="rect">
             <a:avLst/>
@@ -7033,12 +8414,12 @@
             <a:pPr>
               <a:defRPr sz="2800" b="1">
                 <a:solidFill>
-                  <a:srgbClr val="0E1827"/>
-                </a:solidFill>
-              </a:defRPr>
-            </a:pPr>
-            <a:r>
-              <a:t>4. System Architecture</a:t>
+                  <a:srgbClr val="0F172A"/>
+                </a:solidFill>
+              </a:defRPr>
+            </a:pPr>
+            <a:r>
+              <a:t>4. Technology Stack</a:t>
             </a:r>
           </a:p>
         </p:txBody>
@@ -7051,8 +8432,8 @@
         </p:nvSpPr>
         <p:spPr>
           <a:xfrm>
-            <a:off x="658368" y="1143000"/>
-            <a:ext cx="10789920" cy="411480"/>
+            <a:off x="658368" y="987552"/>
+            <a:ext cx="10698480" cy="365760"/>
           </a:xfrm>
           <a:prstGeom prst="rect">
             <a:avLst/>
@@ -7066,14 +8447,14 @@
           <a:lstStyle/>
           <a:p>
             <a:pPr>
-              <a:defRPr sz="1400">
-                <a:solidFill>
-                  <a:srgbClr val="566373"/>
-                </a:solidFill>
-              </a:defRPr>
-            </a:pPr>
-            <a:r>
-              <a:t>Application → Linux interfaces → kernel</a:t>
+              <a:defRPr sz="1300">
+                <a:solidFill>
+                  <a:srgbClr val="64748B"/>
+                </a:solidFill>
+              </a:defRPr>
+            </a:pPr>
+            <a:r>
+              <a:t>Development environment</a:t>
             </a:r>
           </a:p>
         </p:txBody>
@@ -7086,17 +8467,19 @@
         </p:nvSpPr>
         <p:spPr>
           <a:xfrm>
-            <a:off x="1920240" y="1417320"/>
-            <a:ext cx="8229600" cy="777240"/>
+            <a:off x="868680" y="1353312"/>
+            <a:ext cx="3840480" cy="512064"/>
           </a:xfrm>
           <a:prstGeom prst="roundRect">
             <a:avLst/>
           </a:prstGeom>
           <a:solidFill>
-            <a:srgbClr val="2A69BA"/>
+            <a:srgbClr val="FFFFFF"/>
           </a:solidFill>
           <a:ln>
-            <a:noFill/>
+            <a:solidFill>
+              <a:srgbClr val="D7DEE7"/>
+            </a:solidFill>
           </a:ln>
         </p:spPr>
         <p:style>
@@ -7129,8 +8512,8 @@
         </p:nvSpPr>
         <p:spPr>
           <a:xfrm>
-            <a:off x="2148840" y="1527048"/>
-            <a:ext cx="7772400" cy="548640"/>
+            <a:off x="1051560" y="1426464"/>
+            <a:ext cx="1554480" cy="329184"/>
           </a:xfrm>
           <a:prstGeom prst="rect">
             <a:avLst/>
@@ -7144,37 +8527,74 @@
           <a:lstStyle/>
           <a:p>
             <a:pPr>
-              <a:defRPr sz="2000" b="1">
-                <a:solidFill>
-                  <a:srgbClr val="FFFFFF"/>
-                </a:solidFill>
-              </a:defRPr>
-            </a:pPr>
-            <a:r>
-              <a:t>SysGuard C++ CLI  |  User space</a:t>
-            </a:r>
-          </a:p>
-        </p:txBody>
-      </p:sp>
-      <p:sp>
-        <p:nvSpPr>
-          <p:cNvPr id="8" name="Down Arrow 7"/>
+              <a:defRPr sz="1350" b="1">
+                <a:solidFill>
+                  <a:srgbClr val="0F172A"/>
+                </a:solidFill>
+              </a:defRPr>
+            </a:pPr>
+            <a:r>
+              <a:t>Operating System</a:t>
+            </a:r>
+          </a:p>
+        </p:txBody>
+      </p:sp>
+      <p:sp>
+        <p:nvSpPr>
+          <p:cNvPr id="8" name="TextBox 7"/>
+          <p:cNvSpPr txBox="1"/>
+          <p:nvPr/>
+        </p:nvSpPr>
+        <p:spPr>
+          <a:xfrm>
+            <a:off x="2606040" y="1426464"/>
+            <a:ext cx="1828800" cy="329184"/>
+          </a:xfrm>
+          <a:prstGeom prst="rect">
+            <a:avLst/>
+          </a:prstGeom>
+          <a:noFill/>
+        </p:spPr>
+        <p:txBody>
+          <a:bodyPr wrap="none">
+            <a:spAutoFit/>
+          </a:bodyPr>
+          <a:lstStyle/>
+          <a:p>
+            <a:pPr>
+              <a:defRPr sz="1350">
+                <a:solidFill>
+                  <a:srgbClr val="1F2937"/>
+                </a:solidFill>
+              </a:defRPr>
+            </a:pPr>
+            <a:r>
+              <a:t>Ubuntu 26.04.1 LTS</a:t>
+            </a:r>
+          </a:p>
+        </p:txBody>
+      </p:sp>
+      <p:sp>
+        <p:nvSpPr>
+          <p:cNvPr id="9" name="Rounded Rectangle 8"/>
           <p:cNvSpPr/>
           <p:nvPr/>
         </p:nvSpPr>
         <p:spPr>
           <a:xfrm>
-            <a:off x="5577840" y="2221992"/>
-            <a:ext cx="914400" cy="365760"/>
-          </a:xfrm>
-          <a:prstGeom prst="downArrow">
+            <a:off x="868680" y="2020824"/>
+            <a:ext cx="3840480" cy="512064"/>
+          </a:xfrm>
+          <a:prstGeom prst="roundRect">
             <a:avLst/>
           </a:prstGeom>
           <a:solidFill>
-            <a:srgbClr val="566373"/>
+            <a:srgbClr val="FFFFFF"/>
           </a:solidFill>
           <a:ln>
-            <a:noFill/>
+            <a:solidFill>
+              <a:srgbClr val="D7DEE7"/>
+            </a:solidFill>
           </a:ln>
         </p:spPr>
         <p:style>
@@ -7201,23 +8621,95 @@
       </p:sp>
       <p:sp>
         <p:nvSpPr>
-          <p:cNvPr id="9" name="Rounded Rectangle 8"/>
+          <p:cNvPr id="10" name="TextBox 9"/>
+          <p:cNvSpPr txBox="1"/>
+          <p:nvPr/>
+        </p:nvSpPr>
+        <p:spPr>
+          <a:xfrm>
+            <a:off x="1051560" y="2093976"/>
+            <a:ext cx="1554480" cy="329184"/>
+          </a:xfrm>
+          <a:prstGeom prst="rect">
+            <a:avLst/>
+          </a:prstGeom>
+          <a:noFill/>
+        </p:spPr>
+        <p:txBody>
+          <a:bodyPr wrap="none">
+            <a:spAutoFit/>
+          </a:bodyPr>
+          <a:lstStyle/>
+          <a:p>
+            <a:pPr>
+              <a:defRPr sz="1350" b="1">
+                <a:solidFill>
+                  <a:srgbClr val="0F172A"/>
+                </a:solidFill>
+              </a:defRPr>
+            </a:pPr>
+            <a:r>
+              <a:t>Application</a:t>
+            </a:r>
+          </a:p>
+        </p:txBody>
+      </p:sp>
+      <p:sp>
+        <p:nvSpPr>
+          <p:cNvPr id="11" name="TextBox 10"/>
+          <p:cNvSpPr txBox="1"/>
+          <p:nvPr/>
+        </p:nvSpPr>
+        <p:spPr>
+          <a:xfrm>
+            <a:off x="2606040" y="2093976"/>
+            <a:ext cx="1828800" cy="329184"/>
+          </a:xfrm>
+          <a:prstGeom prst="rect">
+            <a:avLst/>
+          </a:prstGeom>
+          <a:noFill/>
+        </p:spPr>
+        <p:txBody>
+          <a:bodyPr wrap="none">
+            <a:spAutoFit/>
+          </a:bodyPr>
+          <a:lstStyle/>
+          <a:p>
+            <a:pPr>
+              <a:defRPr sz="1350">
+                <a:solidFill>
+                  <a:srgbClr val="1F2937"/>
+                </a:solidFill>
+              </a:defRPr>
+            </a:pPr>
+            <a:r>
+              <a:t>C++17</a:t>
+            </a:r>
+          </a:p>
+        </p:txBody>
+      </p:sp>
+      <p:sp>
+        <p:nvSpPr>
+          <p:cNvPr id="12" name="Rounded Rectangle 11"/>
           <p:cNvSpPr/>
           <p:nvPr/>
         </p:nvSpPr>
         <p:spPr>
           <a:xfrm>
-            <a:off x="1920240" y="2560320"/>
-            <a:ext cx="8229600" cy="777240"/>
+            <a:off x="868680" y="2688336"/>
+            <a:ext cx="3840480" cy="512064"/>
           </a:xfrm>
           <a:prstGeom prst="roundRect">
             <a:avLst/>
           </a:prstGeom>
           <a:solidFill>
-            <a:srgbClr val="36B4BE"/>
+            <a:srgbClr val="FFFFFF"/>
           </a:solidFill>
           <a:ln>
-            <a:noFill/>
+            <a:solidFill>
+              <a:srgbClr val="D7DEE7"/>
+            </a:solidFill>
           </a:ln>
         </p:spPr>
         <p:style>
@@ -7244,14 +8736,14 @@
       </p:sp>
       <p:sp>
         <p:nvSpPr>
-          <p:cNvPr id="10" name="TextBox 9"/>
-          <p:cNvSpPr txBox="1"/>
-          <p:nvPr/>
-        </p:nvSpPr>
-        <p:spPr>
-          <a:xfrm>
-            <a:off x="2148840" y="2670048"/>
-            <a:ext cx="7772400" cy="548640"/>
+          <p:cNvPr id="13" name="TextBox 12"/>
+          <p:cNvSpPr txBox="1"/>
+          <p:nvPr/>
+        </p:nvSpPr>
+        <p:spPr>
+          <a:xfrm>
+            <a:off x="1051560" y="2761488"/>
+            <a:ext cx="1554480" cy="329184"/>
           </a:xfrm>
           <a:prstGeom prst="rect">
             <a:avLst/>
@@ -7265,37 +8757,74 @@
           <a:lstStyle/>
           <a:p>
             <a:pPr>
-              <a:defRPr sz="2000" b="1">
-                <a:solidFill>
-                  <a:srgbClr val="FFFFFF"/>
-                </a:solidFill>
-              </a:defRPr>
-            </a:pPr>
-            <a:r>
-              <a:t>Linux system interfaces  |  /proc • /sys • statvfs() • signals</a:t>
-            </a:r>
-          </a:p>
-        </p:txBody>
-      </p:sp>
-      <p:sp>
-        <p:nvSpPr>
-          <p:cNvPr id="11" name="Down Arrow 10"/>
+              <a:defRPr sz="1350" b="1">
+                <a:solidFill>
+                  <a:srgbClr val="0F172A"/>
+                </a:solidFill>
+              </a:defRPr>
+            </a:pPr>
+            <a:r>
+              <a:t>Driver source</a:t>
+            </a:r>
+          </a:p>
+        </p:txBody>
+      </p:sp>
+      <p:sp>
+        <p:nvSpPr>
+          <p:cNvPr id="14" name="TextBox 13"/>
+          <p:cNvSpPr txBox="1"/>
+          <p:nvPr/>
+        </p:nvSpPr>
+        <p:spPr>
+          <a:xfrm>
+            <a:off x="2606040" y="2761488"/>
+            <a:ext cx="1828800" cy="329184"/>
+          </a:xfrm>
+          <a:prstGeom prst="rect">
+            <a:avLst/>
+          </a:prstGeom>
+          <a:noFill/>
+        </p:spPr>
+        <p:txBody>
+          <a:bodyPr wrap="none">
+            <a:spAutoFit/>
+          </a:bodyPr>
+          <a:lstStyle/>
+          <a:p>
+            <a:pPr>
+              <a:defRPr sz="1350">
+                <a:solidFill>
+                  <a:srgbClr val="1F2937"/>
+                </a:solidFill>
+              </a:defRPr>
+            </a:pPr>
+            <a:r>
+              <a:t>C / Linux kernel APIs</a:t>
+            </a:r>
+          </a:p>
+        </p:txBody>
+      </p:sp>
+      <p:sp>
+        <p:nvSpPr>
+          <p:cNvPr id="15" name="Rounded Rectangle 14"/>
           <p:cNvSpPr/>
           <p:nvPr/>
         </p:nvSpPr>
         <p:spPr>
           <a:xfrm>
-            <a:off x="5577840" y="3364991"/>
-            <a:ext cx="914400" cy="365760"/>
-          </a:xfrm>
-          <a:prstGeom prst="downArrow">
+            <a:off x="868680" y="3355848"/>
+            <a:ext cx="3840480" cy="512064"/>
+          </a:xfrm>
+          <a:prstGeom prst="roundRect">
             <a:avLst/>
           </a:prstGeom>
           <a:solidFill>
-            <a:srgbClr val="566373"/>
+            <a:srgbClr val="FFFFFF"/>
           </a:solidFill>
           <a:ln>
-            <a:noFill/>
+            <a:solidFill>
+              <a:srgbClr val="D7DEE7"/>
+            </a:solidFill>
           </a:ln>
         </p:spPr>
         <p:style>
@@ -7322,23 +8851,95 @@
       </p:sp>
       <p:sp>
         <p:nvSpPr>
-          <p:cNvPr id="12" name="Rounded Rectangle 11"/>
+          <p:cNvPr id="16" name="TextBox 15"/>
+          <p:cNvSpPr txBox="1"/>
+          <p:nvPr/>
+        </p:nvSpPr>
+        <p:spPr>
+          <a:xfrm>
+            <a:off x="1051560" y="3429000"/>
+            <a:ext cx="1554480" cy="329184"/>
+          </a:xfrm>
+          <a:prstGeom prst="rect">
+            <a:avLst/>
+          </a:prstGeom>
+          <a:noFill/>
+        </p:spPr>
+        <p:txBody>
+          <a:bodyPr wrap="none">
+            <a:spAutoFit/>
+          </a:bodyPr>
+          <a:lstStyle/>
+          <a:p>
+            <a:pPr>
+              <a:defRPr sz="1350" b="1">
+                <a:solidFill>
+                  <a:srgbClr val="0F172A"/>
+                </a:solidFill>
+              </a:defRPr>
+            </a:pPr>
+            <a:r>
+              <a:t>Compiler</a:t>
+            </a:r>
+          </a:p>
+        </p:txBody>
+      </p:sp>
+      <p:sp>
+        <p:nvSpPr>
+          <p:cNvPr id="17" name="TextBox 16"/>
+          <p:cNvSpPr txBox="1"/>
+          <p:nvPr/>
+        </p:nvSpPr>
+        <p:spPr>
+          <a:xfrm>
+            <a:off x="2606040" y="3429000"/>
+            <a:ext cx="1828800" cy="329184"/>
+          </a:xfrm>
+          <a:prstGeom prst="rect">
+            <a:avLst/>
+          </a:prstGeom>
+          <a:noFill/>
+        </p:spPr>
+        <p:txBody>
+          <a:bodyPr wrap="none">
+            <a:spAutoFit/>
+          </a:bodyPr>
+          <a:lstStyle/>
+          <a:p>
+            <a:pPr>
+              <a:defRPr sz="1350">
+                <a:solidFill>
+                  <a:srgbClr val="1F2937"/>
+                </a:solidFill>
+              </a:defRPr>
+            </a:pPr>
+            <a:r>
+              <a:t>GNU g++</a:t>
+            </a:r>
+          </a:p>
+        </p:txBody>
+      </p:sp>
+      <p:sp>
+        <p:nvSpPr>
+          <p:cNvPr id="18" name="Rounded Rectangle 17"/>
           <p:cNvSpPr/>
           <p:nvPr/>
         </p:nvSpPr>
         <p:spPr>
           <a:xfrm>
-            <a:off x="1920240" y="3703320"/>
-            <a:ext cx="8229600" cy="777240"/>
+            <a:off x="868680" y="4023360"/>
+            <a:ext cx="3840480" cy="512064"/>
           </a:xfrm>
           <a:prstGeom prst="roundRect">
             <a:avLst/>
           </a:prstGeom>
           <a:solidFill>
-            <a:srgbClr val="0E1827"/>
+            <a:srgbClr val="FFFFFF"/>
           </a:solidFill>
           <a:ln>
-            <a:noFill/>
+            <a:solidFill>
+              <a:srgbClr val="D7DEE7"/>
+            </a:solidFill>
           </a:ln>
         </p:spPr>
         <p:style>
@@ -7365,14 +8966,14 @@
       </p:sp>
       <p:sp>
         <p:nvSpPr>
-          <p:cNvPr id="13" name="TextBox 12"/>
-          <p:cNvSpPr txBox="1"/>
-          <p:nvPr/>
-        </p:nvSpPr>
-        <p:spPr>
-          <a:xfrm>
-            <a:off x="2148840" y="3813048"/>
-            <a:ext cx="7772400" cy="548640"/>
+          <p:cNvPr id="19" name="TextBox 18"/>
+          <p:cNvSpPr txBox="1"/>
+          <p:nvPr/>
+        </p:nvSpPr>
+        <p:spPr>
+          <a:xfrm>
+            <a:off x="1051560" y="4096512"/>
+            <a:ext cx="1554480" cy="329184"/>
           </a:xfrm>
           <a:prstGeom prst="rect">
             <a:avLst/>
@@ -7386,28 +8987,28 @@
           <a:lstStyle/>
           <a:p>
             <a:pPr>
-              <a:defRPr sz="2000" b="1">
-                <a:solidFill>
-                  <a:srgbClr val="FFFFFF"/>
-                </a:solidFill>
-              </a:defRPr>
-            </a:pPr>
-            <a:r>
-              <a:t>Linux Kernel  |  Process manager • memory • filesystem • device layer</a:t>
-            </a:r>
-          </a:p>
-        </p:txBody>
-      </p:sp>
-      <p:sp>
-        <p:nvSpPr>
-          <p:cNvPr id="14" name="TextBox 13"/>
-          <p:cNvSpPr txBox="1"/>
-          <p:nvPr/>
-        </p:nvSpPr>
-        <p:spPr>
-          <a:xfrm>
-            <a:off x="1828800" y="5074920"/>
-            <a:ext cx="8412480" cy="731520"/>
+              <a:defRPr sz="1350" b="1">
+                <a:solidFill>
+                  <a:srgbClr val="0F172A"/>
+                </a:solidFill>
+              </a:defRPr>
+            </a:pPr>
+            <a:r>
+              <a:t>Build</a:t>
+            </a:r>
+          </a:p>
+        </p:txBody>
+      </p:sp>
+      <p:sp>
+        <p:nvSpPr>
+          <p:cNvPr id="20" name="TextBox 19"/>
+          <p:cNvSpPr txBox="1"/>
+          <p:nvPr/>
+        </p:nvSpPr>
+        <p:spPr>
+          <a:xfrm>
+            <a:off x="2606040" y="4096512"/>
+            <a:ext cx="1828800" cy="329184"/>
           </a:xfrm>
           <a:prstGeom prst="rect">
             <a:avLst/>
@@ -7420,29 +9021,74 @@
           </a:bodyPr>
           <a:lstStyle/>
           <a:p>
-            <a:pPr algn="ctr">
-              <a:defRPr sz="1800">
-                <a:solidFill>
-                  <a:srgbClr val="1C2536"/>
-                </a:solidFill>
-              </a:defRPr>
-            </a:pPr>
-            <a:r>
-              <a:t>Optional driver path: SysGuard → /dev/sysguard → character driver → kernel</a:t>
-            </a:r>
-          </a:p>
-        </p:txBody>
-      </p:sp>
-      <p:sp>
-        <p:nvSpPr>
-          <p:cNvPr id="15" name="TextBox 14"/>
-          <p:cNvSpPr txBox="1"/>
-          <p:nvPr/>
-        </p:nvSpPr>
-        <p:spPr>
-          <a:xfrm>
-            <a:off x="640080" y="6492240"/>
-            <a:ext cx="10972800" cy="228600"/>
+            <a:pPr>
+              <a:defRPr sz="1350">
+                <a:solidFill>
+                  <a:srgbClr val="1F2937"/>
+                </a:solidFill>
+              </a:defRPr>
+            </a:pPr>
+            <a:r>
+              <a:t>GNU Make</a:t>
+            </a:r>
+          </a:p>
+        </p:txBody>
+      </p:sp>
+      <p:sp>
+        <p:nvSpPr>
+          <p:cNvPr id="21" name="Rounded Rectangle 20"/>
+          <p:cNvSpPr/>
+          <p:nvPr/>
+        </p:nvSpPr>
+        <p:spPr>
+          <a:xfrm>
+            <a:off x="868680" y="4690872"/>
+            <a:ext cx="3840480" cy="512064"/>
+          </a:xfrm>
+          <a:prstGeom prst="roundRect">
+            <a:avLst/>
+          </a:prstGeom>
+          <a:solidFill>
+            <a:srgbClr val="FFFFFF"/>
+          </a:solidFill>
+          <a:ln>
+            <a:solidFill>
+              <a:srgbClr val="D7DEE7"/>
+            </a:solidFill>
+          </a:ln>
+        </p:spPr>
+        <p:style>
+          <a:lnRef idx="1">
+            <a:schemeClr val="accent1"/>
+          </a:lnRef>
+          <a:fillRef idx="3">
+            <a:schemeClr val="accent1"/>
+          </a:fillRef>
+          <a:effectRef idx="2">
+            <a:schemeClr val="accent1"/>
+          </a:effectRef>
+          <a:fontRef idx="minor">
+            <a:schemeClr val="lt1"/>
+          </a:fontRef>
+        </p:style>
+        <p:txBody>
+          <a:bodyPr rtlCol="0" anchor="ctr"/>
+          <a:lstStyle/>
+          <a:p>
+            <a:pPr algn="ctr"/>
+          </a:p>
+        </p:txBody>
+      </p:sp>
+      <p:sp>
+        <p:nvSpPr>
+          <p:cNvPr id="22" name="TextBox 21"/>
+          <p:cNvSpPr txBox="1"/>
+          <p:nvPr/>
+        </p:nvSpPr>
+        <p:spPr>
+          <a:xfrm>
+            <a:off x="1051560" y="4764024"/>
+            <a:ext cx="1554480" cy="329184"/>
           </a:xfrm>
           <a:prstGeom prst="rect">
             <a:avLst/>
@@ -7456,14 +9102,373 @@
           <a:lstStyle/>
           <a:p>
             <a:pPr>
-              <a:defRPr sz="900">
-                <a:solidFill>
-                  <a:srgbClr val="566373"/>
-                </a:solidFill>
-              </a:defRPr>
-            </a:pPr>
-            <a:r>
-              <a:t>SysGuard • Linux System Health Monitor                               5</a:t>
+              <a:defRPr sz="1350" b="1">
+                <a:solidFill>
+                  <a:srgbClr val="0F172A"/>
+                </a:solidFill>
+              </a:defRPr>
+            </a:pPr>
+            <a:r>
+              <a:t>Version control</a:t>
+            </a:r>
+          </a:p>
+        </p:txBody>
+      </p:sp>
+      <p:sp>
+        <p:nvSpPr>
+          <p:cNvPr id="23" name="TextBox 22"/>
+          <p:cNvSpPr txBox="1"/>
+          <p:nvPr/>
+        </p:nvSpPr>
+        <p:spPr>
+          <a:xfrm>
+            <a:off x="2606040" y="4764024"/>
+            <a:ext cx="1828800" cy="329184"/>
+          </a:xfrm>
+          <a:prstGeom prst="rect">
+            <a:avLst/>
+          </a:prstGeom>
+          <a:noFill/>
+        </p:spPr>
+        <p:txBody>
+          <a:bodyPr wrap="none">
+            <a:spAutoFit/>
+          </a:bodyPr>
+          <a:lstStyle/>
+          <a:p>
+            <a:pPr>
+              <a:defRPr sz="1350">
+                <a:solidFill>
+                  <a:srgbClr val="1F2937"/>
+                </a:solidFill>
+              </a:defRPr>
+            </a:pPr>
+            <a:r>
+              <a:t>Git + GitHub</a:t>
+            </a:r>
+          </a:p>
+        </p:txBody>
+      </p:sp>
+      <p:sp>
+        <p:nvSpPr>
+          <p:cNvPr id="24" name="Rounded Rectangle 23"/>
+          <p:cNvSpPr/>
+          <p:nvPr/>
+        </p:nvSpPr>
+        <p:spPr>
+          <a:xfrm>
+            <a:off x="868680" y="5358383"/>
+            <a:ext cx="3840480" cy="512064"/>
+          </a:xfrm>
+          <a:prstGeom prst="roundRect">
+            <a:avLst/>
+          </a:prstGeom>
+          <a:solidFill>
+            <a:srgbClr val="FFFFFF"/>
+          </a:solidFill>
+          <a:ln>
+            <a:solidFill>
+              <a:srgbClr val="D7DEE7"/>
+            </a:solidFill>
+          </a:ln>
+        </p:spPr>
+        <p:style>
+          <a:lnRef idx="1">
+            <a:schemeClr val="accent1"/>
+          </a:lnRef>
+          <a:fillRef idx="3">
+            <a:schemeClr val="accent1"/>
+          </a:fillRef>
+          <a:effectRef idx="2">
+            <a:schemeClr val="accent1"/>
+          </a:effectRef>
+          <a:fontRef idx="minor">
+            <a:schemeClr val="lt1"/>
+          </a:fontRef>
+        </p:style>
+        <p:txBody>
+          <a:bodyPr rtlCol="0" anchor="ctr"/>
+          <a:lstStyle/>
+          <a:p>
+            <a:pPr algn="ctr"/>
+          </a:p>
+        </p:txBody>
+      </p:sp>
+      <p:sp>
+        <p:nvSpPr>
+          <p:cNvPr id="25" name="TextBox 24"/>
+          <p:cNvSpPr txBox="1"/>
+          <p:nvPr/>
+        </p:nvSpPr>
+        <p:spPr>
+          <a:xfrm>
+            <a:off x="1051560" y="5431536"/>
+            <a:ext cx="1554480" cy="329184"/>
+          </a:xfrm>
+          <a:prstGeom prst="rect">
+            <a:avLst/>
+          </a:prstGeom>
+          <a:noFill/>
+        </p:spPr>
+        <p:txBody>
+          <a:bodyPr wrap="none">
+            <a:spAutoFit/>
+          </a:bodyPr>
+          <a:lstStyle/>
+          <a:p>
+            <a:pPr>
+              <a:defRPr sz="1350" b="1">
+                <a:solidFill>
+                  <a:srgbClr val="0F172A"/>
+                </a:solidFill>
+              </a:defRPr>
+            </a:pPr>
+            <a:r>
+              <a:t>Interface</a:t>
+            </a:r>
+          </a:p>
+        </p:txBody>
+      </p:sp>
+      <p:sp>
+        <p:nvSpPr>
+          <p:cNvPr id="26" name="TextBox 25"/>
+          <p:cNvSpPr txBox="1"/>
+          <p:nvPr/>
+        </p:nvSpPr>
+        <p:spPr>
+          <a:xfrm>
+            <a:off x="2606040" y="5431536"/>
+            <a:ext cx="1828800" cy="329184"/>
+          </a:xfrm>
+          <a:prstGeom prst="rect">
+            <a:avLst/>
+          </a:prstGeom>
+          <a:noFill/>
+        </p:spPr>
+        <p:txBody>
+          <a:bodyPr wrap="none">
+            <a:spAutoFit/>
+          </a:bodyPr>
+          <a:lstStyle/>
+          <a:p>
+            <a:pPr>
+              <a:defRPr sz="1350">
+                <a:solidFill>
+                  <a:srgbClr val="1F2937"/>
+                </a:solidFill>
+              </a:defRPr>
+            </a:pPr>
+            <a:r>
+              <a:t>Terminal / CLI</a:t>
+            </a:r>
+          </a:p>
+        </p:txBody>
+      </p:sp>
+      <p:sp>
+        <p:nvSpPr>
+          <p:cNvPr id="27" name="Rounded Rectangle 26"/>
+          <p:cNvSpPr/>
+          <p:nvPr/>
+        </p:nvSpPr>
+        <p:spPr>
+          <a:xfrm>
+            <a:off x="5486400" y="1417320"/>
+            <a:ext cx="5166360" cy="4160520"/>
+          </a:xfrm>
+          <a:prstGeom prst="roundRect">
+            <a:avLst/>
+          </a:prstGeom>
+          <a:solidFill>
+            <a:srgbClr val="FFFFFF"/>
+          </a:solidFill>
+          <a:ln>
+            <a:solidFill>
+              <a:srgbClr val="D7DEE7"/>
+            </a:solidFill>
+          </a:ln>
+        </p:spPr>
+        <p:style>
+          <a:lnRef idx="1">
+            <a:schemeClr val="accent1"/>
+          </a:lnRef>
+          <a:fillRef idx="3">
+            <a:schemeClr val="accent1"/>
+          </a:fillRef>
+          <a:effectRef idx="2">
+            <a:schemeClr val="accent1"/>
+          </a:effectRef>
+          <a:fontRef idx="minor">
+            <a:schemeClr val="lt1"/>
+          </a:fontRef>
+        </p:style>
+        <p:txBody>
+          <a:bodyPr rtlCol="0" anchor="ctr"/>
+          <a:lstStyle/>
+          <a:p>
+            <a:pPr algn="ctr"/>
+          </a:p>
+        </p:txBody>
+      </p:sp>
+      <p:sp>
+        <p:nvSpPr>
+          <p:cNvPr id="28" name="Rectangle 27"/>
+          <p:cNvSpPr/>
+          <p:nvPr/>
+        </p:nvSpPr>
+        <p:spPr>
+          <a:xfrm>
+            <a:off x="5486400" y="1417320"/>
+            <a:ext cx="73152" cy="4160520"/>
+          </a:xfrm>
+          <a:prstGeom prst="rect">
+            <a:avLst/>
+          </a:prstGeom>
+          <a:solidFill>
+            <a:srgbClr val="0EA5E9"/>
+          </a:solidFill>
+          <a:ln>
+            <a:noFill/>
+          </a:ln>
+        </p:spPr>
+        <p:style>
+          <a:lnRef idx="1">
+            <a:schemeClr val="accent1"/>
+          </a:lnRef>
+          <a:fillRef idx="3">
+            <a:schemeClr val="accent1"/>
+          </a:fillRef>
+          <a:effectRef idx="2">
+            <a:schemeClr val="accent1"/>
+          </a:effectRef>
+          <a:fontRef idx="minor">
+            <a:schemeClr val="lt1"/>
+          </a:fontRef>
+        </p:style>
+        <p:txBody>
+          <a:bodyPr rtlCol="0" anchor="ctr"/>
+          <a:lstStyle/>
+          <a:p>
+            <a:pPr algn="ctr"/>
+          </a:p>
+        </p:txBody>
+      </p:sp>
+      <p:sp>
+        <p:nvSpPr>
+          <p:cNvPr id="29" name="TextBox 28"/>
+          <p:cNvSpPr txBox="1"/>
+          <p:nvPr/>
+        </p:nvSpPr>
+        <p:spPr>
+          <a:xfrm>
+            <a:off x="5696712" y="1581912"/>
+            <a:ext cx="4818888" cy="365760"/>
+          </a:xfrm>
+          <a:prstGeom prst="rect">
+            <a:avLst/>
+          </a:prstGeom>
+          <a:noFill/>
+        </p:spPr>
+        <p:txBody>
+          <a:bodyPr wrap="none">
+            <a:spAutoFit/>
+          </a:bodyPr>
+          <a:lstStyle/>
+          <a:p>
+            <a:pPr>
+              <a:defRPr sz="1600" b="1">
+                <a:solidFill>
+                  <a:srgbClr val="0F172A"/>
+                </a:solidFill>
+              </a:defRPr>
+            </a:pPr>
+            <a:r>
+              <a:t>Verified development environment</a:t>
+            </a:r>
+          </a:p>
+        </p:txBody>
+      </p:sp>
+      <p:sp>
+        <p:nvSpPr>
+          <p:cNvPr id="30" name="TextBox 29"/>
+          <p:cNvSpPr txBox="1"/>
+          <p:nvPr/>
+        </p:nvSpPr>
+        <p:spPr>
+          <a:xfrm>
+            <a:off x="5696712" y="2011680"/>
+            <a:ext cx="4818888" cy="3447287"/>
+          </a:xfrm>
+          <a:prstGeom prst="rect">
+            <a:avLst/>
+          </a:prstGeom>
+          <a:noFill/>
+        </p:spPr>
+        <p:txBody>
+          <a:bodyPr wrap="square">
+            <a:spAutoFit/>
+          </a:bodyPr>
+          <a:lstStyle/>
+          <a:p>
+            <a:pPr>
+              <a:defRPr sz="1500">
+                <a:solidFill>
+                  <a:srgbClr val="1F2937"/>
+                </a:solidFill>
+              </a:defRPr>
+            </a:pPr>
+            <a:r>
+              <a:t>Ubuntu 26.04.1 LTS</a:t>
+            </a:r>
+            <a:br/>
+            <a:r>
+              <a:t>6.18.40.1-microsoft-standard-WSL2</a:t>
+            </a:r>
+            <a:br/>
+            <a:r>
+              <a:t>x86_64</a:t>
+            </a:r>
+            <a:br/>
+            <a:r>
+              <a:t>AMD Ryzen 7 6800H with Radeon Graphics</a:t>
+            </a:r>
+            <a:br/>
+            <a:r>
+              <a:t>16 cores reported by the application</a:t>
+            </a:r>
+          </a:p>
+        </p:txBody>
+      </p:sp>
+      <p:sp>
+        <p:nvSpPr>
+          <p:cNvPr id="31" name="TextBox 30"/>
+          <p:cNvSpPr txBox="1"/>
+          <p:nvPr/>
+        </p:nvSpPr>
+        <p:spPr>
+          <a:xfrm>
+            <a:off x="640080" y="6473952"/>
+            <a:ext cx="10972800" cy="201168"/>
+          </a:xfrm>
+          <a:prstGeom prst="rect">
+            <a:avLst/>
+          </a:prstGeom>
+          <a:noFill/>
+        </p:spPr>
+        <p:txBody>
+          <a:bodyPr wrap="none">
+            <a:spAutoFit/>
+          </a:bodyPr>
+          <a:lstStyle/>
+          <a:p>
+            <a:pPr>
+              <a:defRPr sz="850">
+                <a:solidFill>
+                  <a:srgbClr val="64748B"/>
+                </a:solidFill>
+              </a:defRPr>
+            </a:pPr>
+            <a:r>
+              <a:t>SysGuard • Linux System Health Monitor                                              5</a:t>
             </a:r>
           </a:p>
         </p:txBody>
@@ -7495,13 +9500,13 @@
         <p:spPr>
           <a:xfrm>
             <a:off x="0" y="0"/>
-            <a:ext cx="12191695" cy="6858000"/>
+            <a:ext cx="12191999" cy="6858000"/>
           </a:xfrm>
           <a:prstGeom prst="rect">
             <a:avLst/>
           </a:prstGeom>
           <a:solidFill>
-            <a:srgbClr val="FFFFFF"/>
+            <a:srgbClr val="F5F7FA"/>
           </a:solidFill>
           <a:ln>
             <a:noFill/>
@@ -7538,13 +9543,13 @@
         <p:spPr>
           <a:xfrm>
             <a:off x="0" y="0"/>
-            <a:ext cx="12191695" cy="201168"/>
+            <a:ext cx="12191999" cy="164592"/>
           </a:xfrm>
           <a:prstGeom prst="rect">
             <a:avLst/>
           </a:prstGeom>
           <a:solidFill>
-            <a:srgbClr val="2A69BA"/>
+            <a:srgbClr val="2563EB"/>
           </a:solidFill>
           <a:ln>
             <a:noFill/>
@@ -7580,8 +9585,8 @@
         </p:nvSpPr>
         <p:spPr>
           <a:xfrm>
-            <a:off x="640080" y="502920"/>
-            <a:ext cx="10881360" cy="640080"/>
+            <a:off x="640080" y="438912"/>
+            <a:ext cx="10972800" cy="566928"/>
           </a:xfrm>
           <a:prstGeom prst="rect">
             <a:avLst/>
@@ -7597,12 +9602,12 @@
             <a:pPr>
               <a:defRPr sz="2800" b="1">
                 <a:solidFill>
-                  <a:srgbClr val="0E1827"/>
-                </a:solidFill>
-              </a:defRPr>
-            </a:pPr>
-            <a:r>
-              <a:t>5. Major Modules</a:t>
+                  <a:srgbClr val="0F172A"/>
+                </a:solidFill>
+              </a:defRPr>
+            </a:pPr>
+            <a:r>
+              <a:t>5. System Architecture</a:t>
             </a:r>
           </a:p>
         </p:txBody>
@@ -7615,8 +9620,8 @@
         </p:nvSpPr>
         <p:spPr>
           <a:xfrm>
-            <a:off x="658368" y="1143000"/>
-            <a:ext cx="10789920" cy="411480"/>
+            <a:off x="658368" y="987552"/>
+            <a:ext cx="10698480" cy="365760"/>
           </a:xfrm>
           <a:prstGeom prst="rect">
             <a:avLst/>
@@ -7630,14 +9635,14 @@
           <a:lstStyle/>
           <a:p>
             <a:pPr>
-              <a:defRPr sz="1400">
-                <a:solidFill>
-                  <a:srgbClr val="566373"/>
-                </a:solidFill>
-              </a:defRPr>
-            </a:pPr>
-            <a:r>
-              <a:t>Modular C++ design</a:t>
+              <a:defRPr sz="1300">
+                <a:solidFill>
+                  <a:srgbClr val="64748B"/>
+                </a:solidFill>
+              </a:defRPr>
+            </a:pPr>
+            <a:r>
+              <a:t>Application → Linux interfaces → kernel</a:t>
             </a:r>
           </a:p>
         </p:txBody>
@@ -7650,19 +9655,17 @@
         </p:nvSpPr>
         <p:spPr>
           <a:xfrm>
-            <a:off x="914400" y="1508760"/>
-            <a:ext cx="4572000" cy="658368"/>
+            <a:off x="1828800" y="1371600"/>
+            <a:ext cx="8595360" cy="749808"/>
           </a:xfrm>
           <a:prstGeom prst="roundRect">
             <a:avLst/>
           </a:prstGeom>
           <a:solidFill>
-            <a:srgbClr val="F1F5F9"/>
+            <a:srgbClr val="2563EB"/>
           </a:solidFill>
           <a:ln>
-            <a:solidFill>
-              <a:srgbClr val="D2DCE8"/>
-            </a:solidFill>
+            <a:noFill/>
           </a:ln>
         </p:spPr>
         <p:style>
@@ -7695,8 +9698,8 @@
         </p:nvSpPr>
         <p:spPr>
           <a:xfrm>
-            <a:off x="1097280" y="1618488"/>
-            <a:ext cx="4206240" cy="411480"/>
+            <a:off x="2103120" y="1508760"/>
+            <a:ext cx="8046720" cy="457200"/>
           </a:xfrm>
           <a:prstGeom prst="rect">
             <a:avLst/>
@@ -7709,40 +9712,38 @@
           </a:bodyPr>
           <a:lstStyle/>
           <a:p>
-            <a:pPr>
-              <a:defRPr sz="1800" b="1">
-                <a:solidFill>
-                  <a:srgbClr val="0E1827"/>
-                </a:solidFill>
-              </a:defRPr>
-            </a:pPr>
-            <a:r>
-              <a:t>SystemInfo</a:t>
-            </a:r>
-          </a:p>
-        </p:txBody>
-      </p:sp>
-      <p:sp>
-        <p:nvSpPr>
-          <p:cNvPr id="8" name="Rounded Rectangle 7"/>
+            <a:pPr algn="ctr">
+              <a:defRPr sz="1900" b="1">
+                <a:solidFill>
+                  <a:srgbClr val="FFFFFF"/>
+                </a:solidFill>
+              </a:defRPr>
+            </a:pPr>
+            <a:r>
+              <a:t>SysGuard C++ CLI  —  User space</a:t>
+            </a:r>
+          </a:p>
+        </p:txBody>
+      </p:sp>
+      <p:sp>
+        <p:nvSpPr>
+          <p:cNvPr id="8" name="Down Arrow 7"/>
           <p:cNvSpPr/>
           <p:nvPr/>
         </p:nvSpPr>
         <p:spPr>
           <a:xfrm>
-            <a:off x="6217920" y="1508760"/>
-            <a:ext cx="4572000" cy="658368"/>
-          </a:xfrm>
-          <a:prstGeom prst="roundRect">
+            <a:off x="5623560" y="2194560"/>
+            <a:ext cx="822960" cy="347472"/>
+          </a:xfrm>
+          <a:prstGeom prst="downArrow">
             <a:avLst/>
           </a:prstGeom>
           <a:solidFill>
-            <a:srgbClr val="F1F5F9"/>
+            <a:srgbClr val="64748B"/>
           </a:solidFill>
           <a:ln>
-            <a:solidFill>
-              <a:srgbClr val="D2DCE8"/>
-            </a:solidFill>
+            <a:noFill/>
           </a:ln>
         </p:spPr>
         <p:style>
@@ -7769,60 +9770,23 @@
       </p:sp>
       <p:sp>
         <p:nvSpPr>
-          <p:cNvPr id="9" name="TextBox 8"/>
-          <p:cNvSpPr txBox="1"/>
-          <p:nvPr/>
-        </p:nvSpPr>
-        <p:spPr>
-          <a:xfrm>
-            <a:off x="6400800" y="1618488"/>
-            <a:ext cx="4206240" cy="411480"/>
-          </a:xfrm>
-          <a:prstGeom prst="rect">
-            <a:avLst/>
-          </a:prstGeom>
-          <a:noFill/>
-        </p:spPr>
-        <p:txBody>
-          <a:bodyPr wrap="none">
-            <a:spAutoFit/>
-          </a:bodyPr>
-          <a:lstStyle/>
-          <a:p>
-            <a:pPr>
-              <a:defRPr sz="1800" b="1">
-                <a:solidFill>
-                  <a:srgbClr val="0E1827"/>
-                </a:solidFill>
-              </a:defRPr>
-            </a:pPr>
-            <a:r>
-              <a:t>CPUMonitor</a:t>
-            </a:r>
-          </a:p>
-        </p:txBody>
-      </p:sp>
-      <p:sp>
-        <p:nvSpPr>
-          <p:cNvPr id="10" name="Rounded Rectangle 9"/>
+          <p:cNvPr id="9" name="Rounded Rectangle 8"/>
           <p:cNvSpPr/>
           <p:nvPr/>
         </p:nvSpPr>
         <p:spPr>
           <a:xfrm>
-            <a:off x="914400" y="2514600"/>
-            <a:ext cx="4572000" cy="658368"/>
+            <a:off x="1828800" y="2514600"/>
+            <a:ext cx="8595360" cy="749808"/>
           </a:xfrm>
           <a:prstGeom prst="roundRect">
             <a:avLst/>
           </a:prstGeom>
           <a:solidFill>
-            <a:srgbClr val="F1F5F9"/>
+            <a:srgbClr val="0EA5E9"/>
           </a:solidFill>
           <a:ln>
-            <a:solidFill>
-              <a:srgbClr val="D2DCE8"/>
-            </a:solidFill>
+            <a:noFill/>
           </a:ln>
         </p:spPr>
         <p:style>
@@ -7849,14 +9813,14 @@
       </p:sp>
       <p:sp>
         <p:nvSpPr>
-          <p:cNvPr id="11" name="TextBox 10"/>
-          <p:cNvSpPr txBox="1"/>
-          <p:nvPr/>
-        </p:nvSpPr>
-        <p:spPr>
-          <a:xfrm>
-            <a:off x="1097280" y="2624328"/>
-            <a:ext cx="4206240" cy="411480"/>
+          <p:cNvPr id="10" name="TextBox 9"/>
+          <p:cNvSpPr txBox="1"/>
+          <p:nvPr/>
+        </p:nvSpPr>
+        <p:spPr>
+          <a:xfrm>
+            <a:off x="2103120" y="2651760"/>
+            <a:ext cx="8046720" cy="457200"/>
           </a:xfrm>
           <a:prstGeom prst="rect">
             <a:avLst/>
@@ -7869,40 +9833,38 @@
           </a:bodyPr>
           <a:lstStyle/>
           <a:p>
-            <a:pPr>
-              <a:defRPr sz="1800" b="1">
-                <a:solidFill>
-                  <a:srgbClr val="0E1827"/>
-                </a:solidFill>
-              </a:defRPr>
-            </a:pPr>
-            <a:r>
-              <a:t>MemoryMonitor</a:t>
-            </a:r>
-          </a:p>
-        </p:txBody>
-      </p:sp>
-      <p:sp>
-        <p:nvSpPr>
-          <p:cNvPr id="12" name="Rounded Rectangle 11"/>
+            <a:pPr algn="ctr">
+              <a:defRPr sz="1900" b="1">
+                <a:solidFill>
+                  <a:srgbClr val="FFFFFF"/>
+                </a:solidFill>
+              </a:defRPr>
+            </a:pPr>
+            <a:r>
+              <a:t>Linux interfaces  —  /proc  •  uname()  •  statvfs()  •  signals</a:t>
+            </a:r>
+          </a:p>
+        </p:txBody>
+      </p:sp>
+      <p:sp>
+        <p:nvSpPr>
+          <p:cNvPr id="11" name="Down Arrow 10"/>
           <p:cNvSpPr/>
           <p:nvPr/>
         </p:nvSpPr>
         <p:spPr>
           <a:xfrm>
-            <a:off x="6217920" y="2514600"/>
-            <a:ext cx="4572000" cy="658368"/>
-          </a:xfrm>
-          <a:prstGeom prst="roundRect">
+            <a:off x="5623560" y="3337560"/>
+            <a:ext cx="822960" cy="347472"/>
+          </a:xfrm>
+          <a:prstGeom prst="downArrow">
             <a:avLst/>
           </a:prstGeom>
           <a:solidFill>
-            <a:srgbClr val="F1F5F9"/>
+            <a:srgbClr val="64748B"/>
           </a:solidFill>
           <a:ln>
-            <a:solidFill>
-              <a:srgbClr val="D2DCE8"/>
-            </a:solidFill>
+            <a:noFill/>
           </a:ln>
         </p:spPr>
         <p:style>
@@ -7929,60 +9891,23 @@
       </p:sp>
       <p:sp>
         <p:nvSpPr>
-          <p:cNvPr id="13" name="TextBox 12"/>
-          <p:cNvSpPr txBox="1"/>
-          <p:nvPr/>
-        </p:nvSpPr>
-        <p:spPr>
-          <a:xfrm>
-            <a:off x="6400800" y="2624328"/>
-            <a:ext cx="4206240" cy="411480"/>
-          </a:xfrm>
-          <a:prstGeom prst="rect">
-            <a:avLst/>
-          </a:prstGeom>
-          <a:noFill/>
-        </p:spPr>
-        <p:txBody>
-          <a:bodyPr wrap="none">
-            <a:spAutoFit/>
-          </a:bodyPr>
-          <a:lstStyle/>
-          <a:p>
-            <a:pPr>
-              <a:defRPr sz="1800" b="1">
-                <a:solidFill>
-                  <a:srgbClr val="0E1827"/>
-                </a:solidFill>
-              </a:defRPr>
-            </a:pPr>
-            <a:r>
-              <a:t>DiskMonitor</a:t>
-            </a:r>
-          </a:p>
-        </p:txBody>
-      </p:sp>
-      <p:sp>
-        <p:nvSpPr>
-          <p:cNvPr id="14" name="Rounded Rectangle 13"/>
+          <p:cNvPr id="12" name="Rounded Rectangle 11"/>
           <p:cNvSpPr/>
           <p:nvPr/>
         </p:nvSpPr>
         <p:spPr>
           <a:xfrm>
-            <a:off x="914400" y="3520440"/>
-            <a:ext cx="4572000" cy="658368"/>
+            <a:off x="1828800" y="3657600"/>
+            <a:ext cx="8595360" cy="749808"/>
           </a:xfrm>
           <a:prstGeom prst="roundRect">
             <a:avLst/>
           </a:prstGeom>
           <a:solidFill>
-            <a:srgbClr val="F1F5F9"/>
+            <a:srgbClr val="0F172A"/>
           </a:solidFill>
           <a:ln>
-            <a:solidFill>
-              <a:srgbClr val="D2DCE8"/>
-            </a:solidFill>
+            <a:noFill/>
           </a:ln>
         </p:spPr>
         <p:style>
@@ -8009,14 +9934,14 @@
       </p:sp>
       <p:sp>
         <p:nvSpPr>
-          <p:cNvPr id="15" name="TextBox 14"/>
-          <p:cNvSpPr txBox="1"/>
-          <p:nvPr/>
-        </p:nvSpPr>
-        <p:spPr>
-          <a:xfrm>
-            <a:off x="1097280" y="3630168"/>
-            <a:ext cx="4206240" cy="411480"/>
+          <p:cNvPr id="13" name="TextBox 12"/>
+          <p:cNvSpPr txBox="1"/>
+          <p:nvPr/>
+        </p:nvSpPr>
+        <p:spPr>
+          <a:xfrm>
+            <a:off x="2103120" y="3794760"/>
+            <a:ext cx="8046720" cy="457200"/>
           </a:xfrm>
           <a:prstGeom prst="rect">
             <a:avLst/>
@@ -8029,39 +9954,39 @@
           </a:bodyPr>
           <a:lstStyle/>
           <a:p>
-            <a:pPr>
-              <a:defRPr sz="1800" b="1">
-                <a:solidFill>
-                  <a:srgbClr val="0E1827"/>
-                </a:solidFill>
-              </a:defRPr>
-            </a:pPr>
-            <a:r>
-              <a:t>ProcessMonitor</a:t>
-            </a:r>
-          </a:p>
-        </p:txBody>
-      </p:sp>
-      <p:sp>
-        <p:nvSpPr>
-          <p:cNvPr id="16" name="Rounded Rectangle 15"/>
+            <a:pPr algn="ctr">
+              <a:defRPr sz="1900" b="1">
+                <a:solidFill>
+                  <a:srgbClr val="FFFFFF"/>
+                </a:solidFill>
+              </a:defRPr>
+            </a:pPr>
+            <a:r>
+              <a:t>Linux Kernel  —  Process / memory / filesystem / device layer</a:t>
+            </a:r>
+          </a:p>
+        </p:txBody>
+      </p:sp>
+      <p:sp>
+        <p:nvSpPr>
+          <p:cNvPr id="14" name="Rounded Rectangle 13"/>
           <p:cNvSpPr/>
           <p:nvPr/>
         </p:nvSpPr>
         <p:spPr>
           <a:xfrm>
-            <a:off x="6217920" y="3520440"/>
-            <a:ext cx="4572000" cy="658368"/>
+            <a:off x="3017520" y="4983480"/>
+            <a:ext cx="6126480" cy="685800"/>
           </a:xfrm>
           <a:prstGeom prst="roundRect">
             <a:avLst/>
           </a:prstGeom>
           <a:solidFill>
-            <a:srgbClr val="F1F5F9"/>
+            <a:srgbClr val="E2E8F0"/>
           </a:solidFill>
           <a:ln>
             <a:solidFill>
-              <a:srgbClr val="D2DCE8"/>
+              <a:srgbClr val="D7DEE7"/>
             </a:solidFill>
           </a:ln>
         </p:spPr>
@@ -8089,14 +10014,14 @@
       </p:sp>
       <p:sp>
         <p:nvSpPr>
-          <p:cNvPr id="17" name="TextBox 16"/>
-          <p:cNvSpPr txBox="1"/>
-          <p:nvPr/>
-        </p:nvSpPr>
-        <p:spPr>
-          <a:xfrm>
-            <a:off x="6400800" y="3630168"/>
-            <a:ext cx="4206240" cy="411480"/>
+          <p:cNvPr id="15" name="TextBox 14"/>
+          <p:cNvSpPr txBox="1"/>
+          <p:nvPr/>
+        </p:nvSpPr>
+        <p:spPr>
+          <a:xfrm>
+            <a:off x="3200400" y="5148072"/>
+            <a:ext cx="5760720" cy="320040"/>
           </a:xfrm>
           <a:prstGeom prst="rect">
             <a:avLst/>
@@ -8109,130 +10034,50 @@
           </a:bodyPr>
           <a:lstStyle/>
           <a:p>
+            <a:pPr algn="ctr">
+              <a:defRPr sz="1800" b="1">
+                <a:solidFill>
+                  <a:srgbClr val="0F172A"/>
+                </a:solidFill>
+              </a:defRPr>
+            </a:pPr>
+            <a:r>
+              <a:t>CPU  •  RAM  •  Storage  •  Processes</a:t>
+            </a:r>
+          </a:p>
+        </p:txBody>
+      </p:sp>
+      <p:sp>
+        <p:nvSpPr>
+          <p:cNvPr id="16" name="TextBox 15"/>
+          <p:cNvSpPr txBox="1"/>
+          <p:nvPr/>
+        </p:nvSpPr>
+        <p:spPr>
+          <a:xfrm>
+            <a:off x="640080" y="6473952"/>
+            <a:ext cx="10972800" cy="201168"/>
+          </a:xfrm>
+          <a:prstGeom prst="rect">
+            <a:avLst/>
+          </a:prstGeom>
+          <a:noFill/>
+        </p:spPr>
+        <p:txBody>
+          <a:bodyPr wrap="none">
+            <a:spAutoFit/>
+          </a:bodyPr>
+          <a:lstStyle/>
+          <a:p>
             <a:pPr>
-              <a:defRPr sz="1800" b="1">
-                <a:solidFill>
-                  <a:srgbClr val="0E1827"/>
-                </a:solidFill>
-              </a:defRPr>
-            </a:pPr>
-            <a:r>
-              <a:t>HealthMonitor</a:t>
-            </a:r>
-          </a:p>
-        </p:txBody>
-      </p:sp>
-      <p:sp>
-        <p:nvSpPr>
-          <p:cNvPr id="18" name="Rounded Rectangle 17"/>
-          <p:cNvSpPr/>
-          <p:nvPr/>
-        </p:nvSpPr>
-        <p:spPr>
-          <a:xfrm>
-            <a:off x="914400" y="4526280"/>
-            <a:ext cx="4572000" cy="658368"/>
-          </a:xfrm>
-          <a:prstGeom prst="roundRect">
-            <a:avLst/>
-          </a:prstGeom>
-          <a:solidFill>
-            <a:srgbClr val="F1F5F9"/>
-          </a:solidFill>
-          <a:ln>
-            <a:solidFill>
-              <a:srgbClr val="D2DCE8"/>
-            </a:solidFill>
-          </a:ln>
-        </p:spPr>
-        <p:style>
-          <a:lnRef idx="1">
-            <a:schemeClr val="accent1"/>
-          </a:lnRef>
-          <a:fillRef idx="3">
-            <a:schemeClr val="accent1"/>
-          </a:fillRef>
-          <a:effectRef idx="2">
-            <a:schemeClr val="accent1"/>
-          </a:effectRef>
-          <a:fontRef idx="minor">
-            <a:schemeClr val="lt1"/>
-          </a:fontRef>
-        </p:style>
-        <p:txBody>
-          <a:bodyPr rtlCol="0" anchor="ctr"/>
-          <a:lstStyle/>
-          <a:p>
-            <a:pPr algn="ctr"/>
-          </a:p>
-        </p:txBody>
-      </p:sp>
-      <p:sp>
-        <p:nvSpPr>
-          <p:cNvPr id="19" name="TextBox 18"/>
-          <p:cNvSpPr txBox="1"/>
-          <p:nvPr/>
-        </p:nvSpPr>
-        <p:spPr>
-          <a:xfrm>
-            <a:off x="1097280" y="4636008"/>
-            <a:ext cx="4206240" cy="411480"/>
-          </a:xfrm>
-          <a:prstGeom prst="rect">
-            <a:avLst/>
-          </a:prstGeom>
-          <a:noFill/>
-        </p:spPr>
-        <p:txBody>
-          <a:bodyPr wrap="none">
-            <a:spAutoFit/>
-          </a:bodyPr>
-          <a:lstStyle/>
-          <a:p>
-            <a:pPr>
-              <a:defRPr sz="1800" b="1">
-                <a:solidFill>
-                  <a:srgbClr val="0E1827"/>
-                </a:solidFill>
-              </a:defRPr>
-            </a:pPr>
-            <a:r>
-              <a:t>Logger</a:t>
-            </a:r>
-          </a:p>
-        </p:txBody>
-      </p:sp>
-      <p:sp>
-        <p:nvSpPr>
-          <p:cNvPr id="20" name="TextBox 19"/>
-          <p:cNvSpPr txBox="1"/>
-          <p:nvPr/>
-        </p:nvSpPr>
-        <p:spPr>
-          <a:xfrm>
-            <a:off x="640080" y="6492240"/>
-            <a:ext cx="10972800" cy="228600"/>
-          </a:xfrm>
-          <a:prstGeom prst="rect">
-            <a:avLst/>
-          </a:prstGeom>
-          <a:noFill/>
-        </p:spPr>
-        <p:txBody>
-          <a:bodyPr wrap="none">
-            <a:spAutoFit/>
-          </a:bodyPr>
-          <a:lstStyle/>
-          <a:p>
-            <a:pPr>
-              <a:defRPr sz="900">
-                <a:solidFill>
-                  <a:srgbClr val="566373"/>
-                </a:solidFill>
-              </a:defRPr>
-            </a:pPr>
-            <a:r>
-              <a:t>SysGuard • Linux System Health Monitor                               6</a:t>
+              <a:defRPr sz="850">
+                <a:solidFill>
+                  <a:srgbClr val="64748B"/>
+                </a:solidFill>
+              </a:defRPr>
+            </a:pPr>
+            <a:r>
+              <a:t>SysGuard • Linux System Health Monitor                                              6</a:t>
             </a:r>
           </a:p>
         </p:txBody>
@@ -8264,13 +10109,13 @@
         <p:spPr>
           <a:xfrm>
             <a:off x="0" y="0"/>
-            <a:ext cx="12191695" cy="6858000"/>
+            <a:ext cx="12191999" cy="6858000"/>
           </a:xfrm>
           <a:prstGeom prst="rect">
             <a:avLst/>
           </a:prstGeom>
           <a:solidFill>
-            <a:srgbClr val="FFFFFF"/>
+            <a:srgbClr val="F5F7FA"/>
           </a:solidFill>
           <a:ln>
             <a:noFill/>
@@ -8307,13 +10152,13 @@
         <p:spPr>
           <a:xfrm>
             <a:off x="0" y="0"/>
-            <a:ext cx="12191695" cy="201168"/>
+            <a:ext cx="12191999" cy="164592"/>
           </a:xfrm>
           <a:prstGeom prst="rect">
             <a:avLst/>
           </a:prstGeom>
           <a:solidFill>
-            <a:srgbClr val="2A69BA"/>
+            <a:srgbClr val="2563EB"/>
           </a:solidFill>
           <a:ln>
             <a:noFill/>
@@ -8349,8 +10194,8 @@
         </p:nvSpPr>
         <p:spPr>
           <a:xfrm>
-            <a:off x="640080" y="502920"/>
-            <a:ext cx="10881360" cy="640080"/>
+            <a:off x="640080" y="438912"/>
+            <a:ext cx="10972800" cy="566928"/>
           </a:xfrm>
           <a:prstGeom prst="rect">
             <a:avLst/>
@@ -8366,12 +10211,12 @@
             <a:pPr>
               <a:defRPr sz="2800" b="1">
                 <a:solidFill>
-                  <a:srgbClr val="0E1827"/>
-                </a:solidFill>
-              </a:defRPr>
-            </a:pPr>
-            <a:r>
-              <a:t>6. Key Features</a:t>
+                  <a:srgbClr val="0F172A"/>
+                </a:solidFill>
+              </a:defRPr>
+            </a:pPr>
+            <a:r>
+              <a:t>6. Main Modules &amp; Linux Interfaces</a:t>
             </a:r>
           </a:p>
         </p:txBody>
@@ -8384,8 +10229,8 @@
         </p:nvSpPr>
         <p:spPr>
           <a:xfrm>
-            <a:off x="658368" y="1143000"/>
-            <a:ext cx="10789920" cy="411480"/>
+            <a:off x="658368" y="987552"/>
+            <a:ext cx="10698480" cy="365760"/>
           </a:xfrm>
           <a:prstGeom prst="rect">
             <a:avLst/>
@@ -8399,28 +10244,151 @@
           <a:lstStyle/>
           <a:p>
             <a:pPr>
-              <a:defRPr sz="1400">
-                <a:solidFill>
-                  <a:srgbClr val="566373"/>
-                </a:solidFill>
-              </a:defRPr>
-            </a:pPr>
-            <a:r>
-              <a:t>What the user can do</a:t>
-            </a:r>
-          </a:p>
-        </p:txBody>
-      </p:sp>
-      <p:sp>
-        <p:nvSpPr>
-          <p:cNvPr id="6" name="TextBox 5"/>
-          <p:cNvSpPr txBox="1"/>
-          <p:nvPr/>
-        </p:nvSpPr>
-        <p:spPr>
-          <a:xfrm>
-            <a:off x="822960" y="1554480"/>
-            <a:ext cx="10424160" cy="4389120"/>
+              <a:defRPr sz="1300">
+                <a:solidFill>
+                  <a:srgbClr val="64748B"/>
+                </a:solidFill>
+              </a:defRPr>
+            </a:pPr>
+            <a:r>
+              <a:t>How the application is organized</a:t>
+            </a:r>
+          </a:p>
+        </p:txBody>
+      </p:sp>
+      <p:sp>
+        <p:nvSpPr>
+          <p:cNvPr id="6" name="Rounded Rectangle 5"/>
+          <p:cNvSpPr/>
+          <p:nvPr/>
+        </p:nvSpPr>
+        <p:spPr>
+          <a:xfrm>
+            <a:off x="731520" y="1371600"/>
+            <a:ext cx="5029200" cy="896112"/>
+          </a:xfrm>
+          <a:prstGeom prst="roundRect">
+            <a:avLst/>
+          </a:prstGeom>
+          <a:solidFill>
+            <a:srgbClr val="FFFFFF"/>
+          </a:solidFill>
+          <a:ln>
+            <a:solidFill>
+              <a:srgbClr val="D7DEE7"/>
+            </a:solidFill>
+          </a:ln>
+        </p:spPr>
+        <p:style>
+          <a:lnRef idx="1">
+            <a:schemeClr val="accent1"/>
+          </a:lnRef>
+          <a:fillRef idx="3">
+            <a:schemeClr val="accent1"/>
+          </a:fillRef>
+          <a:effectRef idx="2">
+            <a:schemeClr val="accent1"/>
+          </a:effectRef>
+          <a:fontRef idx="minor">
+            <a:schemeClr val="lt1"/>
+          </a:fontRef>
+        </p:style>
+        <p:txBody>
+          <a:bodyPr rtlCol="0" anchor="ctr"/>
+          <a:lstStyle/>
+          <a:p>
+            <a:pPr algn="ctr"/>
+          </a:p>
+        </p:txBody>
+      </p:sp>
+      <p:sp>
+        <p:nvSpPr>
+          <p:cNvPr id="7" name="Rectangle 6"/>
+          <p:cNvSpPr/>
+          <p:nvPr/>
+        </p:nvSpPr>
+        <p:spPr>
+          <a:xfrm>
+            <a:off x="731520" y="1371600"/>
+            <a:ext cx="73152" cy="896112"/>
+          </a:xfrm>
+          <a:prstGeom prst="rect">
+            <a:avLst/>
+          </a:prstGeom>
+          <a:solidFill>
+            <a:srgbClr val="2563EB"/>
+          </a:solidFill>
+          <a:ln>
+            <a:noFill/>
+          </a:ln>
+        </p:spPr>
+        <p:style>
+          <a:lnRef idx="1">
+            <a:schemeClr val="accent1"/>
+          </a:lnRef>
+          <a:fillRef idx="3">
+            <a:schemeClr val="accent1"/>
+          </a:fillRef>
+          <a:effectRef idx="2">
+            <a:schemeClr val="accent1"/>
+          </a:effectRef>
+          <a:fontRef idx="minor">
+            <a:schemeClr val="lt1"/>
+          </a:fontRef>
+        </p:style>
+        <p:txBody>
+          <a:bodyPr rtlCol="0" anchor="ctr"/>
+          <a:lstStyle/>
+          <a:p>
+            <a:pPr algn="ctr"/>
+          </a:p>
+        </p:txBody>
+      </p:sp>
+      <p:sp>
+        <p:nvSpPr>
+          <p:cNvPr id="8" name="TextBox 7"/>
+          <p:cNvSpPr txBox="1"/>
+          <p:nvPr/>
+        </p:nvSpPr>
+        <p:spPr>
+          <a:xfrm>
+            <a:off x="941832" y="1536192"/>
+            <a:ext cx="4681728" cy="365760"/>
+          </a:xfrm>
+          <a:prstGeom prst="rect">
+            <a:avLst/>
+          </a:prstGeom>
+          <a:noFill/>
+        </p:spPr>
+        <p:txBody>
+          <a:bodyPr wrap="none">
+            <a:spAutoFit/>
+          </a:bodyPr>
+          <a:lstStyle/>
+          <a:p>
+            <a:pPr>
+              <a:defRPr sz="1600" b="1">
+                <a:solidFill>
+                  <a:srgbClr val="0F172A"/>
+                </a:solidFill>
+              </a:defRPr>
+            </a:pPr>
+            <a:r>
+              <a:t>SystemInfo</a:t>
+            </a:r>
+          </a:p>
+        </p:txBody>
+      </p:sp>
+      <p:sp>
+        <p:nvSpPr>
+          <p:cNvPr id="9" name="TextBox 8"/>
+          <p:cNvSpPr txBox="1"/>
+          <p:nvPr/>
+        </p:nvSpPr>
+        <p:spPr>
+          <a:xfrm>
+            <a:off x="941832" y="1965960"/>
+            <a:ext cx="4681728" cy="182879"/>
           </a:xfrm>
           <a:prstGeom prst="rect">
             <a:avLst/>
@@ -8434,91 +10402,432 @@
           <a:lstStyle/>
           <a:p>
             <a:pPr>
-              <a:spcAft>
-                <a:spcPts val="1000"/>
-              </a:spcAft>
-              <a:defRPr sz="1900">
-                <a:solidFill>
-                  <a:srgbClr val="1C2536"/>
-                </a:solidFill>
-              </a:defRPr>
-            </a:pPr>
-            <a:r>
-              <a:t>System dashboard: CPU, memory, disk, load and process count.</a:t>
-            </a:r>
-          </a:p>
+              <a:defRPr sz="1250">
+                <a:solidFill>
+                  <a:srgbClr val="1F2937"/>
+                </a:solidFill>
+              </a:defRPr>
+            </a:pPr>
+            <a:r>
+              <a:t>uname(), /proc/uptime, /etc/os-release</a:t>
+            </a:r>
+          </a:p>
+        </p:txBody>
+      </p:sp>
+      <p:sp>
+        <p:nvSpPr>
+          <p:cNvPr id="10" name="Rounded Rectangle 9"/>
+          <p:cNvSpPr/>
+          <p:nvPr/>
+        </p:nvSpPr>
+        <p:spPr>
+          <a:xfrm>
+            <a:off x="6263640" y="1371600"/>
+            <a:ext cx="5029200" cy="896112"/>
+          </a:xfrm>
+          <a:prstGeom prst="roundRect">
+            <a:avLst/>
+          </a:prstGeom>
+          <a:solidFill>
+            <a:srgbClr val="FFFFFF"/>
+          </a:solidFill>
+          <a:ln>
+            <a:solidFill>
+              <a:srgbClr val="D7DEE7"/>
+            </a:solidFill>
+          </a:ln>
+        </p:spPr>
+        <p:style>
+          <a:lnRef idx="1">
+            <a:schemeClr val="accent1"/>
+          </a:lnRef>
+          <a:fillRef idx="3">
+            <a:schemeClr val="accent1"/>
+          </a:fillRef>
+          <a:effectRef idx="2">
+            <a:schemeClr val="accent1"/>
+          </a:effectRef>
+          <a:fontRef idx="minor">
+            <a:schemeClr val="lt1"/>
+          </a:fontRef>
+        </p:style>
+        <p:txBody>
+          <a:bodyPr rtlCol="0" anchor="ctr"/>
+          <a:lstStyle/>
+          <a:p>
+            <a:pPr algn="ctr"/>
+          </a:p>
+        </p:txBody>
+      </p:sp>
+      <p:sp>
+        <p:nvSpPr>
+          <p:cNvPr id="11" name="Rectangle 10"/>
+          <p:cNvSpPr/>
+          <p:nvPr/>
+        </p:nvSpPr>
+        <p:spPr>
+          <a:xfrm>
+            <a:off x="6263640" y="1371600"/>
+            <a:ext cx="73152" cy="896112"/>
+          </a:xfrm>
+          <a:prstGeom prst="rect">
+            <a:avLst/>
+          </a:prstGeom>
+          <a:solidFill>
+            <a:srgbClr val="0EA5E9"/>
+          </a:solidFill>
+          <a:ln>
+            <a:noFill/>
+          </a:ln>
+        </p:spPr>
+        <p:style>
+          <a:lnRef idx="1">
+            <a:schemeClr val="accent1"/>
+          </a:lnRef>
+          <a:fillRef idx="3">
+            <a:schemeClr val="accent1"/>
+          </a:fillRef>
+          <a:effectRef idx="2">
+            <a:schemeClr val="accent1"/>
+          </a:effectRef>
+          <a:fontRef idx="minor">
+            <a:schemeClr val="lt1"/>
+          </a:fontRef>
+        </p:style>
+        <p:txBody>
+          <a:bodyPr rtlCol="0" anchor="ctr"/>
+          <a:lstStyle/>
+          <a:p>
+            <a:pPr algn="ctr"/>
+          </a:p>
+        </p:txBody>
+      </p:sp>
+      <p:sp>
+        <p:nvSpPr>
+          <p:cNvPr id="12" name="TextBox 11"/>
+          <p:cNvSpPr txBox="1"/>
+          <p:nvPr/>
+        </p:nvSpPr>
+        <p:spPr>
+          <a:xfrm>
+            <a:off x="6473952" y="1536192"/>
+            <a:ext cx="4681728" cy="365760"/>
+          </a:xfrm>
+          <a:prstGeom prst="rect">
+            <a:avLst/>
+          </a:prstGeom>
+          <a:noFill/>
+        </p:spPr>
+        <p:txBody>
+          <a:bodyPr wrap="none">
+            <a:spAutoFit/>
+          </a:bodyPr>
+          <a:lstStyle/>
           <a:p>
             <a:pPr>
-              <a:spcAft>
-                <a:spcPts val="1000"/>
-              </a:spcAft>
-              <a:defRPr sz="1900">
-                <a:solidFill>
-                  <a:srgbClr val="1C2536"/>
-                </a:solidFill>
-              </a:defRPr>
-            </a:pPr>
-            <a:r>
-              <a:t>System information: OS, kernel, architecture, hostname, CPU model and uptime.</a:t>
-            </a:r>
-          </a:p>
+              <a:defRPr sz="1600" b="1">
+                <a:solidFill>
+                  <a:srgbClr val="0F172A"/>
+                </a:solidFill>
+              </a:defRPr>
+            </a:pPr>
+            <a:r>
+              <a:t>CPUMonitor</a:t>
+            </a:r>
+          </a:p>
+        </p:txBody>
+      </p:sp>
+      <p:sp>
+        <p:nvSpPr>
+          <p:cNvPr id="13" name="TextBox 12"/>
+          <p:cNvSpPr txBox="1"/>
+          <p:nvPr/>
+        </p:nvSpPr>
+        <p:spPr>
+          <a:xfrm>
+            <a:off x="6473952" y="1965960"/>
+            <a:ext cx="4681728" cy="182879"/>
+          </a:xfrm>
+          <a:prstGeom prst="rect">
+            <a:avLst/>
+          </a:prstGeom>
+          <a:noFill/>
+        </p:spPr>
+        <p:txBody>
+          <a:bodyPr wrap="square">
+            <a:spAutoFit/>
+          </a:bodyPr>
+          <a:lstStyle/>
           <a:p>
             <a:pPr>
-              <a:spcAft>
-                <a:spcPts val="1000"/>
-              </a:spcAft>
-              <a:defRPr sz="1900">
-                <a:solidFill>
-                  <a:srgbClr val="1C2536"/>
-                </a:solidFill>
-              </a:defRPr>
-            </a:pPr>
-            <a:r>
-              <a:t>Process monitor: list processes, search by name, send SIGTERM.</a:t>
-            </a:r>
-          </a:p>
+              <a:defRPr sz="1250">
+                <a:solidFill>
+                  <a:srgbClr val="1F2937"/>
+                </a:solidFill>
+              </a:defRPr>
+            </a:pPr>
+            <a:r>
+              <a:t>/proc/stat, /proc/cpuinfo, /proc/loadavg</a:t>
+            </a:r>
+          </a:p>
+        </p:txBody>
+      </p:sp>
+      <p:sp>
+        <p:nvSpPr>
+          <p:cNvPr id="14" name="Rounded Rectangle 13"/>
+          <p:cNvSpPr/>
+          <p:nvPr/>
+        </p:nvSpPr>
+        <p:spPr>
+          <a:xfrm>
+            <a:off x="731520" y="2542032"/>
+            <a:ext cx="5029200" cy="896112"/>
+          </a:xfrm>
+          <a:prstGeom prst="roundRect">
+            <a:avLst/>
+          </a:prstGeom>
+          <a:solidFill>
+            <a:srgbClr val="FFFFFF"/>
+          </a:solidFill>
+          <a:ln>
+            <a:solidFill>
+              <a:srgbClr val="D7DEE7"/>
+            </a:solidFill>
+          </a:ln>
+        </p:spPr>
+        <p:style>
+          <a:lnRef idx="1">
+            <a:schemeClr val="accent1"/>
+          </a:lnRef>
+          <a:fillRef idx="3">
+            <a:schemeClr val="accent1"/>
+          </a:fillRef>
+          <a:effectRef idx="2">
+            <a:schemeClr val="accent1"/>
+          </a:effectRef>
+          <a:fontRef idx="minor">
+            <a:schemeClr val="lt1"/>
+          </a:fontRef>
+        </p:style>
+        <p:txBody>
+          <a:bodyPr rtlCol="0" anchor="ctr"/>
+          <a:lstStyle/>
+          <a:p>
+            <a:pPr algn="ctr"/>
+          </a:p>
+        </p:txBody>
+      </p:sp>
+      <p:sp>
+        <p:nvSpPr>
+          <p:cNvPr id="15" name="Rectangle 14"/>
+          <p:cNvSpPr/>
+          <p:nvPr/>
+        </p:nvSpPr>
+        <p:spPr>
+          <a:xfrm>
+            <a:off x="731520" y="2542032"/>
+            <a:ext cx="73152" cy="896112"/>
+          </a:xfrm>
+          <a:prstGeom prst="rect">
+            <a:avLst/>
+          </a:prstGeom>
+          <a:solidFill>
+            <a:srgbClr val="0D9488"/>
+          </a:solidFill>
+          <a:ln>
+            <a:noFill/>
+          </a:ln>
+        </p:spPr>
+        <p:style>
+          <a:lnRef idx="1">
+            <a:schemeClr val="accent1"/>
+          </a:lnRef>
+          <a:fillRef idx="3">
+            <a:schemeClr val="accent1"/>
+          </a:fillRef>
+          <a:effectRef idx="2">
+            <a:schemeClr val="accent1"/>
+          </a:effectRef>
+          <a:fontRef idx="minor">
+            <a:schemeClr val="lt1"/>
+          </a:fontRef>
+        </p:style>
+        <p:txBody>
+          <a:bodyPr rtlCol="0" anchor="ctr"/>
+          <a:lstStyle/>
+          <a:p>
+            <a:pPr algn="ctr"/>
+          </a:p>
+        </p:txBody>
+      </p:sp>
+      <p:sp>
+        <p:nvSpPr>
+          <p:cNvPr id="16" name="TextBox 15"/>
+          <p:cNvSpPr txBox="1"/>
+          <p:nvPr/>
+        </p:nvSpPr>
+        <p:spPr>
+          <a:xfrm>
+            <a:off x="941832" y="2706624"/>
+            <a:ext cx="4681728" cy="365760"/>
+          </a:xfrm>
+          <a:prstGeom prst="rect">
+            <a:avLst/>
+          </a:prstGeom>
+          <a:noFill/>
+        </p:spPr>
+        <p:txBody>
+          <a:bodyPr wrap="none">
+            <a:spAutoFit/>
+          </a:bodyPr>
+          <a:lstStyle/>
           <a:p>
             <a:pPr>
-              <a:spcAft>
-                <a:spcPts val="1000"/>
-              </a:spcAft>
-              <a:defRPr sz="1900">
-                <a:solidFill>
-                  <a:srgbClr val="1C2536"/>
-                </a:solidFill>
-              </a:defRPr>
-            </a:pPr>
-            <a:r>
-              <a:t>Health monitor: HEALTHY / WARNING / CRITICAL status.</a:t>
-            </a:r>
-          </a:p>
+              <a:defRPr sz="1600" b="1">
+                <a:solidFill>
+                  <a:srgbClr val="0F172A"/>
+                </a:solidFill>
+              </a:defRPr>
+            </a:pPr>
+            <a:r>
+              <a:t>MemoryMonitor</a:t>
+            </a:r>
+          </a:p>
+        </p:txBody>
+      </p:sp>
+      <p:sp>
+        <p:nvSpPr>
+          <p:cNvPr id="17" name="TextBox 16"/>
+          <p:cNvSpPr txBox="1"/>
+          <p:nvPr/>
+        </p:nvSpPr>
+        <p:spPr>
+          <a:xfrm>
+            <a:off x="941832" y="3136392"/>
+            <a:ext cx="4681728" cy="182879"/>
+          </a:xfrm>
+          <a:prstGeom prst="rect">
+            <a:avLst/>
+          </a:prstGeom>
+          <a:noFill/>
+        </p:spPr>
+        <p:txBody>
+          <a:bodyPr wrap="square">
+            <a:spAutoFit/>
+          </a:bodyPr>
+          <a:lstStyle/>
           <a:p>
             <a:pPr>
-              <a:spcAft>
-                <a:spcPts val="1000"/>
-              </a:spcAft>
-              <a:defRPr sz="1900">
-                <a:solidFill>
-                  <a:srgbClr val="1C2536"/>
-                </a:solidFill>
-              </a:defRPr>
-            </a:pPr>
-            <a:r>
-              <a:t>Logging: store health snapshots in sysguard.log.</a:t>
-            </a:r>
-          </a:p>
-        </p:txBody>
-      </p:sp>
-      <p:sp>
-        <p:nvSpPr>
-          <p:cNvPr id="7" name="TextBox 6"/>
-          <p:cNvSpPr txBox="1"/>
-          <p:nvPr/>
-        </p:nvSpPr>
-        <p:spPr>
-          <a:xfrm>
-            <a:off x="640080" y="6492240"/>
-            <a:ext cx="10972800" cy="228600"/>
+              <a:defRPr sz="1250">
+                <a:solidFill>
+                  <a:srgbClr val="1F2937"/>
+                </a:solidFill>
+              </a:defRPr>
+            </a:pPr>
+            <a:r>
+              <a:t>/proc/meminfo</a:t>
+            </a:r>
+          </a:p>
+        </p:txBody>
+      </p:sp>
+      <p:sp>
+        <p:nvSpPr>
+          <p:cNvPr id="18" name="Rounded Rectangle 17"/>
+          <p:cNvSpPr/>
+          <p:nvPr/>
+        </p:nvSpPr>
+        <p:spPr>
+          <a:xfrm>
+            <a:off x="6263640" y="2542032"/>
+            <a:ext cx="5029200" cy="896112"/>
+          </a:xfrm>
+          <a:prstGeom prst="roundRect">
+            <a:avLst/>
+          </a:prstGeom>
+          <a:solidFill>
+            <a:srgbClr val="FFFFFF"/>
+          </a:solidFill>
+          <a:ln>
+            <a:solidFill>
+              <a:srgbClr val="D7DEE7"/>
+            </a:solidFill>
+          </a:ln>
+        </p:spPr>
+        <p:style>
+          <a:lnRef idx="1">
+            <a:schemeClr val="accent1"/>
+          </a:lnRef>
+          <a:fillRef idx="3">
+            <a:schemeClr val="accent1"/>
+          </a:fillRef>
+          <a:effectRef idx="2">
+            <a:schemeClr val="accent1"/>
+          </a:effectRef>
+          <a:fontRef idx="minor">
+            <a:schemeClr val="lt1"/>
+          </a:fontRef>
+        </p:style>
+        <p:txBody>
+          <a:bodyPr rtlCol="0" anchor="ctr"/>
+          <a:lstStyle/>
+          <a:p>
+            <a:pPr algn="ctr"/>
+          </a:p>
+        </p:txBody>
+      </p:sp>
+      <p:sp>
+        <p:nvSpPr>
+          <p:cNvPr id="19" name="Rectangle 18"/>
+          <p:cNvSpPr/>
+          <p:nvPr/>
+        </p:nvSpPr>
+        <p:spPr>
+          <a:xfrm>
+            <a:off x="6263640" y="2542032"/>
+            <a:ext cx="73152" cy="896112"/>
+          </a:xfrm>
+          <a:prstGeom prst="rect">
+            <a:avLst/>
+          </a:prstGeom>
+          <a:solidFill>
+            <a:srgbClr val="EA8A2A"/>
+          </a:solidFill>
+          <a:ln>
+            <a:noFill/>
+          </a:ln>
+        </p:spPr>
+        <p:style>
+          <a:lnRef idx="1">
+            <a:schemeClr val="accent1"/>
+          </a:lnRef>
+          <a:fillRef idx="3">
+            <a:schemeClr val="accent1"/>
+          </a:fillRef>
+          <a:effectRef idx="2">
+            <a:schemeClr val="accent1"/>
+          </a:effectRef>
+          <a:fontRef idx="minor">
+            <a:schemeClr val="lt1"/>
+          </a:fontRef>
+        </p:style>
+        <p:txBody>
+          <a:bodyPr rtlCol="0" anchor="ctr"/>
+          <a:lstStyle/>
+          <a:p>
+            <a:pPr algn="ctr"/>
+          </a:p>
+        </p:txBody>
+      </p:sp>
+      <p:sp>
+        <p:nvSpPr>
+          <p:cNvPr id="20" name="TextBox 19"/>
+          <p:cNvSpPr txBox="1"/>
+          <p:nvPr/>
+        </p:nvSpPr>
+        <p:spPr>
+          <a:xfrm>
+            <a:off x="6473952" y="2706624"/>
+            <a:ext cx="4681728" cy="365760"/>
           </a:xfrm>
           <a:prstGeom prst="rect">
             <a:avLst/>
@@ -8532,14 +10841,558 @@
           <a:lstStyle/>
           <a:p>
             <a:pPr>
-              <a:defRPr sz="900">
-                <a:solidFill>
-                  <a:srgbClr val="566373"/>
-                </a:solidFill>
-              </a:defRPr>
-            </a:pPr>
-            <a:r>
-              <a:t>SysGuard • Linux System Health Monitor                               7</a:t>
+              <a:defRPr sz="1600" b="1">
+                <a:solidFill>
+                  <a:srgbClr val="0F172A"/>
+                </a:solidFill>
+              </a:defRPr>
+            </a:pPr>
+            <a:r>
+              <a:t>DiskMonitor</a:t>
+            </a:r>
+          </a:p>
+        </p:txBody>
+      </p:sp>
+      <p:sp>
+        <p:nvSpPr>
+          <p:cNvPr id="21" name="TextBox 20"/>
+          <p:cNvSpPr txBox="1"/>
+          <p:nvPr/>
+        </p:nvSpPr>
+        <p:spPr>
+          <a:xfrm>
+            <a:off x="6473952" y="3136392"/>
+            <a:ext cx="4681728" cy="182879"/>
+          </a:xfrm>
+          <a:prstGeom prst="rect">
+            <a:avLst/>
+          </a:prstGeom>
+          <a:noFill/>
+        </p:spPr>
+        <p:txBody>
+          <a:bodyPr wrap="square">
+            <a:spAutoFit/>
+          </a:bodyPr>
+          <a:lstStyle/>
+          <a:p>
+            <a:pPr>
+              <a:defRPr sz="1250">
+                <a:solidFill>
+                  <a:srgbClr val="1F2937"/>
+                </a:solidFill>
+              </a:defRPr>
+            </a:pPr>
+            <a:r>
+              <a:t>statvfs()</a:t>
+            </a:r>
+          </a:p>
+        </p:txBody>
+      </p:sp>
+      <p:sp>
+        <p:nvSpPr>
+          <p:cNvPr id="22" name="Rounded Rectangle 21"/>
+          <p:cNvSpPr/>
+          <p:nvPr/>
+        </p:nvSpPr>
+        <p:spPr>
+          <a:xfrm>
+            <a:off x="731520" y="3712464"/>
+            <a:ext cx="5029200" cy="896112"/>
+          </a:xfrm>
+          <a:prstGeom prst="roundRect">
+            <a:avLst/>
+          </a:prstGeom>
+          <a:solidFill>
+            <a:srgbClr val="FFFFFF"/>
+          </a:solidFill>
+          <a:ln>
+            <a:solidFill>
+              <a:srgbClr val="D7DEE7"/>
+            </a:solidFill>
+          </a:ln>
+        </p:spPr>
+        <p:style>
+          <a:lnRef idx="1">
+            <a:schemeClr val="accent1"/>
+          </a:lnRef>
+          <a:fillRef idx="3">
+            <a:schemeClr val="accent1"/>
+          </a:fillRef>
+          <a:effectRef idx="2">
+            <a:schemeClr val="accent1"/>
+          </a:effectRef>
+          <a:fontRef idx="minor">
+            <a:schemeClr val="lt1"/>
+          </a:fontRef>
+        </p:style>
+        <p:txBody>
+          <a:bodyPr rtlCol="0" anchor="ctr"/>
+          <a:lstStyle/>
+          <a:p>
+            <a:pPr algn="ctr"/>
+          </a:p>
+        </p:txBody>
+      </p:sp>
+      <p:sp>
+        <p:nvSpPr>
+          <p:cNvPr id="23" name="Rectangle 22"/>
+          <p:cNvSpPr/>
+          <p:nvPr/>
+        </p:nvSpPr>
+        <p:spPr>
+          <a:xfrm>
+            <a:off x="731520" y="3712464"/>
+            <a:ext cx="73152" cy="896112"/>
+          </a:xfrm>
+          <a:prstGeom prst="rect">
+            <a:avLst/>
+          </a:prstGeom>
+          <a:solidFill>
+            <a:srgbClr val="2563EB"/>
+          </a:solidFill>
+          <a:ln>
+            <a:noFill/>
+          </a:ln>
+        </p:spPr>
+        <p:style>
+          <a:lnRef idx="1">
+            <a:schemeClr val="accent1"/>
+          </a:lnRef>
+          <a:fillRef idx="3">
+            <a:schemeClr val="accent1"/>
+          </a:fillRef>
+          <a:effectRef idx="2">
+            <a:schemeClr val="accent1"/>
+          </a:effectRef>
+          <a:fontRef idx="minor">
+            <a:schemeClr val="lt1"/>
+          </a:fontRef>
+        </p:style>
+        <p:txBody>
+          <a:bodyPr rtlCol="0" anchor="ctr"/>
+          <a:lstStyle/>
+          <a:p>
+            <a:pPr algn="ctr"/>
+          </a:p>
+        </p:txBody>
+      </p:sp>
+      <p:sp>
+        <p:nvSpPr>
+          <p:cNvPr id="24" name="TextBox 23"/>
+          <p:cNvSpPr txBox="1"/>
+          <p:nvPr/>
+        </p:nvSpPr>
+        <p:spPr>
+          <a:xfrm>
+            <a:off x="941832" y="3877056"/>
+            <a:ext cx="4681728" cy="365760"/>
+          </a:xfrm>
+          <a:prstGeom prst="rect">
+            <a:avLst/>
+          </a:prstGeom>
+          <a:noFill/>
+        </p:spPr>
+        <p:txBody>
+          <a:bodyPr wrap="none">
+            <a:spAutoFit/>
+          </a:bodyPr>
+          <a:lstStyle/>
+          <a:p>
+            <a:pPr>
+              <a:defRPr sz="1600" b="1">
+                <a:solidFill>
+                  <a:srgbClr val="0F172A"/>
+                </a:solidFill>
+              </a:defRPr>
+            </a:pPr>
+            <a:r>
+              <a:t>ProcessMonitor</a:t>
+            </a:r>
+          </a:p>
+        </p:txBody>
+      </p:sp>
+      <p:sp>
+        <p:nvSpPr>
+          <p:cNvPr id="25" name="TextBox 24"/>
+          <p:cNvSpPr txBox="1"/>
+          <p:nvPr/>
+        </p:nvSpPr>
+        <p:spPr>
+          <a:xfrm>
+            <a:off x="941832" y="4306824"/>
+            <a:ext cx="4681728" cy="182879"/>
+          </a:xfrm>
+          <a:prstGeom prst="rect">
+            <a:avLst/>
+          </a:prstGeom>
+          <a:noFill/>
+        </p:spPr>
+        <p:txBody>
+          <a:bodyPr wrap="square">
+            <a:spAutoFit/>
+          </a:bodyPr>
+          <a:lstStyle/>
+          <a:p>
+            <a:pPr>
+              <a:defRPr sz="1250">
+                <a:solidFill>
+                  <a:srgbClr val="1F2937"/>
+                </a:solidFill>
+              </a:defRPr>
+            </a:pPr>
+            <a:r>
+              <a:t>/proc + Linux signals</a:t>
+            </a:r>
+          </a:p>
+        </p:txBody>
+      </p:sp>
+      <p:sp>
+        <p:nvSpPr>
+          <p:cNvPr id="26" name="Rounded Rectangle 25"/>
+          <p:cNvSpPr/>
+          <p:nvPr/>
+        </p:nvSpPr>
+        <p:spPr>
+          <a:xfrm>
+            <a:off x="6263640" y="3712464"/>
+            <a:ext cx="5029200" cy="896112"/>
+          </a:xfrm>
+          <a:prstGeom prst="roundRect">
+            <a:avLst/>
+          </a:prstGeom>
+          <a:solidFill>
+            <a:srgbClr val="FFFFFF"/>
+          </a:solidFill>
+          <a:ln>
+            <a:solidFill>
+              <a:srgbClr val="D7DEE7"/>
+            </a:solidFill>
+          </a:ln>
+        </p:spPr>
+        <p:style>
+          <a:lnRef idx="1">
+            <a:schemeClr val="accent1"/>
+          </a:lnRef>
+          <a:fillRef idx="3">
+            <a:schemeClr val="accent1"/>
+          </a:fillRef>
+          <a:effectRef idx="2">
+            <a:schemeClr val="accent1"/>
+          </a:effectRef>
+          <a:fontRef idx="minor">
+            <a:schemeClr val="lt1"/>
+          </a:fontRef>
+        </p:style>
+        <p:txBody>
+          <a:bodyPr rtlCol="0" anchor="ctr"/>
+          <a:lstStyle/>
+          <a:p>
+            <a:pPr algn="ctr"/>
+          </a:p>
+        </p:txBody>
+      </p:sp>
+      <p:sp>
+        <p:nvSpPr>
+          <p:cNvPr id="27" name="Rectangle 26"/>
+          <p:cNvSpPr/>
+          <p:nvPr/>
+        </p:nvSpPr>
+        <p:spPr>
+          <a:xfrm>
+            <a:off x="6263640" y="3712464"/>
+            <a:ext cx="73152" cy="896112"/>
+          </a:xfrm>
+          <a:prstGeom prst="rect">
+            <a:avLst/>
+          </a:prstGeom>
+          <a:solidFill>
+            <a:srgbClr val="DC4446"/>
+          </a:solidFill>
+          <a:ln>
+            <a:noFill/>
+          </a:ln>
+        </p:spPr>
+        <p:style>
+          <a:lnRef idx="1">
+            <a:schemeClr val="accent1"/>
+          </a:lnRef>
+          <a:fillRef idx="3">
+            <a:schemeClr val="accent1"/>
+          </a:fillRef>
+          <a:effectRef idx="2">
+            <a:schemeClr val="accent1"/>
+          </a:effectRef>
+          <a:fontRef idx="minor">
+            <a:schemeClr val="lt1"/>
+          </a:fontRef>
+        </p:style>
+        <p:txBody>
+          <a:bodyPr rtlCol="0" anchor="ctr"/>
+          <a:lstStyle/>
+          <a:p>
+            <a:pPr algn="ctr"/>
+          </a:p>
+        </p:txBody>
+      </p:sp>
+      <p:sp>
+        <p:nvSpPr>
+          <p:cNvPr id="28" name="TextBox 27"/>
+          <p:cNvSpPr txBox="1"/>
+          <p:nvPr/>
+        </p:nvSpPr>
+        <p:spPr>
+          <a:xfrm>
+            <a:off x="6473952" y="3877056"/>
+            <a:ext cx="4681728" cy="365760"/>
+          </a:xfrm>
+          <a:prstGeom prst="rect">
+            <a:avLst/>
+          </a:prstGeom>
+          <a:noFill/>
+        </p:spPr>
+        <p:txBody>
+          <a:bodyPr wrap="none">
+            <a:spAutoFit/>
+          </a:bodyPr>
+          <a:lstStyle/>
+          <a:p>
+            <a:pPr>
+              <a:defRPr sz="1600" b="1">
+                <a:solidFill>
+                  <a:srgbClr val="0F172A"/>
+                </a:solidFill>
+              </a:defRPr>
+            </a:pPr>
+            <a:r>
+              <a:t>HealthMonitor</a:t>
+            </a:r>
+          </a:p>
+        </p:txBody>
+      </p:sp>
+      <p:sp>
+        <p:nvSpPr>
+          <p:cNvPr id="29" name="TextBox 28"/>
+          <p:cNvSpPr txBox="1"/>
+          <p:nvPr/>
+        </p:nvSpPr>
+        <p:spPr>
+          <a:xfrm>
+            <a:off x="6473952" y="4306824"/>
+            <a:ext cx="4681728" cy="182879"/>
+          </a:xfrm>
+          <a:prstGeom prst="rect">
+            <a:avLst/>
+          </a:prstGeom>
+          <a:noFill/>
+        </p:spPr>
+        <p:txBody>
+          <a:bodyPr wrap="square">
+            <a:spAutoFit/>
+          </a:bodyPr>
+          <a:lstStyle/>
+          <a:p>
+            <a:pPr>
+              <a:defRPr sz="1250">
+                <a:solidFill>
+                  <a:srgbClr val="1F2937"/>
+                </a:solidFill>
+              </a:defRPr>
+            </a:pPr>
+            <a:r>
+              <a:t>Threshold-based status</a:t>
+            </a:r>
+          </a:p>
+        </p:txBody>
+      </p:sp>
+      <p:sp>
+        <p:nvSpPr>
+          <p:cNvPr id="30" name="Rounded Rectangle 29"/>
+          <p:cNvSpPr/>
+          <p:nvPr/>
+        </p:nvSpPr>
+        <p:spPr>
+          <a:xfrm>
+            <a:off x="731520" y="4882896"/>
+            <a:ext cx="5029200" cy="896112"/>
+          </a:xfrm>
+          <a:prstGeom prst="roundRect">
+            <a:avLst/>
+          </a:prstGeom>
+          <a:solidFill>
+            <a:srgbClr val="FFFFFF"/>
+          </a:solidFill>
+          <a:ln>
+            <a:solidFill>
+              <a:srgbClr val="D7DEE7"/>
+            </a:solidFill>
+          </a:ln>
+        </p:spPr>
+        <p:style>
+          <a:lnRef idx="1">
+            <a:schemeClr val="accent1"/>
+          </a:lnRef>
+          <a:fillRef idx="3">
+            <a:schemeClr val="accent1"/>
+          </a:fillRef>
+          <a:effectRef idx="2">
+            <a:schemeClr val="accent1"/>
+          </a:effectRef>
+          <a:fontRef idx="minor">
+            <a:schemeClr val="lt1"/>
+          </a:fontRef>
+        </p:style>
+        <p:txBody>
+          <a:bodyPr rtlCol="0" anchor="ctr"/>
+          <a:lstStyle/>
+          <a:p>
+            <a:pPr algn="ctr"/>
+          </a:p>
+        </p:txBody>
+      </p:sp>
+      <p:sp>
+        <p:nvSpPr>
+          <p:cNvPr id="31" name="Rectangle 30"/>
+          <p:cNvSpPr/>
+          <p:nvPr/>
+        </p:nvSpPr>
+        <p:spPr>
+          <a:xfrm>
+            <a:off x="731520" y="4882896"/>
+            <a:ext cx="73152" cy="896112"/>
+          </a:xfrm>
+          <a:prstGeom prst="rect">
+            <a:avLst/>
+          </a:prstGeom>
+          <a:solidFill>
+            <a:srgbClr val="0D9488"/>
+          </a:solidFill>
+          <a:ln>
+            <a:noFill/>
+          </a:ln>
+        </p:spPr>
+        <p:style>
+          <a:lnRef idx="1">
+            <a:schemeClr val="accent1"/>
+          </a:lnRef>
+          <a:fillRef idx="3">
+            <a:schemeClr val="accent1"/>
+          </a:fillRef>
+          <a:effectRef idx="2">
+            <a:schemeClr val="accent1"/>
+          </a:effectRef>
+          <a:fontRef idx="minor">
+            <a:schemeClr val="lt1"/>
+          </a:fontRef>
+        </p:style>
+        <p:txBody>
+          <a:bodyPr rtlCol="0" anchor="ctr"/>
+          <a:lstStyle/>
+          <a:p>
+            <a:pPr algn="ctr"/>
+          </a:p>
+        </p:txBody>
+      </p:sp>
+      <p:sp>
+        <p:nvSpPr>
+          <p:cNvPr id="32" name="TextBox 31"/>
+          <p:cNvSpPr txBox="1"/>
+          <p:nvPr/>
+        </p:nvSpPr>
+        <p:spPr>
+          <a:xfrm>
+            <a:off x="941832" y="5047488"/>
+            <a:ext cx="4681728" cy="365760"/>
+          </a:xfrm>
+          <a:prstGeom prst="rect">
+            <a:avLst/>
+          </a:prstGeom>
+          <a:noFill/>
+        </p:spPr>
+        <p:txBody>
+          <a:bodyPr wrap="none">
+            <a:spAutoFit/>
+          </a:bodyPr>
+          <a:lstStyle/>
+          <a:p>
+            <a:pPr>
+              <a:defRPr sz="1600" b="1">
+                <a:solidFill>
+                  <a:srgbClr val="0F172A"/>
+                </a:solidFill>
+              </a:defRPr>
+            </a:pPr>
+            <a:r>
+              <a:t>Logger</a:t>
+            </a:r>
+          </a:p>
+        </p:txBody>
+      </p:sp>
+      <p:sp>
+        <p:nvSpPr>
+          <p:cNvPr id="33" name="TextBox 32"/>
+          <p:cNvSpPr txBox="1"/>
+          <p:nvPr/>
+        </p:nvSpPr>
+        <p:spPr>
+          <a:xfrm>
+            <a:off x="941832" y="5477256"/>
+            <a:ext cx="4681728" cy="182879"/>
+          </a:xfrm>
+          <a:prstGeom prst="rect">
+            <a:avLst/>
+          </a:prstGeom>
+          <a:noFill/>
+        </p:spPr>
+        <p:txBody>
+          <a:bodyPr wrap="square">
+            <a:spAutoFit/>
+          </a:bodyPr>
+          <a:lstStyle/>
+          <a:p>
+            <a:pPr>
+              <a:defRPr sz="1250">
+                <a:solidFill>
+                  <a:srgbClr val="1F2937"/>
+                </a:solidFill>
+              </a:defRPr>
+            </a:pPr>
+            <a:r>
+              <a:t>sysguard.log</a:t>
+            </a:r>
+          </a:p>
+        </p:txBody>
+      </p:sp>
+      <p:sp>
+        <p:nvSpPr>
+          <p:cNvPr id="34" name="TextBox 33"/>
+          <p:cNvSpPr txBox="1"/>
+          <p:nvPr/>
+        </p:nvSpPr>
+        <p:spPr>
+          <a:xfrm>
+            <a:off x="640080" y="6473952"/>
+            <a:ext cx="10972800" cy="201168"/>
+          </a:xfrm>
+          <a:prstGeom prst="rect">
+            <a:avLst/>
+          </a:prstGeom>
+          <a:noFill/>
+        </p:spPr>
+        <p:txBody>
+          <a:bodyPr wrap="none">
+            <a:spAutoFit/>
+          </a:bodyPr>
+          <a:lstStyle/>
+          <a:p>
+            <a:pPr>
+              <a:defRPr sz="850">
+                <a:solidFill>
+                  <a:srgbClr val="64748B"/>
+                </a:solidFill>
+              </a:defRPr>
+            </a:pPr>
+            <a:r>
+              <a:t>SysGuard • Linux System Health Monitor                                              7</a:t>
             </a:r>
           </a:p>
         </p:txBody>
@@ -8571,13 +11424,13 @@
         <p:spPr>
           <a:xfrm>
             <a:off x="0" y="0"/>
-            <a:ext cx="12191695" cy="6858000"/>
+            <a:ext cx="12191999" cy="6858000"/>
           </a:xfrm>
           <a:prstGeom prst="rect">
             <a:avLst/>
           </a:prstGeom>
           <a:solidFill>
-            <a:srgbClr val="FFFFFF"/>
+            <a:srgbClr val="F5F7FA"/>
           </a:solidFill>
           <a:ln>
             <a:noFill/>
@@ -8614,13 +11467,13 @@
         <p:spPr>
           <a:xfrm>
             <a:off x="0" y="0"/>
-            <a:ext cx="12191695" cy="201168"/>
+            <a:ext cx="12191999" cy="164592"/>
           </a:xfrm>
           <a:prstGeom prst="rect">
             <a:avLst/>
           </a:prstGeom>
           <a:solidFill>
-            <a:srgbClr val="2A69BA"/>
+            <a:srgbClr val="2563EB"/>
           </a:solidFill>
           <a:ln>
             <a:noFill/>
@@ -8656,8 +11509,8 @@
         </p:nvSpPr>
         <p:spPr>
           <a:xfrm>
-            <a:off x="640080" y="502920"/>
-            <a:ext cx="10881360" cy="640080"/>
+            <a:off x="640080" y="438912"/>
+            <a:ext cx="10972800" cy="566928"/>
           </a:xfrm>
           <a:prstGeom prst="rect">
             <a:avLst/>
@@ -8673,12 +11526,12 @@
             <a:pPr>
               <a:defRPr sz="2800" b="1">
                 <a:solidFill>
-                  <a:srgbClr val="0E1827"/>
-                </a:solidFill>
-              </a:defRPr>
-            </a:pPr>
-            <a:r>
-              <a:t>7. Verified Run</a:t>
+                  <a:srgbClr val="0F172A"/>
+                </a:solidFill>
+              </a:defRPr>
+            </a:pPr>
+            <a:r>
+              <a:t>7. Live Dashboard</a:t>
             </a:r>
           </a:p>
         </p:txBody>
@@ -8691,8 +11544,8 @@
         </p:nvSpPr>
         <p:spPr>
           <a:xfrm>
-            <a:off x="658368" y="1143000"/>
-            <a:ext cx="10789920" cy="411480"/>
+            <a:off x="658368" y="987552"/>
+            <a:ext cx="10698480" cy="365760"/>
           </a:xfrm>
           <a:prstGeom prst="rect">
             <a:avLst/>
@@ -8706,14 +11559,14 @@
           <a:lstStyle/>
           <a:p>
             <a:pPr>
-              <a:defRPr sz="1400">
-                <a:solidFill>
-                  <a:srgbClr val="566373"/>
-                </a:solidFill>
-              </a:defRPr>
-            </a:pPr>
-            <a:r>
-              <a:t>Actual values observed during testing</a:t>
+              <a:defRPr sz="1300">
+                <a:solidFill>
+                  <a:srgbClr val="64748B"/>
+                </a:solidFill>
+              </a:defRPr>
+            </a:pPr>
+            <a:r>
+              <a:t>Actual SysGuard output captured during testing</a:t>
             </a:r>
           </a:p>
         </p:txBody>
@@ -8726,18 +11579,18 @@
         </p:nvSpPr>
         <p:spPr>
           <a:xfrm>
-            <a:off x="822960" y="1417320"/>
-            <a:ext cx="5074920" cy="822960"/>
+            <a:off x="566928" y="1298448"/>
+            <a:ext cx="7690104" cy="4718303"/>
           </a:xfrm>
           <a:prstGeom prst="roundRect">
             <a:avLst/>
           </a:prstGeom>
           <a:solidFill>
-            <a:srgbClr val="F1F5F9"/>
+            <a:srgbClr val="FFFFFF"/>
           </a:solidFill>
           <a:ln>
             <a:solidFill>
-              <a:srgbClr val="D7E1EB"/>
+              <a:srgbClr val="D7DEE7"/>
             </a:solidFill>
           </a:ln>
         </p:spPr>
@@ -8763,96 +11616,50 @@
           </a:p>
         </p:txBody>
       </p:sp>
-      <p:sp>
-        <p:nvSpPr>
-          <p:cNvPr id="7" name="TextBox 6"/>
-          <p:cNvSpPr txBox="1"/>
-          <p:nvPr/>
-        </p:nvSpPr>
-        <p:spPr>
-          <a:xfrm>
-            <a:off x="1005840" y="1527048"/>
-            <a:ext cx="1645920" cy="457200"/>
-          </a:xfrm>
-          <a:prstGeom prst="rect">
-            <a:avLst/>
-          </a:prstGeom>
-          <a:noFill/>
-        </p:spPr>
-        <p:txBody>
-          <a:bodyPr wrap="none">
-            <a:spAutoFit/>
-          </a:bodyPr>
-          <a:lstStyle/>
-          <a:p>
-            <a:pPr>
-              <a:defRPr sz="1500" b="1">
-                <a:solidFill>
-                  <a:srgbClr val="566373"/>
-                </a:solidFill>
-              </a:defRPr>
-            </a:pPr>
-            <a:r>
-              <a:t>OS</a:t>
-            </a:r>
-          </a:p>
-        </p:txBody>
-      </p:sp>
-      <p:sp>
-        <p:nvSpPr>
-          <p:cNvPr id="8" name="TextBox 7"/>
-          <p:cNvSpPr txBox="1"/>
-          <p:nvPr/>
-        </p:nvSpPr>
-        <p:spPr>
-          <a:xfrm>
-            <a:off x="2606040" y="1527048"/>
-            <a:ext cx="3017520" cy="502920"/>
-          </a:xfrm>
-          <a:prstGeom prst="rect">
-            <a:avLst/>
-          </a:prstGeom>
-          <a:noFill/>
-        </p:spPr>
-        <p:txBody>
-          <a:bodyPr wrap="none">
-            <a:spAutoFit/>
-          </a:bodyPr>
-          <a:lstStyle/>
-          <a:p>
-            <a:pPr>
-              <a:defRPr sz="1700" b="1">
-                <a:solidFill>
-                  <a:srgbClr val="0E1827"/>
-                </a:solidFill>
-              </a:defRPr>
-            </a:pPr>
-            <a:r>
-              <a:t>Ubuntu 26.04.1 LTS</a:t>
-            </a:r>
-          </a:p>
-        </p:txBody>
-      </p:sp>
-      <p:sp>
-        <p:nvSpPr>
-          <p:cNvPr id="9" name="Rounded Rectangle 8"/>
+      <p:pic>
+        <p:nvPicPr>
+          <p:cNvPr id="7" name="Picture 6" descr="dashboard.png"/>
+          <p:cNvPicPr>
+            <a:picLocks noChangeAspect="1"/>
+          </p:cNvPicPr>
+          <p:nvPr/>
+        </p:nvPicPr>
+        <p:blipFill>
+          <a:blip r:embed="rId2"/>
+          <a:stretch>
+            <a:fillRect/>
+          </a:stretch>
+        </p:blipFill>
+        <p:spPr>
+          <a:xfrm>
+            <a:off x="1183444" y="1325880"/>
+            <a:ext cx="6457070" cy="4663440"/>
+          </a:xfrm>
+          <a:prstGeom prst="rect">
+            <a:avLst/>
+          </a:prstGeom>
+        </p:spPr>
+      </p:pic>
+      <p:sp>
+        <p:nvSpPr>
+          <p:cNvPr id="8" name="Rounded Rectangle 7"/>
           <p:cNvSpPr/>
           <p:nvPr/>
         </p:nvSpPr>
         <p:spPr>
           <a:xfrm>
-            <a:off x="6309360" y="1417320"/>
-            <a:ext cx="5074920" cy="822960"/>
+            <a:off x="8503920" y="1417320"/>
+            <a:ext cx="2971800" cy="914400"/>
           </a:xfrm>
           <a:prstGeom prst="roundRect">
             <a:avLst/>
           </a:prstGeom>
           <a:solidFill>
-            <a:srgbClr val="F1F5F9"/>
+            <a:srgbClr val="FFFFFF"/>
           </a:solidFill>
           <a:ln>
             <a:solidFill>
-              <a:srgbClr val="D7E1EB"/>
+              <a:srgbClr val="D7DEE7"/>
             </a:solidFill>
           </a:ln>
         </p:spPr>
@@ -8880,95 +11687,23 @@
       </p:sp>
       <p:sp>
         <p:nvSpPr>
-          <p:cNvPr id="10" name="TextBox 9"/>
-          <p:cNvSpPr txBox="1"/>
-          <p:nvPr/>
-        </p:nvSpPr>
-        <p:spPr>
-          <a:xfrm>
-            <a:off x="6492240" y="1527048"/>
-            <a:ext cx="1645920" cy="457200"/>
-          </a:xfrm>
-          <a:prstGeom prst="rect">
-            <a:avLst/>
-          </a:prstGeom>
-          <a:noFill/>
-        </p:spPr>
-        <p:txBody>
-          <a:bodyPr wrap="none">
-            <a:spAutoFit/>
-          </a:bodyPr>
-          <a:lstStyle/>
-          <a:p>
-            <a:pPr>
-              <a:defRPr sz="1500" b="1">
-                <a:solidFill>
-                  <a:srgbClr val="566373"/>
-                </a:solidFill>
-              </a:defRPr>
-            </a:pPr>
-            <a:r>
-              <a:t>Kernel</a:t>
-            </a:r>
-          </a:p>
-        </p:txBody>
-      </p:sp>
-      <p:sp>
-        <p:nvSpPr>
-          <p:cNvPr id="11" name="TextBox 10"/>
-          <p:cNvSpPr txBox="1"/>
-          <p:nvPr/>
-        </p:nvSpPr>
-        <p:spPr>
-          <a:xfrm>
-            <a:off x="8092440" y="1527048"/>
-            <a:ext cx="3017520" cy="502920"/>
-          </a:xfrm>
-          <a:prstGeom prst="rect">
-            <a:avLst/>
-          </a:prstGeom>
-          <a:noFill/>
-        </p:spPr>
-        <p:txBody>
-          <a:bodyPr wrap="none">
-            <a:spAutoFit/>
-          </a:bodyPr>
-          <a:lstStyle/>
-          <a:p>
-            <a:pPr>
-              <a:defRPr sz="1700" b="1">
-                <a:solidFill>
-                  <a:srgbClr val="0E1827"/>
-                </a:solidFill>
-              </a:defRPr>
-            </a:pPr>
-            <a:r>
-              <a:t>6.18.40.1-microsoft-standard-WSL2</a:t>
-            </a:r>
-          </a:p>
-        </p:txBody>
-      </p:sp>
-      <p:sp>
-        <p:nvSpPr>
-          <p:cNvPr id="12" name="Rounded Rectangle 11"/>
+          <p:cNvPr id="9" name="Rectangle 8"/>
           <p:cNvSpPr/>
           <p:nvPr/>
         </p:nvSpPr>
         <p:spPr>
           <a:xfrm>
-            <a:off x="822960" y="2560320"/>
-            <a:ext cx="5074920" cy="822960"/>
-          </a:xfrm>
-          <a:prstGeom prst="roundRect">
+            <a:off x="8503920" y="1417320"/>
+            <a:ext cx="73152" cy="914400"/>
+          </a:xfrm>
+          <a:prstGeom prst="rect">
             <a:avLst/>
           </a:prstGeom>
           <a:solidFill>
-            <a:srgbClr val="F1F5F9"/>
+            <a:srgbClr val="2563EB"/>
           </a:solidFill>
           <a:ln>
-            <a:solidFill>
-              <a:srgbClr val="D7E1EB"/>
-            </a:solidFill>
+            <a:noFill/>
           </a:ln>
         </p:spPr>
         <p:style>
@@ -8995,14 +11730,14 @@
       </p:sp>
       <p:sp>
         <p:nvSpPr>
-          <p:cNvPr id="13" name="TextBox 12"/>
-          <p:cNvSpPr txBox="1"/>
-          <p:nvPr/>
-        </p:nvSpPr>
-        <p:spPr>
-          <a:xfrm>
-            <a:off x="1005840" y="2670048"/>
-            <a:ext cx="1645920" cy="457200"/>
+          <p:cNvPr id="10" name="TextBox 9"/>
+          <p:cNvSpPr txBox="1"/>
+          <p:nvPr/>
+        </p:nvSpPr>
+        <p:spPr>
+          <a:xfrm>
+            <a:off x="8714232" y="1581912"/>
+            <a:ext cx="2624328" cy="365760"/>
           </a:xfrm>
           <a:prstGeom prst="rect">
             <a:avLst/>
@@ -9016,9 +11751,9 @@
           <a:lstStyle/>
           <a:p>
             <a:pPr>
-              <a:defRPr sz="1500" b="1">
-                <a:solidFill>
-                  <a:srgbClr val="566373"/>
+              <a:defRPr sz="1600" b="1">
+                <a:solidFill>
+                  <a:srgbClr val="0F172A"/>
                 </a:solidFill>
               </a:defRPr>
             </a:pPr>
@@ -9030,59 +11765,59 @@
       </p:sp>
       <p:sp>
         <p:nvSpPr>
-          <p:cNvPr id="14" name="TextBox 13"/>
-          <p:cNvSpPr txBox="1"/>
-          <p:nvPr/>
-        </p:nvSpPr>
-        <p:spPr>
-          <a:xfrm>
-            <a:off x="2606040" y="2670048"/>
-            <a:ext cx="3017520" cy="502920"/>
-          </a:xfrm>
-          <a:prstGeom prst="rect">
-            <a:avLst/>
-          </a:prstGeom>
-          <a:noFill/>
-        </p:spPr>
-        <p:txBody>
-          <a:bodyPr wrap="none">
+          <p:cNvPr id="11" name="TextBox 10"/>
+          <p:cNvSpPr txBox="1"/>
+          <p:nvPr/>
+        </p:nvSpPr>
+        <p:spPr>
+          <a:xfrm>
+            <a:off x="8714232" y="2011680"/>
+            <a:ext cx="2624328" cy="201167"/>
+          </a:xfrm>
+          <a:prstGeom prst="rect">
+            <a:avLst/>
+          </a:prstGeom>
+          <a:noFill/>
+        </p:spPr>
+        <p:txBody>
+          <a:bodyPr wrap="square">
             <a:spAutoFit/>
           </a:bodyPr>
           <a:lstStyle/>
           <a:p>
             <a:pPr>
-              <a:defRPr sz="1700" b="1">
-                <a:solidFill>
-                  <a:srgbClr val="0E1827"/>
-                </a:solidFill>
-              </a:defRPr>
-            </a:pPr>
-            <a:r>
-              <a:t>AMD Ryzen 7 6800H</a:t>
-            </a:r>
-          </a:p>
-        </p:txBody>
-      </p:sp>
-      <p:sp>
-        <p:nvSpPr>
-          <p:cNvPr id="15" name="Rounded Rectangle 14"/>
+              <a:defRPr sz="1300">
+                <a:solidFill>
+                  <a:srgbClr val="1F2937"/>
+                </a:solidFill>
+              </a:defRPr>
+            </a:pPr>
+            <a:r>
+              <a:t>0.0% usage • Load 0.0</a:t>
+            </a:r>
+          </a:p>
+        </p:txBody>
+      </p:sp>
+      <p:sp>
+        <p:nvSpPr>
+          <p:cNvPr id="12" name="Rounded Rectangle 11"/>
           <p:cNvSpPr/>
           <p:nvPr/>
         </p:nvSpPr>
         <p:spPr>
           <a:xfrm>
-            <a:off x="6309360" y="2560320"/>
-            <a:ext cx="5074920" cy="822960"/>
+            <a:off x="8503920" y="2514600"/>
+            <a:ext cx="2971800" cy="914400"/>
           </a:xfrm>
           <a:prstGeom prst="roundRect">
             <a:avLst/>
           </a:prstGeom>
           <a:solidFill>
-            <a:srgbClr val="F1F5F9"/>
+            <a:srgbClr val="FFFFFF"/>
           </a:solidFill>
           <a:ln>
             <a:solidFill>
-              <a:srgbClr val="D7E1EB"/>
+              <a:srgbClr val="D7DEE7"/>
             </a:solidFill>
           </a:ln>
         </p:spPr>
@@ -9110,95 +11845,23 @@
       </p:sp>
       <p:sp>
         <p:nvSpPr>
-          <p:cNvPr id="16" name="TextBox 15"/>
-          <p:cNvSpPr txBox="1"/>
-          <p:nvPr/>
-        </p:nvSpPr>
-        <p:spPr>
-          <a:xfrm>
-            <a:off x="6492240" y="2670048"/>
-            <a:ext cx="1645920" cy="457200"/>
-          </a:xfrm>
-          <a:prstGeom prst="rect">
-            <a:avLst/>
-          </a:prstGeom>
-          <a:noFill/>
-        </p:spPr>
-        <p:txBody>
-          <a:bodyPr wrap="none">
-            <a:spAutoFit/>
-          </a:bodyPr>
-          <a:lstStyle/>
-          <a:p>
-            <a:pPr>
-              <a:defRPr sz="1500" b="1">
-                <a:solidFill>
-                  <a:srgbClr val="566373"/>
-                </a:solidFill>
-              </a:defRPr>
-            </a:pPr>
-            <a:r>
-              <a:t>Cores</a:t>
-            </a:r>
-          </a:p>
-        </p:txBody>
-      </p:sp>
-      <p:sp>
-        <p:nvSpPr>
-          <p:cNvPr id="17" name="TextBox 16"/>
-          <p:cNvSpPr txBox="1"/>
-          <p:nvPr/>
-        </p:nvSpPr>
-        <p:spPr>
-          <a:xfrm>
-            <a:off x="8092440" y="2670048"/>
-            <a:ext cx="3017520" cy="502920"/>
-          </a:xfrm>
-          <a:prstGeom prst="rect">
-            <a:avLst/>
-          </a:prstGeom>
-          <a:noFill/>
-        </p:spPr>
-        <p:txBody>
-          <a:bodyPr wrap="none">
-            <a:spAutoFit/>
-          </a:bodyPr>
-          <a:lstStyle/>
-          <a:p>
-            <a:pPr>
-              <a:defRPr sz="1700" b="1">
-                <a:solidFill>
-                  <a:srgbClr val="0E1827"/>
-                </a:solidFill>
-              </a:defRPr>
-            </a:pPr>
-            <a:r>
-              <a:t>16</a:t>
-            </a:r>
-          </a:p>
-        </p:txBody>
-      </p:sp>
-      <p:sp>
-        <p:nvSpPr>
-          <p:cNvPr id="18" name="Rounded Rectangle 17"/>
+          <p:cNvPr id="13" name="Rectangle 12"/>
           <p:cNvSpPr/>
           <p:nvPr/>
         </p:nvSpPr>
         <p:spPr>
           <a:xfrm>
-            <a:off x="822960" y="3703320"/>
-            <a:ext cx="5074920" cy="822960"/>
-          </a:xfrm>
-          <a:prstGeom prst="roundRect">
+            <a:off x="8503920" y="2514600"/>
+            <a:ext cx="73152" cy="914400"/>
+          </a:xfrm>
+          <a:prstGeom prst="rect">
             <a:avLst/>
           </a:prstGeom>
           <a:solidFill>
-            <a:srgbClr val="F1F5F9"/>
+            <a:srgbClr val="0EA5E9"/>
           </a:solidFill>
           <a:ln>
-            <a:solidFill>
-              <a:srgbClr val="D7E1EB"/>
-            </a:solidFill>
+            <a:noFill/>
           </a:ln>
         </p:spPr>
         <p:style>
@@ -9225,14 +11888,14 @@
       </p:sp>
       <p:sp>
         <p:nvSpPr>
-          <p:cNvPr id="19" name="TextBox 18"/>
-          <p:cNvSpPr txBox="1"/>
-          <p:nvPr/>
-        </p:nvSpPr>
-        <p:spPr>
-          <a:xfrm>
-            <a:off x="1005840" y="3813048"/>
-            <a:ext cx="1645920" cy="457200"/>
+          <p:cNvPr id="14" name="TextBox 13"/>
+          <p:cNvSpPr txBox="1"/>
+          <p:nvPr/>
+        </p:nvSpPr>
+        <p:spPr>
+          <a:xfrm>
+            <a:off x="8714232" y="2679192"/>
+            <a:ext cx="2624328" cy="365760"/>
           </a:xfrm>
           <a:prstGeom prst="rect">
             <a:avLst/>
@@ -9246,9 +11909,9 @@
           <a:lstStyle/>
           <a:p>
             <a:pPr>
-              <a:defRPr sz="1500" b="1">
-                <a:solidFill>
-                  <a:srgbClr val="566373"/>
+              <a:defRPr sz="1600" b="1">
+                <a:solidFill>
+                  <a:srgbClr val="0F172A"/>
                 </a:solidFill>
               </a:defRPr>
             </a:pPr>
@@ -9260,59 +11923,59 @@
       </p:sp>
       <p:sp>
         <p:nvSpPr>
-          <p:cNvPr id="20" name="TextBox 19"/>
-          <p:cNvSpPr txBox="1"/>
-          <p:nvPr/>
-        </p:nvSpPr>
-        <p:spPr>
-          <a:xfrm>
-            <a:off x="2606040" y="3813048"/>
-            <a:ext cx="3017520" cy="502920"/>
-          </a:xfrm>
-          <a:prstGeom prst="rect">
-            <a:avLst/>
-          </a:prstGeom>
-          <a:noFill/>
-        </p:spPr>
-        <p:txBody>
-          <a:bodyPr wrap="none">
+          <p:cNvPr id="15" name="TextBox 14"/>
+          <p:cNvSpPr txBox="1"/>
+          <p:nvPr/>
+        </p:nvSpPr>
+        <p:spPr>
+          <a:xfrm>
+            <a:off x="8714232" y="3108960"/>
+            <a:ext cx="2624328" cy="201167"/>
+          </a:xfrm>
+          <a:prstGeom prst="rect">
+            <a:avLst/>
+          </a:prstGeom>
+          <a:noFill/>
+        </p:spPr>
+        <p:txBody>
+          <a:bodyPr wrap="square">
             <a:spAutoFit/>
           </a:bodyPr>
           <a:lstStyle/>
           <a:p>
             <a:pPr>
-              <a:defRPr sz="1700" b="1">
-                <a:solidFill>
-                  <a:srgbClr val="0E1827"/>
-                </a:solidFill>
-              </a:defRPr>
-            </a:pPr>
-            <a:r>
-              <a:t>7.9% used</a:t>
-            </a:r>
-          </a:p>
-        </p:txBody>
-      </p:sp>
-      <p:sp>
-        <p:nvSpPr>
-          <p:cNvPr id="21" name="Rounded Rectangle 20"/>
+              <a:defRPr sz="1300">
+                <a:solidFill>
+                  <a:srgbClr val="1F2937"/>
+                </a:solidFill>
+              </a:defRPr>
+            </a:pPr>
+            <a:r>
+              <a:t>8.1% used</a:t>
+            </a:r>
+          </a:p>
+        </p:txBody>
+      </p:sp>
+      <p:sp>
+        <p:nvSpPr>
+          <p:cNvPr id="16" name="Rounded Rectangle 15"/>
           <p:cNvSpPr/>
           <p:nvPr/>
         </p:nvSpPr>
         <p:spPr>
           <a:xfrm>
-            <a:off x="6309360" y="3703320"/>
-            <a:ext cx="5074920" cy="822960"/>
+            <a:off x="8503920" y="3611880"/>
+            <a:ext cx="2971800" cy="914400"/>
           </a:xfrm>
           <a:prstGeom prst="roundRect">
             <a:avLst/>
           </a:prstGeom>
           <a:solidFill>
-            <a:srgbClr val="F1F5F9"/>
+            <a:srgbClr val="FFFFFF"/>
           </a:solidFill>
           <a:ln>
             <a:solidFill>
-              <a:srgbClr val="D7E1EB"/>
+              <a:srgbClr val="D7DEE7"/>
             </a:solidFill>
           </a:ln>
         </p:spPr>
@@ -9340,95 +12003,23 @@
       </p:sp>
       <p:sp>
         <p:nvSpPr>
-          <p:cNvPr id="22" name="TextBox 21"/>
-          <p:cNvSpPr txBox="1"/>
-          <p:nvPr/>
-        </p:nvSpPr>
-        <p:spPr>
-          <a:xfrm>
-            <a:off x="6492240" y="3813048"/>
-            <a:ext cx="1645920" cy="457200"/>
-          </a:xfrm>
-          <a:prstGeom prst="rect">
-            <a:avLst/>
-          </a:prstGeom>
-          <a:noFill/>
-        </p:spPr>
-        <p:txBody>
-          <a:bodyPr wrap="none">
-            <a:spAutoFit/>
-          </a:bodyPr>
-          <a:lstStyle/>
-          <a:p>
-            <a:pPr>
-              <a:defRPr sz="1500" b="1">
-                <a:solidFill>
-                  <a:srgbClr val="566373"/>
-                </a:solidFill>
-              </a:defRPr>
-            </a:pPr>
-            <a:r>
-              <a:t>Disk</a:t>
-            </a:r>
-          </a:p>
-        </p:txBody>
-      </p:sp>
-      <p:sp>
-        <p:nvSpPr>
-          <p:cNvPr id="23" name="TextBox 22"/>
-          <p:cNvSpPr txBox="1"/>
-          <p:nvPr/>
-        </p:nvSpPr>
-        <p:spPr>
-          <a:xfrm>
-            <a:off x="8092440" y="3813048"/>
-            <a:ext cx="3017520" cy="502920"/>
-          </a:xfrm>
-          <a:prstGeom prst="rect">
-            <a:avLst/>
-          </a:prstGeom>
-          <a:noFill/>
-        </p:spPr>
-        <p:txBody>
-          <a:bodyPr wrap="none">
-            <a:spAutoFit/>
-          </a:bodyPr>
-          <a:lstStyle/>
-          <a:p>
-            <a:pPr>
-              <a:defRPr sz="1700" b="1">
-                <a:solidFill>
-                  <a:srgbClr val="0E1827"/>
-                </a:solidFill>
-              </a:defRPr>
-            </a:pPr>
-            <a:r>
-              <a:t>5.3% used</a:t>
-            </a:r>
-          </a:p>
-        </p:txBody>
-      </p:sp>
-      <p:sp>
-        <p:nvSpPr>
-          <p:cNvPr id="24" name="Rounded Rectangle 23"/>
+          <p:cNvPr id="17" name="Rectangle 16"/>
           <p:cNvSpPr/>
           <p:nvPr/>
         </p:nvSpPr>
         <p:spPr>
           <a:xfrm>
-            <a:off x="822960" y="4846320"/>
-            <a:ext cx="5074920" cy="822960"/>
-          </a:xfrm>
-          <a:prstGeom prst="roundRect">
+            <a:off x="8503920" y="3611880"/>
+            <a:ext cx="73152" cy="914400"/>
+          </a:xfrm>
+          <a:prstGeom prst="rect">
             <a:avLst/>
           </a:prstGeom>
           <a:solidFill>
-            <a:srgbClr val="F1F5F9"/>
+            <a:srgbClr val="0D9488"/>
           </a:solidFill>
           <a:ln>
-            <a:solidFill>
-              <a:srgbClr val="D7E1EB"/>
-            </a:solidFill>
+            <a:noFill/>
           </a:ln>
         </p:spPr>
         <p:style>
@@ -9455,14 +12046,14 @@
       </p:sp>
       <p:sp>
         <p:nvSpPr>
-          <p:cNvPr id="25" name="TextBox 24"/>
-          <p:cNvSpPr txBox="1"/>
-          <p:nvPr/>
-        </p:nvSpPr>
-        <p:spPr>
-          <a:xfrm>
-            <a:off x="1005840" y="4956048"/>
-            <a:ext cx="1645920" cy="457200"/>
+          <p:cNvPr id="18" name="TextBox 17"/>
+          <p:cNvSpPr txBox="1"/>
+          <p:nvPr/>
+        </p:nvSpPr>
+        <p:spPr>
+          <a:xfrm>
+            <a:off x="8714232" y="3776472"/>
+            <a:ext cx="2624328" cy="365760"/>
           </a:xfrm>
           <a:prstGeom prst="rect">
             <a:avLst/>
@@ -9476,73 +12067,73 @@
           <a:lstStyle/>
           <a:p>
             <a:pPr>
-              <a:defRPr sz="1500" b="1">
-                <a:solidFill>
-                  <a:srgbClr val="566373"/>
-                </a:solidFill>
-              </a:defRPr>
-            </a:pPr>
-            <a:r>
-              <a:t>Processes</a:t>
-            </a:r>
-          </a:p>
-        </p:txBody>
-      </p:sp>
-      <p:sp>
-        <p:nvSpPr>
-          <p:cNvPr id="26" name="TextBox 25"/>
-          <p:cNvSpPr txBox="1"/>
-          <p:nvPr/>
-        </p:nvSpPr>
-        <p:spPr>
-          <a:xfrm>
-            <a:off x="2606040" y="4956048"/>
-            <a:ext cx="3017520" cy="502920"/>
-          </a:xfrm>
-          <a:prstGeom prst="rect">
-            <a:avLst/>
-          </a:prstGeom>
-          <a:noFill/>
-        </p:spPr>
-        <p:txBody>
-          <a:bodyPr wrap="none">
+              <a:defRPr sz="1600" b="1">
+                <a:solidFill>
+                  <a:srgbClr val="0F172A"/>
+                </a:solidFill>
+              </a:defRPr>
+            </a:pPr>
+            <a:r>
+              <a:t>Storage</a:t>
+            </a:r>
+          </a:p>
+        </p:txBody>
+      </p:sp>
+      <p:sp>
+        <p:nvSpPr>
+          <p:cNvPr id="19" name="TextBox 18"/>
+          <p:cNvSpPr txBox="1"/>
+          <p:nvPr/>
+        </p:nvSpPr>
+        <p:spPr>
+          <a:xfrm>
+            <a:off x="8714232" y="4206240"/>
+            <a:ext cx="2624328" cy="201167"/>
+          </a:xfrm>
+          <a:prstGeom prst="rect">
+            <a:avLst/>
+          </a:prstGeom>
+          <a:noFill/>
+        </p:spPr>
+        <p:txBody>
+          <a:bodyPr wrap="square">
             <a:spAutoFit/>
           </a:bodyPr>
           <a:lstStyle/>
           <a:p>
             <a:pPr>
-              <a:defRPr sz="1700" b="1">
-                <a:solidFill>
-                  <a:srgbClr val="0E1827"/>
-                </a:solidFill>
-              </a:defRPr>
-            </a:pPr>
-            <a:r>
-              <a:t>26</a:t>
-            </a:r>
-          </a:p>
-        </p:txBody>
-      </p:sp>
-      <p:sp>
-        <p:nvSpPr>
-          <p:cNvPr id="27" name="Rounded Rectangle 26"/>
+              <a:defRPr sz="1300">
+                <a:solidFill>
+                  <a:srgbClr val="1F2937"/>
+                </a:solidFill>
+              </a:defRPr>
+            </a:pPr>
+            <a:r>
+              <a:t>5.3% used</a:t>
+            </a:r>
+          </a:p>
+        </p:txBody>
+      </p:sp>
+      <p:sp>
+        <p:nvSpPr>
+          <p:cNvPr id="20" name="Rounded Rectangle 19"/>
           <p:cNvSpPr/>
           <p:nvPr/>
         </p:nvSpPr>
         <p:spPr>
           <a:xfrm>
-            <a:off x="6309360" y="4846320"/>
-            <a:ext cx="5074920" cy="822960"/>
+            <a:off x="8503920" y="4709160"/>
+            <a:ext cx="2971800" cy="914400"/>
           </a:xfrm>
           <a:prstGeom prst="roundRect">
             <a:avLst/>
           </a:prstGeom>
           <a:solidFill>
-            <a:srgbClr val="F1F5F9"/>
+            <a:srgbClr val="FFFFFF"/>
           </a:solidFill>
           <a:ln>
             <a:solidFill>
-              <a:srgbClr val="D7E1EB"/>
+              <a:srgbClr val="D7DEE7"/>
             </a:solidFill>
           </a:ln>
         </p:spPr>
@@ -9570,14 +12161,57 @@
       </p:sp>
       <p:sp>
         <p:nvSpPr>
-          <p:cNvPr id="28" name="TextBox 27"/>
-          <p:cNvSpPr txBox="1"/>
-          <p:nvPr/>
-        </p:nvSpPr>
-        <p:spPr>
-          <a:xfrm>
-            <a:off x="6492240" y="4956048"/>
-            <a:ext cx="1645920" cy="457200"/>
+          <p:cNvPr id="21" name="Rectangle 20"/>
+          <p:cNvSpPr/>
+          <p:nvPr/>
+        </p:nvSpPr>
+        <p:spPr>
+          <a:xfrm>
+            <a:off x="8503920" y="4709160"/>
+            <a:ext cx="73152" cy="914400"/>
+          </a:xfrm>
+          <a:prstGeom prst="rect">
+            <a:avLst/>
+          </a:prstGeom>
+          <a:solidFill>
+            <a:srgbClr val="16A34A"/>
+          </a:solidFill>
+          <a:ln>
+            <a:noFill/>
+          </a:ln>
+        </p:spPr>
+        <p:style>
+          <a:lnRef idx="1">
+            <a:schemeClr val="accent1"/>
+          </a:lnRef>
+          <a:fillRef idx="3">
+            <a:schemeClr val="accent1"/>
+          </a:fillRef>
+          <a:effectRef idx="2">
+            <a:schemeClr val="accent1"/>
+          </a:effectRef>
+          <a:fontRef idx="minor">
+            <a:schemeClr val="lt1"/>
+          </a:fontRef>
+        </p:style>
+        <p:txBody>
+          <a:bodyPr rtlCol="0" anchor="ctr"/>
+          <a:lstStyle/>
+          <a:p>
+            <a:pPr algn="ctr"/>
+          </a:p>
+        </p:txBody>
+      </p:sp>
+      <p:sp>
+        <p:nvSpPr>
+          <p:cNvPr id="22" name="TextBox 21"/>
+          <p:cNvSpPr txBox="1"/>
+          <p:nvPr/>
+        </p:nvSpPr>
+        <p:spPr>
+          <a:xfrm>
+            <a:off x="8714232" y="4873752"/>
+            <a:ext cx="2624328" cy="365760"/>
           </a:xfrm>
           <a:prstGeom prst="rect">
             <a:avLst/>
@@ -9591,28 +12225,63 @@
           <a:lstStyle/>
           <a:p>
             <a:pPr>
-              <a:defRPr sz="1500" b="1">
-                <a:solidFill>
-                  <a:srgbClr val="566373"/>
-                </a:solidFill>
-              </a:defRPr>
-            </a:pPr>
-            <a:r>
-              <a:t>Health</a:t>
-            </a:r>
-          </a:p>
-        </p:txBody>
-      </p:sp>
-      <p:sp>
-        <p:nvSpPr>
-          <p:cNvPr id="29" name="TextBox 28"/>
-          <p:cNvSpPr txBox="1"/>
-          <p:nvPr/>
-        </p:nvSpPr>
-        <p:spPr>
-          <a:xfrm>
-            <a:off x="8092440" y="4956048"/>
-            <a:ext cx="3017520" cy="502920"/>
+              <a:defRPr sz="1600" b="1">
+                <a:solidFill>
+                  <a:srgbClr val="0F172A"/>
+                </a:solidFill>
+              </a:defRPr>
+            </a:pPr>
+            <a:r>
+              <a:t>Overall health</a:t>
+            </a:r>
+          </a:p>
+        </p:txBody>
+      </p:sp>
+      <p:sp>
+        <p:nvSpPr>
+          <p:cNvPr id="23" name="TextBox 22"/>
+          <p:cNvSpPr txBox="1"/>
+          <p:nvPr/>
+        </p:nvSpPr>
+        <p:spPr>
+          <a:xfrm>
+            <a:off x="8714232" y="5303520"/>
+            <a:ext cx="2624328" cy="201167"/>
+          </a:xfrm>
+          <a:prstGeom prst="rect">
+            <a:avLst/>
+          </a:prstGeom>
+          <a:noFill/>
+        </p:spPr>
+        <p:txBody>
+          <a:bodyPr wrap="square">
+            <a:spAutoFit/>
+          </a:bodyPr>
+          <a:lstStyle/>
+          <a:p>
+            <a:pPr>
+              <a:defRPr sz="1300">
+                <a:solidFill>
+                  <a:srgbClr val="1F2937"/>
+                </a:solidFill>
+              </a:defRPr>
+            </a:pPr>
+            <a:r>
+              <a:t>HEALTHY</a:t>
+            </a:r>
+          </a:p>
+        </p:txBody>
+      </p:sp>
+      <p:sp>
+        <p:nvSpPr>
+          <p:cNvPr id="24" name="TextBox 23"/>
+          <p:cNvSpPr txBox="1"/>
+          <p:nvPr/>
+        </p:nvSpPr>
+        <p:spPr>
+          <a:xfrm>
+            <a:off x="640080" y="6473952"/>
+            <a:ext cx="10972800" cy="201168"/>
           </a:xfrm>
           <a:prstGeom prst="rect">
             <a:avLst/>
@@ -9626,84 +12295,14 @@
           <a:lstStyle/>
           <a:p>
             <a:pPr>
-              <a:defRPr sz="1700" b="1">
-                <a:solidFill>
-                  <a:srgbClr val="0E1827"/>
-                </a:solidFill>
-              </a:defRPr>
-            </a:pPr>
-            <a:r>
-              <a:t>HEALTHY</a:t>
-            </a:r>
-          </a:p>
-        </p:txBody>
-      </p:sp>
-      <p:sp>
-        <p:nvSpPr>
-          <p:cNvPr id="30" name="TextBox 29"/>
-          <p:cNvSpPr txBox="1"/>
-          <p:nvPr/>
-        </p:nvSpPr>
-        <p:spPr>
-          <a:xfrm>
-            <a:off x="868680" y="5760720"/>
-            <a:ext cx="10515600" cy="365760"/>
-          </a:xfrm>
-          <a:prstGeom prst="rect">
-            <a:avLst/>
-          </a:prstGeom>
-          <a:noFill/>
-        </p:spPr>
-        <p:txBody>
-          <a:bodyPr wrap="none">
-            <a:spAutoFit/>
-          </a:bodyPr>
-          <a:lstStyle/>
-          <a:p>
-            <a:pPr algn="ctr">
-              <a:defRPr sz="1500">
-                <a:solidFill>
-                  <a:srgbClr val="26915E"/>
-                </a:solidFill>
-              </a:defRPr>
-            </a:pPr>
-            <a:r>
-              <a:t>Process search: query “bash” → PIDs 330 and 633 (2 matches)</a:t>
-            </a:r>
-          </a:p>
-        </p:txBody>
-      </p:sp>
-      <p:sp>
-        <p:nvSpPr>
-          <p:cNvPr id="31" name="TextBox 30"/>
-          <p:cNvSpPr txBox="1"/>
-          <p:nvPr/>
-        </p:nvSpPr>
-        <p:spPr>
-          <a:xfrm>
-            <a:off x="640080" y="6492240"/>
-            <a:ext cx="10972800" cy="228600"/>
-          </a:xfrm>
-          <a:prstGeom prst="rect">
-            <a:avLst/>
-          </a:prstGeom>
-          <a:noFill/>
-        </p:spPr>
-        <p:txBody>
-          <a:bodyPr wrap="none">
-            <a:spAutoFit/>
-          </a:bodyPr>
-          <a:lstStyle/>
-          <a:p>
-            <a:pPr>
-              <a:defRPr sz="900">
-                <a:solidFill>
-                  <a:srgbClr val="566373"/>
-                </a:solidFill>
-              </a:defRPr>
-            </a:pPr>
-            <a:r>
-              <a:t>SysGuard • Linux System Health Monitor                               8</a:t>
+              <a:defRPr sz="850">
+                <a:solidFill>
+                  <a:srgbClr val="64748B"/>
+                </a:solidFill>
+              </a:defRPr>
+            </a:pPr>
+            <a:r>
+              <a:t>SysGuard • Linux System Health Monitor                                              8</a:t>
             </a:r>
           </a:p>
         </p:txBody>
@@ -9735,13 +12334,13 @@
         <p:spPr>
           <a:xfrm>
             <a:off x="0" y="0"/>
-            <a:ext cx="12191695" cy="6858000"/>
+            <a:ext cx="12191999" cy="6858000"/>
           </a:xfrm>
           <a:prstGeom prst="rect">
             <a:avLst/>
           </a:prstGeom>
           <a:solidFill>
-            <a:srgbClr val="FFFFFF"/>
+            <a:srgbClr val="F5F7FA"/>
           </a:solidFill>
           <a:ln>
             <a:noFill/>
@@ -9778,13 +12377,13 @@
         <p:spPr>
           <a:xfrm>
             <a:off x="0" y="0"/>
-            <a:ext cx="12191695" cy="201168"/>
+            <a:ext cx="12191999" cy="164592"/>
           </a:xfrm>
           <a:prstGeom prst="rect">
             <a:avLst/>
           </a:prstGeom>
           <a:solidFill>
-            <a:srgbClr val="2A69BA"/>
+            <a:srgbClr val="2563EB"/>
           </a:solidFill>
           <a:ln>
             <a:noFill/>
@@ -9820,8 +12419,8 @@
         </p:nvSpPr>
         <p:spPr>
           <a:xfrm>
-            <a:off x="640080" y="502920"/>
-            <a:ext cx="10881360" cy="640080"/>
+            <a:off x="640080" y="438912"/>
+            <a:ext cx="10972800" cy="566928"/>
           </a:xfrm>
           <a:prstGeom prst="rect">
             <a:avLst/>
@@ -9837,12 +12436,12 @@
             <a:pPr>
               <a:defRPr sz="2800" b="1">
                 <a:solidFill>
-                  <a:srgbClr val="0E1827"/>
-                </a:solidFill>
-              </a:defRPr>
-            </a:pPr>
-            <a:r>
-              <a:t>8. Device Driver Component</a:t>
+                  <a:srgbClr val="0F172A"/>
+                </a:solidFill>
+              </a:defRPr>
+            </a:pPr>
+            <a:r>
+              <a:t>8. Process Monitoring</a:t>
             </a:r>
           </a:p>
         </p:txBody>
@@ -9855,8 +12454,8 @@
         </p:nvSpPr>
         <p:spPr>
           <a:xfrm>
-            <a:off x="658368" y="1143000"/>
-            <a:ext cx="10789920" cy="411480"/>
+            <a:off x="658368" y="987552"/>
+            <a:ext cx="10698480" cy="365760"/>
           </a:xfrm>
           <a:prstGeom prst="rect">
             <a:avLst/>
@@ -9870,135 +12469,39 @@
           <a:lstStyle/>
           <a:p>
             <a:pPr>
-              <a:defRPr sz="1400">
-                <a:solidFill>
-                  <a:srgbClr val="566373"/>
-                </a:solidFill>
-              </a:defRPr>
-            </a:pPr>
-            <a:r>
-              <a:t>Kernel-space concept</a:t>
-            </a:r>
-          </a:p>
-        </p:txBody>
-      </p:sp>
-      <p:sp>
-        <p:nvSpPr>
-          <p:cNvPr id="6" name="TextBox 5"/>
-          <p:cNvSpPr txBox="1"/>
-          <p:nvPr/>
-        </p:nvSpPr>
-        <p:spPr>
-          <a:xfrm>
-            <a:off x="822960" y="1554480"/>
-            <a:ext cx="10424160" cy="4389120"/>
-          </a:xfrm>
-          <a:prstGeom prst="rect">
-            <a:avLst/>
-          </a:prstGeom>
-          <a:noFill/>
-        </p:spPr>
-        <p:txBody>
-          <a:bodyPr wrap="square">
-            <a:spAutoFit/>
-          </a:bodyPr>
-          <a:lstStyle/>
-          <a:p>
-            <a:pPr>
-              <a:spcAft>
-                <a:spcPts val="1000"/>
-              </a:spcAft>
-              <a:defRPr sz="1800">
-                <a:solidFill>
-                  <a:srgbClr val="1C2536"/>
-                </a:solidFill>
-              </a:defRPr>
-            </a:pPr>
-            <a:r>
-              <a:t>Source: driver/sysguard_driver.c</a:t>
-            </a:r>
-          </a:p>
-          <a:p>
-            <a:pPr>
-              <a:spcAft>
-                <a:spcPts val="1000"/>
-              </a:spcAft>
-              <a:defRPr sz="1800">
-                <a:solidFill>
-                  <a:srgbClr val="1C2536"/>
-                </a:solidFill>
-              </a:defRPr>
-            </a:pPr>
-            <a:r>
-              <a:t>Uses the Linux misc-device framework.</a:t>
-            </a:r>
-          </a:p>
-          <a:p>
-            <a:pPr>
-              <a:spcAft>
-                <a:spcPts val="1000"/>
-              </a:spcAft>
-              <a:defRPr sz="1800">
-                <a:solidFill>
-                  <a:srgbClr val="1C2536"/>
-                </a:solidFill>
-              </a:defRPr>
-            </a:pPr>
-            <a:r>
-              <a:t>Designed to expose a read-only character device: /dev/sysguard</a:t>
-            </a:r>
-          </a:p>
-          <a:p>
-            <a:pPr>
-              <a:spcAft>
-                <a:spcPts val="1000"/>
-              </a:spcAft>
-              <a:defRPr sz="1800">
-                <a:solidFill>
-                  <a:srgbClr val="1C2536"/>
-                </a:solidFill>
-              </a:defRPr>
-            </a:pPr>
-            <a:r>
-              <a:t>Demonstrates module initialization, device registration, file operations and copy_to_user().</a:t>
-            </a:r>
-          </a:p>
-          <a:p>
-            <a:pPr>
-              <a:spcAft>
-                <a:spcPts val="1000"/>
-              </a:spcAft>
-              <a:defRPr sz="1800">
-                <a:solidFill>
-                  <a:srgbClr val="1C2536"/>
-                </a:solidFill>
-              </a:defRPr>
-            </a:pPr>
-            <a:r>
-              <a:t>Current WSL environment does not expose the matching kernel build tree, so runtime driver loading was not validated.</a:t>
-            </a:r>
-          </a:p>
-        </p:txBody>
-      </p:sp>
-      <p:sp>
-        <p:nvSpPr>
-          <p:cNvPr id="7" name="Rounded Rectangle 6"/>
+              <a:defRPr sz="1300">
+                <a:solidFill>
+                  <a:srgbClr val="64748B"/>
+                </a:solidFill>
+              </a:defRPr>
+            </a:pPr>
+            <a:r>
+              <a:t>Enumeration and search of Linux processes</a:t>
+            </a:r>
+          </a:p>
+        </p:txBody>
+      </p:sp>
+      <p:sp>
+        <p:nvSpPr>
+          <p:cNvPr id="6" name="Rounded Rectangle 5"/>
           <p:cNvSpPr/>
           <p:nvPr/>
         </p:nvSpPr>
         <p:spPr>
           <a:xfrm>
-            <a:off x="7680960" y="5120640"/>
-            <a:ext cx="3291840" cy="640080"/>
+            <a:off x="566928" y="1389888"/>
+            <a:ext cx="5586983" cy="4535424"/>
           </a:xfrm>
           <a:prstGeom prst="roundRect">
             <a:avLst/>
           </a:prstGeom>
           <a:solidFill>
-            <a:srgbClr val="DD892A"/>
+            <a:srgbClr val="FFFFFF"/>
           </a:solidFill>
           <a:ln>
-            <a:noFill/>
+            <a:solidFill>
+              <a:srgbClr val="D7DEE7"/>
+            </a:solidFill>
           </a:ln>
         </p:spPr>
         <p:style>
@@ -10023,16 +12526,197 @@
           </a:p>
         </p:txBody>
       </p:sp>
-      <p:sp>
-        <p:nvSpPr>
-          <p:cNvPr id="8" name="TextBox 7"/>
-          <p:cNvSpPr txBox="1"/>
-          <p:nvPr/>
-        </p:nvSpPr>
-        <p:spPr>
-          <a:xfrm>
-            <a:off x="7818120" y="5239512"/>
-            <a:ext cx="3017520" cy="365760"/>
+      <p:pic>
+        <p:nvPicPr>
+          <p:cNvPr id="7" name="Picture 6" descr="process.png"/>
+          <p:cNvPicPr>
+            <a:picLocks noChangeAspect="1"/>
+          </p:cNvPicPr>
+          <p:nvPr/>
+        </p:nvPicPr>
+        <p:blipFill>
+          <a:blip r:embed="rId2"/>
+          <a:stretch>
+            <a:fillRect/>
+          </a:stretch>
+        </p:blipFill>
+        <p:spPr>
+          <a:xfrm>
+            <a:off x="594360" y="1892723"/>
+            <a:ext cx="5532120" cy="3529753"/>
+          </a:xfrm>
+          <a:prstGeom prst="rect">
+            <a:avLst/>
+          </a:prstGeom>
+        </p:spPr>
+      </p:pic>
+      <p:sp>
+        <p:nvSpPr>
+          <p:cNvPr id="8" name="Rounded Rectangle 7"/>
+          <p:cNvSpPr/>
+          <p:nvPr/>
+        </p:nvSpPr>
+        <p:spPr>
+          <a:xfrm>
+            <a:off x="6327648" y="2715768"/>
+            <a:ext cx="5129783" cy="2295144"/>
+          </a:xfrm>
+          <a:prstGeom prst="roundRect">
+            <a:avLst/>
+          </a:prstGeom>
+          <a:solidFill>
+            <a:srgbClr val="FFFFFF"/>
+          </a:solidFill>
+          <a:ln>
+            <a:solidFill>
+              <a:srgbClr val="D7DEE7"/>
+            </a:solidFill>
+          </a:ln>
+        </p:spPr>
+        <p:style>
+          <a:lnRef idx="1">
+            <a:schemeClr val="accent1"/>
+          </a:lnRef>
+          <a:fillRef idx="3">
+            <a:schemeClr val="accent1"/>
+          </a:fillRef>
+          <a:effectRef idx="2">
+            <a:schemeClr val="accent1"/>
+          </a:effectRef>
+          <a:fontRef idx="minor">
+            <a:schemeClr val="lt1"/>
+          </a:fontRef>
+        </p:style>
+        <p:txBody>
+          <a:bodyPr rtlCol="0" anchor="ctr"/>
+          <a:lstStyle/>
+          <a:p>
+            <a:pPr algn="ctr"/>
+          </a:p>
+        </p:txBody>
+      </p:sp>
+      <p:pic>
+        <p:nvPicPr>
+          <p:cNvPr id="9" name="Picture 8" descr="search.png"/>
+          <p:cNvPicPr>
+            <a:picLocks noChangeAspect="1"/>
+          </p:cNvPicPr>
+          <p:nvPr/>
+        </p:nvPicPr>
+        <p:blipFill>
+          <a:blip r:embed="rId3"/>
+          <a:stretch>
+            <a:fillRect/>
+          </a:stretch>
+        </p:blipFill>
+        <p:spPr>
+          <a:xfrm>
+            <a:off x="6355080" y="2970530"/>
+            <a:ext cx="5074920" cy="1785620"/>
+          </a:xfrm>
+          <a:prstGeom prst="rect">
+            <a:avLst/>
+          </a:prstGeom>
+        </p:spPr>
+      </p:pic>
+      <p:sp>
+        <p:nvSpPr>
+          <p:cNvPr id="10" name="Rounded Rectangle 9"/>
+          <p:cNvSpPr/>
+          <p:nvPr/>
+        </p:nvSpPr>
+        <p:spPr>
+          <a:xfrm>
+            <a:off x="6400800" y="1325880"/>
+            <a:ext cx="4983480" cy="1051560"/>
+          </a:xfrm>
+          <a:prstGeom prst="roundRect">
+            <a:avLst/>
+          </a:prstGeom>
+          <a:solidFill>
+            <a:srgbClr val="FFFFFF"/>
+          </a:solidFill>
+          <a:ln>
+            <a:solidFill>
+              <a:srgbClr val="D7DEE7"/>
+            </a:solidFill>
+          </a:ln>
+        </p:spPr>
+        <p:style>
+          <a:lnRef idx="1">
+            <a:schemeClr val="accent1"/>
+          </a:lnRef>
+          <a:fillRef idx="3">
+            <a:schemeClr val="accent1"/>
+          </a:fillRef>
+          <a:effectRef idx="2">
+            <a:schemeClr val="accent1"/>
+          </a:effectRef>
+          <a:fontRef idx="minor">
+            <a:schemeClr val="lt1"/>
+          </a:fontRef>
+        </p:style>
+        <p:txBody>
+          <a:bodyPr rtlCol="0" anchor="ctr"/>
+          <a:lstStyle/>
+          <a:p>
+            <a:pPr algn="ctr"/>
+          </a:p>
+        </p:txBody>
+      </p:sp>
+      <p:sp>
+        <p:nvSpPr>
+          <p:cNvPr id="11" name="Rectangle 10"/>
+          <p:cNvSpPr/>
+          <p:nvPr/>
+        </p:nvSpPr>
+        <p:spPr>
+          <a:xfrm>
+            <a:off x="6400800" y="1325880"/>
+            <a:ext cx="73152" cy="1051560"/>
+          </a:xfrm>
+          <a:prstGeom prst="rect">
+            <a:avLst/>
+          </a:prstGeom>
+          <a:solidFill>
+            <a:srgbClr val="0EA5E9"/>
+          </a:solidFill>
+          <a:ln>
+            <a:noFill/>
+          </a:ln>
+        </p:spPr>
+        <p:style>
+          <a:lnRef idx="1">
+            <a:schemeClr val="accent1"/>
+          </a:lnRef>
+          <a:fillRef idx="3">
+            <a:schemeClr val="accent1"/>
+          </a:fillRef>
+          <a:effectRef idx="2">
+            <a:schemeClr val="accent1"/>
+          </a:effectRef>
+          <a:fontRef idx="minor">
+            <a:schemeClr val="lt1"/>
+          </a:fontRef>
+        </p:style>
+        <p:txBody>
+          <a:bodyPr rtlCol="0" anchor="ctr"/>
+          <a:lstStyle/>
+          <a:p>
+            <a:pPr algn="ctr"/>
+          </a:p>
+        </p:txBody>
+      </p:sp>
+      <p:sp>
+        <p:nvSpPr>
+          <p:cNvPr id="12" name="TextBox 11"/>
+          <p:cNvSpPr txBox="1"/>
+          <p:nvPr/>
+        </p:nvSpPr>
+        <p:spPr>
+          <a:xfrm>
+            <a:off x="6611112" y="1490472"/>
+            <a:ext cx="4636008" cy="365760"/>
           </a:xfrm>
           <a:prstGeom prst="rect">
             <a:avLst/>
@@ -10045,29 +12729,64 @@
           </a:bodyPr>
           <a:lstStyle/>
           <a:p>
-            <a:pPr algn="ctr">
-              <a:defRPr sz="1500" b="1">
-                <a:solidFill>
-                  <a:srgbClr val="FFFFFF"/>
-                </a:solidFill>
-              </a:defRPr>
-            </a:pPr>
-            <a:r>
-              <a:t>Transparent WSL limitation</a:t>
-            </a:r>
-          </a:p>
-        </p:txBody>
-      </p:sp>
-      <p:sp>
-        <p:nvSpPr>
-          <p:cNvPr id="9" name="TextBox 8"/>
-          <p:cNvSpPr txBox="1"/>
-          <p:nvPr/>
-        </p:nvSpPr>
-        <p:spPr>
-          <a:xfrm>
-            <a:off x="640080" y="6492240"/>
-            <a:ext cx="10972800" cy="228600"/>
+            <a:pPr>
+              <a:defRPr sz="1600" b="1">
+                <a:solidFill>
+                  <a:srgbClr val="0F172A"/>
+                </a:solidFill>
+              </a:defRPr>
+            </a:pPr>
+            <a:r>
+              <a:t>Verified search</a:t>
+            </a:r>
+          </a:p>
+        </p:txBody>
+      </p:sp>
+      <p:sp>
+        <p:nvSpPr>
+          <p:cNvPr id="13" name="TextBox 12"/>
+          <p:cNvSpPr txBox="1"/>
+          <p:nvPr/>
+        </p:nvSpPr>
+        <p:spPr>
+          <a:xfrm>
+            <a:off x="6611112" y="1920240"/>
+            <a:ext cx="4636008" cy="338327"/>
+          </a:xfrm>
+          <a:prstGeom prst="rect">
+            <a:avLst/>
+          </a:prstGeom>
+          <a:noFill/>
+        </p:spPr>
+        <p:txBody>
+          <a:bodyPr wrap="square">
+            <a:spAutoFit/>
+          </a:bodyPr>
+          <a:lstStyle/>
+          <a:p>
+            <a:pPr>
+              <a:defRPr sz="1400">
+                <a:solidFill>
+                  <a:srgbClr val="1F2937"/>
+                </a:solidFill>
+              </a:defRPr>
+            </a:pPr>
+            <a:r>
+              <a:t>Query: bash  •  2 matches  •  PIDs 330 and 633</a:t>
+            </a:r>
+          </a:p>
+        </p:txBody>
+      </p:sp>
+      <p:sp>
+        <p:nvSpPr>
+          <p:cNvPr id="14" name="TextBox 13"/>
+          <p:cNvSpPr txBox="1"/>
+          <p:nvPr/>
+        </p:nvSpPr>
+        <p:spPr>
+          <a:xfrm>
+            <a:off x="640080" y="6473952"/>
+            <a:ext cx="10972800" cy="201168"/>
           </a:xfrm>
           <a:prstGeom prst="rect">
             <a:avLst/>
@@ -10081,14 +12800,14 @@
           <a:lstStyle/>
           <a:p>
             <a:pPr>
-              <a:defRPr sz="900">
-                <a:solidFill>
-                  <a:srgbClr val="566373"/>
-                </a:solidFill>
-              </a:defRPr>
-            </a:pPr>
-            <a:r>
-              <a:t>SysGuard • Linux System Health Monitor                               9</a:t>
+              <a:defRPr sz="850">
+                <a:solidFill>
+                  <a:srgbClr val="64748B"/>
+                </a:solidFill>
+              </a:defRPr>
+            </a:pPr>
+            <a:r>
+              <a:t>SysGuard • Linux System Health Monitor                                              9</a:t>
             </a:r>
           </a:p>
         </p:txBody>
